--- a/folien/09-industrie-iot.pptx
+++ b/folien/09-industrie-iot.pptx
@@ -3327,7 +3327,7 @@
                 <a:ea typeface="Arial" pitchFamily="34" charset="-122"/>
                 <a:cs typeface="Arial" pitchFamily="34" charset="-120"/>
               </a:rPr>
-              <a:t>WIRESHARK UND DER MITSCHNITT</a:t>
+              <a:t>KURZ VORGESTELLT</a:t>
             </a:r>
             <a:endParaRPr lang="en-US" sz="1150" dirty="0"/>
           </a:p>
@@ -3366,7 +3366,7 @@
                 <a:ea typeface="Arial" pitchFamily="34" charset="-122"/>
                 <a:cs typeface="Arial" pitchFamily="34" charset="-120"/>
               </a:rPr>
-              <a:t>Euer Röntgenblick ins Kabel</a:t>
+              <a:t>Wireshark und der Mitschnitt</a:t>
             </a:r>
             <a:endParaRPr lang="en-US" sz="2600" dirty="0"/>
           </a:p>
@@ -6966,7 +6966,7 @@
                 <a:ea typeface="Arial" pitchFamily="34" charset="-122"/>
                 <a:cs typeface="Arial" pitchFamily="34" charset="-120"/>
               </a:rPr>
-              <a:t>Frage 4 ist der Cliffhanger: Am Montag betreibt ihr den Broker selbst und dann sichern wir genau das ab.</a:t>
+              <a:t>Frage 4 bleibt bis Montag offen: Dann betreibt ihr den Broker selbst und wir sichern genau das ab.</a:t>
             </a:r>
             <a:endParaRPr lang="en-US" sz="1200" dirty="0"/>
           </a:p>
@@ -9746,7 +9746,7 @@
                 <a:ea typeface="Arial" pitchFamily="34" charset="-122"/>
                 <a:cs typeface="Arial" pitchFamily="34" charset="-120"/>
               </a:rPr>
-              <a:t>Die Fabrik hat gesprochen.</a:t>
+              <a:t>Eine Messung, drei Protokolle.</a:t>
             </a:r>
             <a:endParaRPr lang="en-US" sz="3200" dirty="0"/>
           </a:p>
@@ -11782,7 +11782,7 @@
                 <a:ea typeface="Arial" pitchFamily="34" charset="-122"/>
                 <a:cs typeface="Arial" pitchFamily="34" charset="-120"/>
               </a:rPr>
-              <a:t>Das IoT-Duo</a:t>
+              <a:t>MQTT und der Broker</a:t>
             </a:r>
             <a:endParaRPr lang="en-US" sz="2600" dirty="0"/>
           </a:p>
@@ -11865,7 +11865,7 @@
                 <a:ea typeface="Arial" pitchFamily="34" charset="-122"/>
                 <a:cs typeface="Arial" pitchFamily="34" charset="-120"/>
               </a:rPr>
-              <a:t>MQTT seht ihr heute im Klartext funken. Genau aus diesem Fund wird am Montag die Sicherheitsdiskussion.</a:t>
+              <a:t>MQTT lest ihr heute im Klartext mit. Genau aus diesem Fund wird am Montag die Sicherheitsdiskussion.</a:t>
             </a:r>
             <a:endParaRPr lang="en-US" sz="1200" dirty="0"/>
           </a:p>

--- a/folien/09-industrie-iot.pptx
+++ b/folien/09-industrie-iot.pptx
@@ -27,9 +27,12 @@
     <p:sldId id="275" r:id="rId21"/>
     <p:sldId id="276" r:id="rId22"/>
     <p:sldId id="277" r:id="rId23"/>
+    <p:sldId id="278" r:id="rId24"/>
+    <p:sldId id="279" r:id="rId25"/>
+    <p:sldId id="280" r:id="rId26"/>
   </p:sldIdLst>
   <p:notesMasterIdLst>
-    <p:notesMasterId r:id="rId24"/>
+    <p:notesMasterId r:id="rId27"/>
   </p:notesMasterIdLst>
   <p:sldSz cx="9144000" cy="5143500"/>
   <p:notesSz cx="5143500" cy="9144000"/>
@@ -1779,6 +1782,270 @@
             <a:fld id="{F7021451-1387-4CA6-816F-3879F97B5CBC}" type="slidenum">
               <a:rPr lang="en-US"/>
               <a:t>22</a:t>
+            </a:fld>
+            <a:endParaRPr lang="en-US"/>
+          </a:p>
+        </p:txBody>
+      </p:sp>
+    </p:spTree>
+    <p:extLst>
+      <p:ext uri="{BB962C8B-B14F-4D97-AF65-F5344CB8AC3E}">
+        <p14:creationId xmlns:p14="http://schemas.microsoft.com/office/powerpoint/2010/main" val="1024086991"/>
+      </p:ext>
+    </p:extLst>
+  </p:cSld>
+  <p:clrMapOvr>
+    <a:masterClrMapping/>
+  </p:clrMapOvr>
+</p:notes>
+</file>
+
+<file path=ppt/notesSlides/notesSlide23.xml><?xml version="1.0" encoding="utf-8"?>
+<p:notes xmlns:a="http://schemas.openxmlformats.org/drawingml/2006/main" xmlns:r="http://schemas.openxmlformats.org/officeDocument/2006/relationships" xmlns:p="http://schemas.openxmlformats.org/presentationml/2006/main">
+  <p:cSld>
+    <p:spTree>
+      <p:nvGrpSpPr>
+        <p:cNvPr id="1" name=""/>
+        <p:cNvGrpSpPr/>
+        <p:nvPr/>
+      </p:nvGrpSpPr>
+      <p:grpSpPr>
+        <a:xfrm>
+          <a:off x="0" y="0"/>
+          <a:ext cx="0" cy="0"/>
+          <a:chOff x="0" y="0"/>
+          <a:chExt cx="0" cy="0"/>
+        </a:xfrm>
+      </p:grpSpPr>
+      <p:sp>
+        <p:nvSpPr>
+          <p:cNvPr id="2" name="Slide Image Placeholder 1"/>
+          <p:cNvSpPr>
+            <a:spLocks noGrp="1" noRot="1" noChangeAspect="1"/>
+          </p:cNvSpPr>
+          <p:nvPr>
+            <p:ph type="sldImg"/>
+          </p:nvPr>
+        </p:nvSpPr>
+        <p:spPr/>
+      </p:sp>
+      <p:sp>
+        <p:nvSpPr>
+          <p:cNvPr id="3" name="Notes Placeholder 2"/>
+          <p:cNvSpPr>
+            <a:spLocks noGrp="1"/>
+          </p:cNvSpPr>
+          <p:nvPr>
+            <p:ph type="body" idx="1"/>
+          </p:nvPr>
+        </p:nvSpPr>
+        <p:spPr/>
+        <p:txBody>
+          <a:bodyPr/>
+          <a:lstStyle/>
+          <a:p>
+            <a:r>
+              <a:rPr lang="en-US" dirty="0"/>
+              <a:t/>
+            </a:r>
+            <a:endParaRPr lang="en-US" dirty="0"/>
+          </a:p>
+        </p:txBody>
+      </p:sp>
+      <p:sp>
+        <p:nvSpPr>
+          <p:cNvPr id="4" name="Slide Number Placeholder 3"/>
+          <p:cNvSpPr>
+            <a:spLocks noGrp="1"/>
+          </p:cNvSpPr>
+          <p:nvPr>
+            <p:ph type="sldNum" sz="quarter" idx="10"/>
+          </p:nvPr>
+        </p:nvSpPr>
+        <p:spPr/>
+        <p:txBody>
+          <a:bodyPr/>
+          <a:lstStyle/>
+          <a:p>
+            <a:fld id="{F7021451-1387-4CA6-816F-3879F97B5CBC}" type="slidenum">
+              <a:rPr lang="en-US"/>
+              <a:t>23</a:t>
+            </a:fld>
+            <a:endParaRPr lang="en-US"/>
+          </a:p>
+        </p:txBody>
+      </p:sp>
+    </p:spTree>
+    <p:extLst>
+      <p:ext uri="{BB962C8B-B14F-4D97-AF65-F5344CB8AC3E}">
+        <p14:creationId xmlns:p14="http://schemas.microsoft.com/office/powerpoint/2010/main" val="1024086991"/>
+      </p:ext>
+    </p:extLst>
+  </p:cSld>
+  <p:clrMapOvr>
+    <a:masterClrMapping/>
+  </p:clrMapOvr>
+</p:notes>
+</file>
+
+<file path=ppt/notesSlides/notesSlide24.xml><?xml version="1.0" encoding="utf-8"?>
+<p:notes xmlns:a="http://schemas.openxmlformats.org/drawingml/2006/main" xmlns:r="http://schemas.openxmlformats.org/officeDocument/2006/relationships" xmlns:p="http://schemas.openxmlformats.org/presentationml/2006/main">
+  <p:cSld>
+    <p:spTree>
+      <p:nvGrpSpPr>
+        <p:cNvPr id="1" name=""/>
+        <p:cNvGrpSpPr/>
+        <p:nvPr/>
+      </p:nvGrpSpPr>
+      <p:grpSpPr>
+        <a:xfrm>
+          <a:off x="0" y="0"/>
+          <a:ext cx="0" cy="0"/>
+          <a:chOff x="0" y="0"/>
+          <a:chExt cx="0" cy="0"/>
+        </a:xfrm>
+      </p:grpSpPr>
+      <p:sp>
+        <p:nvSpPr>
+          <p:cNvPr id="2" name="Slide Image Placeholder 1"/>
+          <p:cNvSpPr>
+            <a:spLocks noGrp="1" noRot="1" noChangeAspect="1"/>
+          </p:cNvSpPr>
+          <p:nvPr>
+            <p:ph type="sldImg"/>
+          </p:nvPr>
+        </p:nvSpPr>
+        <p:spPr/>
+      </p:sp>
+      <p:sp>
+        <p:nvSpPr>
+          <p:cNvPr id="3" name="Notes Placeholder 2"/>
+          <p:cNvSpPr>
+            <a:spLocks noGrp="1"/>
+          </p:cNvSpPr>
+          <p:nvPr>
+            <p:ph type="body" idx="1"/>
+          </p:nvPr>
+        </p:nvSpPr>
+        <p:spPr/>
+        <p:txBody>
+          <a:bodyPr/>
+          <a:lstStyle/>
+          <a:p>
+            <a:r>
+              <a:rPr lang="en-US" dirty="0"/>
+              <a:t/>
+            </a:r>
+            <a:endParaRPr lang="en-US" dirty="0"/>
+          </a:p>
+        </p:txBody>
+      </p:sp>
+      <p:sp>
+        <p:nvSpPr>
+          <p:cNvPr id="4" name="Slide Number Placeholder 3"/>
+          <p:cNvSpPr>
+            <a:spLocks noGrp="1"/>
+          </p:cNvSpPr>
+          <p:nvPr>
+            <p:ph type="sldNum" sz="quarter" idx="10"/>
+          </p:nvPr>
+        </p:nvSpPr>
+        <p:spPr/>
+        <p:txBody>
+          <a:bodyPr/>
+          <a:lstStyle/>
+          <a:p>
+            <a:fld id="{F7021451-1387-4CA6-816F-3879F97B5CBC}" type="slidenum">
+              <a:rPr lang="en-US"/>
+              <a:t>24</a:t>
+            </a:fld>
+            <a:endParaRPr lang="en-US"/>
+          </a:p>
+        </p:txBody>
+      </p:sp>
+    </p:spTree>
+    <p:extLst>
+      <p:ext uri="{BB962C8B-B14F-4D97-AF65-F5344CB8AC3E}">
+        <p14:creationId xmlns:p14="http://schemas.microsoft.com/office/powerpoint/2010/main" val="1024086991"/>
+      </p:ext>
+    </p:extLst>
+  </p:cSld>
+  <p:clrMapOvr>
+    <a:masterClrMapping/>
+  </p:clrMapOvr>
+</p:notes>
+</file>
+
+<file path=ppt/notesSlides/notesSlide25.xml><?xml version="1.0" encoding="utf-8"?>
+<p:notes xmlns:a="http://schemas.openxmlformats.org/drawingml/2006/main" xmlns:r="http://schemas.openxmlformats.org/officeDocument/2006/relationships" xmlns:p="http://schemas.openxmlformats.org/presentationml/2006/main">
+  <p:cSld>
+    <p:spTree>
+      <p:nvGrpSpPr>
+        <p:cNvPr id="1" name=""/>
+        <p:cNvGrpSpPr/>
+        <p:nvPr/>
+      </p:nvGrpSpPr>
+      <p:grpSpPr>
+        <a:xfrm>
+          <a:off x="0" y="0"/>
+          <a:ext cx="0" cy="0"/>
+          <a:chOff x="0" y="0"/>
+          <a:chExt cx="0" cy="0"/>
+        </a:xfrm>
+      </p:grpSpPr>
+      <p:sp>
+        <p:nvSpPr>
+          <p:cNvPr id="2" name="Slide Image Placeholder 1"/>
+          <p:cNvSpPr>
+            <a:spLocks noGrp="1" noRot="1" noChangeAspect="1"/>
+          </p:cNvSpPr>
+          <p:nvPr>
+            <p:ph type="sldImg"/>
+          </p:nvPr>
+        </p:nvSpPr>
+        <p:spPr/>
+      </p:sp>
+      <p:sp>
+        <p:nvSpPr>
+          <p:cNvPr id="3" name="Notes Placeholder 2"/>
+          <p:cNvSpPr>
+            <a:spLocks noGrp="1"/>
+          </p:cNvSpPr>
+          <p:nvPr>
+            <p:ph type="body" idx="1"/>
+          </p:nvPr>
+        </p:nvSpPr>
+        <p:spPr/>
+        <p:txBody>
+          <a:bodyPr/>
+          <a:lstStyle/>
+          <a:p>
+            <a:r>
+              <a:rPr lang="en-US" dirty="0"/>
+              <a:t/>
+            </a:r>
+            <a:endParaRPr lang="en-US" dirty="0"/>
+          </a:p>
+        </p:txBody>
+      </p:sp>
+      <p:sp>
+        <p:nvSpPr>
+          <p:cNvPr id="4" name="Slide Number Placeholder 3"/>
+          <p:cNvSpPr>
+            <a:spLocks noGrp="1"/>
+          </p:cNvSpPr>
+          <p:nvPr>
+            <p:ph type="sldNum" sz="quarter" idx="10"/>
+          </p:nvPr>
+        </p:nvSpPr>
+        <p:spPr/>
+        <p:txBody>
+          <a:bodyPr/>
+          <a:lstStyle/>
+          <a:p>
+            <a:fld id="{F7021451-1387-4CA6-816F-3879F97B5CBC}" type="slidenum">
+              <a:rPr lang="en-US"/>
+              <a:t>25</a:t>
             </a:fld>
             <a:endParaRPr lang="en-US"/>
           </a:p>
@@ -2922,7 +3189,7 @@
                 <a:ea typeface="Arial" pitchFamily="34" charset="-122"/>
                 <a:cs typeface="Arial" pitchFamily="34" charset="-120"/>
               </a:rPr>
-              <a:t>Mittwoch, 23. September 2026 · 18:00 bis 21:00 Uhr</a:t>
+              <a:t>Montag, 28. September 2026 · 18:00 bis 21:00 Uhr</a:t>
             </a:r>
             <a:endParaRPr lang="en-US" sz="1100" dirty="0"/>
           </a:p>
@@ -3135,7 +3402,7 @@
                 <a:ea typeface="Arial" pitchFamily="34" charset="-122"/>
                 <a:cs typeface="Arial" pitchFamily="34" charset="-120"/>
               </a:rPr>
-              <a:t>Euer erster Fund nachher: vier Pakete, drei Namen und die Frage, wer hier das Sagen hat.</a:t>
+              <a:t>Genau diese vier Pakete findet ihr nachher im Mitschnitt: drei Namen und die Frage, wer hier das Sagen hat.</a:t>
             </a:r>
             <a:endParaRPr lang="en-US" sz="1200" dirty="0"/>
           </a:p>
@@ -3236,7 +3503,7 @@
                 <a:ea typeface="Arial" pitchFamily="34" charset="-122"/>
                 <a:cs typeface="Arial" pitchFamily="34" charset="-120"/>
               </a:rPr>
-              <a:t>8/18</a:t>
+              <a:t>8/20</a:t>
             </a:r>
             <a:endParaRPr lang="en-US" sz="1050" dirty="0"/>
           </a:p>
@@ -3289,7 +3556,7 @@
             <a:avLst/>
           </a:prstGeom>
           <a:solidFill>
-            <a:srgbClr val="3843AF"/>
+            <a:srgbClr val="0F7C86"/>
           </a:solidFill>
           <a:ln/>
         </p:spPr>
@@ -3321,13 +3588,13 @@
             <a:r>
               <a:rPr lang="en-US" sz="1150" b="1" spc="180" kern="0" dirty="0">
                 <a:solidFill>
-                  <a:srgbClr val="3843AF"/>
-                </a:solidFill>
-                <a:latin typeface="Arial" pitchFamily="34" charset="0"/>
-                <a:ea typeface="Arial" pitchFamily="34" charset="-122"/>
-                <a:cs typeface="Arial" pitchFamily="34" charset="-120"/>
-              </a:rPr>
-              <a:t>KURZ VORGESTELLT</a:t>
+                  <a:srgbClr val="0F7C86"/>
+                </a:solidFill>
+                <a:latin typeface="Arial" pitchFamily="34" charset="0"/>
+                <a:ea typeface="Arial" pitchFamily="34" charset="-122"/>
+                <a:cs typeface="Arial" pitchFamily="34" charset="-120"/>
+              </a:rPr>
+              <a:t>EINORDNUNG FÜR DIE PRÜFUNG</a:t>
             </a:r>
             <a:endParaRPr lang="en-US" sz="1150" dirty="0"/>
           </a:p>
@@ -3366,7 +3633,7 @@
                 <a:ea typeface="Arial" pitchFamily="34" charset="-122"/>
                 <a:cs typeface="Arial" pitchFamily="34" charset="-120"/>
               </a:rPr>
-              <a:t>Wireshark und der Mitschnitt</a:t>
+              <a:t>Die Ebenen der Automatisierung</a:t>
             </a:r>
             <a:endParaRPr lang="en-US" sz="2600" dirty="0"/>
           </a:p>
@@ -3374,7 +3641,7 @@
       </p:sp>
       <p:pic>
         <p:nvPicPr>
-          <p:cNvPr id="5" name="Image 0" descr="/Users/jacobmenge/Desktop/kurs-26.2b-orga/folienwerkstatt/assets/diagramme/steckbrief-werkzeug.png">    </p:cNvPr>
+          <p:cNvPr id="5" name="Image 0" descr="/Users/jacobmenge/Desktop/kurs-26.2b-orga/folienwerkstatt/assets/diagramme/i40-ebenen.png">    </p:cNvPr>
           <p:cNvPicPr>
             <a:picLocks noChangeAspect="1"/>
           </p:cNvPicPr>
@@ -3388,8 +3655,8 @@
         </p:blipFill>
         <p:spPr>
           <a:xfrm>
-            <a:off x="566928" y="1463040"/>
-            <a:ext cx="8010144" cy="2468880"/>
+            <a:off x="1243584" y="1344168"/>
+            <a:ext cx="6647688" cy="2807208"/>
           </a:xfrm>
           <a:prstGeom prst="rect">
             <a:avLst/>
@@ -3404,14 +3671,14 @@
         </p:nvSpPr>
         <p:spPr>
           <a:xfrm>
-            <a:off x="566928" y="4105656"/>
+            <a:off x="566928" y="4288536"/>
             <a:ext cx="32004" cy="256032"/>
           </a:xfrm>
           <a:prstGeom prst="rect">
             <a:avLst/>
           </a:prstGeom>
           <a:solidFill>
-            <a:srgbClr val="3843AF"/>
+            <a:srgbClr val="0F7C86"/>
           </a:solidFill>
           <a:ln/>
         </p:spPr>
@@ -3424,7 +3691,7 @@
         </p:nvSpPr>
         <p:spPr>
           <a:xfrm>
-            <a:off x="749808" y="4059936"/>
+            <a:off x="749808" y="4242816"/>
             <a:ext cx="7827264" cy="402336"/>
           </a:xfrm>
           <a:prstGeom prst="rect">
@@ -3449,7 +3716,7 @@
                 <a:ea typeface="Arial" pitchFamily="34" charset="-122"/>
                 <a:cs typeface="Arial" pitchFamily="34" charset="-120"/>
               </a:rPr>
-              <a:t>Für heute reicht Datei öffnen. Alles, was nach Treiber oder Sonderrechten klingt, dürft ihr getrost ignorieren.</a:t>
+              <a:t>Die fünf Kürzel und ihre Zuordnung: Genau das fragt die Prüfung.</a:t>
             </a:r>
             <a:endParaRPr lang="en-US" sz="1200" dirty="0"/>
           </a:p>
@@ -3511,7 +3778,7 @@
                 <a:ea typeface="Arial" pitchFamily="34" charset="-122"/>
                 <a:cs typeface="Arial" pitchFamily="34" charset="-120"/>
               </a:rPr>
-              <a:t>Werkzeug</a:t>
+              <a:t>Die Sprachen der Fabrik</a:t>
             </a:r>
             <a:endParaRPr lang="en-US" sz="1050" dirty="0"/>
           </a:p>
@@ -3550,7 +3817,7 @@
                 <a:ea typeface="Arial" pitchFamily="34" charset="-122"/>
                 <a:cs typeface="Arial" pitchFamily="34" charset="-120"/>
               </a:rPr>
-              <a:t>9/18</a:t>
+              <a:t>9/20</a:t>
             </a:r>
             <a:endParaRPr lang="en-US" sz="1050" dirty="0"/>
           </a:p>
@@ -3603,7 +3870,7 @@
             <a:avLst/>
           </a:prstGeom>
           <a:solidFill>
-            <a:srgbClr val="3843AF"/>
+            <a:srgbClr val="0F7C86"/>
           </a:solidFill>
           <a:ln/>
         </p:spPr>
@@ -3635,13 +3902,13 @@
             <a:r>
               <a:rPr lang="en-US" sz="1150" b="1" spc="180" kern="0" dirty="0">
                 <a:solidFill>
-                  <a:srgbClr val="3843AF"/>
-                </a:solidFill>
-                <a:latin typeface="Arial" pitchFamily="34" charset="0"/>
-                <a:ea typeface="Arial" pitchFamily="34" charset="-122"/>
-                <a:cs typeface="Arial" pitchFamily="34" charset="-120"/>
-              </a:rPr>
-              <a:t>ALLE ZUSAMMEN, JETZT</a:t>
+                  <a:srgbClr val="0F7C86"/>
+                </a:solidFill>
+                <a:latin typeface="Arial" pitchFamily="34" charset="0"/>
+                <a:ea typeface="Arial" pitchFamily="34" charset="-122"/>
+                <a:cs typeface="Arial" pitchFamily="34" charset="-120"/>
+              </a:rPr>
+              <a:t>EINORDNUNG FÜR DIE PRÜFUNG</a:t>
             </a:r>
             <a:endParaRPr lang="en-US" sz="1150" dirty="0"/>
           </a:p>
@@ -3680,159 +3947,82 @@
                 <a:ea typeface="Arial" pitchFamily="34" charset="-122"/>
                 <a:cs typeface="Arial" pitchFamily="34" charset="-120"/>
               </a:rPr>
-              <a:t>Wireshark einrichten, gemeinsam</a:t>
+              <a:t>Zwei Protokoll-Familien</a:t>
             </a:r>
             <a:endParaRPr lang="en-US" sz="2600" dirty="0"/>
           </a:p>
         </p:txBody>
       </p:sp>
-      <p:sp>
-        <p:nvSpPr>
-          <p:cNvPr id="5" name="Text 3"/>
-          <p:cNvSpPr/>
-          <p:nvPr/>
-        </p:nvSpPr>
-        <p:spPr>
-          <a:xfrm>
-            <a:off x="566928" y="1444752"/>
-            <a:ext cx="8010144" cy="274320"/>
-          </a:xfrm>
-          <a:prstGeom prst="rect">
-            <a:avLst/>
-          </a:prstGeom>
-          <a:noFill/>
-          <a:ln/>
-        </p:spPr>
-        <p:txBody>
-          <a:bodyPr wrap="square" lIns="0" tIns="0" rIns="0" bIns="0" rtlCol="0" anchor="t"/>
-          <a:lstStyle/>
-          <a:p>
-            <a:pPr indent="0" marL="0">
-              <a:buNone/>
-            </a:pPr>
-            <a:r>
-              <a:rPr lang="en-US" sz="1300" dirty="0">
-                <a:solidFill>
-                  <a:srgbClr val="5C6377"/>
-                </a:solidFill>
-                <a:latin typeface="Arial" pitchFamily="34" charset="0"/>
-                <a:ea typeface="Arial" pitchFamily="34" charset="-122"/>
-                <a:cs typeface="Arial" pitchFamily="34" charset="-120"/>
-              </a:rPr>
-              <a:t>Wir installieren jetzt gemeinsam. Die Anleitung führt euch je Betriebssystem durch:</a:t>
-            </a:r>
-            <a:endParaRPr lang="en-US" sz="1300" dirty="0"/>
-          </a:p>
-        </p:txBody>
-      </p:sp>
-      <p:sp>
-        <p:nvSpPr>
-          <p:cNvPr id="6" name="Shape 4"/>
-          <p:cNvSpPr/>
-          <p:nvPr/>
-        </p:nvSpPr>
-        <p:spPr>
-          <a:xfrm>
-            <a:off x="566928" y="1920240"/>
-            <a:ext cx="8010144" cy="713232"/>
+      <p:pic>
+        <p:nvPicPr>
+          <p:cNvPr id="5" name="Image 0" descr="/Users/jacobmenge/Desktop/kurs-26.2b-orga/folienwerkstatt/assets/diagramme/i40-protokoll-familien.png">    </p:cNvPr>
+          <p:cNvPicPr>
+            <a:picLocks noChangeAspect="1"/>
+          </p:cNvPicPr>
+          <p:nvPr/>
+        </p:nvPicPr>
+        <p:blipFill>
+          <a:blip r:embed="rId1"/>
+          <a:stretch>
+            <a:fillRect/>
+          </a:stretch>
+        </p:blipFill>
+        <p:spPr>
+          <a:xfrm>
+            <a:off x="795528" y="1316736"/>
+            <a:ext cx="7562088" cy="2743200"/>
+          </a:xfrm>
+          <a:prstGeom prst="rect">
+            <a:avLst/>
+          </a:prstGeom>
+        </p:spPr>
+      </p:pic>
+      <p:sp>
+        <p:nvSpPr>
+          <p:cNvPr id="6" name="Shape 3"/>
+          <p:cNvSpPr/>
+          <p:nvPr/>
+        </p:nvSpPr>
+        <p:spPr>
+          <a:xfrm>
+            <a:off x="566928" y="4251960"/>
+            <a:ext cx="32004" cy="256032"/>
           </a:xfrm>
           <a:prstGeom prst="rect">
             <a:avLst/>
           </a:prstGeom>
           <a:solidFill>
-            <a:srgbClr val="EEF0FB"/>
+            <a:srgbClr val="0F7C86"/>
           </a:solidFill>
           <a:ln/>
         </p:spPr>
       </p:sp>
       <p:sp>
         <p:nvSpPr>
-          <p:cNvPr id="7" name="Shape 5"/>
-          <p:cNvSpPr/>
-          <p:nvPr/>
-        </p:nvSpPr>
-        <p:spPr>
-          <a:xfrm>
-            <a:off x="566928" y="1920240"/>
-            <a:ext cx="41148" cy="713232"/>
-          </a:xfrm>
-          <a:prstGeom prst="rect">
-            <a:avLst/>
-          </a:prstGeom>
-          <a:solidFill>
-            <a:srgbClr val="3843AF"/>
-          </a:solidFill>
-          <a:ln/>
-        </p:spPr>
-      </p:sp>
-      <p:sp>
-        <p:nvSpPr>
-          <p:cNvPr id="8" name="Text 6"/>
-          <p:cNvSpPr/>
-          <p:nvPr/>
-        </p:nvSpPr>
-        <p:spPr>
-          <a:xfrm>
-            <a:off x="804672" y="2066544"/>
-            <a:ext cx="7607808" cy="242062"/>
-          </a:xfrm>
-          <a:prstGeom prst="rect">
-            <a:avLst/>
-          </a:prstGeom>
-          <a:noFill/>
-          <a:ln/>
-        </p:spPr>
-        <p:txBody>
-          <a:bodyPr wrap="square" lIns="0" tIns="0" rIns="0" bIns="0" rtlCol="0" anchor="t"/>
-          <a:lstStyle/>
-          <a:p>
-            <a:pPr indent="0" marL="0">
-              <a:buNone/>
-            </a:pPr>
-            <a:r>
-              <a:rPr lang="en-US" sz="1300" b="1" dirty="0">
-                <a:solidFill>
-                  <a:srgbClr val="272E52"/>
-                </a:solidFill>
-                <a:latin typeface="Arial" pitchFamily="34" charset="0"/>
-                <a:ea typeface="Arial" pitchFamily="34" charset="-122"/>
-                <a:cs typeface="Arial" pitchFamily="34" charset="-120"/>
-              </a:rPr>
-              <a:t>Anleitung öffnen</a:t>
-            </a:r>
-            <a:endParaRPr lang="en-US" sz="1300" dirty="0"/>
-          </a:p>
-        </p:txBody>
-      </p:sp>
-      <p:sp>
-        <p:nvSpPr>
-          <p:cNvPr id="9" name="Text 7"/>
-          <p:cNvSpPr/>
-          <p:nvPr/>
-        </p:nvSpPr>
-        <p:spPr>
-          <a:xfrm>
-            <a:off x="804672" y="2354326"/>
-            <a:ext cx="7607808" cy="160274"/>
-          </a:xfrm>
-          <a:prstGeom prst="rect">
-            <a:avLst/>
-          </a:prstGeom>
-          <a:noFill/>
-          <a:ln/>
-        </p:spPr>
-        <p:txBody>
-          <a:bodyPr wrap="square" lIns="0" tIns="0" rIns="0" bIns="0" rtlCol="0" anchor="t"/>
-          <a:lstStyle/>
-          <a:p>
-            <a:pPr indent="0" marL="0">
-              <a:lnSpc>
-                <a:spcPct val="92000"/>
-              </a:lnSpc>
-              <a:buNone/>
-            </a:pPr>
-            <a:r>
-              <a:rPr lang="en-US" sz="1200" dirty="0">
+          <p:cNvPr id="7" name="Text 4"/>
+          <p:cNvSpPr/>
+          <p:nvPr/>
+        </p:nvSpPr>
+        <p:spPr>
+          <a:xfrm>
+            <a:off x="749808" y="4206240"/>
+            <a:ext cx="7827264" cy="402336"/>
+          </a:xfrm>
+          <a:prstGeom prst="rect">
+            <a:avLst/>
+          </a:prstGeom>
+          <a:noFill/>
+          <a:ln/>
+        </p:spPr>
+        <p:txBody>
+          <a:bodyPr wrap="square" lIns="0" tIns="0" rIns="0" bIns="0" rtlCol="0" anchor="ctr"/>
+          <a:lstStyle/>
+          <a:p>
+            <a:pPr indent="0" marL="0">
+              <a:buNone/>
+            </a:pPr>
+            <a:r>
+              <a:rPr lang="en-US" sz="1200" b="1" dirty="0">
                 <a:solidFill>
                   <a:srgbClr val="434A63"/>
                 </a:solidFill>
@@ -3840,7 +4030,7 @@
                 <a:ea typeface="Arial" pitchFamily="34" charset="-122"/>
                 <a:cs typeface="Arial" pitchFamily="34" charset="-120"/>
               </a:rPr>
-              <a:t>jacobmenge.github.io/kurs-unterlagen/industrie-iot/wireshark-installation/</a:t>
+              <a:t>Mit diesen drei Fragen sortiert ihr jedes unbekannte Protokoll ein, auch in der Prüfung.</a:t>
             </a:r>
             <a:endParaRPr lang="en-US" sz="1200" dirty="0"/>
           </a:p>
@@ -3848,196 +4038,7 @@
       </p:sp>
       <p:sp>
         <p:nvSpPr>
-          <p:cNvPr id="10" name="Text 8"/>
-          <p:cNvSpPr/>
-          <p:nvPr/>
-        </p:nvSpPr>
-        <p:spPr>
-          <a:xfrm>
-            <a:off x="566928" y="2798064"/>
-            <a:ext cx="8010144" cy="1280160"/>
-          </a:xfrm>
-          <a:prstGeom prst="rect">
-            <a:avLst/>
-          </a:prstGeom>
-          <a:noFill/>
-          <a:ln/>
-        </p:spPr>
-        <p:txBody>
-          <a:bodyPr wrap="square" lIns="0" tIns="0" rIns="0" bIns="0" rtlCol="0" anchor="t"/>
-          <a:lstStyle/>
-          <a:p>
-            <a:pPr marL="254000" indent="-254000">
-              <a:lnSpc>
-                <a:spcPct val="100000"/>
-              </a:lnSpc>
-              <a:spcAft>
-                <a:spcPts val="900"/>
-              </a:spcAft>
-              <a:buClr>
-                <a:srgbClr val="0F7C86"/>
-              </a:buClr>
-              <a:buSzPct val="100000"/>
-              <a:buChar char="▸"/>
-            </a:pPr>
-            <a:r>
-              <a:rPr lang="en-US" sz="1150" dirty="0">
-                <a:solidFill>
-                  <a:srgbClr val="434A63"/>
-                </a:solidFill>
-                <a:latin typeface="Arial" pitchFamily="34" charset="0"/>
-                <a:ea typeface="Arial" pitchFamily="34" charset="-122"/>
-                <a:cs typeface="Arial" pitchFamily="34" charset="-120"/>
-              </a:rPr>
-              <a:t>Windows: Installer von wireshark.org, durchklicken. Die Npcap-Frage ist heute egal.</a:t>
-            </a:r>
-            <a:endParaRPr lang="en-US" sz="1150" dirty="0"/>
-          </a:p>
-          <a:p>
-            <a:pPr marL="254000" indent="-254000">
-              <a:lnSpc>
-                <a:spcPct val="100000"/>
-              </a:lnSpc>
-              <a:spcAft>
-                <a:spcPts val="900"/>
-              </a:spcAft>
-              <a:buClr>
-                <a:srgbClr val="0F7C86"/>
-              </a:buClr>
-              <a:buSzPct val="100000"/>
-              <a:buChar char="▸"/>
-            </a:pPr>
-            <a:r>
-              <a:rPr lang="en-US" sz="1150" dirty="0">
-                <a:solidFill>
-                  <a:srgbClr val="434A63"/>
-                </a:solidFill>
-                <a:latin typeface="Arial" pitchFamily="34" charset="0"/>
-                <a:ea typeface="Arial" pitchFamily="34" charset="-122"/>
-                <a:cs typeface="Arial" pitchFamily="34" charset="-120"/>
-              </a:rPr>
-              <a:t>macOS: dmg laden, in Programme ziehen. Die ChmodBPF-Frage überspringen.</a:t>
-            </a:r>
-            <a:endParaRPr lang="en-US" sz="1150" dirty="0"/>
-          </a:p>
-          <a:p>
-            <a:pPr marL="254000" indent="-254000">
-              <a:lnSpc>
-                <a:spcPct val="100000"/>
-              </a:lnSpc>
-              <a:spcAft>
-                <a:spcPts val="900"/>
-              </a:spcAft>
-              <a:buClr>
-                <a:srgbClr val="0F7C86"/>
-              </a:buClr>
-              <a:buSzPct val="100000"/>
-              <a:buChar char="▸"/>
-            </a:pPr>
-            <a:r>
-              <a:rPr lang="en-US" sz="1150" dirty="0">
-                <a:solidFill>
-                  <a:srgbClr val="434A63"/>
-                </a:solidFill>
-                <a:latin typeface="Arial" pitchFamily="34" charset="0"/>
-                <a:ea typeface="Arial" pitchFamily="34" charset="-122"/>
-                <a:cs typeface="Arial" pitchFamily="34" charset="-120"/>
-              </a:rPr>
-              <a:t>Linux: wireshark aus der Paketverwaltung.</a:t>
-            </a:r>
-            <a:endParaRPr lang="en-US" sz="1150" dirty="0"/>
-          </a:p>
-          <a:p>
-            <a:pPr marL="254000" indent="-254000">
-              <a:lnSpc>
-                <a:spcPct val="100000"/>
-              </a:lnSpc>
-              <a:spcAft>
-                <a:spcPts val="900"/>
-              </a:spcAft>
-              <a:buClr>
-                <a:srgbClr val="0F7C86"/>
-              </a:buClr>
-              <a:buSzPct val="100000"/>
-              <a:buChar char="▸"/>
-            </a:pPr>
-            <a:r>
-              <a:rPr lang="en-US" sz="1150" dirty="0">
-                <a:solidFill>
-                  <a:srgbClr val="434A63"/>
-                </a:solidFill>
-                <a:latin typeface="Arial" pitchFamily="34" charset="0"/>
-                <a:ea typeface="Arial" pitchFamily="34" charset="-122"/>
-                <a:cs typeface="Arial" pitchFamily="34" charset="-120"/>
-              </a:rPr>
-              <a:t>Test bei allen gleich: Wireshark startet und zeigt seine Startseite.</a:t>
-            </a:r>
-            <a:endParaRPr lang="en-US" sz="1150" dirty="0"/>
-          </a:p>
-        </p:txBody>
-      </p:sp>
-      <p:sp>
-        <p:nvSpPr>
-          <p:cNvPr id="11" name="Shape 9"/>
-          <p:cNvSpPr/>
-          <p:nvPr/>
-        </p:nvSpPr>
-        <p:spPr>
-          <a:xfrm>
-            <a:off x="566928" y="4206240"/>
-            <a:ext cx="32004" cy="256032"/>
-          </a:xfrm>
-          <a:prstGeom prst="rect">
-            <a:avLst/>
-          </a:prstGeom>
-          <a:solidFill>
-            <a:srgbClr val="3843AF"/>
-          </a:solidFill>
-          <a:ln/>
-        </p:spPr>
-      </p:sp>
-      <p:sp>
-        <p:nvSpPr>
-          <p:cNvPr id="12" name="Text 10"/>
-          <p:cNvSpPr/>
-          <p:nvPr/>
-        </p:nvSpPr>
-        <p:spPr>
-          <a:xfrm>
-            <a:off x="749808" y="4160520"/>
-            <a:ext cx="7827264" cy="402336"/>
-          </a:xfrm>
-          <a:prstGeom prst="rect">
-            <a:avLst/>
-          </a:prstGeom>
-          <a:noFill/>
-          <a:ln/>
-        </p:spPr>
-        <p:txBody>
-          <a:bodyPr wrap="square" lIns="0" tIns="0" rIns="0" bIns="0" rtlCol="0" anchor="ctr"/>
-          <a:lstStyle/>
-          <a:p>
-            <a:pPr indent="0" marL="0">
-              <a:buNone/>
-            </a:pPr>
-            <a:r>
-              <a:rPr lang="en-US" sz="1200" b="1" dirty="0">
-                <a:solidFill>
-                  <a:srgbClr val="434A63"/>
-                </a:solidFill>
-                <a:latin typeface="Arial" pitchFamily="34" charset="0"/>
-                <a:ea typeface="Arial" pitchFamily="34" charset="-122"/>
-                <a:cs typeface="Arial" pitchFamily="34" charset="-120"/>
-              </a:rPr>
-              <a:t>Die Menüsprache folgt eurem System. Anleitung und Folien nennen deshalb immer beide Namen, etwa Statistiken/Statistics.</a:t>
-            </a:r>
-            <a:endParaRPr lang="en-US" sz="1200" dirty="0"/>
-          </a:p>
-        </p:txBody>
-      </p:sp>
-      <p:sp>
-        <p:nvSpPr>
-          <p:cNvPr id="13" name="Shape 11"/>
+          <p:cNvPr id="8" name="Shape 5"/>
           <p:cNvSpPr/>
           <p:nvPr/>
         </p:nvSpPr>
@@ -4060,7 +4061,7 @@
       </p:sp>
       <p:sp>
         <p:nvSpPr>
-          <p:cNvPr id="14" name="Text 12"/>
+          <p:cNvPr id="9" name="Text 6"/>
           <p:cNvSpPr/>
           <p:nvPr/>
         </p:nvSpPr>
@@ -4091,7 +4092,7 @@
                 <a:ea typeface="Arial" pitchFamily="34" charset="-122"/>
                 <a:cs typeface="Arial" pitchFamily="34" charset="-120"/>
               </a:rPr>
-              <a:t>Werkzeug</a:t>
+              <a:t>Die Sprachen der Fabrik</a:t>
             </a:r>
             <a:endParaRPr lang="en-US" sz="1050" dirty="0"/>
           </a:p>
@@ -4099,7 +4100,7 @@
       </p:sp>
       <p:sp>
         <p:nvSpPr>
-          <p:cNvPr id="15" name="Text 13"/>
+          <p:cNvPr id="10" name="Text 7"/>
           <p:cNvSpPr/>
           <p:nvPr/>
         </p:nvSpPr>
@@ -4130,7 +4131,7 @@
                 <a:ea typeface="Arial" pitchFamily="34" charset="-122"/>
                 <a:cs typeface="Arial" pitchFamily="34" charset="-120"/>
               </a:rPr>
-              <a:t>10/18</a:t>
+              <a:t>10/20</a:t>
             </a:r>
             <a:endParaRPr lang="en-US" sz="1050" dirty="0"/>
           </a:p>
@@ -4176,8 +4177,28 @@
         </p:nvSpPr>
         <p:spPr>
           <a:xfrm>
-            <a:off x="566928" y="201168"/>
-            <a:ext cx="475488" cy="50292"/>
+            <a:off x="6355080" y="0"/>
+            <a:ext cx="2788920" cy="5143500"/>
+          </a:xfrm>
+          <a:prstGeom prst="rect">
+            <a:avLst/>
+          </a:prstGeom>
+          <a:solidFill>
+            <a:srgbClr val="EEF0FB"/>
+          </a:solidFill>
+          <a:ln/>
+        </p:spPr>
+      </p:sp>
+      <p:sp>
+        <p:nvSpPr>
+          <p:cNvPr id="3" name="Shape 1"/>
+          <p:cNvSpPr/>
+          <p:nvPr/>
+        </p:nvSpPr>
+        <p:spPr>
+          <a:xfrm>
+            <a:off x="6355080" y="0"/>
+            <a:ext cx="45720" cy="5143500"/>
           </a:xfrm>
           <a:prstGeom prst="rect">
             <a:avLst/>
@@ -4190,14 +4211,14 @@
       </p:sp>
       <p:sp>
         <p:nvSpPr>
-          <p:cNvPr id="3" name="Text 1"/>
-          <p:cNvSpPr/>
-          <p:nvPr/>
-        </p:nvSpPr>
-        <p:spPr>
-          <a:xfrm>
-            <a:off x="566928" y="384048"/>
-            <a:ext cx="8010144" cy="237744"/>
+          <p:cNvPr id="4" name="Text 2"/>
+          <p:cNvSpPr/>
+          <p:nvPr/>
+        </p:nvSpPr>
+        <p:spPr>
+          <a:xfrm>
+            <a:off x="6629400" y="1463040"/>
+            <a:ext cx="2194560" cy="1737360"/>
           </a:xfrm>
           <a:prstGeom prst="rect">
             <a:avLst/>
@@ -4209,11 +4230,11 @@
           <a:bodyPr wrap="square" lIns="0" tIns="0" rIns="0" bIns="0" rtlCol="0" anchor="ctr"/>
           <a:lstStyle/>
           <a:p>
-            <a:pPr indent="0" marL="0">
-              <a:buNone/>
-            </a:pPr>
-            <a:r>
-              <a:rPr lang="en-US" sz="1150" b="1" spc="180" kern="0" dirty="0">
+            <a:pPr algn="ctr" indent="0" marL="0">
+              <a:buNone/>
+            </a:pPr>
+            <a:r>
+              <a:rPr lang="en-US" sz="8400" b="1" dirty="0">
                 <a:solidFill>
                   <a:srgbClr val="3843AF"/>
                 </a:solidFill>
@@ -4221,85 +4242,22 @@
                 <a:ea typeface="Arial" pitchFamily="34" charset="-122"/>
                 <a:cs typeface="Arial" pitchFamily="34" charset="-120"/>
               </a:rPr>
-              <a:t>LIVE AM GETEILTEN BILDSCHIRM</a:t>
-            </a:r>
-            <a:endParaRPr lang="en-US" sz="1150" dirty="0"/>
-          </a:p>
-        </p:txBody>
-      </p:sp>
-      <p:sp>
-        <p:nvSpPr>
-          <p:cNvPr id="4" name="Text 2"/>
-          <p:cNvSpPr/>
-          <p:nvPr/>
-        </p:nvSpPr>
-        <p:spPr>
-          <a:xfrm>
-            <a:off x="566928" y="731520"/>
-            <a:ext cx="8010144" cy="603504"/>
-          </a:xfrm>
-          <a:prstGeom prst="rect">
-            <a:avLst/>
-          </a:prstGeom>
-          <a:noFill/>
-          <a:ln/>
-        </p:spPr>
-        <p:txBody>
-          <a:bodyPr wrap="square" lIns="0" tIns="0" rIns="0" bIns="0" rtlCol="0" anchor="t"/>
-          <a:lstStyle/>
-          <a:p>
-            <a:pPr indent="0" marL="0">
-              <a:buNone/>
-            </a:pPr>
-            <a:r>
-              <a:rPr lang="en-US" sz="2600" b="1" dirty="0">
-                <a:solidFill>
-                  <a:srgbClr val="272E52"/>
-                </a:solidFill>
-                <a:latin typeface="Arial" pitchFamily="34" charset="0"/>
-                <a:ea typeface="Arial" pitchFamily="34" charset="-122"/>
-                <a:cs typeface="Arial" pitchFamily="34" charset="-120"/>
-              </a:rPr>
-              <a:t>Die vier Handgriffe</a:t>
-            </a:r>
-            <a:endParaRPr lang="en-US" sz="2600" dirty="0"/>
-          </a:p>
-        </p:txBody>
-      </p:sp>
-      <p:pic>
-        <p:nvPicPr>
-          <p:cNvPr id="5" name="Image 0" descr="/Users/jacobmenge/Desktop/kurs-26.2b-orga/folienwerkstatt/assets/diagramme/wireshark-fahrplan.png">    </p:cNvPr>
-          <p:cNvPicPr>
-            <a:picLocks noChangeAspect="1"/>
-          </p:cNvPicPr>
-          <p:nvPr/>
-        </p:nvPicPr>
-        <p:blipFill>
-          <a:blip r:embed="rId1"/>
-          <a:stretch>
-            <a:fillRect/>
-          </a:stretch>
-        </p:blipFill>
-        <p:spPr>
-          <a:xfrm>
-            <a:off x="566928" y="1481328"/>
-            <a:ext cx="8010144" cy="2304288"/>
-          </a:xfrm>
-          <a:prstGeom prst="rect">
-            <a:avLst/>
-          </a:prstGeom>
-        </p:spPr>
-      </p:pic>
-      <p:sp>
-        <p:nvSpPr>
-          <p:cNvPr id="6" name="Shape 3"/>
-          <p:cNvSpPr/>
-          <p:nvPr/>
-        </p:nvSpPr>
-        <p:spPr>
-          <a:xfrm>
-            <a:off x="566928" y="4069080"/>
-            <a:ext cx="32004" cy="256032"/>
+              <a:t>02</a:t>
+            </a:r>
+            <a:endParaRPr lang="en-US" sz="8400" dirty="0"/>
+          </a:p>
+        </p:txBody>
+      </p:sp>
+      <p:sp>
+        <p:nvSpPr>
+          <p:cNvPr id="5" name="Shape 3"/>
+          <p:cNvSpPr/>
+          <p:nvPr/>
+        </p:nvSpPr>
+        <p:spPr>
+          <a:xfrm>
+            <a:off x="566928" y="1883664"/>
+            <a:ext cx="475488" cy="50292"/>
           </a:xfrm>
           <a:prstGeom prst="rect">
             <a:avLst/>
@@ -4312,92 +4270,69 @@
       </p:sp>
       <p:sp>
         <p:nvSpPr>
-          <p:cNvPr id="7" name="Text 4"/>
-          <p:cNvSpPr/>
-          <p:nvPr/>
-        </p:nvSpPr>
-        <p:spPr>
-          <a:xfrm>
-            <a:off x="749808" y="4023360"/>
-            <a:ext cx="7827264" cy="402336"/>
-          </a:xfrm>
-          <a:prstGeom prst="rect">
-            <a:avLst/>
-          </a:prstGeom>
-          <a:noFill/>
-          <a:ln/>
-        </p:spPr>
-        <p:txBody>
-          <a:bodyPr wrap="square" lIns="0" tIns="0" rIns="0" bIns="0" rtlCol="0" anchor="ctr"/>
-          <a:lstStyle/>
-          <a:p>
-            <a:pPr indent="0" marL="0">
-              <a:buNone/>
-            </a:pPr>
-            <a:r>
-              <a:rPr lang="en-US" sz="1200" b="1" dirty="0">
-                <a:solidFill>
-                  <a:srgbClr val="434A63"/>
-                </a:solidFill>
-                <a:latin typeface="Arial" pitchFamily="34" charset="0"/>
-                <a:ea typeface="Arial" pitchFamily="34" charset="-122"/>
-                <a:cs typeface="Arial" pitchFamily="34" charset="-120"/>
-              </a:rPr>
-              <a:t>Das machen wir jetzt einmal zusammen an meinem Bildschirm. Danach seid ihr mit derselben Datei dran.</a:t>
-            </a:r>
-            <a:endParaRPr lang="en-US" sz="1200" dirty="0"/>
-          </a:p>
-        </p:txBody>
-      </p:sp>
-      <p:sp>
-        <p:nvSpPr>
-          <p:cNvPr id="8" name="Shape 5"/>
-          <p:cNvSpPr/>
-          <p:nvPr/>
-        </p:nvSpPr>
-        <p:spPr>
-          <a:xfrm>
-            <a:off x="566928" y="4631436"/>
-            <a:ext cx="8010144" cy="0"/>
-          </a:xfrm>
-          <a:prstGeom prst="line">
-            <a:avLst/>
-          </a:prstGeom>
-          <a:noFill/>
-          <a:ln w="9525">
-            <a:solidFill>
-              <a:srgbClr val="DFE3F0"/>
-            </a:solidFill>
-            <a:prstDash val="solid"/>
-          </a:ln>
-        </p:spPr>
-      </p:sp>
-      <p:sp>
-        <p:nvSpPr>
-          <p:cNvPr id="9" name="Text 6"/>
-          <p:cNvSpPr/>
-          <p:nvPr/>
-        </p:nvSpPr>
-        <p:spPr>
-          <a:xfrm>
-            <a:off x="566928" y="4722876"/>
-            <a:ext cx="5029200" cy="237744"/>
-          </a:xfrm>
-          <a:prstGeom prst="rect">
-            <a:avLst/>
-          </a:prstGeom>
-          <a:noFill/>
-          <a:ln/>
-        </p:spPr>
-        <p:txBody>
-          <a:bodyPr wrap="square" lIns="0" tIns="0" rIns="0" bIns="0" rtlCol="0" anchor="ctr"/>
-          <a:lstStyle/>
-          <a:p>
-            <a:pPr indent="0" marL="0">
-              <a:buNone/>
-            </a:pPr>
-            <a:r>
-              <a:rPr lang="en-US" sz="1050" spc="30" kern="0" dirty="0">
+          <p:cNvPr id="6" name="Text 4"/>
+          <p:cNvSpPr/>
+          <p:nvPr/>
+        </p:nvSpPr>
+        <p:spPr>
+          <a:xfrm>
+            <a:off x="566928" y="2084832"/>
+            <a:ext cx="5394960" cy="868680"/>
+          </a:xfrm>
+          <a:prstGeom prst="rect">
+            <a:avLst/>
+          </a:prstGeom>
+          <a:noFill/>
+          <a:ln/>
+        </p:spPr>
+        <p:txBody>
+          <a:bodyPr wrap="square" lIns="0" tIns="0" rIns="0" bIns="0" rtlCol="0" anchor="t"/>
+          <a:lstStyle/>
+          <a:p>
+            <a:pPr indent="0" marL="0">
+              <a:buNone/>
+            </a:pPr>
+            <a:r>
+              <a:rPr lang="en-US" sz="3000" b="1" dirty="0">
+                <a:solidFill>
+                  <a:srgbClr val="272E52"/>
+                </a:solidFill>
+                <a:latin typeface="Arial" pitchFamily="34" charset="0"/>
+                <a:ea typeface="Arial" pitchFamily="34" charset="-122"/>
+                <a:cs typeface="Arial" pitchFamily="34" charset="-120"/>
+              </a:rPr>
+              <a:t>Die Werkzeuge</a:t>
+            </a:r>
+            <a:endParaRPr lang="en-US" sz="3000" dirty="0"/>
+          </a:p>
+        </p:txBody>
+      </p:sp>
+      <p:sp>
+        <p:nvSpPr>
+          <p:cNvPr id="7" name="Text 5"/>
+          <p:cNvSpPr/>
+          <p:nvPr/>
+        </p:nvSpPr>
+        <p:spPr>
+          <a:xfrm>
+            <a:off x="566928" y="3017520"/>
+            <a:ext cx="5394960" cy="548640"/>
+          </a:xfrm>
+          <a:prstGeom prst="rect">
+            <a:avLst/>
+          </a:prstGeom>
+          <a:noFill/>
+          <a:ln/>
+        </p:spPr>
+        <p:txBody>
+          <a:bodyPr wrap="square" lIns="0" tIns="0" rIns="0" bIns="0" rtlCol="0" anchor="t"/>
+          <a:lstStyle/>
+          <a:p>
+            <a:pPr indent="0" marL="0">
+              <a:buNone/>
+            </a:pPr>
+            <a:r>
+              <a:rPr lang="en-US" sz="1350" dirty="0">
                 <a:solidFill>
                   <a:srgbClr val="5C6377"/>
                 </a:solidFill>
@@ -4405,48 +4340,9 @@
                 <a:ea typeface="Arial" pitchFamily="34" charset="-122"/>
                 <a:cs typeface="Arial" pitchFamily="34" charset="-120"/>
               </a:rPr>
-              <a:t>Werkzeug</a:t>
-            </a:r>
-            <a:endParaRPr lang="en-US" sz="1050" dirty="0"/>
-          </a:p>
-        </p:txBody>
-      </p:sp>
-      <p:sp>
-        <p:nvSpPr>
-          <p:cNvPr id="10" name="Text 7"/>
-          <p:cNvSpPr/>
-          <p:nvPr/>
-        </p:nvSpPr>
-        <p:spPr>
-          <a:xfrm>
-            <a:off x="8028432" y="4722876"/>
-            <a:ext cx="548640" cy="237744"/>
-          </a:xfrm>
-          <a:prstGeom prst="rect">
-            <a:avLst/>
-          </a:prstGeom>
-          <a:noFill/>
-          <a:ln/>
-        </p:spPr>
-        <p:txBody>
-          <a:bodyPr wrap="square" lIns="0" tIns="0" rIns="0" bIns="0" rtlCol="0" anchor="ctr"/>
-          <a:lstStyle/>
-          <a:p>
-            <a:pPr algn="r" indent="0" marL="0">
-              <a:buNone/>
-            </a:pPr>
-            <a:r>
-              <a:rPr lang="en-US" sz="1050" dirty="0">
-                <a:solidFill>
-                  <a:srgbClr val="5C6377"/>
-                </a:solidFill>
-                <a:latin typeface="Arial" pitchFamily="34" charset="0"/>
-                <a:ea typeface="Arial" pitchFamily="34" charset="-122"/>
-                <a:cs typeface="Arial" pitchFamily="34" charset="-120"/>
-              </a:rPr>
-              <a:t>11/18</a:t>
-            </a:r>
-            <a:endParaRPr lang="en-US" sz="1050" dirty="0"/>
+              <a:t>Wireshark und ein eigener MQTT-Broker</a:t>
+            </a:r>
+            <a:endParaRPr lang="en-US" sz="1350" dirty="0"/>
           </a:p>
         </p:txBody>
       </p:sp>
@@ -4490,48 +4386,150 @@
         </p:nvSpPr>
         <p:spPr>
           <a:xfrm>
-            <a:off x="6355080" y="0"/>
-            <a:ext cx="2788920" cy="5143500"/>
+            <a:off x="566928" y="201168"/>
+            <a:ext cx="475488" cy="50292"/>
           </a:xfrm>
           <a:prstGeom prst="rect">
             <a:avLst/>
           </a:prstGeom>
           <a:solidFill>
-            <a:srgbClr val="FBF2E3"/>
+            <a:srgbClr val="3843AF"/>
           </a:solidFill>
           <a:ln/>
         </p:spPr>
       </p:sp>
       <p:sp>
         <p:nvSpPr>
-          <p:cNvPr id="3" name="Shape 1"/>
-          <p:cNvSpPr/>
-          <p:nvPr/>
-        </p:nvSpPr>
-        <p:spPr>
-          <a:xfrm>
-            <a:off x="6355080" y="0"/>
-            <a:ext cx="45720" cy="5143500"/>
+          <p:cNvPr id="3" name="Text 1"/>
+          <p:cNvSpPr/>
+          <p:nvPr/>
+        </p:nvSpPr>
+        <p:spPr>
+          <a:xfrm>
+            <a:off x="566928" y="384048"/>
+            <a:ext cx="8010144" cy="237744"/>
+          </a:xfrm>
+          <a:prstGeom prst="rect">
+            <a:avLst/>
+          </a:prstGeom>
+          <a:noFill/>
+          <a:ln/>
+        </p:spPr>
+        <p:txBody>
+          <a:bodyPr wrap="square" lIns="0" tIns="0" rIns="0" bIns="0" rtlCol="0" anchor="ctr"/>
+          <a:lstStyle/>
+          <a:p>
+            <a:pPr indent="0" marL="0">
+              <a:buNone/>
+            </a:pPr>
+            <a:r>
+              <a:rPr lang="en-US" sz="1150" b="1" spc="180" kern="0" dirty="0">
+                <a:solidFill>
+                  <a:srgbClr val="3843AF"/>
+                </a:solidFill>
+                <a:latin typeface="Arial" pitchFamily="34" charset="0"/>
+                <a:ea typeface="Arial" pitchFamily="34" charset="-122"/>
+                <a:cs typeface="Arial" pitchFamily="34" charset="-120"/>
+              </a:rPr>
+              <a:t>KURZ VORGESTELLT</a:t>
+            </a:r>
+            <a:endParaRPr lang="en-US" sz="1150" dirty="0"/>
+          </a:p>
+        </p:txBody>
+      </p:sp>
+      <p:sp>
+        <p:nvSpPr>
+          <p:cNvPr id="4" name="Text 2"/>
+          <p:cNvSpPr/>
+          <p:nvPr/>
+        </p:nvSpPr>
+        <p:spPr>
+          <a:xfrm>
+            <a:off x="566928" y="731520"/>
+            <a:ext cx="8010144" cy="603504"/>
+          </a:xfrm>
+          <a:prstGeom prst="rect">
+            <a:avLst/>
+          </a:prstGeom>
+          <a:noFill/>
+          <a:ln/>
+        </p:spPr>
+        <p:txBody>
+          <a:bodyPr wrap="square" lIns="0" tIns="0" rIns="0" bIns="0" rtlCol="0" anchor="t"/>
+          <a:lstStyle/>
+          <a:p>
+            <a:pPr indent="0" marL="0">
+              <a:buNone/>
+            </a:pPr>
+            <a:r>
+              <a:rPr lang="en-US" sz="2600" b="1" dirty="0">
+                <a:solidFill>
+                  <a:srgbClr val="272E52"/>
+                </a:solidFill>
+                <a:latin typeface="Arial" pitchFamily="34" charset="0"/>
+                <a:ea typeface="Arial" pitchFamily="34" charset="-122"/>
+                <a:cs typeface="Arial" pitchFamily="34" charset="-120"/>
+              </a:rPr>
+              <a:t>Wireshark und der Mitschnitt</a:t>
+            </a:r>
+            <a:endParaRPr lang="en-US" sz="2600" dirty="0"/>
+          </a:p>
+        </p:txBody>
+      </p:sp>
+      <p:pic>
+        <p:nvPicPr>
+          <p:cNvPr id="5" name="Image 0" descr="/Users/jacobmenge/Desktop/kurs-26.2b-orga/folienwerkstatt/assets/diagramme/steckbrief-werkzeug.png">    </p:cNvPr>
+          <p:cNvPicPr>
+            <a:picLocks noChangeAspect="1"/>
+          </p:cNvPicPr>
+          <p:nvPr/>
+        </p:nvPicPr>
+        <p:blipFill>
+          <a:blip r:embed="rId1"/>
+          <a:stretch>
+            <a:fillRect/>
+          </a:stretch>
+        </p:blipFill>
+        <p:spPr>
+          <a:xfrm>
+            <a:off x="566928" y="1463040"/>
+            <a:ext cx="8010144" cy="2468880"/>
+          </a:xfrm>
+          <a:prstGeom prst="rect">
+            <a:avLst/>
+          </a:prstGeom>
+        </p:spPr>
+      </p:pic>
+      <p:sp>
+        <p:nvSpPr>
+          <p:cNvPr id="6" name="Shape 3"/>
+          <p:cNvSpPr/>
+          <p:nvPr/>
+        </p:nvSpPr>
+        <p:spPr>
+          <a:xfrm>
+            <a:off x="566928" y="4105656"/>
+            <a:ext cx="32004" cy="256032"/>
           </a:xfrm>
           <a:prstGeom prst="rect">
             <a:avLst/>
           </a:prstGeom>
           <a:solidFill>
-            <a:srgbClr val="9A6310"/>
+            <a:srgbClr val="3843AF"/>
           </a:solidFill>
           <a:ln/>
         </p:spPr>
       </p:sp>
       <p:sp>
         <p:nvSpPr>
-          <p:cNvPr id="4" name="Text 2"/>
-          <p:cNvSpPr/>
-          <p:nvPr/>
-        </p:nvSpPr>
-        <p:spPr>
-          <a:xfrm>
-            <a:off x="6629400" y="1463040"/>
-            <a:ext cx="2194560" cy="1737360"/>
+          <p:cNvPr id="7" name="Text 4"/>
+          <p:cNvSpPr/>
+          <p:nvPr/>
+        </p:nvSpPr>
+        <p:spPr>
+          <a:xfrm>
+            <a:off x="749808" y="4059936"/>
+            <a:ext cx="7827264" cy="402336"/>
           </a:xfrm>
           <a:prstGeom prst="rect">
             <a:avLst/>
@@ -4543,109 +4541,73 @@
           <a:bodyPr wrap="square" lIns="0" tIns="0" rIns="0" bIns="0" rtlCol="0" anchor="ctr"/>
           <a:lstStyle/>
           <a:p>
-            <a:pPr algn="ctr" indent="0" marL="0">
-              <a:buNone/>
-            </a:pPr>
-            <a:r>
-              <a:rPr lang="en-US" sz="8400" b="1" dirty="0">
-                <a:solidFill>
-                  <a:srgbClr val="9A6310"/>
-                </a:solidFill>
-                <a:latin typeface="Arial" pitchFamily="34" charset="0"/>
-                <a:ea typeface="Arial" pitchFamily="34" charset="-122"/>
-                <a:cs typeface="Arial" pitchFamily="34" charset="-120"/>
-              </a:rPr>
-              <a:t>02</a:t>
-            </a:r>
-            <a:endParaRPr lang="en-US" sz="8400" dirty="0"/>
-          </a:p>
-        </p:txBody>
-      </p:sp>
-      <p:sp>
-        <p:nvSpPr>
-          <p:cNvPr id="5" name="Shape 3"/>
-          <p:cNvSpPr/>
-          <p:nvPr/>
-        </p:nvSpPr>
-        <p:spPr>
-          <a:xfrm>
-            <a:off x="566928" y="1883664"/>
-            <a:ext cx="475488" cy="50292"/>
-          </a:xfrm>
-          <a:prstGeom prst="rect">
-            <a:avLst/>
-          </a:prstGeom>
-          <a:solidFill>
-            <a:srgbClr val="9A6310"/>
-          </a:solidFill>
-          <a:ln/>
-        </p:spPr>
-      </p:sp>
-      <p:sp>
-        <p:nvSpPr>
-          <p:cNvPr id="6" name="Text 4"/>
-          <p:cNvSpPr/>
-          <p:nvPr/>
-        </p:nvSpPr>
-        <p:spPr>
-          <a:xfrm>
-            <a:off x="566928" y="2084832"/>
-            <a:ext cx="5394960" cy="868680"/>
-          </a:xfrm>
-          <a:prstGeom prst="rect">
-            <a:avLst/>
-          </a:prstGeom>
-          <a:noFill/>
-          <a:ln/>
-        </p:spPr>
-        <p:txBody>
-          <a:bodyPr wrap="square" lIns="0" tIns="0" rIns="0" bIns="0" rtlCol="0" anchor="t"/>
-          <a:lstStyle/>
-          <a:p>
-            <a:pPr indent="0" marL="0">
-              <a:buNone/>
-            </a:pPr>
-            <a:r>
-              <a:rPr lang="en-US" sz="3000" b="1" dirty="0">
-                <a:solidFill>
-                  <a:srgbClr val="272E52"/>
-                </a:solidFill>
-                <a:latin typeface="Arial" pitchFamily="34" charset="0"/>
-                <a:ea typeface="Arial" pitchFamily="34" charset="-122"/>
-                <a:cs typeface="Arial" pitchFamily="34" charset="-120"/>
-              </a:rPr>
-              <a:t>Paket-Detektiv</a:t>
-            </a:r>
-            <a:endParaRPr lang="en-US" sz="3000" dirty="0"/>
-          </a:p>
-        </p:txBody>
-      </p:sp>
-      <p:sp>
-        <p:nvSpPr>
-          <p:cNvPr id="7" name="Text 5"/>
-          <p:cNvSpPr/>
-          <p:nvPr/>
-        </p:nvSpPr>
-        <p:spPr>
-          <a:xfrm>
-            <a:off x="566928" y="3017520"/>
-            <a:ext cx="5394960" cy="548640"/>
-          </a:xfrm>
-          <a:prstGeom prst="rect">
-            <a:avLst/>
-          </a:prstGeom>
-          <a:noFill/>
-          <a:ln/>
-        </p:spPr>
-        <p:txBody>
-          <a:bodyPr wrap="square" lIns="0" tIns="0" rIns="0" bIns="0" rtlCol="0" anchor="t"/>
-          <a:lstStyle/>
-          <a:p>
-            <a:pPr indent="0" marL="0">
-              <a:buNone/>
-            </a:pPr>
-            <a:r>
-              <a:rPr lang="en-US" sz="1350" dirty="0">
+            <a:pPr indent="0" marL="0">
+              <a:buNone/>
+            </a:pPr>
+            <a:r>
+              <a:rPr lang="en-US" sz="1200" b="1" dirty="0">
+                <a:solidFill>
+                  <a:srgbClr val="434A63"/>
+                </a:solidFill>
+                <a:latin typeface="Arial" pitchFamily="34" charset="0"/>
+                <a:ea typeface="Arial" pitchFamily="34" charset="-122"/>
+                <a:cs typeface="Arial" pitchFamily="34" charset="-120"/>
+              </a:rPr>
+              <a:t>Für heute reicht Datei öffnen. Alles, was nach Treiber oder Sonderrechten klingt, dürft ihr getrost ignorieren.</a:t>
+            </a:r>
+            <a:endParaRPr lang="en-US" sz="1200" dirty="0"/>
+          </a:p>
+        </p:txBody>
+      </p:sp>
+      <p:sp>
+        <p:nvSpPr>
+          <p:cNvPr id="8" name="Shape 5"/>
+          <p:cNvSpPr/>
+          <p:nvPr/>
+        </p:nvSpPr>
+        <p:spPr>
+          <a:xfrm>
+            <a:off x="566928" y="4631436"/>
+            <a:ext cx="8010144" cy="0"/>
+          </a:xfrm>
+          <a:prstGeom prst="line">
+            <a:avLst/>
+          </a:prstGeom>
+          <a:noFill/>
+          <a:ln w="9525">
+            <a:solidFill>
+              <a:srgbClr val="DFE3F0"/>
+            </a:solidFill>
+            <a:prstDash val="solid"/>
+          </a:ln>
+        </p:spPr>
+      </p:sp>
+      <p:sp>
+        <p:nvSpPr>
+          <p:cNvPr id="9" name="Text 6"/>
+          <p:cNvSpPr/>
+          <p:nvPr/>
+        </p:nvSpPr>
+        <p:spPr>
+          <a:xfrm>
+            <a:off x="566928" y="4722876"/>
+            <a:ext cx="5029200" cy="237744"/>
+          </a:xfrm>
+          <a:prstGeom prst="rect">
+            <a:avLst/>
+          </a:prstGeom>
+          <a:noFill/>
+          <a:ln/>
+        </p:spPr>
+        <p:txBody>
+          <a:bodyPr wrap="square" lIns="0" tIns="0" rIns="0" bIns="0" rtlCol="0" anchor="ctr"/>
+          <a:lstStyle/>
+          <a:p>
+            <a:pPr indent="0" marL="0">
+              <a:buNone/>
+            </a:pPr>
+            <a:r>
+              <a:rPr lang="en-US" sz="1050" spc="30" kern="0" dirty="0">
                 <a:solidFill>
                   <a:srgbClr val="5C6377"/>
                 </a:solidFill>
@@ -4653,9 +4615,48 @@
                 <a:ea typeface="Arial" pitchFamily="34" charset="-122"/>
                 <a:cs typeface="Arial" pitchFamily="34" charset="-120"/>
               </a:rPr>
-              <a:t>50 Minuten in Gruppen: ein Mitschnitt, drei Fundorte</a:t>
-            </a:r>
-            <a:endParaRPr lang="en-US" sz="1350" dirty="0"/>
+              <a:t>Die Werkzeuge</a:t>
+            </a:r>
+            <a:endParaRPr lang="en-US" sz="1050" dirty="0"/>
+          </a:p>
+        </p:txBody>
+      </p:sp>
+      <p:sp>
+        <p:nvSpPr>
+          <p:cNvPr id="10" name="Text 7"/>
+          <p:cNvSpPr/>
+          <p:nvPr/>
+        </p:nvSpPr>
+        <p:spPr>
+          <a:xfrm>
+            <a:off x="8028432" y="4722876"/>
+            <a:ext cx="548640" cy="237744"/>
+          </a:xfrm>
+          <a:prstGeom prst="rect">
+            <a:avLst/>
+          </a:prstGeom>
+          <a:noFill/>
+          <a:ln/>
+        </p:spPr>
+        <p:txBody>
+          <a:bodyPr wrap="square" lIns="0" tIns="0" rIns="0" bIns="0" rtlCol="0" anchor="ctr"/>
+          <a:lstStyle/>
+          <a:p>
+            <a:pPr algn="r" indent="0" marL="0">
+              <a:buNone/>
+            </a:pPr>
+            <a:r>
+              <a:rPr lang="en-US" sz="1050" dirty="0">
+                <a:solidFill>
+                  <a:srgbClr val="5C6377"/>
+                </a:solidFill>
+                <a:latin typeface="Arial" pitchFamily="34" charset="0"/>
+                <a:ea typeface="Arial" pitchFamily="34" charset="-122"/>
+                <a:cs typeface="Arial" pitchFamily="34" charset="-120"/>
+              </a:rPr>
+              <a:t>11/20</a:t>
+            </a:r>
+            <a:endParaRPr lang="en-US" sz="1050" dirty="0"/>
           </a:p>
         </p:txBody>
       </p:sp>
@@ -4706,7 +4707,7 @@
             <a:avLst/>
           </a:prstGeom>
           <a:solidFill>
-            <a:srgbClr val="9A6310"/>
+            <a:srgbClr val="3843AF"/>
           </a:solidFill>
           <a:ln/>
         </p:spPr>
@@ -4738,13 +4739,13 @@
             <a:r>
               <a:rPr lang="en-US" sz="1150" b="1" spc="180" kern="0" dirty="0">
                 <a:solidFill>
-                  <a:srgbClr val="9A6310"/>
-                </a:solidFill>
-                <a:latin typeface="Arial" pitchFamily="34" charset="0"/>
-                <a:ea typeface="Arial" pitchFamily="34" charset="-122"/>
-                <a:cs typeface="Arial" pitchFamily="34" charset="-120"/>
-              </a:rPr>
-              <a:t>DAS ZIELBILD</a:t>
+                  <a:srgbClr val="3843AF"/>
+                </a:solidFill>
+                <a:latin typeface="Arial" pitchFamily="34" charset="0"/>
+                <a:ea typeface="Arial" pitchFamily="34" charset="-122"/>
+                <a:cs typeface="Arial" pitchFamily="34" charset="-120"/>
+              </a:rPr>
+              <a:t>LIVE AM GETEILTEN BILDSCHIRM</a:t>
             </a:r>
             <a:endParaRPr lang="en-US" sz="1150" dirty="0"/>
           </a:p>
@@ -4783,7 +4784,7 @@
                 <a:ea typeface="Arial" pitchFamily="34" charset="-122"/>
                 <a:cs typeface="Arial" pitchFamily="34" charset="-120"/>
               </a:rPr>
-              <a:t>Eure Fundorte</a:t>
+              <a:t>Die vier Handgriffe</a:t>
             </a:r>
             <a:endParaRPr lang="en-US" sz="2600" dirty="0"/>
           </a:p>
@@ -4791,7 +4792,7 @@
       </p:sp>
       <p:pic>
         <p:nvPicPr>
-          <p:cNvPr id="5" name="Image 0" descr="/Users/jacobmenge/Desktop/kurs-26.2b-orga/folienwerkstatt/assets/diagramme/detektiv-ziel.png">    </p:cNvPr>
+          <p:cNvPr id="5" name="Image 0" descr="/Users/jacobmenge/Desktop/kurs-26.2b-orga/folienwerkstatt/assets/diagramme/wireshark-fahrplan.png">    </p:cNvPr>
           <p:cNvPicPr>
             <a:picLocks noChangeAspect="1"/>
           </p:cNvPicPr>
@@ -4805,8 +4806,8 @@
         </p:blipFill>
         <p:spPr>
           <a:xfrm>
-            <a:off x="566928" y="1444752"/>
-            <a:ext cx="8010144" cy="2432304"/>
+            <a:off x="566928" y="1481328"/>
+            <a:ext cx="8010144" cy="2304288"/>
           </a:xfrm>
           <a:prstGeom prst="rect">
             <a:avLst/>
@@ -4821,14 +4822,14 @@
         </p:nvSpPr>
         <p:spPr>
           <a:xfrm>
-            <a:off x="566928" y="4087368"/>
+            <a:off x="566928" y="4069080"/>
             <a:ext cx="32004" cy="256032"/>
           </a:xfrm>
           <a:prstGeom prst="rect">
             <a:avLst/>
           </a:prstGeom>
           <a:solidFill>
-            <a:srgbClr val="9A6310"/>
+            <a:srgbClr val="3843AF"/>
           </a:solidFill>
           <a:ln/>
         </p:spPr>
@@ -4841,7 +4842,7 @@
         </p:nvSpPr>
         <p:spPr>
           <a:xfrm>
-            <a:off x="749808" y="4041648"/>
+            <a:off x="749808" y="4023360"/>
             <a:ext cx="7827264" cy="402336"/>
           </a:xfrm>
           <a:prstGeom prst="rect">
@@ -4866,7 +4867,7 @@
                 <a:ea typeface="Arial" pitchFamily="34" charset="-122"/>
                 <a:cs typeface="Arial" pitchFamily="34" charset="-120"/>
               </a:rPr>
-              <a:t>Alles spielt in einer einzigen Datei. Einmal geladen, braucht ihr nur noch die Filterleiste.</a:t>
+              <a:t>Einmal zusammen an meinem Bildschirm. In der Praxiszeit macht ihr genau diese Schritte mit derselben Datei.</a:t>
             </a:r>
             <a:endParaRPr lang="en-US" sz="1200" dirty="0"/>
           </a:p>
@@ -4928,7 +4929,7 @@
                 <a:ea typeface="Arial" pitchFamily="34" charset="-122"/>
                 <a:cs typeface="Arial" pitchFamily="34" charset="-120"/>
               </a:rPr>
-              <a:t>Breakout</a:t>
+              <a:t>Die Werkzeuge</a:t>
             </a:r>
             <a:endParaRPr lang="en-US" sz="1050" dirty="0"/>
           </a:p>
@@ -4967,7 +4968,7 @@
                 <a:ea typeface="Arial" pitchFamily="34" charset="-122"/>
                 <a:cs typeface="Arial" pitchFamily="34" charset="-120"/>
               </a:rPr>
-              <a:t>12/18</a:t>
+              <a:t>12/20</a:t>
             </a:r>
             <a:endParaRPr lang="en-US" sz="1050" dirty="0"/>
           </a:p>
@@ -5020,7 +5021,7 @@
             <a:avLst/>
           </a:prstGeom>
           <a:solidFill>
-            <a:srgbClr val="9A6310"/>
+            <a:srgbClr val="3843AF"/>
           </a:solidFill>
           <a:ln/>
         </p:spPr>
@@ -5052,13 +5053,13 @@
             <a:r>
               <a:rPr lang="en-US" sz="1150" b="1" spc="180" kern="0" dirty="0">
                 <a:solidFill>
-                  <a:srgbClr val="9A6310"/>
-                </a:solidFill>
-                <a:latin typeface="Arial" pitchFamily="34" charset="0"/>
-                <a:ea typeface="Arial" pitchFamily="34" charset="-122"/>
-                <a:cs typeface="Arial" pitchFamily="34" charset="-120"/>
-              </a:rPr>
-              <a:t>BREAKOUT · 50 MINUTEN</a:t>
+                  <a:srgbClr val="3843AF"/>
+                </a:solidFill>
+                <a:latin typeface="Arial" pitchFamily="34" charset="0"/>
+                <a:ea typeface="Arial" pitchFamily="34" charset="-122"/>
+                <a:cs typeface="Arial" pitchFamily="34" charset="-120"/>
+              </a:rPr>
+              <a:t>MQTT IM CONTAINER</a:t>
             </a:r>
             <a:endParaRPr lang="en-US" sz="1150" dirty="0"/>
           </a:p>
@@ -5097,42 +5098,66 @@
                 <a:ea typeface="Arial" pitchFamily="34" charset="-122"/>
                 <a:cs typeface="Arial" pitchFamily="34" charset="-120"/>
               </a:rPr>
-              <a:t>Der Auftrag</a:t>
+              <a:t>Eure eigene Poststelle</a:t>
             </a:r>
             <a:endParaRPr lang="en-US" sz="2600" dirty="0"/>
           </a:p>
         </p:txBody>
       </p:sp>
-      <p:sp>
-        <p:nvSpPr>
-          <p:cNvPr id="5" name="Shape 3"/>
-          <p:cNvSpPr/>
-          <p:nvPr/>
-        </p:nvSpPr>
-        <p:spPr>
-          <a:xfrm>
-            <a:off x="438912" y="1792224"/>
-            <a:ext cx="8266176" cy="329184"/>
+      <p:pic>
+        <p:nvPicPr>
+          <p:cNvPr id="5" name="Image 0" descr="/Users/jacobmenge/Desktop/kurs-26.2b-orga/folienwerkstatt/assets/diagramme/mqtt-container-bild.png">    </p:cNvPr>
+          <p:cNvPicPr>
+            <a:picLocks noChangeAspect="1"/>
+          </p:cNvPicPr>
+          <p:nvPr/>
+        </p:nvPicPr>
+        <p:blipFill>
+          <a:blip r:embed="rId1"/>
+          <a:stretch>
+            <a:fillRect/>
+          </a:stretch>
+        </p:blipFill>
+        <p:spPr>
+          <a:xfrm>
+            <a:off x="566928" y="1444752"/>
+            <a:ext cx="8010144" cy="2340864"/>
+          </a:xfrm>
+          <a:prstGeom prst="rect">
+            <a:avLst/>
+          </a:prstGeom>
+        </p:spPr>
+      </p:pic>
+      <p:sp>
+        <p:nvSpPr>
+          <p:cNvPr id="6" name="Shape 3"/>
+          <p:cNvSpPr/>
+          <p:nvPr/>
+        </p:nvSpPr>
+        <p:spPr>
+          <a:xfrm>
+            <a:off x="566928" y="4069080"/>
+            <a:ext cx="32004" cy="256032"/>
           </a:xfrm>
           <a:prstGeom prst="rect">
             <a:avLst/>
           </a:prstGeom>
           <a:solidFill>
-            <a:srgbClr val="F5F6FC"/>
+            <a:srgbClr val="3843AF"/>
           </a:solidFill>
           <a:ln/>
         </p:spPr>
       </p:sp>
       <p:sp>
         <p:nvSpPr>
-          <p:cNvPr id="6" name="Text 4"/>
-          <p:cNvSpPr/>
-          <p:nvPr/>
-        </p:nvSpPr>
-        <p:spPr>
-          <a:xfrm>
-            <a:off x="566928" y="1792224"/>
-            <a:ext cx="914400" cy="329184"/>
+          <p:cNvPr id="7" name="Text 4"/>
+          <p:cNvSpPr/>
+          <p:nvPr/>
+        </p:nvSpPr>
+        <p:spPr>
+          <a:xfrm>
+            <a:off x="749808" y="4023360"/>
+            <a:ext cx="7827264" cy="402336"/>
           </a:xfrm>
           <a:prstGeom prst="rect">
             <a:avLst/>
@@ -5148,46 +5173,7 @@
               <a:buNone/>
             </a:pPr>
             <a:r>
-              <a:rPr lang="en-US" sz="1100" b="1" dirty="0">
-                <a:solidFill>
-                  <a:srgbClr val="9A6310"/>
-                </a:solidFill>
-                <a:latin typeface="Courier New" pitchFamily="34" charset="0"/>
-                <a:ea typeface="Courier New" pitchFamily="34" charset="-122"/>
-                <a:cs typeface="Courier New" pitchFamily="34" charset="-120"/>
-              </a:rPr>
-              <a:t>Teil 1</a:t>
-            </a:r>
-            <a:endParaRPr lang="en-US" sz="1100" dirty="0"/>
-          </a:p>
-        </p:txBody>
-      </p:sp>
-      <p:sp>
-        <p:nvSpPr>
-          <p:cNvPr id="7" name="Text 5"/>
-          <p:cNvSpPr/>
-          <p:nvPr/>
-        </p:nvSpPr>
-        <p:spPr>
-          <a:xfrm>
-            <a:off x="1481328" y="1792224"/>
-            <a:ext cx="7095744" cy="329184"/>
-          </a:xfrm>
-          <a:prstGeom prst="rect">
-            <a:avLst/>
-          </a:prstGeom>
-          <a:noFill/>
-          <a:ln/>
-        </p:spPr>
-        <p:txBody>
-          <a:bodyPr wrap="square" lIns="0" tIns="0" rIns="0" bIns="0" rtlCol="0" anchor="ctr"/>
-          <a:lstStyle/>
-          <a:p>
-            <a:pPr indent="0" marL="0">
-              <a:buNone/>
-            </a:pPr>
-            <a:r>
-              <a:rPr lang="en-US" sz="1100" dirty="0">
+              <a:rPr lang="en-US" sz="1200" b="1" dirty="0">
                 <a:solidFill>
                   <a:srgbClr val="434A63"/>
                 </a:solidFill>
@@ -5195,537 +5181,15 @@
                 <a:ea typeface="Arial" pitchFamily="34" charset="-122"/>
                 <a:cs typeface="Arial" pitchFamily="34" charset="-120"/>
               </a:rPr>
-              <a:t>Mitschnitt öffnen und Überblick: Welche Protokolle stecken drin?</a:t>
-            </a:r>
-            <a:endParaRPr lang="en-US" sz="1100" dirty="0"/>
-          </a:p>
-        </p:txBody>
-      </p:sp>
-      <p:sp>
-        <p:nvSpPr>
-          <p:cNvPr id="8" name="Text 6"/>
-          <p:cNvSpPr/>
-          <p:nvPr/>
-        </p:nvSpPr>
-        <p:spPr>
-          <a:xfrm>
-            <a:off x="566928" y="2121408"/>
-            <a:ext cx="914400" cy="329184"/>
-          </a:xfrm>
-          <a:prstGeom prst="rect">
-            <a:avLst/>
-          </a:prstGeom>
-          <a:noFill/>
-          <a:ln/>
-        </p:spPr>
-        <p:txBody>
-          <a:bodyPr wrap="square" lIns="0" tIns="0" rIns="0" bIns="0" rtlCol="0" anchor="ctr"/>
-          <a:lstStyle/>
-          <a:p>
-            <a:pPr indent="0" marL="0">
-              <a:buNone/>
-            </a:pPr>
-            <a:r>
-              <a:rPr lang="en-US" sz="1100" b="1" dirty="0">
-                <a:solidFill>
-                  <a:srgbClr val="9A6310"/>
-                </a:solidFill>
-                <a:latin typeface="Courier New" pitchFamily="34" charset="0"/>
-                <a:ea typeface="Courier New" pitchFamily="34" charset="-122"/>
-                <a:cs typeface="Courier New" pitchFamily="34" charset="-120"/>
-              </a:rPr>
-              <a:t>Teil 2</a:t>
-            </a:r>
-            <a:endParaRPr lang="en-US" sz="1100" dirty="0"/>
-          </a:p>
-        </p:txBody>
-      </p:sp>
-      <p:sp>
-        <p:nvSpPr>
-          <p:cNvPr id="9" name="Text 7"/>
-          <p:cNvSpPr/>
-          <p:nvPr/>
-        </p:nvSpPr>
-        <p:spPr>
-          <a:xfrm>
-            <a:off x="1481328" y="2121408"/>
-            <a:ext cx="7095744" cy="329184"/>
-          </a:xfrm>
-          <a:prstGeom prst="rect">
-            <a:avLst/>
-          </a:prstGeom>
-          <a:noFill/>
-          <a:ln/>
-        </p:spPr>
-        <p:txBody>
-          <a:bodyPr wrap="square" lIns="0" tIns="0" rIns="0" bIns="0" rtlCol="0" anchor="ctr"/>
-          <a:lstStyle/>
-          <a:p>
-            <a:pPr indent="0" marL="0">
-              <a:buNone/>
-            </a:pPr>
-            <a:r>
-              <a:rPr lang="en-US" sz="1100" dirty="0">
-                <a:solidFill>
-                  <a:srgbClr val="434A63"/>
-                </a:solidFill>
-                <a:latin typeface="Arial" pitchFamily="34" charset="0"/>
-                <a:ea typeface="Arial" pitchFamily="34" charset="-122"/>
-                <a:cs typeface="Arial" pitchFamily="34" charset="-120"/>
-              </a:rPr>
-              <a:t>Profinet: die drei Gerätenamen, der Controller und der Takt</a:t>
-            </a:r>
-            <a:endParaRPr lang="en-US" sz="1100" dirty="0"/>
-          </a:p>
-        </p:txBody>
-      </p:sp>
-      <p:sp>
-        <p:nvSpPr>
-          <p:cNvPr id="10" name="Shape 8"/>
-          <p:cNvSpPr/>
-          <p:nvPr/>
-        </p:nvSpPr>
-        <p:spPr>
-          <a:xfrm>
-            <a:off x="438912" y="2450592"/>
-            <a:ext cx="8266176" cy="329184"/>
-          </a:xfrm>
-          <a:prstGeom prst="rect">
-            <a:avLst/>
-          </a:prstGeom>
-          <a:solidFill>
-            <a:srgbClr val="F5F6FC"/>
-          </a:solidFill>
-          <a:ln/>
-        </p:spPr>
-      </p:sp>
-      <p:sp>
-        <p:nvSpPr>
-          <p:cNvPr id="11" name="Text 9"/>
-          <p:cNvSpPr/>
-          <p:nvPr/>
-        </p:nvSpPr>
-        <p:spPr>
-          <a:xfrm>
-            <a:off x="566928" y="2450592"/>
-            <a:ext cx="914400" cy="329184"/>
-          </a:xfrm>
-          <a:prstGeom prst="rect">
-            <a:avLst/>
-          </a:prstGeom>
-          <a:noFill/>
-          <a:ln/>
-        </p:spPr>
-        <p:txBody>
-          <a:bodyPr wrap="square" lIns="0" tIns="0" rIns="0" bIns="0" rtlCol="0" anchor="ctr"/>
-          <a:lstStyle/>
-          <a:p>
-            <a:pPr indent="0" marL="0">
-              <a:buNone/>
-            </a:pPr>
-            <a:r>
-              <a:rPr lang="en-US" sz="1100" b="1" dirty="0">
-                <a:solidFill>
-                  <a:srgbClr val="9A6310"/>
-                </a:solidFill>
-                <a:latin typeface="Courier New" pitchFamily="34" charset="0"/>
-                <a:ea typeface="Courier New" pitchFamily="34" charset="-122"/>
-                <a:cs typeface="Courier New" pitchFamily="34" charset="-120"/>
-              </a:rPr>
-              <a:t>Teil 3</a:t>
-            </a:r>
-            <a:endParaRPr lang="en-US" sz="1100" dirty="0"/>
-          </a:p>
-        </p:txBody>
-      </p:sp>
-      <p:sp>
-        <p:nvSpPr>
-          <p:cNvPr id="12" name="Text 10"/>
-          <p:cNvSpPr/>
-          <p:nvPr/>
-        </p:nvSpPr>
-        <p:spPr>
-          <a:xfrm>
-            <a:off x="1481328" y="2450592"/>
-            <a:ext cx="7095744" cy="329184"/>
-          </a:xfrm>
-          <a:prstGeom prst="rect">
-            <a:avLst/>
-          </a:prstGeom>
-          <a:noFill/>
-          <a:ln/>
-        </p:spPr>
-        <p:txBody>
-          <a:bodyPr wrap="square" lIns="0" tIns="0" rIns="0" bIns="0" rtlCol="0" anchor="ctr"/>
-          <a:lstStyle/>
-          <a:p>
-            <a:pPr indent="0" marL="0">
-              <a:buNone/>
-            </a:pPr>
-            <a:r>
-              <a:rPr lang="en-US" sz="1100" dirty="0">
-                <a:solidFill>
-                  <a:srgbClr val="434A63"/>
-                </a:solidFill>
-                <a:latin typeface="Arial" pitchFamily="34" charset="0"/>
-                <a:ea typeface="Arial" pitchFamily="34" charset="-122"/>
-                <a:cs typeface="Arial" pitchFamily="34" charset="-120"/>
-              </a:rPr>
-              <a:t>MQTT: Topic und Nutzlast lesen, dann die Klartext-Frage beantworten</a:t>
-            </a:r>
-            <a:endParaRPr lang="en-US" sz="1100" dirty="0"/>
-          </a:p>
-        </p:txBody>
-      </p:sp>
-      <p:sp>
-        <p:nvSpPr>
-          <p:cNvPr id="13" name="Text 11"/>
-          <p:cNvSpPr/>
-          <p:nvPr/>
-        </p:nvSpPr>
-        <p:spPr>
-          <a:xfrm>
-            <a:off x="566928" y="2779776"/>
-            <a:ext cx="914400" cy="329184"/>
-          </a:xfrm>
-          <a:prstGeom prst="rect">
-            <a:avLst/>
-          </a:prstGeom>
-          <a:noFill/>
-          <a:ln/>
-        </p:spPr>
-        <p:txBody>
-          <a:bodyPr wrap="square" lIns="0" tIns="0" rIns="0" bIns="0" rtlCol="0" anchor="ctr"/>
-          <a:lstStyle/>
-          <a:p>
-            <a:pPr indent="0" marL="0">
-              <a:buNone/>
-            </a:pPr>
-            <a:r>
-              <a:rPr lang="en-US" sz="1100" b="1" dirty="0">
-                <a:solidFill>
-                  <a:srgbClr val="9A6310"/>
-                </a:solidFill>
-                <a:latin typeface="Courier New" pitchFamily="34" charset="0"/>
-                <a:ea typeface="Courier New" pitchFamily="34" charset="-122"/>
-                <a:cs typeface="Courier New" pitchFamily="34" charset="-120"/>
-              </a:rPr>
-              <a:t>Bonus</a:t>
-            </a:r>
-            <a:endParaRPr lang="en-US" sz="1100" dirty="0"/>
-          </a:p>
-        </p:txBody>
-      </p:sp>
-      <p:sp>
-        <p:nvSpPr>
-          <p:cNvPr id="14" name="Text 12"/>
-          <p:cNvSpPr/>
-          <p:nvPr/>
-        </p:nvSpPr>
-        <p:spPr>
-          <a:xfrm>
-            <a:off x="1481328" y="2779776"/>
-            <a:ext cx="7095744" cy="329184"/>
-          </a:xfrm>
-          <a:prstGeom prst="rect">
-            <a:avLst/>
-          </a:prstGeom>
-          <a:noFill/>
-          <a:ln/>
-        </p:spPr>
-        <p:txBody>
-          <a:bodyPr wrap="square" lIns="0" tIns="0" rIns="0" bIns="0" rtlCol="0" anchor="ctr"/>
-          <a:lstStyle/>
-          <a:p>
-            <a:pPr indent="0" marL="0">
-              <a:buNone/>
-            </a:pPr>
-            <a:r>
-              <a:rPr lang="en-US" sz="1100" dirty="0">
-                <a:solidFill>
-                  <a:srgbClr val="434A63"/>
-                </a:solidFill>
-                <a:latin typeface="Arial" pitchFamily="34" charset="0"/>
-                <a:ea typeface="Arial" pitchFamily="34" charset="-122"/>
-                <a:cs typeface="Arial" pitchFamily="34" charset="-120"/>
-              </a:rPr>
-              <a:t>Vier Spuren: OPC UA, der Switch, die Hersteller, die Gespräche</a:t>
-            </a:r>
-            <a:endParaRPr lang="en-US" sz="1100" dirty="0"/>
-          </a:p>
-        </p:txBody>
-      </p:sp>
-      <p:sp>
-        <p:nvSpPr>
-          <p:cNvPr id="15" name="Shape 13"/>
-          <p:cNvSpPr/>
-          <p:nvPr/>
-        </p:nvSpPr>
-        <p:spPr>
-          <a:xfrm>
-            <a:off x="438912" y="3108960"/>
-            <a:ext cx="8266176" cy="329184"/>
-          </a:xfrm>
-          <a:prstGeom prst="rect">
-            <a:avLst/>
-          </a:prstGeom>
-          <a:solidFill>
-            <a:srgbClr val="F5F6FC"/>
-          </a:solidFill>
-          <a:ln/>
-        </p:spPr>
-      </p:sp>
-      <p:sp>
-        <p:nvSpPr>
-          <p:cNvPr id="16" name="Text 14"/>
-          <p:cNvSpPr/>
-          <p:nvPr/>
-        </p:nvSpPr>
-        <p:spPr>
-          <a:xfrm>
-            <a:off x="566928" y="3108960"/>
-            <a:ext cx="914400" cy="329184"/>
-          </a:xfrm>
-          <a:prstGeom prst="rect">
-            <a:avLst/>
-          </a:prstGeom>
-          <a:noFill/>
-          <a:ln/>
-        </p:spPr>
-        <p:txBody>
-          <a:bodyPr wrap="square" lIns="0" tIns="0" rIns="0" bIns="0" rtlCol="0" anchor="ctr"/>
-          <a:lstStyle/>
-          <a:p>
-            <a:pPr indent="0" marL="0">
-              <a:buNone/>
-            </a:pPr>
-            <a:r>
-              <a:rPr lang="en-US" sz="1100" b="1" dirty="0">
-                <a:solidFill>
-                  <a:srgbClr val="9A6310"/>
-                </a:solidFill>
-                <a:latin typeface="Courier New" pitchFamily="34" charset="0"/>
-                <a:ea typeface="Courier New" pitchFamily="34" charset="-122"/>
-                <a:cs typeface="Courier New" pitchFamily="34" charset="-120"/>
-              </a:rPr>
-              <a:t>Notieren</a:t>
-            </a:r>
-            <a:endParaRPr lang="en-US" sz="1100" dirty="0"/>
-          </a:p>
-        </p:txBody>
-      </p:sp>
-      <p:sp>
-        <p:nvSpPr>
-          <p:cNvPr id="17" name="Text 15"/>
-          <p:cNvSpPr/>
-          <p:nvPr/>
-        </p:nvSpPr>
-        <p:spPr>
-          <a:xfrm>
-            <a:off x="1481328" y="3108960"/>
-            <a:ext cx="7095744" cy="329184"/>
-          </a:xfrm>
-          <a:prstGeom prst="rect">
-            <a:avLst/>
-          </a:prstGeom>
-          <a:noFill/>
-          <a:ln/>
-        </p:spPr>
-        <p:txBody>
-          <a:bodyPr wrap="square" lIns="0" tIns="0" rIns="0" bIns="0" rtlCol="0" anchor="ctr"/>
-          <a:lstStyle/>
-          <a:p>
-            <a:pPr indent="0" marL="0">
-              <a:buNone/>
-            </a:pPr>
-            <a:r>
-              <a:rPr lang="en-US" sz="1100" dirty="0">
-                <a:solidFill>
-                  <a:srgbClr val="434A63"/>
-                </a:solidFill>
-                <a:latin typeface="Arial" pitchFamily="34" charset="0"/>
-                <a:ea typeface="Arial" pitchFamily="34" charset="-122"/>
-                <a:cs typeface="Arial" pitchFamily="34" charset="-120"/>
-              </a:rPr>
-              <a:t>Die drei Namen, das Temperatur-Topic und euren Sicherheits-Satz</a:t>
-            </a:r>
-            <a:endParaRPr lang="en-US" sz="1100" dirty="0"/>
-          </a:p>
-        </p:txBody>
-      </p:sp>
-      <p:sp>
-        <p:nvSpPr>
-          <p:cNvPr id="18" name="Shape 16"/>
-          <p:cNvSpPr/>
-          <p:nvPr/>
-        </p:nvSpPr>
-        <p:spPr>
-          <a:xfrm>
-            <a:off x="566928" y="3456432"/>
-            <a:ext cx="8010144" cy="1097280"/>
-          </a:xfrm>
-          <a:prstGeom prst="rect">
-            <a:avLst/>
-          </a:prstGeom>
-          <a:solidFill>
-            <a:srgbClr val="EEF0FB"/>
-          </a:solidFill>
-          <a:ln/>
-        </p:spPr>
-      </p:sp>
-      <p:sp>
-        <p:nvSpPr>
-          <p:cNvPr id="19" name="Shape 17"/>
-          <p:cNvSpPr/>
-          <p:nvPr/>
-        </p:nvSpPr>
-        <p:spPr>
-          <a:xfrm>
-            <a:off x="566928" y="3456432"/>
-            <a:ext cx="41148" cy="1097280"/>
-          </a:xfrm>
-          <a:prstGeom prst="rect">
-            <a:avLst/>
-          </a:prstGeom>
-          <a:solidFill>
-            <a:srgbClr val="9A6310"/>
-          </a:solidFill>
-          <a:ln/>
-        </p:spPr>
-      </p:sp>
-      <p:sp>
-        <p:nvSpPr>
-          <p:cNvPr id="20" name="Text 18"/>
-          <p:cNvSpPr/>
-          <p:nvPr/>
-        </p:nvSpPr>
-        <p:spPr>
-          <a:xfrm>
-            <a:off x="804672" y="3602736"/>
-            <a:ext cx="7607808" cy="242062"/>
-          </a:xfrm>
-          <a:prstGeom prst="rect">
-            <a:avLst/>
-          </a:prstGeom>
-          <a:noFill/>
-          <a:ln/>
-        </p:spPr>
-        <p:txBody>
-          <a:bodyPr wrap="square" lIns="0" tIns="0" rIns="0" bIns="0" rtlCol="0" anchor="t"/>
-          <a:lstStyle/>
-          <a:p>
-            <a:pPr indent="0" marL="0">
-              <a:buNone/>
-            </a:pPr>
-            <a:r>
-              <a:rPr lang="en-US" sz="1300" b="1" dirty="0">
-                <a:solidFill>
-                  <a:srgbClr val="272E52"/>
-                </a:solidFill>
-                <a:latin typeface="Arial" pitchFamily="34" charset="0"/>
-                <a:ea typeface="Arial" pitchFamily="34" charset="-122"/>
-                <a:cs typeface="Arial" pitchFamily="34" charset="-120"/>
-              </a:rPr>
-              <a:t>Jetzt öffnen, alles braucht ihr gleich im Raum</a:t>
-            </a:r>
-            <a:endParaRPr lang="en-US" sz="1300" dirty="0"/>
-          </a:p>
-        </p:txBody>
-      </p:sp>
-      <p:sp>
-        <p:nvSpPr>
-          <p:cNvPr id="21" name="Text 19"/>
-          <p:cNvSpPr/>
-          <p:nvPr/>
-        </p:nvSpPr>
-        <p:spPr>
-          <a:xfrm>
-            <a:off x="804672" y="3890518"/>
-            <a:ext cx="7607808" cy="544322"/>
-          </a:xfrm>
-          <a:prstGeom prst="rect">
-            <a:avLst/>
-          </a:prstGeom>
-          <a:noFill/>
-          <a:ln/>
-        </p:spPr>
-        <p:txBody>
-          <a:bodyPr wrap="square" lIns="0" tIns="0" rIns="0" bIns="0" rtlCol="0" anchor="t"/>
-          <a:lstStyle/>
-          <a:p>
-            <a:pPr indent="0" marL="0">
-              <a:lnSpc>
-                <a:spcPct val="92000"/>
-              </a:lnSpc>
-              <a:spcAft>
-                <a:spcPts val="500"/>
-              </a:spcAft>
-              <a:buNone/>
-            </a:pPr>
-            <a:r>
-              <a:rPr lang="en-US" sz="1000" dirty="0">
-                <a:solidFill>
-                  <a:srgbClr val="434A63"/>
-                </a:solidFill>
-                <a:latin typeface="Arial" pitchFamily="34" charset="0"/>
-                <a:ea typeface="Arial" pitchFamily="34" charset="-122"/>
-                <a:cs typeface="Arial" pitchFamily="34" charset="-120"/>
-              </a:rPr>
-              <a:t>Übung samt Mitschnitt:  jacobmenge.github.io/kurs-unterlagen/industrie-iot/praxis-paket-detektiv/</a:t>
-            </a:r>
-            <a:endParaRPr lang="en-US" sz="1000" dirty="0"/>
-          </a:p>
-          <a:p>
-            <a:pPr indent="0" marL="0">
-              <a:lnSpc>
-                <a:spcPct val="92000"/>
-              </a:lnSpc>
-              <a:spcAft>
-                <a:spcPts val="500"/>
-              </a:spcAft>
-              <a:buNone/>
-            </a:pPr>
-            <a:r>
-              <a:rPr lang="en-US" sz="1000" dirty="0">
-                <a:solidFill>
-                  <a:srgbClr val="434A63"/>
-                </a:solidFill>
-                <a:latin typeface="Arial" pitchFamily="34" charset="0"/>
-                <a:ea typeface="Arial" pitchFamily="34" charset="-122"/>
-                <a:cs typeface="Arial" pitchFamily="34" charset="-120"/>
-              </a:rPr>
-              <a:t>Wenn es klemmt:  jacobmenge.github.io/kurs-unterlagen/industrie-iot/stolpersteine/</a:t>
-            </a:r>
-            <a:endParaRPr lang="en-US" sz="1000" dirty="0"/>
-          </a:p>
-          <a:p>
-            <a:pPr indent="0" marL="0">
-              <a:lnSpc>
-                <a:spcPct val="92000"/>
-              </a:lnSpc>
-              <a:spcAft>
-                <a:spcPts val="500"/>
-              </a:spcAft>
-              <a:buNone/>
-            </a:pPr>
-            <a:r>
-              <a:rPr lang="en-US" sz="1000" dirty="0">
-                <a:solidFill>
-                  <a:srgbClr val="434A63"/>
-                </a:solidFill>
-                <a:latin typeface="Arial" pitchFamily="34" charset="0"/>
-                <a:ea typeface="Arial" pitchFamily="34" charset="-122"/>
-                <a:cs typeface="Arial" pitchFamily="34" charset="-120"/>
-              </a:rPr>
-              <a:t>Ergebnisse eintragen:  &lt;Link zum Ergebnis-Dokument hier eintragen&gt;</a:t>
-            </a:r>
-            <a:endParaRPr lang="en-US" sz="1000" dirty="0"/>
-          </a:p>
-        </p:txBody>
-      </p:sp>
-      <p:sp>
-        <p:nvSpPr>
-          <p:cNvPr id="22" name="Shape 20"/>
+              <a:t>Zwei Terminal-Fenster nebeneinander: In einem lest ihr mit, im anderen sendet ihr. Im Windows-Terminal teilt Alt+Umschalt+Plus das Fenster.</a:t>
+            </a:r>
+            <a:endParaRPr lang="en-US" sz="1200" dirty="0"/>
+          </a:p>
+        </p:txBody>
+      </p:sp>
+      <p:sp>
+        <p:nvSpPr>
+          <p:cNvPr id="8" name="Shape 5"/>
           <p:cNvSpPr/>
           <p:nvPr/>
         </p:nvSpPr>
@@ -5748,7 +5212,7 @@
       </p:sp>
       <p:sp>
         <p:nvSpPr>
-          <p:cNvPr id="23" name="Text 21"/>
+          <p:cNvPr id="9" name="Text 6"/>
           <p:cNvSpPr/>
           <p:nvPr/>
         </p:nvSpPr>
@@ -5779,7 +5243,7 @@
                 <a:ea typeface="Arial" pitchFamily="34" charset="-122"/>
                 <a:cs typeface="Arial" pitchFamily="34" charset="-120"/>
               </a:rPr>
-              <a:t>Breakout</a:t>
+              <a:t>Die Werkzeuge</a:t>
             </a:r>
             <a:endParaRPr lang="en-US" sz="1050" dirty="0"/>
           </a:p>
@@ -5787,7 +5251,7 @@
       </p:sp>
       <p:sp>
         <p:nvSpPr>
-          <p:cNvPr id="24" name="Text 22"/>
+          <p:cNvPr id="10" name="Text 7"/>
           <p:cNvSpPr/>
           <p:nvPr/>
         </p:nvSpPr>
@@ -5818,7 +5282,7 @@
                 <a:ea typeface="Arial" pitchFamily="34" charset="-122"/>
                 <a:cs typeface="Arial" pitchFamily="34" charset="-120"/>
               </a:rPr>
-              <a:t>13/18</a:t>
+              <a:t>13/20</a:t>
             </a:r>
             <a:endParaRPr lang="en-US" sz="1050" dirty="0"/>
           </a:p>
@@ -5864,8 +5328,28 @@
         </p:nvSpPr>
         <p:spPr>
           <a:xfrm>
-            <a:off x="566928" y="201168"/>
-            <a:ext cx="475488" cy="50292"/>
+            <a:off x="6355080" y="0"/>
+            <a:ext cx="2788920" cy="5143500"/>
+          </a:xfrm>
+          <a:prstGeom prst="rect">
+            <a:avLst/>
+          </a:prstGeom>
+          <a:solidFill>
+            <a:srgbClr val="FBF2E3"/>
+          </a:solidFill>
+          <a:ln/>
+        </p:spPr>
+      </p:sp>
+      <p:sp>
+        <p:nvSpPr>
+          <p:cNvPr id="3" name="Shape 1"/>
+          <p:cNvSpPr/>
+          <p:nvPr/>
+        </p:nvSpPr>
+        <p:spPr>
+          <a:xfrm>
+            <a:off x="6355080" y="0"/>
+            <a:ext cx="45720" cy="5143500"/>
           </a:xfrm>
           <a:prstGeom prst="rect">
             <a:avLst/>
@@ -5878,14 +5362,14 @@
       </p:sp>
       <p:sp>
         <p:nvSpPr>
-          <p:cNvPr id="3" name="Text 1"/>
-          <p:cNvSpPr/>
-          <p:nvPr/>
-        </p:nvSpPr>
-        <p:spPr>
-          <a:xfrm>
-            <a:off x="566928" y="384048"/>
-            <a:ext cx="8010144" cy="237744"/>
+          <p:cNvPr id="4" name="Text 2"/>
+          <p:cNvSpPr/>
+          <p:nvPr/>
+        </p:nvSpPr>
+        <p:spPr>
+          <a:xfrm>
+            <a:off x="6629400" y="1463040"/>
+            <a:ext cx="2194560" cy="1737360"/>
           </a:xfrm>
           <a:prstGeom prst="rect">
             <a:avLst/>
@@ -5897,11 +5381,11 @@
           <a:bodyPr wrap="square" lIns="0" tIns="0" rIns="0" bIns="0" rtlCol="0" anchor="ctr"/>
           <a:lstStyle/>
           <a:p>
-            <a:pPr indent="0" marL="0">
-              <a:buNone/>
-            </a:pPr>
-            <a:r>
-              <a:rPr lang="en-US" sz="1150" b="1" spc="180" kern="0" dirty="0">
+            <a:pPr algn="ctr" indent="0" marL="0">
+              <a:buNone/>
+            </a:pPr>
+            <a:r>
+              <a:rPr lang="en-US" sz="8400" b="1" dirty="0">
                 <a:solidFill>
                   <a:srgbClr val="9A6310"/>
                 </a:solidFill>
@@ -5909,238 +5393,22 @@
                 <a:ea typeface="Arial" pitchFamily="34" charset="-122"/>
                 <a:cs typeface="Arial" pitchFamily="34" charset="-120"/>
               </a:rPr>
-              <a:t>SPIELREGELN</a:t>
-            </a:r>
-            <a:endParaRPr lang="en-US" sz="1150" dirty="0"/>
-          </a:p>
-        </p:txBody>
-      </p:sp>
-      <p:sp>
-        <p:nvSpPr>
-          <p:cNvPr id="4" name="Text 2"/>
-          <p:cNvSpPr/>
-          <p:nvPr/>
-        </p:nvSpPr>
-        <p:spPr>
-          <a:xfrm>
-            <a:off x="566928" y="731520"/>
-            <a:ext cx="8010144" cy="603504"/>
-          </a:xfrm>
-          <a:prstGeom prst="rect">
-            <a:avLst/>
-          </a:prstGeom>
-          <a:noFill/>
-          <a:ln/>
-        </p:spPr>
-        <p:txBody>
-          <a:bodyPr wrap="square" lIns="0" tIns="0" rIns="0" bIns="0" rtlCol="0" anchor="t"/>
-          <a:lstStyle/>
-          <a:p>
-            <a:pPr indent="0" marL="0">
-              <a:buNone/>
-            </a:pPr>
-            <a:r>
-              <a:rPr lang="en-US" sz="2600" b="1" dirty="0">
-                <a:solidFill>
-                  <a:srgbClr val="272E52"/>
-                </a:solidFill>
-                <a:latin typeface="Arial" pitchFamily="34" charset="0"/>
-                <a:ea typeface="Arial" pitchFamily="34" charset="-122"/>
-                <a:cs typeface="Arial" pitchFamily="34" charset="-120"/>
-              </a:rPr>
-              <a:t>So arbeitet ihr</a:t>
-            </a:r>
-            <a:endParaRPr lang="en-US" sz="2600" dirty="0"/>
-          </a:p>
-        </p:txBody>
-      </p:sp>
-      <p:sp>
-        <p:nvSpPr>
-          <p:cNvPr id="5" name="Text 3"/>
-          <p:cNvSpPr/>
-          <p:nvPr/>
-        </p:nvSpPr>
-        <p:spPr>
-          <a:xfrm>
-            <a:off x="566928" y="1700784"/>
-            <a:ext cx="8010144" cy="1828800"/>
-          </a:xfrm>
-          <a:prstGeom prst="rect">
-            <a:avLst/>
-          </a:prstGeom>
-          <a:noFill/>
-          <a:ln/>
-        </p:spPr>
-        <p:txBody>
-          <a:bodyPr wrap="square" lIns="0" tIns="0" rIns="0" bIns="0" rtlCol="0" anchor="t"/>
-          <a:lstStyle/>
-          <a:p>
-            <a:pPr marL="254000" indent="-254000">
-              <a:lnSpc>
-                <a:spcPct val="100000"/>
-              </a:lnSpc>
-              <a:spcAft>
-                <a:spcPts val="900"/>
-              </a:spcAft>
-              <a:buClr>
-                <a:srgbClr val="0F7C86"/>
-              </a:buClr>
-              <a:buSzPct val="100000"/>
-              <a:buChar char="▸"/>
-            </a:pPr>
-            <a:r>
-              <a:rPr lang="en-US" sz="1200" dirty="0">
-                <a:solidFill>
-                  <a:srgbClr val="434A63"/>
-                </a:solidFill>
-                <a:latin typeface="Arial" pitchFamily="34" charset="0"/>
-                <a:ea typeface="Arial" pitchFamily="34" charset="-122"/>
-                <a:cs typeface="Arial" pitchFamily="34" charset="-120"/>
-              </a:rPr>
-              <a:t>Gleiche Gruppen, eine Person teilt den Bildschirm, alle klicken auf dem eigenen Rechner mit.</a:t>
-            </a:r>
-            <a:endParaRPr lang="en-US" sz="1200" dirty="0"/>
-          </a:p>
-          <a:p>
-            <a:pPr marL="254000" indent="-254000">
-              <a:lnSpc>
-                <a:spcPct val="100000"/>
-              </a:lnSpc>
-              <a:spcAft>
-                <a:spcPts val="900"/>
-              </a:spcAft>
-              <a:buClr>
-                <a:srgbClr val="0F7C86"/>
-              </a:buClr>
-              <a:buSzPct val="100000"/>
-              <a:buChar char="▸"/>
-            </a:pPr>
-            <a:r>
-              <a:rPr lang="en-US" sz="1200" dirty="0">
-                <a:solidFill>
-                  <a:srgbClr val="434A63"/>
-                </a:solidFill>
-                <a:latin typeface="Arial" pitchFamily="34" charset="0"/>
-                <a:ea typeface="Arial" pitchFamily="34" charset="-122"/>
-                <a:cs typeface="Arial" pitchFamily="34" charset="-120"/>
-              </a:rPr>
-              <a:t>Die ganze Übung läuft in der Wireshark-Oberfläche und ist damit auf Windows, macOS und Linux identisch.</a:t>
-            </a:r>
-            <a:endParaRPr lang="en-US" sz="1200" dirty="0"/>
-          </a:p>
-          <a:p>
-            <a:pPr marL="254000" indent="-254000">
-              <a:lnSpc>
-                <a:spcPct val="100000"/>
-              </a:lnSpc>
-              <a:spcAft>
-                <a:spcPts val="900"/>
-              </a:spcAft>
-              <a:buClr>
-                <a:srgbClr val="0F7C86"/>
-              </a:buClr>
-              <a:buSzPct val="100000"/>
-              <a:buChar char="▸"/>
-            </a:pPr>
-            <a:r>
-              <a:rPr lang="en-US" sz="1200" dirty="0">
-                <a:solidFill>
-                  <a:srgbClr val="434A63"/>
-                </a:solidFill>
-                <a:latin typeface="Arial" pitchFamily="34" charset="0"/>
-                <a:ea typeface="Arial" pitchFamily="34" charset="-122"/>
-                <a:cs typeface="Arial" pitchFamily="34" charset="-120"/>
-              </a:rPr>
-              <a:t>Filterleiste grün heißt gültig, rot heißt Tippfehler. Alle Filter stehen in der Anleitung.</a:t>
-            </a:r>
-            <a:endParaRPr lang="en-US" sz="1200" dirty="0"/>
-          </a:p>
-          <a:p>
-            <a:pPr marL="254000" indent="-254000">
-              <a:lnSpc>
-                <a:spcPct val="100000"/>
-              </a:lnSpc>
-              <a:spcAft>
-                <a:spcPts val="900"/>
-              </a:spcAft>
-              <a:buClr>
-                <a:srgbClr val="0F7C86"/>
-              </a:buClr>
-              <a:buSzPct val="100000"/>
-              <a:buChar char="▸"/>
-            </a:pPr>
-            <a:r>
-              <a:rPr lang="en-US" sz="1200" dirty="0">
-                <a:solidFill>
-                  <a:srgbClr val="434A63"/>
-                </a:solidFill>
-                <a:latin typeface="Arial" pitchFamily="34" charset="0"/>
-                <a:ea typeface="Arial" pitchFamily="34" charset="-122"/>
-                <a:cs typeface="Arial" pitchFamily="34" charset="-120"/>
-              </a:rPr>
-              <a:t>Wer ohne Wireshark dasteht: im Duo mitarbeiten, die Installation läuft nebenher weiter.</a:t>
-            </a:r>
-            <a:endParaRPr lang="en-US" sz="1200" dirty="0"/>
-          </a:p>
-          <a:p>
-            <a:pPr marL="254000" indent="-254000">
-              <a:lnSpc>
-                <a:spcPct val="100000"/>
-              </a:lnSpc>
-              <a:spcAft>
-                <a:spcPts val="900"/>
-              </a:spcAft>
-              <a:buClr>
-                <a:srgbClr val="0F7C86"/>
-              </a:buClr>
-              <a:buSzPct val="100000"/>
-              <a:buChar char="▸"/>
-            </a:pPr>
-            <a:r>
-              <a:rPr lang="en-US" sz="1200" dirty="0">
-                <a:solidFill>
-                  <a:srgbClr val="434A63"/>
-                </a:solidFill>
-                <a:latin typeface="Arial" pitchFamily="34" charset="0"/>
-                <a:ea typeface="Arial" pitchFamily="34" charset="-122"/>
-                <a:cs typeface="Arial" pitchFamily="34" charset="-120"/>
-              </a:rPr>
-              <a:t>Wenn es klemmt: erst die Stolpersteine-Seite, dann um Hilfe bitten.</a:t>
-            </a:r>
-            <a:endParaRPr lang="en-US" sz="1200" dirty="0"/>
-          </a:p>
-        </p:txBody>
-      </p:sp>
-      <p:sp>
-        <p:nvSpPr>
-          <p:cNvPr id="6" name="Shape 4"/>
-          <p:cNvSpPr/>
-          <p:nvPr/>
-        </p:nvSpPr>
-        <p:spPr>
-          <a:xfrm>
-            <a:off x="566928" y="3639312"/>
-            <a:ext cx="8010144" cy="822960"/>
-          </a:xfrm>
-          <a:prstGeom prst="rect">
-            <a:avLst/>
-          </a:prstGeom>
-          <a:solidFill>
-            <a:srgbClr val="F5F6FC"/>
-          </a:solidFill>
-          <a:ln/>
-        </p:spPr>
-      </p:sp>
-      <p:sp>
-        <p:nvSpPr>
-          <p:cNvPr id="7" name="Shape 5"/>
-          <p:cNvSpPr/>
-          <p:nvPr/>
-        </p:nvSpPr>
-        <p:spPr>
-          <a:xfrm>
-            <a:off x="566928" y="3639312"/>
-            <a:ext cx="41148" cy="822960"/>
+              <a:t>03</a:t>
+            </a:r>
+            <a:endParaRPr lang="en-US" sz="8400" dirty="0"/>
+          </a:p>
+        </p:txBody>
+      </p:sp>
+      <p:sp>
+        <p:nvSpPr>
+          <p:cNvPr id="5" name="Shape 3"/>
+          <p:cNvSpPr/>
+          <p:nvPr/>
+        </p:nvSpPr>
+        <p:spPr>
+          <a:xfrm>
+            <a:off x="566928" y="1883664"/>
+            <a:ext cx="475488" cy="50292"/>
           </a:xfrm>
           <a:prstGeom prst="rect">
             <a:avLst/>
@@ -6153,14 +5421,14 @@
       </p:sp>
       <p:sp>
         <p:nvSpPr>
-          <p:cNvPr id="8" name="Text 6"/>
-          <p:cNvSpPr/>
-          <p:nvPr/>
-        </p:nvSpPr>
-        <p:spPr>
-          <a:xfrm>
-            <a:off x="804672" y="3785616"/>
-            <a:ext cx="7607808" cy="242062"/>
+          <p:cNvPr id="6" name="Text 4"/>
+          <p:cNvSpPr/>
+          <p:nvPr/>
+        </p:nvSpPr>
+        <p:spPr>
+          <a:xfrm>
+            <a:off x="566928" y="2084832"/>
+            <a:ext cx="5394960" cy="868680"/>
           </a:xfrm>
           <a:prstGeom prst="rect">
             <a:avLst/>
@@ -6176,7 +5444,7 @@
               <a:buNone/>
             </a:pPr>
             <a:r>
-              <a:rPr lang="en-US" sz="1300" b="1" dirty="0">
+              <a:rPr lang="en-US" sz="3000" b="1" dirty="0">
                 <a:solidFill>
                   <a:srgbClr val="272E52"/>
                 </a:solidFill>
@@ -6184,22 +5452,22 @@
                 <a:ea typeface="Arial" pitchFamily="34" charset="-122"/>
                 <a:cs typeface="Arial" pitchFamily="34" charset="-120"/>
               </a:rPr>
-              <a:t>Um 20:10 sind alle wieder hier</a:t>
-            </a:r>
-            <a:endParaRPr lang="en-US" sz="1300" dirty="0"/>
-          </a:p>
-        </p:txBody>
-      </p:sp>
-      <p:sp>
-        <p:nvSpPr>
-          <p:cNvPr id="9" name="Text 7"/>
-          <p:cNvSpPr/>
-          <p:nvPr/>
-        </p:nvSpPr>
-        <p:spPr>
-          <a:xfrm>
-            <a:off x="804672" y="4073398"/>
-            <a:ext cx="7607808" cy="270002"/>
+              <a:t>Praxiszeit</a:t>
+            </a:r>
+            <a:endParaRPr lang="en-US" sz="3000" dirty="0"/>
+          </a:p>
+        </p:txBody>
+      </p:sp>
+      <p:sp>
+        <p:nvSpPr>
+          <p:cNvPr id="7" name="Text 5"/>
+          <p:cNvSpPr/>
+          <p:nvPr/>
+        </p:nvSpPr>
+        <p:spPr>
+          <a:xfrm>
+            <a:off x="566928" y="3017520"/>
+            <a:ext cx="5394960" cy="548640"/>
           </a:xfrm>
           <a:prstGeom prst="rect">
             <a:avLst/>
@@ -6212,75 +5480,10 @@
           <a:lstStyle/>
           <a:p>
             <a:pPr indent="0" marL="0">
-              <a:lnSpc>
-                <a:spcPct val="92000"/>
-              </a:lnSpc>
-              <a:buNone/>
-            </a:pPr>
-            <a:r>
-              <a:rPr lang="en-US" sz="1150" dirty="0">
-                <a:solidFill>
-                  <a:srgbClr val="434A63"/>
-                </a:solidFill>
-                <a:latin typeface="Arial" pitchFamily="34" charset="0"/>
-                <a:ea typeface="Arial" pitchFamily="34" charset="-122"/>
-                <a:cs typeface="Arial" pitchFamily="34" charset="-120"/>
-              </a:rPr>
-              <a:t>Jede Gruppe bringt einen Fund mit und ihren Sicherheits-Satz zur Klartext-Frage.</a:t>
-            </a:r>
-            <a:endParaRPr lang="en-US" sz="1150" dirty="0"/>
-          </a:p>
-        </p:txBody>
-      </p:sp>
-      <p:sp>
-        <p:nvSpPr>
-          <p:cNvPr id="10" name="Shape 8"/>
-          <p:cNvSpPr/>
-          <p:nvPr/>
-        </p:nvSpPr>
-        <p:spPr>
-          <a:xfrm>
-            <a:off x="566928" y="4631436"/>
-            <a:ext cx="8010144" cy="0"/>
-          </a:xfrm>
-          <a:prstGeom prst="line">
-            <a:avLst/>
-          </a:prstGeom>
-          <a:noFill/>
-          <a:ln w="9525">
-            <a:solidFill>
-              <a:srgbClr val="DFE3F0"/>
-            </a:solidFill>
-            <a:prstDash val="solid"/>
-          </a:ln>
-        </p:spPr>
-      </p:sp>
-      <p:sp>
-        <p:nvSpPr>
-          <p:cNvPr id="11" name="Text 9"/>
-          <p:cNvSpPr/>
-          <p:nvPr/>
-        </p:nvSpPr>
-        <p:spPr>
-          <a:xfrm>
-            <a:off x="566928" y="4722876"/>
-            <a:ext cx="5029200" cy="237744"/>
-          </a:xfrm>
-          <a:prstGeom prst="rect">
-            <a:avLst/>
-          </a:prstGeom>
-          <a:noFill/>
-          <a:ln/>
-        </p:spPr>
-        <p:txBody>
-          <a:bodyPr wrap="square" lIns="0" tIns="0" rIns="0" bIns="0" rtlCol="0" anchor="ctr"/>
-          <a:lstStyle/>
-          <a:p>
-            <a:pPr indent="0" marL="0">
-              <a:buNone/>
-            </a:pPr>
-            <a:r>
-              <a:rPr lang="en-US" sz="1050" spc="30" kern="0" dirty="0">
+              <a:buNone/>
+            </a:pPr>
+            <a:r>
+              <a:rPr lang="en-US" sz="1350" dirty="0">
                 <a:solidFill>
                   <a:srgbClr val="5C6377"/>
                 </a:solidFill>
@@ -6288,48 +5491,9 @@
                 <a:ea typeface="Arial" pitchFamily="34" charset="-122"/>
                 <a:cs typeface="Arial" pitchFamily="34" charset="-120"/>
               </a:rPr>
-              <a:t>Breakout</a:t>
-            </a:r>
-            <a:endParaRPr lang="en-US" sz="1050" dirty="0"/>
-          </a:p>
-        </p:txBody>
-      </p:sp>
-      <p:sp>
-        <p:nvSpPr>
-          <p:cNvPr id="12" name="Text 10"/>
-          <p:cNvSpPr/>
-          <p:nvPr/>
-        </p:nvSpPr>
-        <p:spPr>
-          <a:xfrm>
-            <a:off x="8028432" y="4722876"/>
-            <a:ext cx="548640" cy="237744"/>
-          </a:xfrm>
-          <a:prstGeom prst="rect">
-            <a:avLst/>
-          </a:prstGeom>
-          <a:noFill/>
-          <a:ln/>
-        </p:spPr>
-        <p:txBody>
-          <a:bodyPr wrap="square" lIns="0" tIns="0" rIns="0" bIns="0" rtlCol="0" anchor="ctr"/>
-          <a:lstStyle/>
-          <a:p>
-            <a:pPr algn="r" indent="0" marL="0">
-              <a:buNone/>
-            </a:pPr>
-            <a:r>
-              <a:rPr lang="en-US" sz="1050" dirty="0">
-                <a:solidFill>
-                  <a:srgbClr val="5C6377"/>
-                </a:solidFill>
-                <a:latin typeface="Arial" pitchFamily="34" charset="0"/>
-                <a:ea typeface="Arial" pitchFamily="34" charset="-122"/>
-                <a:cs typeface="Arial" pitchFamily="34" charset="-120"/>
-              </a:rPr>
-              <a:t>14/18</a:t>
-            </a:r>
-            <a:endParaRPr lang="en-US" sz="1050" dirty="0"/>
+              <a:t>75 Minuten in festen Gruppen, drei Stationen</a:t>
+            </a:r>
+            <a:endParaRPr lang="en-US" sz="1350" dirty="0"/>
           </a:p>
         </p:txBody>
       </p:sp>
@@ -6380,7 +5544,7 @@
             <a:avLst/>
           </a:prstGeom>
           <a:solidFill>
-            <a:srgbClr val="0F7C86"/>
+            <a:srgbClr val="9A6310"/>
           </a:solidFill>
           <a:ln/>
         </p:spPr>
@@ -6412,13 +5576,13 @@
             <a:r>
               <a:rPr lang="en-US" sz="1150" b="1" spc="180" kern="0" dirty="0">
                 <a:solidFill>
-                  <a:srgbClr val="0F7C86"/>
-                </a:solidFill>
-                <a:latin typeface="Arial" pitchFamily="34" charset="0"/>
-                <a:ea typeface="Arial" pitchFamily="34" charset="-122"/>
-                <a:cs typeface="Arial" pitchFamily="34" charset="-120"/>
-              </a:rPr>
-              <a:t>AUSWERTUNG · 30 MINUTEN</a:t>
+                  <a:srgbClr val="9A6310"/>
+                </a:solidFill>
+                <a:latin typeface="Arial" pitchFamily="34" charset="0"/>
+                <a:ea typeface="Arial" pitchFamily="34" charset="-122"/>
+                <a:cs typeface="Arial" pitchFamily="34" charset="-120"/>
+              </a:rPr>
+              <a:t>BREAKOUT · 19:20 BIS 20:35</a:t>
             </a:r>
             <a:endParaRPr lang="en-US" sz="1150" dirty="0"/>
           </a:p>
@@ -6457,7 +5621,7 @@
                 <a:ea typeface="Arial" pitchFamily="34" charset="-122"/>
                 <a:cs typeface="Arial" pitchFamily="34" charset="-120"/>
               </a:rPr>
-              <a:t>Eure Funde</a:t>
+              <a:t>So läuft die Praxiszeit</a:t>
             </a:r>
             <a:endParaRPr lang="en-US" sz="2600" dirty="0"/>
           </a:p>
@@ -6471,8 +5635,8 @@
         </p:nvSpPr>
         <p:spPr>
           <a:xfrm>
-            <a:off x="438912" y="1810512"/>
-            <a:ext cx="8266176" cy="365760"/>
+            <a:off x="438912" y="1737360"/>
+            <a:ext cx="8266176" cy="384048"/>
           </a:xfrm>
           <a:prstGeom prst="rect">
             <a:avLst/>
@@ -6491,8 +5655,8 @@
         </p:nvSpPr>
         <p:spPr>
           <a:xfrm>
-            <a:off x="566928" y="1810512"/>
-            <a:ext cx="548640" cy="365760"/>
+            <a:off x="566928" y="1737360"/>
+            <a:ext cx="1097280" cy="384048"/>
           </a:xfrm>
           <a:prstGeom prst="rect">
             <a:avLst/>
@@ -6508,17 +5672,17 @@
               <a:buNone/>
             </a:pPr>
             <a:r>
-              <a:rPr lang="en-US" sz="1200" b="1" dirty="0">
-                <a:solidFill>
-                  <a:srgbClr val="0F7C86"/>
+              <a:rPr lang="en-US" sz="1100" b="1" dirty="0">
+                <a:solidFill>
+                  <a:srgbClr val="9A6310"/>
                 </a:solidFill>
                 <a:latin typeface="Courier New" pitchFamily="34" charset="0"/>
                 <a:ea typeface="Courier New" pitchFamily="34" charset="-122"/>
                 <a:cs typeface="Courier New" pitchFamily="34" charset="-120"/>
               </a:rPr>
-              <a:t>1</a:t>
-            </a:r>
-            <a:endParaRPr lang="en-US" sz="1200" dirty="0"/>
+              <a:t>Station 1</a:t>
+            </a:r>
+            <a:endParaRPr lang="en-US" sz="1100" dirty="0"/>
           </a:p>
         </p:txBody>
       </p:sp>
@@ -6530,8 +5694,8 @@
         </p:nvSpPr>
         <p:spPr>
           <a:xfrm>
-            <a:off x="1115568" y="1810512"/>
-            <a:ext cx="7461504" cy="365760"/>
+            <a:off x="1664208" y="1737360"/>
+            <a:ext cx="6912864" cy="384048"/>
           </a:xfrm>
           <a:prstGeom prst="rect">
             <a:avLst/>
@@ -6547,7 +5711,7 @@
               <a:buNone/>
             </a:pPr>
             <a:r>
-              <a:rPr lang="en-US" sz="1200" dirty="0">
+              <a:rPr lang="en-US" sz="1100" dirty="0">
                 <a:solidFill>
                   <a:srgbClr val="434A63"/>
                 </a:solidFill>
@@ -6555,9 +5719,9 @@
                 <a:ea typeface="Arial" pitchFamily="34" charset="-122"/>
                 <a:cs typeface="Arial" pitchFamily="34" charset="-120"/>
               </a:rPr>
-              <a:t>Der Protokoll-Zensus: Was steckt im Mitschnitt und was stellt die meisten Pakete?</a:t>
-            </a:r>
-            <a:endParaRPr lang="en-US" sz="1200" dirty="0"/>
+              <a:t>Wireshark einrichten: jede Person installiert selbst, die Gruppe hilft sich · 15 Min.</a:t>
+            </a:r>
+            <a:endParaRPr lang="en-US" sz="1100" dirty="0"/>
           </a:p>
         </p:txBody>
       </p:sp>
@@ -6569,8 +5733,8 @@
         </p:nvSpPr>
         <p:spPr>
           <a:xfrm>
-            <a:off x="566928" y="2176272"/>
-            <a:ext cx="548640" cy="365760"/>
+            <a:off x="566928" y="2121408"/>
+            <a:ext cx="1097280" cy="384048"/>
           </a:xfrm>
           <a:prstGeom prst="rect">
             <a:avLst/>
@@ -6586,17 +5750,17 @@
               <a:buNone/>
             </a:pPr>
             <a:r>
-              <a:rPr lang="en-US" sz="1200" b="1" dirty="0">
-                <a:solidFill>
-                  <a:srgbClr val="0F7C86"/>
+              <a:rPr lang="en-US" sz="1100" b="1" dirty="0">
+                <a:solidFill>
+                  <a:srgbClr val="9A6310"/>
                 </a:solidFill>
                 <a:latin typeface="Courier New" pitchFamily="34" charset="0"/>
                 <a:ea typeface="Courier New" pitchFamily="34" charset="-122"/>
                 <a:cs typeface="Courier New" pitchFamily="34" charset="-120"/>
               </a:rPr>
-              <a:t>2</a:t>
-            </a:r>
-            <a:endParaRPr lang="en-US" sz="1200" dirty="0"/>
+              <a:t>Station 2</a:t>
+            </a:r>
+            <a:endParaRPr lang="en-US" sz="1100" dirty="0"/>
           </a:p>
         </p:txBody>
       </p:sp>
@@ -6608,8 +5772,8 @@
         </p:nvSpPr>
         <p:spPr>
           <a:xfrm>
-            <a:off x="1115568" y="2176272"/>
-            <a:ext cx="7461504" cy="365760"/>
+            <a:off x="1664208" y="2121408"/>
+            <a:ext cx="6912864" cy="384048"/>
           </a:xfrm>
           <a:prstGeom prst="rect">
             <a:avLst/>
@@ -6625,7 +5789,7 @@
               <a:buNone/>
             </a:pPr>
             <a:r>
-              <a:rPr lang="en-US" sz="1200" dirty="0">
+              <a:rPr lang="en-US" sz="1100" dirty="0">
                 <a:solidFill>
                   <a:srgbClr val="434A63"/>
                 </a:solidFill>
@@ -6633,9 +5797,9 @@
                 <a:ea typeface="Arial" pitchFamily="34" charset="-122"/>
                 <a:cs typeface="Arial" pitchFamily="34" charset="-120"/>
               </a:rPr>
-              <a:t>Die Halle stellt sich vor: die drei Gerätenamen und wer der Controller ist</a:t>
-            </a:r>
-            <a:endParaRPr lang="en-US" sz="1200" dirty="0"/>
+              <a:t>Paket-Detektiv: Profinet, MQTT und OPC UA im Mitschnitt der Großbäckerei · 35 Min.</a:t>
+            </a:r>
+            <a:endParaRPr lang="en-US" sz="1100" dirty="0"/>
           </a:p>
         </p:txBody>
       </p:sp>
@@ -6647,8 +5811,8 @@
         </p:nvSpPr>
         <p:spPr>
           <a:xfrm>
-            <a:off x="438912" y="2542032"/>
-            <a:ext cx="8266176" cy="365760"/>
+            <a:off x="438912" y="2505456"/>
+            <a:ext cx="8266176" cy="384048"/>
           </a:xfrm>
           <a:prstGeom prst="rect">
             <a:avLst/>
@@ -6667,8 +5831,8 @@
         </p:nvSpPr>
         <p:spPr>
           <a:xfrm>
-            <a:off x="566928" y="2542032"/>
-            <a:ext cx="548640" cy="365760"/>
+            <a:off x="566928" y="2505456"/>
+            <a:ext cx="1097280" cy="384048"/>
           </a:xfrm>
           <a:prstGeom prst="rect">
             <a:avLst/>
@@ -6684,17 +5848,17 @@
               <a:buNone/>
             </a:pPr>
             <a:r>
-              <a:rPr lang="en-US" sz="1200" b="1" dirty="0">
-                <a:solidFill>
-                  <a:srgbClr val="0F7C86"/>
+              <a:rPr lang="en-US" sz="1100" b="1" dirty="0">
+                <a:solidFill>
+                  <a:srgbClr val="9A6310"/>
                 </a:solidFill>
                 <a:latin typeface="Courier New" pitchFamily="34" charset="0"/>
                 <a:ea typeface="Courier New" pitchFamily="34" charset="-122"/>
                 <a:cs typeface="Courier New" pitchFamily="34" charset="-120"/>
               </a:rPr>
-              <a:t>3</a:t>
-            </a:r>
-            <a:endParaRPr lang="en-US" sz="1200" dirty="0"/>
+              <a:t>Station 3</a:t>
+            </a:r>
+            <a:endParaRPr lang="en-US" sz="1100" dirty="0"/>
           </a:p>
         </p:txBody>
       </p:sp>
@@ -6706,8 +5870,8 @@
         </p:nvSpPr>
         <p:spPr>
           <a:xfrm>
-            <a:off x="1115568" y="2542032"/>
-            <a:ext cx="7461504" cy="365760"/>
+            <a:off x="1664208" y="2505456"/>
+            <a:ext cx="6912864" cy="384048"/>
           </a:xfrm>
           <a:prstGeom prst="rect">
             <a:avLst/>
@@ -6723,7 +5887,7 @@
               <a:buNone/>
             </a:pPr>
             <a:r>
-              <a:rPr lang="en-US" sz="1200" dirty="0">
+              <a:rPr lang="en-US" sz="1100" dirty="0">
                 <a:solidFill>
                   <a:srgbClr val="434A63"/>
                 </a:solidFill>
@@ -6731,77 +5895,123 @@
                 <a:ea typeface="Arial" pitchFamily="34" charset="-122"/>
                 <a:cs typeface="Arial" pitchFamily="34" charset="-120"/>
               </a:rPr>
-              <a:t>Der 32-Millisekunden-Takt: Woran erkennt man Echtzeit im Mitschnitt?</a:t>
-            </a:r>
-            <a:endParaRPr lang="en-US" sz="1200" dirty="0"/>
-          </a:p>
-        </p:txBody>
-      </p:sp>
-      <p:sp>
-        <p:nvSpPr>
-          <p:cNvPr id="13" name="Text 11"/>
-          <p:cNvSpPr/>
-          <p:nvPr/>
-        </p:nvSpPr>
-        <p:spPr>
-          <a:xfrm>
-            <a:off x="566928" y="2907792"/>
-            <a:ext cx="548640" cy="365760"/>
-          </a:xfrm>
-          <a:prstGeom prst="rect">
-            <a:avLst/>
-          </a:prstGeom>
-          <a:noFill/>
-          <a:ln/>
-        </p:spPr>
-        <p:txBody>
-          <a:bodyPr wrap="square" lIns="0" tIns="0" rIns="0" bIns="0" rtlCol="0" anchor="ctr"/>
-          <a:lstStyle/>
-          <a:p>
-            <a:pPr indent="0" marL="0">
-              <a:buNone/>
-            </a:pPr>
-            <a:r>
-              <a:rPr lang="en-US" sz="1200" b="1" dirty="0">
-                <a:solidFill>
-                  <a:srgbClr val="0F7C86"/>
-                </a:solidFill>
-                <a:latin typeface="Courier New" pitchFamily="34" charset="0"/>
-                <a:ea typeface="Courier New" pitchFamily="34" charset="-122"/>
-                <a:cs typeface="Courier New" pitchFamily="34" charset="-120"/>
-              </a:rPr>
-              <a:t>4</a:t>
-            </a:r>
-            <a:endParaRPr lang="en-US" sz="1200" dirty="0"/>
-          </a:p>
-        </p:txBody>
-      </p:sp>
-      <p:sp>
-        <p:nvSpPr>
-          <p:cNvPr id="14" name="Text 12"/>
-          <p:cNvSpPr/>
-          <p:nvPr/>
-        </p:nvSpPr>
-        <p:spPr>
-          <a:xfrm>
-            <a:off x="1115568" y="2907792"/>
-            <a:ext cx="7461504" cy="365760"/>
-          </a:xfrm>
-          <a:prstGeom prst="rect">
-            <a:avLst/>
-          </a:prstGeom>
-          <a:noFill/>
-          <a:ln/>
-        </p:spPr>
-        <p:txBody>
-          <a:bodyPr wrap="square" lIns="0" tIns="0" rIns="0" bIns="0" rtlCol="0" anchor="ctr"/>
-          <a:lstStyle/>
-          <a:p>
-            <a:pPr indent="0" marL="0">
-              <a:buNone/>
-            </a:pPr>
-            <a:r>
-              <a:rPr lang="en-US" sz="1200" dirty="0">
+              <a:t>MQTT im Container: eigener Broker, senden, abonnieren, ein Sensor funkt mit · 25 Min.</a:t>
+            </a:r>
+            <a:endParaRPr lang="en-US" sz="1100" dirty="0"/>
+          </a:p>
+        </p:txBody>
+      </p:sp>
+      <p:sp>
+        <p:nvSpPr>
+          <p:cNvPr id="13" name="Shape 11"/>
+          <p:cNvSpPr/>
+          <p:nvPr/>
+        </p:nvSpPr>
+        <p:spPr>
+          <a:xfrm>
+            <a:off x="566928" y="3017520"/>
+            <a:ext cx="8010144" cy="1426464"/>
+          </a:xfrm>
+          <a:prstGeom prst="rect">
+            <a:avLst/>
+          </a:prstGeom>
+          <a:solidFill>
+            <a:srgbClr val="EEF0FB"/>
+          </a:solidFill>
+          <a:ln/>
+        </p:spPr>
+      </p:sp>
+      <p:sp>
+        <p:nvSpPr>
+          <p:cNvPr id="14" name="Shape 12"/>
+          <p:cNvSpPr/>
+          <p:nvPr/>
+        </p:nvSpPr>
+        <p:spPr>
+          <a:xfrm>
+            <a:off x="566928" y="3017520"/>
+            <a:ext cx="41148" cy="1426464"/>
+          </a:xfrm>
+          <a:prstGeom prst="rect">
+            <a:avLst/>
+          </a:prstGeom>
+          <a:solidFill>
+            <a:srgbClr val="9A6310"/>
+          </a:solidFill>
+          <a:ln/>
+        </p:spPr>
+      </p:sp>
+      <p:sp>
+        <p:nvSpPr>
+          <p:cNvPr id="15" name="Text 13"/>
+          <p:cNvSpPr/>
+          <p:nvPr/>
+        </p:nvSpPr>
+        <p:spPr>
+          <a:xfrm>
+            <a:off x="804672" y="3163824"/>
+            <a:ext cx="7607808" cy="242062"/>
+          </a:xfrm>
+          <a:prstGeom prst="rect">
+            <a:avLst/>
+          </a:prstGeom>
+          <a:noFill/>
+          <a:ln/>
+        </p:spPr>
+        <p:txBody>
+          <a:bodyPr wrap="square" lIns="0" tIns="0" rIns="0" bIns="0" rtlCol="0" anchor="t"/>
+          <a:lstStyle/>
+          <a:p>
+            <a:pPr indent="0" marL="0">
+              <a:buNone/>
+            </a:pPr>
+            <a:r>
+              <a:rPr lang="en-US" sz="1300" b="1" dirty="0">
+                <a:solidFill>
+                  <a:srgbClr val="272E52"/>
+                </a:solidFill>
+                <a:latin typeface="Arial" pitchFamily="34" charset="0"/>
+                <a:ea typeface="Arial" pitchFamily="34" charset="-122"/>
+                <a:cs typeface="Arial" pitchFamily="34" charset="-120"/>
+              </a:rPr>
+              <a:t>Jetzt öffnen, alles steht auf der Kursseite</a:t>
+            </a:r>
+            <a:endParaRPr lang="en-US" sz="1300" dirty="0"/>
+          </a:p>
+        </p:txBody>
+      </p:sp>
+      <p:sp>
+        <p:nvSpPr>
+          <p:cNvPr id="16" name="Text 14"/>
+          <p:cNvSpPr/>
+          <p:nvPr/>
+        </p:nvSpPr>
+        <p:spPr>
+          <a:xfrm>
+            <a:off x="804672" y="3451606"/>
+            <a:ext cx="7607808" cy="873506"/>
+          </a:xfrm>
+          <a:prstGeom prst="rect">
+            <a:avLst/>
+          </a:prstGeom>
+          <a:noFill/>
+          <a:ln/>
+        </p:spPr>
+        <p:txBody>
+          <a:bodyPr wrap="square" lIns="0" tIns="0" rIns="0" bIns="0" rtlCol="0" anchor="t"/>
+          <a:lstStyle/>
+          <a:p>
+            <a:pPr indent="0" marL="0">
+              <a:lnSpc>
+                <a:spcPct val="92000"/>
+              </a:lnSpc>
+              <a:spcAft>
+                <a:spcPts val="500"/>
+              </a:spcAft>
+              <a:buNone/>
+            </a:pPr>
+            <a:r>
+              <a:rPr lang="en-US" sz="1000" dirty="0">
                 <a:solidFill>
                   <a:srgbClr val="434A63"/>
                 </a:solidFill>
@@ -6809,97 +6019,22 @@
                 <a:ea typeface="Arial" pitchFamily="34" charset="-122"/>
                 <a:cs typeface="Arial" pitchFamily="34" charset="-120"/>
               </a:rPr>
-              <a:t>Die Klartext-Frage: Wer kann das MQTT-Topic mitlesen und was hilft dagegen?</a:t>
-            </a:r>
-            <a:endParaRPr lang="en-US" sz="1200" dirty="0"/>
-          </a:p>
-        </p:txBody>
-      </p:sp>
-      <p:sp>
-        <p:nvSpPr>
-          <p:cNvPr id="15" name="Shape 13"/>
-          <p:cNvSpPr/>
-          <p:nvPr/>
-        </p:nvSpPr>
-        <p:spPr>
-          <a:xfrm>
-            <a:off x="438912" y="3273552"/>
-            <a:ext cx="8266176" cy="365760"/>
-          </a:xfrm>
-          <a:prstGeom prst="rect">
-            <a:avLst/>
-          </a:prstGeom>
-          <a:solidFill>
-            <a:srgbClr val="F5F6FC"/>
-          </a:solidFill>
-          <a:ln/>
-        </p:spPr>
-      </p:sp>
-      <p:sp>
-        <p:nvSpPr>
-          <p:cNvPr id="16" name="Text 14"/>
-          <p:cNvSpPr/>
-          <p:nvPr/>
-        </p:nvSpPr>
-        <p:spPr>
-          <a:xfrm>
-            <a:off x="566928" y="3273552"/>
-            <a:ext cx="548640" cy="365760"/>
-          </a:xfrm>
-          <a:prstGeom prst="rect">
-            <a:avLst/>
-          </a:prstGeom>
-          <a:noFill/>
-          <a:ln/>
-        </p:spPr>
-        <p:txBody>
-          <a:bodyPr wrap="square" lIns="0" tIns="0" rIns="0" bIns="0" rtlCol="0" anchor="ctr"/>
-          <a:lstStyle/>
-          <a:p>
-            <a:pPr indent="0" marL="0">
-              <a:buNone/>
-            </a:pPr>
-            <a:r>
-              <a:rPr lang="en-US" sz="1200" b="1" dirty="0">
-                <a:solidFill>
-                  <a:srgbClr val="0F7C86"/>
-                </a:solidFill>
-                <a:latin typeface="Courier New" pitchFamily="34" charset="0"/>
-                <a:ea typeface="Courier New" pitchFamily="34" charset="-122"/>
-                <a:cs typeface="Courier New" pitchFamily="34" charset="-120"/>
-              </a:rPr>
-              <a:t>5</a:t>
-            </a:r>
-            <a:endParaRPr lang="en-US" sz="1200" dirty="0"/>
-          </a:p>
-        </p:txBody>
-      </p:sp>
-      <p:sp>
-        <p:nvSpPr>
-          <p:cNvPr id="17" name="Text 15"/>
-          <p:cNvSpPr/>
-          <p:nvPr/>
-        </p:nvSpPr>
-        <p:spPr>
-          <a:xfrm>
-            <a:off x="1115568" y="3273552"/>
-            <a:ext cx="7461504" cy="365760"/>
-          </a:xfrm>
-          <a:prstGeom prst="rect">
-            <a:avLst/>
-          </a:prstGeom>
-          <a:noFill/>
-          <a:ln/>
-        </p:spPr>
-        <p:txBody>
-          <a:bodyPr wrap="square" lIns="0" tIns="0" rIns="0" bIns="0" rtlCol="0" anchor="ctr"/>
-          <a:lstStyle/>
-          <a:p>
-            <a:pPr indent="0" marL="0">
-              <a:buNone/>
-            </a:pPr>
-            <a:r>
-              <a:rPr lang="en-US" sz="1200" dirty="0">
+              <a:t>Station 1:  jacobmenge.github.io/kurs-unterlagen/industrie-iot/wireshark-installation/</a:t>
+            </a:r>
+            <a:endParaRPr lang="en-US" sz="1000" dirty="0"/>
+          </a:p>
+          <a:p>
+            <a:pPr indent="0" marL="0">
+              <a:lnSpc>
+                <a:spcPct val="92000"/>
+              </a:lnSpc>
+              <a:spcAft>
+                <a:spcPts val="500"/>
+              </a:spcAft>
+              <a:buNone/>
+            </a:pPr>
+            <a:r>
+              <a:rPr lang="en-US" sz="1000" dirty="0">
                 <a:solidFill>
                   <a:srgbClr val="434A63"/>
                 </a:solidFill>
@@ -6907,58 +6042,22 @@
                 <a:ea typeface="Arial" pitchFamily="34" charset="-122"/>
                 <a:cs typeface="Arial" pitchFamily="34" charset="-120"/>
               </a:rPr>
-              <a:t>Bonus-Runde: OPC-UA-Port, der Switch, die Hersteller hinter den MAC-Adressen</a:t>
-            </a:r>
-            <a:endParaRPr lang="en-US" sz="1200" dirty="0"/>
-          </a:p>
-        </p:txBody>
-      </p:sp>
-      <p:sp>
-        <p:nvSpPr>
-          <p:cNvPr id="18" name="Shape 16"/>
-          <p:cNvSpPr/>
-          <p:nvPr/>
-        </p:nvSpPr>
-        <p:spPr>
-          <a:xfrm>
-            <a:off x="566928" y="4069080"/>
-            <a:ext cx="32004" cy="256032"/>
-          </a:xfrm>
-          <a:prstGeom prst="rect">
-            <a:avLst/>
-          </a:prstGeom>
-          <a:solidFill>
-            <a:srgbClr val="0F7C86"/>
-          </a:solidFill>
-          <a:ln/>
-        </p:spPr>
-      </p:sp>
-      <p:sp>
-        <p:nvSpPr>
-          <p:cNvPr id="19" name="Text 17"/>
-          <p:cNvSpPr/>
-          <p:nvPr/>
-        </p:nvSpPr>
-        <p:spPr>
-          <a:xfrm>
-            <a:off x="749808" y="4023360"/>
-            <a:ext cx="7827264" cy="402336"/>
-          </a:xfrm>
-          <a:prstGeom prst="rect">
-            <a:avLst/>
-          </a:prstGeom>
-          <a:noFill/>
-          <a:ln/>
-        </p:spPr>
-        <p:txBody>
-          <a:bodyPr wrap="square" lIns="0" tIns="0" rIns="0" bIns="0" rtlCol="0" anchor="ctr"/>
-          <a:lstStyle/>
-          <a:p>
-            <a:pPr indent="0" marL="0">
-              <a:buNone/>
-            </a:pPr>
-            <a:r>
-              <a:rPr lang="en-US" sz="1200" b="1" dirty="0">
+              <a:t>Station 2:  jacobmenge.github.io/kurs-unterlagen/industrie-iot/praxis-paket-detektiv/</a:t>
+            </a:r>
+            <a:endParaRPr lang="en-US" sz="1000" dirty="0"/>
+          </a:p>
+          <a:p>
+            <a:pPr indent="0" marL="0">
+              <a:lnSpc>
+                <a:spcPct val="92000"/>
+              </a:lnSpc>
+              <a:spcAft>
+                <a:spcPts val="500"/>
+              </a:spcAft>
+              <a:buNone/>
+            </a:pPr>
+            <a:r>
+              <a:rPr lang="en-US" sz="1000" dirty="0">
                 <a:solidFill>
                   <a:srgbClr val="434A63"/>
                 </a:solidFill>
@@ -6966,15 +6065,38 @@
                 <a:ea typeface="Arial" pitchFamily="34" charset="-122"/>
                 <a:cs typeface="Arial" pitchFamily="34" charset="-120"/>
               </a:rPr>
-              <a:t>Frage 4 bleibt bis Montag offen: Dann betreibt ihr den Broker selbst und wir sichern genau das ab.</a:t>
-            </a:r>
-            <a:endParaRPr lang="en-US" sz="1200" dirty="0"/>
-          </a:p>
-        </p:txBody>
-      </p:sp>
-      <p:sp>
-        <p:nvSpPr>
-          <p:cNvPr id="20" name="Shape 18"/>
+              <a:t>Station 3:  jacobmenge.github.io/kurs-unterlagen/industrie-iot/praxis-mqtt-container/</a:t>
+            </a:r>
+            <a:endParaRPr lang="en-US" sz="1000" dirty="0"/>
+          </a:p>
+          <a:p>
+            <a:pPr indent="0" marL="0">
+              <a:lnSpc>
+                <a:spcPct val="92000"/>
+              </a:lnSpc>
+              <a:spcAft>
+                <a:spcPts val="500"/>
+              </a:spcAft>
+              <a:buNone/>
+            </a:pPr>
+            <a:r>
+              <a:rPr lang="en-US" sz="1000" dirty="0">
+                <a:solidFill>
+                  <a:srgbClr val="434A63"/>
+                </a:solidFill>
+                <a:latin typeface="Arial" pitchFamily="34" charset="0"/>
+                <a:ea typeface="Arial" pitchFamily="34" charset="-122"/>
+                <a:cs typeface="Arial" pitchFamily="34" charset="-120"/>
+              </a:rPr>
+              <a:t>Wenn es klemmt:  jacobmenge.github.io/kurs-unterlagen/industrie-iot/stolpersteine/</a:t>
+            </a:r>
+            <a:endParaRPr lang="en-US" sz="1000" dirty="0"/>
+          </a:p>
+        </p:txBody>
+      </p:sp>
+      <p:sp>
+        <p:nvSpPr>
+          <p:cNvPr id="17" name="Shape 15"/>
           <p:cNvSpPr/>
           <p:nvPr/>
         </p:nvSpPr>
@@ -6997,7 +6119,7 @@
       </p:sp>
       <p:sp>
         <p:nvSpPr>
-          <p:cNvPr id="21" name="Text 19"/>
+          <p:cNvPr id="18" name="Text 16"/>
           <p:cNvSpPr/>
           <p:nvPr/>
         </p:nvSpPr>
@@ -7028,7 +6150,7 @@
                 <a:ea typeface="Arial" pitchFamily="34" charset="-122"/>
                 <a:cs typeface="Arial" pitchFamily="34" charset="-120"/>
               </a:rPr>
-              <a:t>Auswertung</a:t>
+              <a:t>Praxiszeit</a:t>
             </a:r>
             <a:endParaRPr lang="en-US" sz="1050" dirty="0"/>
           </a:p>
@@ -7036,7 +6158,7 @@
       </p:sp>
       <p:sp>
         <p:nvSpPr>
-          <p:cNvPr id="22" name="Text 20"/>
+          <p:cNvPr id="19" name="Text 17"/>
           <p:cNvSpPr/>
           <p:nvPr/>
         </p:nvSpPr>
@@ -7067,7 +6189,7 @@
                 <a:ea typeface="Arial" pitchFamily="34" charset="-122"/>
                 <a:cs typeface="Arial" pitchFamily="34" charset="-120"/>
               </a:rPr>
-              <a:t>15/18</a:t>
+              <a:t>14/20</a:t>
             </a:r>
             <a:endParaRPr lang="en-US" sz="1050" dirty="0"/>
           </a:p>
@@ -7120,7 +6242,7 @@
             <a:avLst/>
           </a:prstGeom>
           <a:solidFill>
-            <a:srgbClr val="0F7C86"/>
+            <a:srgbClr val="9A6310"/>
           </a:solidFill>
           <a:ln/>
         </p:spPr>
@@ -7152,13 +6274,13 @@
             <a:r>
               <a:rPr lang="en-US" sz="1150" b="1" spc="180" kern="0" dirty="0">
                 <a:solidFill>
-                  <a:srgbClr val="0F7C86"/>
-                </a:solidFill>
-                <a:latin typeface="Arial" pitchFamily="34" charset="0"/>
-                <a:ea typeface="Arial" pitchFamily="34" charset="-122"/>
-                <a:cs typeface="Arial" pitchFamily="34" charset="-120"/>
-              </a:rPr>
-              <a:t>EINORDNUNG FÜR DIE PRÜFUNG</a:t>
+                  <a:srgbClr val="9A6310"/>
+                </a:solidFill>
+                <a:latin typeface="Arial" pitchFamily="34" charset="0"/>
+                <a:ea typeface="Arial" pitchFamily="34" charset="-122"/>
+                <a:cs typeface="Arial" pitchFamily="34" charset="-120"/>
+              </a:rPr>
+              <a:t>IN DER GRUPPE · 15 MINUTEN</a:t>
             </a:r>
             <a:endParaRPr lang="en-US" sz="1150" dirty="0"/>
           </a:p>
@@ -7197,65 +6319,198 @@
                 <a:ea typeface="Arial" pitchFamily="34" charset="-122"/>
                 <a:cs typeface="Arial" pitchFamily="34" charset="-120"/>
               </a:rPr>
-              <a:t>Die Ebenen der Automatisierung</a:t>
+              <a:t>Station 1: Wireshark einrichten</a:t>
             </a:r>
             <a:endParaRPr lang="en-US" sz="2600" dirty="0"/>
           </a:p>
         </p:txBody>
       </p:sp>
-      <p:pic>
-        <p:nvPicPr>
-          <p:cNvPr id="5" name="Image 0" descr="/Users/jacobmenge/Desktop/kurs-26.2b-orga/folienwerkstatt/assets/diagramme/i40-ebenen.png">    </p:cNvPr>
-          <p:cNvPicPr>
-            <a:picLocks noChangeAspect="1"/>
-          </p:cNvPicPr>
-          <p:nvPr/>
-        </p:nvPicPr>
-        <p:blipFill>
-          <a:blip r:embed="rId1"/>
-          <a:stretch>
-            <a:fillRect/>
-          </a:stretch>
-        </p:blipFill>
-        <p:spPr>
-          <a:xfrm>
-            <a:off x="1243584" y="1344168"/>
-            <a:ext cx="6647688" cy="2807208"/>
-          </a:xfrm>
-          <a:prstGeom prst="rect">
-            <a:avLst/>
-          </a:prstGeom>
-        </p:spPr>
-      </p:pic>
-      <p:sp>
-        <p:nvSpPr>
-          <p:cNvPr id="6" name="Shape 3"/>
-          <p:cNvSpPr/>
-          <p:nvPr/>
-        </p:nvSpPr>
-        <p:spPr>
-          <a:xfrm>
-            <a:off x="566928" y="4288536"/>
+      <p:sp>
+        <p:nvSpPr>
+          <p:cNvPr id="5" name="Text 3"/>
+          <p:cNvSpPr/>
+          <p:nvPr/>
+        </p:nvSpPr>
+        <p:spPr>
+          <a:xfrm>
+            <a:off x="566928" y="1737360"/>
+            <a:ext cx="8010144" cy="2103120"/>
+          </a:xfrm>
+          <a:prstGeom prst="rect">
+            <a:avLst/>
+          </a:prstGeom>
+          <a:noFill/>
+          <a:ln/>
+        </p:spPr>
+        <p:txBody>
+          <a:bodyPr wrap="square" lIns="0" tIns="0" rIns="0" bIns="0" rtlCol="0" anchor="t"/>
+          <a:lstStyle/>
+          <a:p>
+            <a:pPr marL="254000" indent="-254000">
+              <a:lnSpc>
+                <a:spcPct val="100000"/>
+              </a:lnSpc>
+              <a:spcAft>
+                <a:spcPts val="900"/>
+              </a:spcAft>
+              <a:buClr>
+                <a:srgbClr val="0F7C86"/>
+              </a:buClr>
+              <a:buSzPct val="100000"/>
+              <a:buChar char="▸"/>
+            </a:pPr>
+            <a:r>
+              <a:rPr lang="en-US" sz="1200" dirty="0">
+                <a:solidFill>
+                  <a:srgbClr val="434A63"/>
+                </a:solidFill>
+                <a:latin typeface="Arial" pitchFamily="34" charset="0"/>
+                <a:ea typeface="Arial" pitchFamily="34" charset="-122"/>
+                <a:cs typeface="Arial" pitchFamily="34" charset="-120"/>
+              </a:rPr>
+              <a:t>Windows: Installer von wireshark.org, durchklicken. Die Npcap-Frage ist heute egal.</a:t>
+            </a:r>
+            <a:endParaRPr lang="en-US" sz="1200" dirty="0"/>
+          </a:p>
+          <a:p>
+            <a:pPr marL="254000" indent="-254000">
+              <a:lnSpc>
+                <a:spcPct val="100000"/>
+              </a:lnSpc>
+              <a:spcAft>
+                <a:spcPts val="900"/>
+              </a:spcAft>
+              <a:buClr>
+                <a:srgbClr val="0F7C86"/>
+              </a:buClr>
+              <a:buSzPct val="100000"/>
+              <a:buChar char="▸"/>
+            </a:pPr>
+            <a:r>
+              <a:rPr lang="en-US" sz="1200" dirty="0">
+                <a:solidFill>
+                  <a:srgbClr val="434A63"/>
+                </a:solidFill>
+                <a:latin typeface="Arial" pitchFamily="34" charset="0"/>
+                <a:ea typeface="Arial" pitchFamily="34" charset="-122"/>
+                <a:cs typeface="Arial" pitchFamily="34" charset="-120"/>
+              </a:rPr>
+              <a:t>macOS: dmg laden, in Programme ziehen. Die ChmodBPF-Frage überspringen.</a:t>
+            </a:r>
+            <a:endParaRPr lang="en-US" sz="1200" dirty="0"/>
+          </a:p>
+          <a:p>
+            <a:pPr marL="254000" indent="-254000">
+              <a:lnSpc>
+                <a:spcPct val="100000"/>
+              </a:lnSpc>
+              <a:spcAft>
+                <a:spcPts val="900"/>
+              </a:spcAft>
+              <a:buClr>
+                <a:srgbClr val="0F7C86"/>
+              </a:buClr>
+              <a:buSzPct val="100000"/>
+              <a:buChar char="▸"/>
+            </a:pPr>
+            <a:r>
+              <a:rPr lang="en-US" sz="1200" dirty="0">
+                <a:solidFill>
+                  <a:srgbClr val="434A63"/>
+                </a:solidFill>
+                <a:latin typeface="Arial" pitchFamily="34" charset="0"/>
+                <a:ea typeface="Arial" pitchFamily="34" charset="-122"/>
+                <a:cs typeface="Arial" pitchFamily="34" charset="-120"/>
+              </a:rPr>
+              <a:t>Linux: wireshark aus der Paketverwaltung.</a:t>
+            </a:r>
+            <a:endParaRPr lang="en-US" sz="1200" dirty="0"/>
+          </a:p>
+          <a:p>
+            <a:pPr marL="254000" indent="-254000">
+              <a:lnSpc>
+                <a:spcPct val="100000"/>
+              </a:lnSpc>
+              <a:spcAft>
+                <a:spcPts val="900"/>
+              </a:spcAft>
+              <a:buClr>
+                <a:srgbClr val="0F7C86"/>
+              </a:buClr>
+              <a:buSzPct val="100000"/>
+              <a:buChar char="▸"/>
+            </a:pPr>
+            <a:r>
+              <a:rPr lang="en-US" sz="1200" dirty="0">
+                <a:solidFill>
+                  <a:srgbClr val="434A63"/>
+                </a:solidFill>
+                <a:latin typeface="Arial" pitchFamily="34" charset="0"/>
+                <a:ea typeface="Arial" pitchFamily="34" charset="-122"/>
+                <a:cs typeface="Arial" pitchFamily="34" charset="-120"/>
+              </a:rPr>
+              <a:t>Test bei allen gleich: Wireshark startet und zeigt seine Startseite.</a:t>
+            </a:r>
+            <a:endParaRPr lang="en-US" sz="1200" dirty="0"/>
+          </a:p>
+          <a:p>
+            <a:pPr marL="254000" indent="-254000">
+              <a:lnSpc>
+                <a:spcPct val="100000"/>
+              </a:lnSpc>
+              <a:spcAft>
+                <a:spcPts val="900"/>
+              </a:spcAft>
+              <a:buClr>
+                <a:srgbClr val="0F7C86"/>
+              </a:buClr>
+              <a:buSzPct val="100000"/>
+              <a:buChar char="▸"/>
+            </a:pPr>
+            <a:r>
+              <a:rPr lang="en-US" sz="1200" dirty="0">
+                <a:solidFill>
+                  <a:srgbClr val="434A63"/>
+                </a:solidFill>
+                <a:latin typeface="Arial" pitchFamily="34" charset="0"/>
+                <a:ea typeface="Arial" pitchFamily="34" charset="-122"/>
+                <a:cs typeface="Arial" pitchFamily="34" charset="-120"/>
+              </a:rPr>
+              <a:t>Wer zuerst fertig ist, hilft den anderen. Klappt es bei jemandem gar nicht: im Duo weiterarbeiten.</a:t>
+            </a:r>
+            <a:endParaRPr lang="en-US" sz="1200" dirty="0"/>
+          </a:p>
+        </p:txBody>
+      </p:sp>
+      <p:sp>
+        <p:nvSpPr>
+          <p:cNvPr id="6" name="Shape 4"/>
+          <p:cNvSpPr/>
+          <p:nvPr/>
+        </p:nvSpPr>
+        <p:spPr>
+          <a:xfrm>
+            <a:off x="566928" y="4114800"/>
             <a:ext cx="32004" cy="256032"/>
           </a:xfrm>
           <a:prstGeom prst="rect">
             <a:avLst/>
           </a:prstGeom>
           <a:solidFill>
-            <a:srgbClr val="0F7C86"/>
+            <a:srgbClr val="9A6310"/>
           </a:solidFill>
           <a:ln/>
         </p:spPr>
       </p:sp>
       <p:sp>
         <p:nvSpPr>
-          <p:cNvPr id="7" name="Text 4"/>
-          <p:cNvSpPr/>
-          <p:nvPr/>
-        </p:nvSpPr>
-        <p:spPr>
-          <a:xfrm>
-            <a:off x="749808" y="4242816"/>
+          <p:cNvPr id="7" name="Text 5"/>
+          <p:cNvSpPr/>
+          <p:nvPr/>
+        </p:nvSpPr>
+        <p:spPr>
+          <a:xfrm>
+            <a:off x="749808" y="4069080"/>
             <a:ext cx="7827264" cy="402336"/>
           </a:xfrm>
           <a:prstGeom prst="rect">
@@ -7280,7 +6535,7 @@
                 <a:ea typeface="Arial" pitchFamily="34" charset="-122"/>
                 <a:cs typeface="Arial" pitchFamily="34" charset="-120"/>
               </a:rPr>
-              <a:t>Die fünf Kürzel und ihre Zuordnung: Genau das fragt die Prüfung.</a:t>
+              <a:t>Die Menüsprache folgt eurem System. Anleitung und Folien nennen deshalb immer beide Namen, etwa Statistiken/Statistics.</a:t>
             </a:r>
             <a:endParaRPr lang="en-US" sz="1200" dirty="0"/>
           </a:p>
@@ -7288,7 +6543,7 @@
       </p:sp>
       <p:sp>
         <p:nvSpPr>
-          <p:cNvPr id="8" name="Shape 5"/>
+          <p:cNvPr id="8" name="Shape 6"/>
           <p:cNvSpPr/>
           <p:nvPr/>
         </p:nvSpPr>
@@ -7311,7 +6566,7 @@
       </p:sp>
       <p:sp>
         <p:nvSpPr>
-          <p:cNvPr id="9" name="Text 6"/>
+          <p:cNvPr id="9" name="Text 7"/>
           <p:cNvSpPr/>
           <p:nvPr/>
         </p:nvSpPr>
@@ -7342,7 +6597,7 @@
                 <a:ea typeface="Arial" pitchFamily="34" charset="-122"/>
                 <a:cs typeface="Arial" pitchFamily="34" charset="-120"/>
               </a:rPr>
-              <a:t>Auswertung</a:t>
+              <a:t>Praxiszeit</a:t>
             </a:r>
             <a:endParaRPr lang="en-US" sz="1050" dirty="0"/>
           </a:p>
@@ -7350,7 +6605,7 @@
       </p:sp>
       <p:sp>
         <p:nvSpPr>
-          <p:cNvPr id="10" name="Text 7"/>
+          <p:cNvPr id="10" name="Text 8"/>
           <p:cNvSpPr/>
           <p:nvPr/>
         </p:nvSpPr>
@@ -7381,7 +6636,7 @@
                 <a:ea typeface="Arial" pitchFamily="34" charset="-122"/>
                 <a:cs typeface="Arial" pitchFamily="34" charset="-120"/>
               </a:rPr>
-              <a:t>16/18</a:t>
+              <a:t>15/20</a:t>
             </a:r>
             <a:endParaRPr lang="en-US" sz="1050" dirty="0"/>
           </a:p>
@@ -7526,7 +6781,7 @@
         <p:spPr>
           <a:xfrm>
             <a:off x="438912" y="1737360"/>
-            <a:ext cx="8266176" cy="228600"/>
+            <a:ext cx="8266176" cy="237744"/>
           </a:xfrm>
           <a:prstGeom prst="rect">
             <a:avLst/>
@@ -7546,7 +6801,7 @@
         <p:spPr>
           <a:xfrm>
             <a:off x="566928" y="1737360"/>
-            <a:ext cx="1005840" cy="228600"/>
+            <a:ext cx="1005840" cy="237744"/>
           </a:xfrm>
           <a:prstGeom prst="rect">
             <a:avLst/>
@@ -7585,7 +6840,7 @@
         <p:spPr>
           <a:xfrm>
             <a:off x="1572768" y="1737360"/>
-            <a:ext cx="7004304" cy="228600"/>
+            <a:ext cx="7004304" cy="237744"/>
           </a:xfrm>
           <a:prstGeom prst="rect">
             <a:avLst/>
@@ -7609,7 +6864,7 @@
                 <a:ea typeface="Arial" pitchFamily="34" charset="-122"/>
                 <a:cs typeface="Arial" pitchFamily="34" charset="-120"/>
               </a:rPr>
-              <a:t>Warmup: Spricht die Presse HTTP?</a:t>
+              <a:t>Warmup: Spricht der Backofen HTTP?</a:t>
             </a:r>
             <a:endParaRPr lang="en-US" sz="1050" dirty="0"/>
           </a:p>
@@ -7623,8 +6878,8 @@
         </p:nvSpPr>
         <p:spPr>
           <a:xfrm>
-            <a:off x="566928" y="1965960"/>
-            <a:ext cx="1005840" cy="228600"/>
+            <a:off x="566928" y="1975104"/>
+            <a:ext cx="1005840" cy="237744"/>
           </a:xfrm>
           <a:prstGeom prst="rect">
             <a:avLst/>
@@ -7662,8 +6917,8 @@
         </p:nvSpPr>
         <p:spPr>
           <a:xfrm>
-            <a:off x="1572768" y="1965960"/>
-            <a:ext cx="7004304" cy="228600"/>
+            <a:off x="1572768" y="1975104"/>
+            <a:ext cx="7004304" cy="237744"/>
           </a:xfrm>
           <a:prstGeom prst="rect">
             <a:avLst/>
@@ -7701,8 +6956,8 @@
         </p:nvSpPr>
         <p:spPr>
           <a:xfrm>
-            <a:off x="438912" y="2194560"/>
-            <a:ext cx="8266176" cy="228600"/>
+            <a:off x="438912" y="2212848"/>
+            <a:ext cx="8266176" cy="237744"/>
           </a:xfrm>
           <a:prstGeom prst="rect">
             <a:avLst/>
@@ -7721,8 +6976,8 @@
         </p:nvSpPr>
         <p:spPr>
           <a:xfrm>
-            <a:off x="566928" y="2194560"/>
-            <a:ext cx="1005840" cy="228600"/>
+            <a:off x="566928" y="2212848"/>
+            <a:ext cx="1005840" cy="237744"/>
           </a:xfrm>
           <a:prstGeom prst="rect">
             <a:avLst/>
@@ -7760,8 +7015,8 @@
         </p:nvSpPr>
         <p:spPr>
           <a:xfrm>
-            <a:off x="1572768" y="2194560"/>
-            <a:ext cx="7004304" cy="228600"/>
+            <a:off x="1572768" y="2212848"/>
+            <a:ext cx="7004304" cy="237744"/>
           </a:xfrm>
           <a:prstGeom prst="rect">
             <a:avLst/>
@@ -7799,8 +7054,8 @@
         </p:nvSpPr>
         <p:spPr>
           <a:xfrm>
-            <a:off x="566928" y="2423160"/>
-            <a:ext cx="1005840" cy="228600"/>
+            <a:off x="566928" y="2450592"/>
+            <a:ext cx="1005840" cy="237744"/>
           </a:xfrm>
           <a:prstGeom prst="rect">
             <a:avLst/>
@@ -7838,8 +7093,8 @@
         </p:nvSpPr>
         <p:spPr>
           <a:xfrm>
-            <a:off x="1572768" y="2423160"/>
-            <a:ext cx="7004304" cy="228600"/>
+            <a:off x="1572768" y="2450592"/>
+            <a:ext cx="7004304" cy="237744"/>
           </a:xfrm>
           <a:prstGeom prst="rect">
             <a:avLst/>
@@ -7877,8 +7132,8 @@
         </p:nvSpPr>
         <p:spPr>
           <a:xfrm>
-            <a:off x="438912" y="2651760"/>
-            <a:ext cx="8266176" cy="228600"/>
+            <a:off x="438912" y="2688336"/>
+            <a:ext cx="8266176" cy="237744"/>
           </a:xfrm>
           <a:prstGeom prst="rect">
             <a:avLst/>
@@ -7897,8 +7152,8 @@
         </p:nvSpPr>
         <p:spPr>
           <a:xfrm>
-            <a:off x="566928" y="2651760"/>
-            <a:ext cx="1005840" cy="228600"/>
+            <a:off x="566928" y="2688336"/>
+            <a:ext cx="1005840" cy="237744"/>
           </a:xfrm>
           <a:prstGeom prst="rect">
             <a:avLst/>
@@ -7922,7 +7177,7 @@
                 <a:ea typeface="Courier New" pitchFamily="34" charset="-122"/>
                 <a:cs typeface="Courier New" pitchFamily="34" charset="-120"/>
               </a:rPr>
-              <a:t>18:45</a:t>
+              <a:t>18:40</a:t>
             </a:r>
             <a:endParaRPr lang="en-US" sz="1050" dirty="0"/>
           </a:p>
@@ -7936,8 +7191,8 @@
         </p:nvSpPr>
         <p:spPr>
           <a:xfrm>
-            <a:off x="1572768" y="2651760"/>
-            <a:ext cx="7004304" cy="228600"/>
+            <a:off x="1572768" y="2688336"/>
+            <a:ext cx="7004304" cy="237744"/>
           </a:xfrm>
           <a:prstGeom prst="rect">
             <a:avLst/>
@@ -7961,7 +7216,7 @@
                 <a:ea typeface="Arial" pitchFamily="34" charset="-122"/>
                 <a:cs typeface="Arial" pitchFamily="34" charset="-120"/>
               </a:rPr>
-              <a:t>Werkzeug Wireshark: einrichten und kennenlernen</a:t>
+              <a:t>Einordnung: Ebenen-Modell und Protokoll-Familien</a:t>
             </a:r>
             <a:endParaRPr lang="en-US" sz="1050" dirty="0"/>
           </a:p>
@@ -7975,8 +7230,8 @@
         </p:nvSpPr>
         <p:spPr>
           <a:xfrm>
-            <a:off x="566928" y="2880360"/>
-            <a:ext cx="1005840" cy="228600"/>
+            <a:off x="566928" y="2926080"/>
+            <a:ext cx="1005840" cy="237744"/>
           </a:xfrm>
           <a:prstGeom prst="rect">
             <a:avLst/>
@@ -8014,8 +7269,8 @@
         </p:nvSpPr>
         <p:spPr>
           <a:xfrm>
-            <a:off x="1572768" y="2880360"/>
-            <a:ext cx="7004304" cy="228600"/>
+            <a:off x="1572768" y="2926080"/>
+            <a:ext cx="7004304" cy="237744"/>
           </a:xfrm>
           <a:prstGeom prst="rect">
             <a:avLst/>
@@ -8039,7 +7294,7 @@
                 <a:ea typeface="Arial" pitchFamily="34" charset="-122"/>
                 <a:cs typeface="Arial" pitchFamily="34" charset="-120"/>
               </a:rPr>
-              <a:t>Pause</a:t>
+              <a:t>Die Werkzeuge: Wireshark live und euer eigener MQTT-Broker</a:t>
             </a:r>
             <a:endParaRPr lang="en-US" sz="1050" dirty="0"/>
           </a:p>
@@ -8053,8 +7308,8 @@
         </p:nvSpPr>
         <p:spPr>
           <a:xfrm>
-            <a:off x="438912" y="3108960"/>
-            <a:ext cx="8266176" cy="228600"/>
+            <a:off x="438912" y="3163824"/>
+            <a:ext cx="8266176" cy="237744"/>
           </a:xfrm>
           <a:prstGeom prst="rect">
             <a:avLst/>
@@ -8073,8 +7328,8 @@
         </p:nvSpPr>
         <p:spPr>
           <a:xfrm>
-            <a:off x="566928" y="3108960"/>
-            <a:ext cx="1005840" cy="228600"/>
+            <a:off x="566928" y="3163824"/>
+            <a:ext cx="1005840" cy="237744"/>
           </a:xfrm>
           <a:prstGeom prst="rect">
             <a:avLst/>
@@ -8098,7 +7353,7 @@
                 <a:ea typeface="Courier New" pitchFamily="34" charset="-122"/>
                 <a:cs typeface="Courier New" pitchFamily="34" charset="-120"/>
               </a:rPr>
-              <a:t>19:05</a:t>
+              <a:t>19:10</a:t>
             </a:r>
             <a:endParaRPr lang="en-US" sz="1050" dirty="0"/>
           </a:p>
@@ -8112,8 +7367,8 @@
         </p:nvSpPr>
         <p:spPr>
           <a:xfrm>
-            <a:off x="1572768" y="3108960"/>
-            <a:ext cx="7004304" cy="228600"/>
+            <a:off x="1572768" y="3163824"/>
+            <a:ext cx="7004304" cy="237744"/>
           </a:xfrm>
           <a:prstGeom prst="rect">
             <a:avLst/>
@@ -8137,7 +7392,7 @@
                 <a:ea typeface="Arial" pitchFamily="34" charset="-122"/>
                 <a:cs typeface="Arial" pitchFamily="34" charset="-120"/>
               </a:rPr>
-              <a:t>Live am geteilten Bildschirm: die vier Handgriffe im Mitschnitt</a:t>
+              <a:t>Pause</a:t>
             </a:r>
             <a:endParaRPr lang="en-US" sz="1050" dirty="0"/>
           </a:p>
@@ -8151,8 +7406,8 @@
         </p:nvSpPr>
         <p:spPr>
           <a:xfrm>
-            <a:off x="566928" y="3337560"/>
-            <a:ext cx="1005840" cy="228600"/>
+            <a:off x="566928" y="3401568"/>
+            <a:ext cx="1005840" cy="237744"/>
           </a:xfrm>
           <a:prstGeom prst="rect">
             <a:avLst/>
@@ -8176,7 +7431,7 @@
                 <a:ea typeface="Courier New" pitchFamily="34" charset="-122"/>
                 <a:cs typeface="Courier New" pitchFamily="34" charset="-120"/>
               </a:rPr>
-              <a:t>19:15</a:t>
+              <a:t>19:20</a:t>
             </a:r>
             <a:endParaRPr lang="en-US" sz="1050" dirty="0"/>
           </a:p>
@@ -8190,8 +7445,8 @@
         </p:nvSpPr>
         <p:spPr>
           <a:xfrm>
-            <a:off x="1572768" y="3337560"/>
-            <a:ext cx="7004304" cy="228600"/>
+            <a:off x="1572768" y="3401568"/>
+            <a:ext cx="7004304" cy="237744"/>
           </a:xfrm>
           <a:prstGeom prst="rect">
             <a:avLst/>
@@ -8215,7 +7470,7 @@
                 <a:ea typeface="Arial" pitchFamily="34" charset="-122"/>
                 <a:cs typeface="Arial" pitchFamily="34" charset="-120"/>
               </a:rPr>
-              <a:t>Briefing für die Breakout-Übung</a:t>
+              <a:t>Praxiszeit in Gruppen: Installation, Paket-Detektiv, MQTT im Container</a:t>
             </a:r>
             <a:endParaRPr lang="en-US" sz="1050" dirty="0"/>
           </a:p>
@@ -8229,8 +7484,8 @@
         </p:nvSpPr>
         <p:spPr>
           <a:xfrm>
-            <a:off x="438912" y="3566160"/>
-            <a:ext cx="8266176" cy="228600"/>
+            <a:off x="438912" y="3639312"/>
+            <a:ext cx="8266176" cy="237744"/>
           </a:xfrm>
           <a:prstGeom prst="rect">
             <a:avLst/>
@@ -8249,8 +7504,8 @@
         </p:nvSpPr>
         <p:spPr>
           <a:xfrm>
-            <a:off x="566928" y="3566160"/>
-            <a:ext cx="1005840" cy="228600"/>
+            <a:off x="566928" y="3639312"/>
+            <a:ext cx="1005840" cy="237744"/>
           </a:xfrm>
           <a:prstGeom prst="rect">
             <a:avLst/>
@@ -8274,7 +7529,7 @@
                 <a:ea typeface="Courier New" pitchFamily="34" charset="-122"/>
                 <a:cs typeface="Courier New" pitchFamily="34" charset="-120"/>
               </a:rPr>
-              <a:t>19:20</a:t>
+              <a:t>20:35</a:t>
             </a:r>
             <a:endParaRPr lang="en-US" sz="1050" dirty="0"/>
           </a:p>
@@ -8288,8 +7543,8 @@
         </p:nvSpPr>
         <p:spPr>
           <a:xfrm>
-            <a:off x="1572768" y="3566160"/>
-            <a:ext cx="7004304" cy="228600"/>
+            <a:off x="1572768" y="3639312"/>
+            <a:ext cx="7004304" cy="237744"/>
           </a:xfrm>
           <a:prstGeom prst="rect">
             <a:avLst/>
@@ -8313,7 +7568,7 @@
                 <a:ea typeface="Arial" pitchFamily="34" charset="-122"/>
                 <a:cs typeface="Arial" pitchFamily="34" charset="-120"/>
               </a:rPr>
-              <a:t>Breakout: Paket-Detektiv in der Halle 1</a:t>
+              <a:t>Gemeinsame Auswertung beider Übungen</a:t>
             </a:r>
             <a:endParaRPr lang="en-US" sz="1050" dirty="0"/>
           </a:p>
@@ -8327,8 +7582,8 @@
         </p:nvSpPr>
         <p:spPr>
           <a:xfrm>
-            <a:off x="566928" y="3794760"/>
-            <a:ext cx="1005840" cy="228600"/>
+            <a:off x="566928" y="3877056"/>
+            <a:ext cx="1005840" cy="237744"/>
           </a:xfrm>
           <a:prstGeom prst="rect">
             <a:avLst/>
@@ -8352,7 +7607,7 @@
                 <a:ea typeface="Courier New" pitchFamily="34" charset="-122"/>
                 <a:cs typeface="Courier New" pitchFamily="34" charset="-120"/>
               </a:rPr>
-              <a:t>20:10</a:t>
+              <a:t>20:55</a:t>
             </a:r>
             <a:endParaRPr lang="en-US" sz="1050" dirty="0"/>
           </a:p>
@@ -8366,8 +7621,8 @@
         </p:nvSpPr>
         <p:spPr>
           <a:xfrm>
-            <a:off x="1572768" y="3794760"/>
-            <a:ext cx="7004304" cy="228600"/>
+            <a:off x="1572768" y="3877056"/>
+            <a:ext cx="7004304" cy="237744"/>
           </a:xfrm>
           <a:prstGeom prst="rect">
             <a:avLst/>
@@ -8391,7 +7646,7 @@
                 <a:ea typeface="Arial" pitchFamily="34" charset="-122"/>
                 <a:cs typeface="Arial" pitchFamily="34" charset="-120"/>
               </a:rPr>
-              <a:t>Auswertung: eure Funde und die Klartext-Frage</a:t>
+              <a:t>Ausblick auf Mittwoch</a:t>
             </a:r>
             <a:endParaRPr lang="en-US" sz="1050" dirty="0"/>
           </a:p>
@@ -8405,105 +7660,7 @@
         </p:nvSpPr>
         <p:spPr>
           <a:xfrm>
-            <a:off x="438912" y="4023360"/>
-            <a:ext cx="8266176" cy="228600"/>
-          </a:xfrm>
-          <a:prstGeom prst="rect">
-            <a:avLst/>
-          </a:prstGeom>
-          <a:solidFill>
-            <a:srgbClr val="F5F6FC"/>
-          </a:solidFill>
-          <a:ln/>
-        </p:spPr>
-      </p:sp>
-      <p:sp>
-        <p:nvSpPr>
-          <p:cNvPr id="31" name="Text 29"/>
-          <p:cNvSpPr/>
-          <p:nvPr/>
-        </p:nvSpPr>
-        <p:spPr>
-          <a:xfrm>
-            <a:off x="566928" y="4023360"/>
-            <a:ext cx="1005840" cy="228600"/>
-          </a:xfrm>
-          <a:prstGeom prst="rect">
-            <a:avLst/>
-          </a:prstGeom>
-          <a:noFill/>
-          <a:ln/>
-        </p:spPr>
-        <p:txBody>
-          <a:bodyPr wrap="square" lIns="0" tIns="0" rIns="0" bIns="0" rtlCol="0" anchor="ctr"/>
-          <a:lstStyle/>
-          <a:p>
-            <a:pPr indent="0" marL="0">
-              <a:buNone/>
-            </a:pPr>
-            <a:r>
-              <a:rPr lang="en-US" sz="1050" b="1" dirty="0">
-                <a:solidFill>
-                  <a:srgbClr val="0F7C86"/>
-                </a:solidFill>
-                <a:latin typeface="Courier New" pitchFamily="34" charset="0"/>
-                <a:ea typeface="Courier New" pitchFamily="34" charset="-122"/>
-                <a:cs typeface="Courier New" pitchFamily="34" charset="-120"/>
-              </a:rPr>
-              <a:t>20:40</a:t>
-            </a:r>
-            <a:endParaRPr lang="en-US" sz="1050" dirty="0"/>
-          </a:p>
-        </p:txBody>
-      </p:sp>
-      <p:sp>
-        <p:nvSpPr>
-          <p:cNvPr id="32" name="Text 30"/>
-          <p:cNvSpPr/>
-          <p:nvPr/>
-        </p:nvSpPr>
-        <p:spPr>
-          <a:xfrm>
-            <a:off x="1572768" y="4023360"/>
-            <a:ext cx="7004304" cy="228600"/>
-          </a:xfrm>
-          <a:prstGeom prst="rect">
-            <a:avLst/>
-          </a:prstGeom>
-          <a:noFill/>
-          <a:ln/>
-        </p:spPr>
-        <p:txBody>
-          <a:bodyPr wrap="square" lIns="0" tIns="0" rIns="0" bIns="0" rtlCol="0" anchor="ctr"/>
-          <a:lstStyle/>
-          <a:p>
-            <a:pPr indent="0" marL="0">
-              <a:buNone/>
-            </a:pPr>
-            <a:r>
-              <a:rPr lang="en-US" sz="1050" dirty="0">
-                <a:solidFill>
-                  <a:srgbClr val="434A63"/>
-                </a:solidFill>
-                <a:latin typeface="Arial" pitchFamily="34" charset="0"/>
-                <a:ea typeface="Arial" pitchFamily="34" charset="-122"/>
-                <a:cs typeface="Arial" pitchFamily="34" charset="-120"/>
-              </a:rPr>
-              <a:t>Ebenen-Modell, Protokoll-Familien und der Ausblick</a:t>
-            </a:r>
-            <a:endParaRPr lang="en-US" sz="1050" dirty="0"/>
-          </a:p>
-        </p:txBody>
-      </p:sp>
-      <p:sp>
-        <p:nvSpPr>
-          <p:cNvPr id="33" name="Shape 31"/>
-          <p:cNvSpPr/>
-          <p:nvPr/>
-        </p:nvSpPr>
-        <p:spPr>
-          <a:xfrm>
-            <a:off x="566928" y="4288536"/>
+            <a:off x="566928" y="4251960"/>
             <a:ext cx="32004" cy="256032"/>
           </a:xfrm>
           <a:prstGeom prst="rect">
@@ -8517,13 +7674,13 @@
       </p:sp>
       <p:sp>
         <p:nvSpPr>
-          <p:cNvPr id="34" name="Text 32"/>
-          <p:cNvSpPr/>
-          <p:nvPr/>
-        </p:nvSpPr>
-        <p:spPr>
-          <a:xfrm>
-            <a:off x="749808" y="4242816"/>
+          <p:cNvPr id="31" name="Text 29"/>
+          <p:cNvSpPr/>
+          <p:nvPr/>
+        </p:nvSpPr>
+        <p:spPr>
+          <a:xfrm>
+            <a:off x="749808" y="4206240"/>
             <a:ext cx="7827264" cy="402336"/>
           </a:xfrm>
           <a:prstGeom prst="rect">
@@ -8548,7 +7705,7 @@
                 <a:ea typeface="Arial" pitchFamily="34" charset="-122"/>
                 <a:cs typeface="Arial" pitchFamily="34" charset="-120"/>
               </a:rPr>
-              <a:t>Neues Kapitel: Nach vier Abenden Docker schauen wir dorthin, wo IT auf Maschinen trifft.</a:t>
+              <a:t>Erst die Theorie am Stück, dann eine lange Praxiszeit in festen Gruppen, zum Schluss besprechen wir alles gemeinsam.</a:t>
             </a:r>
             <a:endParaRPr lang="en-US" sz="1200" dirty="0"/>
           </a:p>
@@ -8556,7 +7713,7 @@
       </p:sp>
       <p:sp>
         <p:nvSpPr>
-          <p:cNvPr id="35" name="Shape 33"/>
+          <p:cNvPr id="32" name="Shape 30"/>
           <p:cNvSpPr/>
           <p:nvPr/>
         </p:nvSpPr>
@@ -8579,7 +7736,7 @@
       </p:sp>
       <p:sp>
         <p:nvSpPr>
-          <p:cNvPr id="36" name="Text 34"/>
+          <p:cNvPr id="33" name="Text 31"/>
           <p:cNvSpPr/>
           <p:nvPr/>
         </p:nvSpPr>
@@ -8618,7 +7775,7 @@
       </p:sp>
       <p:sp>
         <p:nvSpPr>
-          <p:cNvPr id="37" name="Text 35"/>
+          <p:cNvPr id="34" name="Text 32"/>
           <p:cNvSpPr/>
           <p:nvPr/>
         </p:nvSpPr>
@@ -8649,7 +7806,7 @@
                 <a:ea typeface="Arial" pitchFamily="34" charset="-122"/>
                 <a:cs typeface="Arial" pitchFamily="34" charset="-120"/>
               </a:rPr>
-              <a:t>1/18</a:t>
+              <a:t>1/20</a:t>
             </a:r>
             <a:endParaRPr lang="en-US" sz="1050" dirty="0"/>
           </a:p>
@@ -8702,7 +7859,7 @@
             <a:avLst/>
           </a:prstGeom>
           <a:solidFill>
-            <a:srgbClr val="0F7C86"/>
+            <a:srgbClr val="9A6310"/>
           </a:solidFill>
           <a:ln/>
         </p:spPr>
@@ -8734,13 +7891,13 @@
             <a:r>
               <a:rPr lang="en-US" sz="1150" b="1" spc="180" kern="0" dirty="0">
                 <a:solidFill>
-                  <a:srgbClr val="0F7C86"/>
-                </a:solidFill>
-                <a:latin typeface="Arial" pitchFamily="34" charset="0"/>
-                <a:ea typeface="Arial" pitchFamily="34" charset="-122"/>
-                <a:cs typeface="Arial" pitchFamily="34" charset="-120"/>
-              </a:rPr>
-              <a:t>EINORDNUNG FÜR DIE PRÜFUNG</a:t>
+                  <a:srgbClr val="9A6310"/>
+                </a:solidFill>
+                <a:latin typeface="Arial" pitchFamily="34" charset="0"/>
+                <a:ea typeface="Arial" pitchFamily="34" charset="-122"/>
+                <a:cs typeface="Arial" pitchFamily="34" charset="-120"/>
+              </a:rPr>
+              <a:t>PAKET-DETEKTIV · 35 MINUTEN</a:t>
             </a:r>
             <a:endParaRPr lang="en-US" sz="1150" dirty="0"/>
           </a:p>
@@ -8779,7 +7936,7 @@
                 <a:ea typeface="Arial" pitchFamily="34" charset="-122"/>
                 <a:cs typeface="Arial" pitchFamily="34" charset="-120"/>
               </a:rPr>
-              <a:t>Zwei Protokoll-Familien</a:t>
+              <a:t>Station 2: Eure Fundorte</a:t>
             </a:r>
             <a:endParaRPr lang="en-US" sz="2600" dirty="0"/>
           </a:p>
@@ -8787,7 +7944,7 @@
       </p:sp>
       <p:pic>
         <p:nvPicPr>
-          <p:cNvPr id="5" name="Image 0" descr="/Users/jacobmenge/Desktop/kurs-26.2b-orga/folienwerkstatt/assets/diagramme/i40-protokoll-familien.png">    </p:cNvPr>
+          <p:cNvPr id="5" name="Image 0" descr="/Users/jacobmenge/Desktop/kurs-26.2b-orga/folienwerkstatt/assets/diagramme/detektiv-ziel.png">    </p:cNvPr>
           <p:cNvPicPr>
             <a:picLocks noChangeAspect="1"/>
           </p:cNvPicPr>
@@ -8801,8 +7958,8 @@
         </p:blipFill>
         <p:spPr>
           <a:xfrm>
-            <a:off x="795528" y="1316736"/>
-            <a:ext cx="7562088" cy="2743200"/>
+            <a:off x="566928" y="1444752"/>
+            <a:ext cx="8010144" cy="2432304"/>
           </a:xfrm>
           <a:prstGeom prst="rect">
             <a:avLst/>
@@ -8817,14 +7974,14 @@
         </p:nvSpPr>
         <p:spPr>
           <a:xfrm>
-            <a:off x="566928" y="4251960"/>
+            <a:off x="566928" y="4087368"/>
             <a:ext cx="32004" cy="256032"/>
           </a:xfrm>
           <a:prstGeom prst="rect">
             <a:avLst/>
           </a:prstGeom>
           <a:solidFill>
-            <a:srgbClr val="0F7C86"/>
+            <a:srgbClr val="9A6310"/>
           </a:solidFill>
           <a:ln/>
         </p:spPr>
@@ -8837,7 +7994,7 @@
         </p:nvSpPr>
         <p:spPr>
           <a:xfrm>
-            <a:off x="749808" y="4206240"/>
+            <a:off x="749808" y="4041648"/>
             <a:ext cx="7827264" cy="402336"/>
           </a:xfrm>
           <a:prstGeom prst="rect">
@@ -8862,7 +8019,7 @@
                 <a:ea typeface="Arial" pitchFamily="34" charset="-122"/>
                 <a:cs typeface="Arial" pitchFamily="34" charset="-120"/>
               </a:rPr>
-              <a:t>Mit diesen drei Fragen sortiert ihr jedes unbekannte Protokoll ein, auch in der Prüfung.</a:t>
+              <a:t>Teil 1 bis 3 sind das Ziel, die Bonus-Spuren sind freiwillig. Alles spielt in einer einzigen Datei.</a:t>
             </a:r>
             <a:endParaRPr lang="en-US" sz="1200" dirty="0"/>
           </a:p>
@@ -8924,7 +8081,7 @@
                 <a:ea typeface="Arial" pitchFamily="34" charset="-122"/>
                 <a:cs typeface="Arial" pitchFamily="34" charset="-120"/>
               </a:rPr>
-              <a:t>Auswertung</a:t>
+              <a:t>Praxiszeit</a:t>
             </a:r>
             <a:endParaRPr lang="en-US" sz="1050" dirty="0"/>
           </a:p>
@@ -8963,7 +8120,7 @@
                 <a:ea typeface="Arial" pitchFamily="34" charset="-122"/>
                 <a:cs typeface="Arial" pitchFamily="34" charset="-120"/>
               </a:rPr>
-              <a:t>17/18</a:t>
+              <a:t>16/20</a:t>
             </a:r>
             <a:endParaRPr lang="en-US" sz="1050" dirty="0"/>
           </a:p>
@@ -9016,7 +8173,7 @@
             <a:avLst/>
           </a:prstGeom>
           <a:solidFill>
-            <a:srgbClr val="0F7C86"/>
+            <a:srgbClr val="9A6310"/>
           </a:solidFill>
           <a:ln/>
         </p:spPr>
@@ -9048,13 +8205,13 @@
             <a:r>
               <a:rPr lang="en-US" sz="1150" b="1" spc="180" kern="0" dirty="0">
                 <a:solidFill>
-                  <a:srgbClr val="0F7C86"/>
-                </a:solidFill>
-                <a:latin typeface="Arial" pitchFamily="34" charset="0"/>
-                <a:ea typeface="Arial" pitchFamily="34" charset="-122"/>
-                <a:cs typeface="Arial" pitchFamily="34" charset="-120"/>
-              </a:rPr>
-              <a:t>AUSBLICK</a:t>
+                  <a:srgbClr val="9A6310"/>
+                </a:solidFill>
+                <a:latin typeface="Arial" pitchFamily="34" charset="0"/>
+                <a:ea typeface="Arial" pitchFamily="34" charset="-122"/>
+                <a:cs typeface="Arial" pitchFamily="34" charset="-120"/>
+              </a:rPr>
+              <a:t>ALLEIN ODER ZU ZWEIT · 25 MINUTEN</a:t>
             </a:r>
             <a:endParaRPr lang="en-US" sz="1150" dirty="0"/>
           </a:p>
@@ -9093,7 +8250,7 @@
                 <a:ea typeface="Arial" pitchFamily="34" charset="-122"/>
                 <a:cs typeface="Arial" pitchFamily="34" charset="-120"/>
               </a:rPr>
-              <a:t>Bis Montag</a:t>
+              <a:t>Station 3: MQTT im Container</a:t>
             </a:r>
             <a:endParaRPr lang="en-US" sz="2600" dirty="0"/>
           </a:p>
@@ -9101,53 +8258,14 @@
       </p:sp>
       <p:sp>
         <p:nvSpPr>
-          <p:cNvPr id="5" name="Text 3"/>
-          <p:cNvSpPr/>
-          <p:nvPr/>
-        </p:nvSpPr>
-        <p:spPr>
-          <a:xfrm>
-            <a:off x="566928" y="1444752"/>
-            <a:ext cx="8010144" cy="438912"/>
-          </a:xfrm>
-          <a:prstGeom prst="rect">
-            <a:avLst/>
-          </a:prstGeom>
-          <a:noFill/>
-          <a:ln/>
-        </p:spPr>
-        <p:txBody>
-          <a:bodyPr wrap="square" lIns="0" tIns="0" rIns="0" bIns="0" rtlCol="0" anchor="t"/>
-          <a:lstStyle/>
-          <a:p>
-            <a:pPr indent="0" marL="0">
-              <a:buNone/>
-            </a:pPr>
-            <a:r>
-              <a:rPr lang="en-US" sz="1300" dirty="0">
-                <a:solidFill>
-                  <a:srgbClr val="5C6377"/>
-                </a:solidFill>
-                <a:latin typeface="Arial" pitchFamily="34" charset="0"/>
-                <a:ea typeface="Arial" pitchFamily="34" charset="-122"/>
-                <a:cs typeface="Arial" pitchFamily="34" charset="-120"/>
-              </a:rPr>
-              <a:t>Montag wird selbst gefunkt: Sensorik, Edge und Smart Home, mit echtem MQTT zum Anfassen.</a:t>
-            </a:r>
-            <a:endParaRPr lang="en-US" sz="1300" dirty="0"/>
-          </a:p>
-        </p:txBody>
-      </p:sp>
-      <p:sp>
-        <p:nvSpPr>
-          <p:cNvPr id="6" name="Shape 4"/>
-          <p:cNvSpPr/>
-          <p:nvPr/>
-        </p:nvSpPr>
-        <p:spPr>
-          <a:xfrm>
-            <a:off x="566928" y="1975104"/>
-            <a:ext cx="2523744" cy="1920240"/>
+          <p:cNvPr id="5" name="Shape 3"/>
+          <p:cNvSpPr/>
+          <p:nvPr/>
+        </p:nvSpPr>
+        <p:spPr>
+          <a:xfrm>
+            <a:off x="438912" y="1737360"/>
+            <a:ext cx="8266176" cy="329184"/>
           </a:xfrm>
           <a:prstGeom prst="rect">
             <a:avLst/>
@@ -9160,23 +8278,81 @@
       </p:sp>
       <p:sp>
         <p:nvSpPr>
-          <p:cNvPr id="7" name="Shape 5"/>
-          <p:cNvSpPr/>
-          <p:nvPr/>
-        </p:nvSpPr>
-        <p:spPr>
-          <a:xfrm>
-            <a:off x="566928" y="1975104"/>
-            <a:ext cx="41148" cy="1920240"/>
-          </a:xfrm>
-          <a:prstGeom prst="rect">
-            <a:avLst/>
-          </a:prstGeom>
-          <a:solidFill>
-            <a:srgbClr val="0F7C86"/>
-          </a:solidFill>
-          <a:ln/>
-        </p:spPr>
+          <p:cNvPr id="6" name="Text 4"/>
+          <p:cNvSpPr/>
+          <p:nvPr/>
+        </p:nvSpPr>
+        <p:spPr>
+          <a:xfrm>
+            <a:off x="566928" y="1737360"/>
+            <a:ext cx="914400" cy="329184"/>
+          </a:xfrm>
+          <a:prstGeom prst="rect">
+            <a:avLst/>
+          </a:prstGeom>
+          <a:noFill/>
+          <a:ln/>
+        </p:spPr>
+        <p:txBody>
+          <a:bodyPr wrap="square" lIns="0" tIns="0" rIns="0" bIns="0" rtlCol="0" anchor="ctr"/>
+          <a:lstStyle/>
+          <a:p>
+            <a:pPr indent="0" marL="0">
+              <a:buNone/>
+            </a:pPr>
+            <a:r>
+              <a:rPr lang="en-US" sz="1100" b="1" dirty="0">
+                <a:solidFill>
+                  <a:srgbClr val="9A6310"/>
+                </a:solidFill>
+                <a:latin typeface="Courier New" pitchFamily="34" charset="0"/>
+                <a:ea typeface="Courier New" pitchFamily="34" charset="-122"/>
+                <a:cs typeface="Courier New" pitchFamily="34" charset="-120"/>
+              </a:rPr>
+              <a:t>Teil 1</a:t>
+            </a:r>
+            <a:endParaRPr lang="en-US" sz="1100" dirty="0"/>
+          </a:p>
+        </p:txBody>
+      </p:sp>
+      <p:sp>
+        <p:nvSpPr>
+          <p:cNvPr id="7" name="Text 5"/>
+          <p:cNvSpPr/>
+          <p:nvPr/>
+        </p:nvSpPr>
+        <p:spPr>
+          <a:xfrm>
+            <a:off x="1481328" y="1737360"/>
+            <a:ext cx="7095744" cy="329184"/>
+          </a:xfrm>
+          <a:prstGeom prst="rect">
+            <a:avLst/>
+          </a:prstGeom>
+          <a:noFill/>
+          <a:ln/>
+        </p:spPr>
+        <p:txBody>
+          <a:bodyPr wrap="square" lIns="0" tIns="0" rIns="0" bIns="0" rtlCol="0" anchor="ctr"/>
+          <a:lstStyle/>
+          <a:p>
+            <a:pPr indent="0" marL="0">
+              <a:buNone/>
+            </a:pPr>
+            <a:r>
+              <a:rPr lang="en-US" sz="1100" dirty="0">
+                <a:solidFill>
+                  <a:srgbClr val="434A63"/>
+                </a:solidFill>
+                <a:latin typeface="Arial" pitchFamily="34" charset="0"/>
+                <a:ea typeface="Arial" pitchFamily="34" charset="-122"/>
+                <a:cs typeface="Arial" pitchFamily="34" charset="-120"/>
+              </a:rPr>
+              <a:t>Broker starten: ein Netzwerk, ein docker run, ein Blick in die Logs</a:t>
+            </a:r>
+            <a:endParaRPr lang="en-US" sz="1100" dirty="0"/>
+          </a:p>
+        </p:txBody>
       </p:sp>
       <p:sp>
         <p:nvSpPr>
@@ -9186,34 +8362,34 @@
         </p:nvSpPr>
         <p:spPr>
           <a:xfrm>
-            <a:off x="804672" y="2121408"/>
-            <a:ext cx="2121408" cy="256032"/>
-          </a:xfrm>
-          <a:prstGeom prst="rect">
-            <a:avLst/>
-          </a:prstGeom>
-          <a:noFill/>
-          <a:ln/>
-        </p:spPr>
-        <p:txBody>
-          <a:bodyPr wrap="square" lIns="0" tIns="0" rIns="0" bIns="0" rtlCol="0" anchor="t"/>
-          <a:lstStyle/>
-          <a:p>
-            <a:pPr indent="0" marL="0">
-              <a:buNone/>
-            </a:pPr>
-            <a:r>
-              <a:rPr lang="en-US" sz="1300" b="1" dirty="0">
-                <a:solidFill>
-                  <a:srgbClr val="272E52"/>
-                </a:solidFill>
-                <a:latin typeface="Arial" pitchFamily="34" charset="0"/>
-                <a:ea typeface="Arial" pitchFamily="34" charset="-122"/>
-                <a:cs typeface="Arial" pitchFamily="34" charset="-120"/>
-              </a:rPr>
-              <a:t>MQTT live</a:t>
-            </a:r>
-            <a:endParaRPr lang="en-US" sz="1300" dirty="0"/>
+            <a:off x="566928" y="2066544"/>
+            <a:ext cx="914400" cy="329184"/>
+          </a:xfrm>
+          <a:prstGeom prst="rect">
+            <a:avLst/>
+          </a:prstGeom>
+          <a:noFill/>
+          <a:ln/>
+        </p:spPr>
+        <p:txBody>
+          <a:bodyPr wrap="square" lIns="0" tIns="0" rIns="0" bIns="0" rtlCol="0" anchor="ctr"/>
+          <a:lstStyle/>
+          <a:p>
+            <a:pPr indent="0" marL="0">
+              <a:buNone/>
+            </a:pPr>
+            <a:r>
+              <a:rPr lang="en-US" sz="1100" b="1" dirty="0">
+                <a:solidFill>
+                  <a:srgbClr val="9A6310"/>
+                </a:solidFill>
+                <a:latin typeface="Courier New" pitchFamily="34" charset="0"/>
+                <a:ea typeface="Courier New" pitchFamily="34" charset="-122"/>
+                <a:cs typeface="Courier New" pitchFamily="34" charset="-120"/>
+              </a:rPr>
+              <a:t>Teil 2</a:t>
+            </a:r>
+            <a:endParaRPr lang="en-US" sz="1100" dirty="0"/>
           </a:p>
         </p:txBody>
       </p:sp>
@@ -9225,27 +8401,24 @@
         </p:nvSpPr>
         <p:spPr>
           <a:xfrm>
-            <a:off x="804672" y="2423160"/>
-            <a:ext cx="2121408" cy="1353312"/>
-          </a:xfrm>
-          <a:prstGeom prst="rect">
-            <a:avLst/>
-          </a:prstGeom>
-          <a:noFill/>
-          <a:ln/>
-        </p:spPr>
-        <p:txBody>
-          <a:bodyPr wrap="square" lIns="0" tIns="0" rIns="0" bIns="0" rtlCol="0" anchor="t"/>
-          <a:lstStyle/>
-          <a:p>
-            <a:pPr indent="0" marL="0">
-              <a:lnSpc>
-                <a:spcPct val="92000"/>
-              </a:lnSpc>
-              <a:buNone/>
-            </a:pPr>
-            <a:r>
-              <a:rPr lang="en-US" sz="1150" dirty="0">
+            <a:off x="1481328" y="2066544"/>
+            <a:ext cx="7095744" cy="329184"/>
+          </a:xfrm>
+          <a:prstGeom prst="rect">
+            <a:avLst/>
+          </a:prstGeom>
+          <a:noFill/>
+          <a:ln/>
+        </p:spPr>
+        <p:txBody>
+          <a:bodyPr wrap="square" lIns="0" tIns="0" rIns="0" bIns="0" rtlCol="0" anchor="ctr"/>
+          <a:lstStyle/>
+          <a:p>
+            <a:pPr indent="0" marL="0">
+              <a:buNone/>
+            </a:pPr>
+            <a:r>
+              <a:rPr lang="en-US" sz="1100" dirty="0">
                 <a:solidFill>
                   <a:srgbClr val="434A63"/>
                 </a:solidFill>
@@ -9253,9 +8426,9 @@
                 <a:ea typeface="Arial" pitchFamily="34" charset="-122"/>
                 <a:cs typeface="Arial" pitchFamily="34" charset="-120"/>
               </a:rPr>
-              <a:t>Ein Broker für den ganzen Kurs: Ihr veröffentlicht und abonniert selbst und seht die Nachrichten fliegen.</a:t>
-            </a:r>
-            <a:endParaRPr lang="en-US" sz="1150" dirty="0"/>
+              <a:t>Mitlesen und senden: mosquitto_sub im einen, mosquitto_pub im anderen Fenster</a:t>
+            </a:r>
+            <a:endParaRPr lang="en-US" sz="1100" dirty="0"/>
           </a:p>
         </p:txBody>
       </p:sp>
@@ -9267,8 +8440,8 @@
         </p:nvSpPr>
         <p:spPr>
           <a:xfrm>
-            <a:off x="3310128" y="1975104"/>
-            <a:ext cx="2523744" cy="1920240"/>
+            <a:off x="438912" y="2395728"/>
+            <a:ext cx="8266176" cy="329184"/>
           </a:xfrm>
           <a:prstGeom prst="rect">
             <a:avLst/>
@@ -9281,23 +8454,42 @@
       </p:sp>
       <p:sp>
         <p:nvSpPr>
-          <p:cNvPr id="11" name="Shape 9"/>
-          <p:cNvSpPr/>
-          <p:nvPr/>
-        </p:nvSpPr>
-        <p:spPr>
-          <a:xfrm>
-            <a:off x="3310128" y="1975104"/>
-            <a:ext cx="41148" cy="1920240"/>
-          </a:xfrm>
-          <a:prstGeom prst="rect">
-            <a:avLst/>
-          </a:prstGeom>
-          <a:solidFill>
-            <a:srgbClr val="0F7C86"/>
-          </a:solidFill>
-          <a:ln/>
-        </p:spPr>
+          <p:cNvPr id="11" name="Text 9"/>
+          <p:cNvSpPr/>
+          <p:nvPr/>
+        </p:nvSpPr>
+        <p:spPr>
+          <a:xfrm>
+            <a:off x="566928" y="2395728"/>
+            <a:ext cx="914400" cy="329184"/>
+          </a:xfrm>
+          <a:prstGeom prst="rect">
+            <a:avLst/>
+          </a:prstGeom>
+          <a:noFill/>
+          <a:ln/>
+        </p:spPr>
+        <p:txBody>
+          <a:bodyPr wrap="square" lIns="0" tIns="0" rIns="0" bIns="0" rtlCol="0" anchor="ctr"/>
+          <a:lstStyle/>
+          <a:p>
+            <a:pPr indent="0" marL="0">
+              <a:buNone/>
+            </a:pPr>
+            <a:r>
+              <a:rPr lang="en-US" sz="1100" b="1" dirty="0">
+                <a:solidFill>
+                  <a:srgbClr val="9A6310"/>
+                </a:solidFill>
+                <a:latin typeface="Courier New" pitchFamily="34" charset="0"/>
+                <a:ea typeface="Courier New" pitchFamily="34" charset="-122"/>
+                <a:cs typeface="Courier New" pitchFamily="34" charset="-120"/>
+              </a:rPr>
+              <a:t>Teil 3</a:t>
+            </a:r>
+            <a:endParaRPr lang="en-US" sz="1100" dirty="0"/>
+          </a:p>
+        </p:txBody>
       </p:sp>
       <p:sp>
         <p:nvSpPr>
@@ -9307,34 +8499,34 @@
         </p:nvSpPr>
         <p:spPr>
           <a:xfrm>
-            <a:off x="3547872" y="2121408"/>
-            <a:ext cx="2121408" cy="256032"/>
-          </a:xfrm>
-          <a:prstGeom prst="rect">
-            <a:avLst/>
-          </a:prstGeom>
-          <a:noFill/>
-          <a:ln/>
-        </p:spPr>
-        <p:txBody>
-          <a:bodyPr wrap="square" lIns="0" tIns="0" rIns="0" bIns="0" rtlCol="0" anchor="t"/>
-          <a:lstStyle/>
-          <a:p>
-            <a:pPr indent="0" marL="0">
-              <a:buNone/>
-            </a:pPr>
-            <a:r>
-              <a:rPr lang="en-US" sz="1300" b="1" dirty="0">
-                <a:solidFill>
-                  <a:srgbClr val="272E52"/>
-                </a:solidFill>
-                <a:latin typeface="Arial" pitchFamily="34" charset="0"/>
-                <a:ea typeface="Arial" pitchFamily="34" charset="-122"/>
-                <a:cs typeface="Arial" pitchFamily="34" charset="-120"/>
-              </a:rPr>
-              <a:t>Docker ist zurück</a:t>
-            </a:r>
-            <a:endParaRPr lang="en-US" sz="1300" dirty="0"/>
+            <a:off x="1481328" y="2395728"/>
+            <a:ext cx="7095744" cy="329184"/>
+          </a:xfrm>
+          <a:prstGeom prst="rect">
+            <a:avLst/>
+          </a:prstGeom>
+          <a:noFill/>
+          <a:ln/>
+        </p:spPr>
+        <p:txBody>
+          <a:bodyPr wrap="square" lIns="0" tIns="0" rIns="0" bIns="0" rtlCol="0" anchor="ctr"/>
+          <a:lstStyle/>
+          <a:p>
+            <a:pPr indent="0" marL="0">
+              <a:buNone/>
+            </a:pPr>
+            <a:r>
+              <a:rPr lang="en-US" sz="1100" dirty="0">
+                <a:solidFill>
+                  <a:srgbClr val="434A63"/>
+                </a:solidFill>
+                <a:latin typeface="Arial" pitchFamily="34" charset="0"/>
+                <a:ea typeface="Arial" pitchFamily="34" charset="-122"/>
+                <a:cs typeface="Arial" pitchFamily="34" charset="-120"/>
+              </a:rPr>
+              <a:t>Platzhalter: mit + und # mehrere Topics auf einmal abonnieren</a:t>
+            </a:r>
+            <a:endParaRPr lang="en-US" sz="1100" dirty="0"/>
           </a:p>
         </p:txBody>
       </p:sp>
@@ -9346,27 +8538,63 @@
         </p:nvSpPr>
         <p:spPr>
           <a:xfrm>
-            <a:off x="3547872" y="2423160"/>
-            <a:ext cx="2121408" cy="1353312"/>
-          </a:xfrm>
-          <a:prstGeom prst="rect">
-            <a:avLst/>
-          </a:prstGeom>
-          <a:noFill/>
-          <a:ln/>
-        </p:spPr>
-        <p:txBody>
-          <a:bodyPr wrap="square" lIns="0" tIns="0" rIns="0" bIns="0" rtlCol="0" anchor="t"/>
-          <a:lstStyle/>
-          <a:p>
-            <a:pPr indent="0" marL="0">
-              <a:lnSpc>
-                <a:spcPct val="92000"/>
-              </a:lnSpc>
-              <a:buNone/>
-            </a:pPr>
-            <a:r>
-              <a:rPr lang="en-US" sz="1150" dirty="0">
+            <a:off x="566928" y="2724912"/>
+            <a:ext cx="914400" cy="329184"/>
+          </a:xfrm>
+          <a:prstGeom prst="rect">
+            <a:avLst/>
+          </a:prstGeom>
+          <a:noFill/>
+          <a:ln/>
+        </p:spPr>
+        <p:txBody>
+          <a:bodyPr wrap="square" lIns="0" tIns="0" rIns="0" bIns="0" rtlCol="0" anchor="ctr"/>
+          <a:lstStyle/>
+          <a:p>
+            <a:pPr indent="0" marL="0">
+              <a:buNone/>
+            </a:pPr>
+            <a:r>
+              <a:rPr lang="en-US" sz="1100" b="1" dirty="0">
+                <a:solidFill>
+                  <a:srgbClr val="9A6310"/>
+                </a:solidFill>
+                <a:latin typeface="Courier New" pitchFamily="34" charset="0"/>
+                <a:ea typeface="Courier New" pitchFamily="34" charset="-122"/>
+                <a:cs typeface="Courier New" pitchFamily="34" charset="-120"/>
+              </a:rPr>
+              <a:t>Teil 4</a:t>
+            </a:r>
+            <a:endParaRPr lang="en-US" sz="1100" dirty="0"/>
+          </a:p>
+        </p:txBody>
+      </p:sp>
+      <p:sp>
+        <p:nvSpPr>
+          <p:cNvPr id="14" name="Text 12"/>
+          <p:cNvSpPr/>
+          <p:nvPr/>
+        </p:nvSpPr>
+        <p:spPr>
+          <a:xfrm>
+            <a:off x="1481328" y="2724912"/>
+            <a:ext cx="7095744" cy="329184"/>
+          </a:xfrm>
+          <a:prstGeom prst="rect">
+            <a:avLst/>
+          </a:prstGeom>
+          <a:noFill/>
+          <a:ln/>
+        </p:spPr>
+        <p:txBody>
+          <a:bodyPr wrap="square" lIns="0" tIns="0" rIns="0" bIns="0" rtlCol="0" anchor="ctr"/>
+          <a:lstStyle/>
+          <a:p>
+            <a:pPr indent="0" marL="0">
+              <a:buNone/>
+            </a:pPr>
+            <a:r>
+              <a:rPr lang="en-US" sz="1100" dirty="0">
                 <a:solidFill>
                   <a:srgbClr val="434A63"/>
                 </a:solidFill>
@@ -9374,22 +8602,22 @@
                 <a:ea typeface="Arial" pitchFamily="34" charset="-122"/>
                 <a:cs typeface="Arial" pitchFamily="34" charset="-120"/>
               </a:rPr>
-              <a:t>Der Broker Mosquitto wohnt in einem Container. Euer Werkzeugkasten aus dem Docker-Block im Einsatz.</a:t>
-            </a:r>
-            <a:endParaRPr lang="en-US" sz="1150" dirty="0"/>
-          </a:p>
-        </p:txBody>
-      </p:sp>
-      <p:sp>
-        <p:nvSpPr>
-          <p:cNvPr id="14" name="Shape 12"/>
-          <p:cNvSpPr/>
-          <p:nvPr/>
-        </p:nvSpPr>
-        <p:spPr>
-          <a:xfrm>
-            <a:off x="6053328" y="1975104"/>
-            <a:ext cx="2523744" cy="1920240"/>
+              <a:t>Retained Message: Der Broker merkt sich den letzten Sollwert</a:t>
+            </a:r>
+            <a:endParaRPr lang="en-US" sz="1100" dirty="0"/>
+          </a:p>
+        </p:txBody>
+      </p:sp>
+      <p:sp>
+        <p:nvSpPr>
+          <p:cNvPr id="15" name="Shape 13"/>
+          <p:cNvSpPr/>
+          <p:nvPr/>
+        </p:nvSpPr>
+        <p:spPr>
+          <a:xfrm>
+            <a:off x="438912" y="3054096"/>
+            <a:ext cx="8266176" cy="329184"/>
           </a:xfrm>
           <a:prstGeom prst="rect">
             <a:avLst/>
@@ -9402,92 +8630,128 @@
       </p:sp>
       <p:sp>
         <p:nvSpPr>
-          <p:cNvPr id="15" name="Shape 13"/>
-          <p:cNvSpPr/>
-          <p:nvPr/>
-        </p:nvSpPr>
-        <p:spPr>
-          <a:xfrm>
-            <a:off x="6053328" y="1975104"/>
-            <a:ext cx="41148" cy="1920240"/>
+          <p:cNvPr id="16" name="Text 14"/>
+          <p:cNvSpPr/>
+          <p:nvPr/>
+        </p:nvSpPr>
+        <p:spPr>
+          <a:xfrm>
+            <a:off x="566928" y="3054096"/>
+            <a:ext cx="914400" cy="329184"/>
+          </a:xfrm>
+          <a:prstGeom prst="rect">
+            <a:avLst/>
+          </a:prstGeom>
+          <a:noFill/>
+          <a:ln/>
+        </p:spPr>
+        <p:txBody>
+          <a:bodyPr wrap="square" lIns="0" tIns="0" rIns="0" bIns="0" rtlCol="0" anchor="ctr"/>
+          <a:lstStyle/>
+          <a:p>
+            <a:pPr indent="0" marL="0">
+              <a:buNone/>
+            </a:pPr>
+            <a:r>
+              <a:rPr lang="en-US" sz="1100" b="1" dirty="0">
+                <a:solidFill>
+                  <a:srgbClr val="9A6310"/>
+                </a:solidFill>
+                <a:latin typeface="Courier New" pitchFamily="34" charset="0"/>
+                <a:ea typeface="Courier New" pitchFamily="34" charset="-122"/>
+                <a:cs typeface="Courier New" pitchFamily="34" charset="-120"/>
+              </a:rPr>
+              <a:t>Teil 5</a:t>
+            </a:r>
+            <a:endParaRPr lang="en-US" sz="1100" dirty="0"/>
+          </a:p>
+        </p:txBody>
+      </p:sp>
+      <p:sp>
+        <p:nvSpPr>
+          <p:cNvPr id="17" name="Text 15"/>
+          <p:cNvSpPr/>
+          <p:nvPr/>
+        </p:nvSpPr>
+        <p:spPr>
+          <a:xfrm>
+            <a:off x="1481328" y="3054096"/>
+            <a:ext cx="7095744" cy="329184"/>
+          </a:xfrm>
+          <a:prstGeom prst="rect">
+            <a:avLst/>
+          </a:prstGeom>
+          <a:noFill/>
+          <a:ln/>
+        </p:spPr>
+        <p:txBody>
+          <a:bodyPr wrap="square" lIns="0" tIns="0" rIns="0" bIns="0" rtlCol="0" anchor="ctr"/>
+          <a:lstStyle/>
+          <a:p>
+            <a:pPr indent="0" marL="0">
+              <a:buNone/>
+            </a:pPr>
+            <a:r>
+              <a:rPr lang="en-US" sz="1100" dirty="0">
+                <a:solidFill>
+                  <a:srgbClr val="434A63"/>
+                </a:solidFill>
+                <a:latin typeface="Arial" pitchFamily="34" charset="0"/>
+                <a:ea typeface="Arial" pitchFamily="34" charset="-122"/>
+                <a:cs typeface="Arial" pitchFamily="34" charset="-120"/>
+              </a:rPr>
+              <a:t>Ein Sensor-Container funkt mit, dazu das Dashboard im Browser</a:t>
+            </a:r>
+            <a:endParaRPr lang="en-US" sz="1100" dirty="0"/>
+          </a:p>
+        </p:txBody>
+      </p:sp>
+      <p:sp>
+        <p:nvSpPr>
+          <p:cNvPr id="18" name="Shape 16"/>
+          <p:cNvSpPr/>
+          <p:nvPr/>
+        </p:nvSpPr>
+        <p:spPr>
+          <a:xfrm>
+            <a:off x="566928" y="3794760"/>
+            <a:ext cx="32004" cy="256032"/>
           </a:xfrm>
           <a:prstGeom prst="rect">
             <a:avLst/>
           </a:prstGeom>
           <a:solidFill>
-            <a:srgbClr val="0F7C86"/>
+            <a:srgbClr val="9A6310"/>
           </a:solidFill>
           <a:ln/>
         </p:spPr>
       </p:sp>
       <p:sp>
         <p:nvSpPr>
-          <p:cNvPr id="16" name="Text 14"/>
-          <p:cNvSpPr/>
-          <p:nvPr/>
-        </p:nvSpPr>
-        <p:spPr>
-          <a:xfrm>
-            <a:off x="6291072" y="2121408"/>
-            <a:ext cx="2121408" cy="256032"/>
-          </a:xfrm>
-          <a:prstGeom prst="rect">
-            <a:avLst/>
-          </a:prstGeom>
-          <a:noFill/>
-          <a:ln/>
-        </p:spPr>
-        <p:txBody>
-          <a:bodyPr wrap="square" lIns="0" tIns="0" rIns="0" bIns="0" rtlCol="0" anchor="t"/>
-          <a:lstStyle/>
-          <a:p>
-            <a:pPr indent="0" marL="0">
-              <a:buNone/>
-            </a:pPr>
-            <a:r>
-              <a:rPr lang="en-US" sz="1300" b="1" dirty="0">
-                <a:solidFill>
-                  <a:srgbClr val="272E52"/>
-                </a:solidFill>
-                <a:latin typeface="Arial" pitchFamily="34" charset="0"/>
-                <a:ea typeface="Arial" pitchFamily="34" charset="-122"/>
-                <a:cs typeface="Arial" pitchFamily="34" charset="-120"/>
-              </a:rPr>
-              <a:t>Nichts vorbereiten</a:t>
-            </a:r>
-            <a:endParaRPr lang="en-US" sz="1300" dirty="0"/>
-          </a:p>
-        </p:txBody>
-      </p:sp>
-      <p:sp>
-        <p:nvSpPr>
-          <p:cNvPr id="17" name="Text 15"/>
-          <p:cNvSpPr/>
-          <p:nvPr/>
-        </p:nvSpPr>
-        <p:spPr>
-          <a:xfrm>
-            <a:off x="6291072" y="2423160"/>
-            <a:ext cx="2121408" cy="1353312"/>
-          </a:xfrm>
-          <a:prstGeom prst="rect">
-            <a:avLst/>
-          </a:prstGeom>
-          <a:noFill/>
-          <a:ln/>
-        </p:spPr>
-        <p:txBody>
-          <a:bodyPr wrap="square" lIns="0" tIns="0" rIns="0" bIns="0" rtlCol="0" anchor="t"/>
-          <a:lstStyle/>
-          <a:p>
-            <a:pPr indent="0" marL="0">
-              <a:lnSpc>
-                <a:spcPct val="92000"/>
-              </a:lnSpc>
-              <a:buNone/>
-            </a:pPr>
-            <a:r>
-              <a:rPr lang="en-US" sz="1150" dirty="0">
+          <p:cNvPr id="19" name="Text 17"/>
+          <p:cNvSpPr/>
+          <p:nvPr/>
+        </p:nvSpPr>
+        <p:spPr>
+          <a:xfrm>
+            <a:off x="749808" y="3749040"/>
+            <a:ext cx="7827264" cy="402336"/>
+          </a:xfrm>
+          <a:prstGeom prst="rect">
+            <a:avLst/>
+          </a:prstGeom>
+          <a:noFill/>
+          <a:ln/>
+        </p:spPr>
+        <p:txBody>
+          <a:bodyPr wrap="square" lIns="0" tIns="0" rIns="0" bIns="0" rtlCol="0" anchor="ctr"/>
+          <a:lstStyle/>
+          <a:p>
+            <a:pPr indent="0" marL="0">
+              <a:buNone/>
+            </a:pPr>
+            <a:r>
+              <a:rPr lang="en-US" sz="1200" b="1" dirty="0">
                 <a:solidFill>
                   <a:srgbClr val="434A63"/>
                 </a:solidFill>
@@ -9495,66 +8759,7 @@
                 <a:ea typeface="Arial" pitchFamily="34" charset="-122"/>
                 <a:cs typeface="Arial" pitchFamily="34" charset="-120"/>
               </a:rPr>
-              <a:t>Wireshark bleibt installiert, mehr braucht es nicht. Wer mag, spielt die Bonus-Spuren zu Ende.</a:t>
-            </a:r>
-            <a:endParaRPr lang="en-US" sz="1150" dirty="0"/>
-          </a:p>
-        </p:txBody>
-      </p:sp>
-      <p:sp>
-        <p:nvSpPr>
-          <p:cNvPr id="18" name="Shape 16"/>
-          <p:cNvSpPr/>
-          <p:nvPr/>
-        </p:nvSpPr>
-        <p:spPr>
-          <a:xfrm>
-            <a:off x="566928" y="4160520"/>
-            <a:ext cx="32004" cy="256032"/>
-          </a:xfrm>
-          <a:prstGeom prst="rect">
-            <a:avLst/>
-          </a:prstGeom>
-          <a:solidFill>
-            <a:srgbClr val="0F7C86"/>
-          </a:solidFill>
-          <a:ln/>
-        </p:spPr>
-      </p:sp>
-      <p:sp>
-        <p:nvSpPr>
-          <p:cNvPr id="19" name="Text 17"/>
-          <p:cNvSpPr/>
-          <p:nvPr/>
-        </p:nvSpPr>
-        <p:spPr>
-          <a:xfrm>
-            <a:off x="749808" y="4114800"/>
-            <a:ext cx="7827264" cy="402336"/>
-          </a:xfrm>
-          <a:prstGeom prst="rect">
-            <a:avLst/>
-          </a:prstGeom>
-          <a:noFill/>
-          <a:ln/>
-        </p:spPr>
-        <p:txBody>
-          <a:bodyPr wrap="square" lIns="0" tIns="0" rIns="0" bIns="0" rtlCol="0" anchor="ctr"/>
-          <a:lstStyle/>
-          <a:p>
-            <a:pPr indent="0" marL="0">
-              <a:buNone/>
-            </a:pPr>
-            <a:r>
-              <a:rPr lang="en-US" sz="1200" b="1" dirty="0">
-                <a:solidFill>
-                  <a:srgbClr val="434A63"/>
-                </a:solidFill>
-                <a:latin typeface="Arial" pitchFamily="34" charset="0"/>
-                <a:ea typeface="Arial" pitchFamily="34" charset="-122"/>
-                <a:cs typeface="Arial" pitchFamily="34" charset="-120"/>
-              </a:rPr>
-              <a:t>Nächster Termin: Montag, 28. September um 18:00 Uhr, Sensorik und Edge.</a:t>
+              <a:t>Teil 1 bis 4 sind das Ziel, Teil 5 für alle mit Restzeit. Probiert eigene Topics und Werte aus: Der Broker läuft nur auf eurem Rechner.</a:t>
             </a:r>
             <a:endParaRPr lang="en-US" sz="1200" dirty="0"/>
           </a:p>
@@ -9616,7 +8821,7 @@
                 <a:ea typeface="Arial" pitchFamily="34" charset="-122"/>
                 <a:cs typeface="Arial" pitchFamily="34" charset="-120"/>
               </a:rPr>
-              <a:t>Abschluss</a:t>
+              <a:t>Praxiszeit</a:t>
             </a:r>
             <a:endParaRPr lang="en-US" sz="1050" dirty="0"/>
           </a:p>
@@ -9655,7 +8860,7 @@
                 <a:ea typeface="Arial" pitchFamily="34" charset="-122"/>
                 <a:cs typeface="Arial" pitchFamily="34" charset="-120"/>
               </a:rPr>
-              <a:t>18/18</a:t>
+              <a:t>17/20</a:t>
             </a:r>
             <a:endParaRPr lang="en-US" sz="1050" dirty="0"/>
           </a:p>
@@ -9672,6 +8877,1947 @@
 <file path=ppt/slides/slide22.xml><?xml version="1.0" encoding="utf-8"?>
 <p:sld xmlns:a="http://schemas.openxmlformats.org/drawingml/2006/main" xmlns:r="http://schemas.openxmlformats.org/officeDocument/2006/relationships" xmlns:p="http://schemas.openxmlformats.org/presentationml/2006/main">
   <p:cSld name="Slide 22">
+    <p:bg>
+      <p:bgPr>
+        <a:solidFill>
+          <a:srgbClr val="FFFFFF"/>
+        </a:solidFill>
+      </p:bgPr>
+    </p:bg>
+    <p:spTree>
+      <p:nvGrpSpPr>
+        <p:cNvPr id="1" name=""/>
+        <p:cNvGrpSpPr/>
+        <p:nvPr/>
+      </p:nvGrpSpPr>
+      <p:grpSpPr>
+        <a:xfrm>
+          <a:off x="0" y="0"/>
+          <a:ext cx="0" cy="0"/>
+          <a:chOff x="0" y="0"/>
+          <a:chExt cx="0" cy="0"/>
+        </a:xfrm>
+      </p:grpSpPr>
+      <p:sp>
+        <p:nvSpPr>
+          <p:cNvPr id="2" name="Shape 0"/>
+          <p:cNvSpPr/>
+          <p:nvPr/>
+        </p:nvSpPr>
+        <p:spPr>
+          <a:xfrm>
+            <a:off x="566928" y="201168"/>
+            <a:ext cx="475488" cy="50292"/>
+          </a:xfrm>
+          <a:prstGeom prst="rect">
+            <a:avLst/>
+          </a:prstGeom>
+          <a:solidFill>
+            <a:srgbClr val="9A6310"/>
+          </a:solidFill>
+          <a:ln/>
+        </p:spPr>
+      </p:sp>
+      <p:sp>
+        <p:nvSpPr>
+          <p:cNvPr id="3" name="Text 1"/>
+          <p:cNvSpPr/>
+          <p:nvPr/>
+        </p:nvSpPr>
+        <p:spPr>
+          <a:xfrm>
+            <a:off x="566928" y="384048"/>
+            <a:ext cx="8010144" cy="237744"/>
+          </a:xfrm>
+          <a:prstGeom prst="rect">
+            <a:avLst/>
+          </a:prstGeom>
+          <a:noFill/>
+          <a:ln/>
+        </p:spPr>
+        <p:txBody>
+          <a:bodyPr wrap="square" lIns="0" tIns="0" rIns="0" bIns="0" rtlCol="0" anchor="ctr"/>
+          <a:lstStyle/>
+          <a:p>
+            <a:pPr indent="0" marL="0">
+              <a:buNone/>
+            </a:pPr>
+            <a:r>
+              <a:rPr lang="en-US" sz="1150" b="1" spc="180" kern="0" dirty="0">
+                <a:solidFill>
+                  <a:srgbClr val="9A6310"/>
+                </a:solidFill>
+                <a:latin typeface="Arial" pitchFamily="34" charset="0"/>
+                <a:ea typeface="Arial" pitchFamily="34" charset="-122"/>
+                <a:cs typeface="Arial" pitchFamily="34" charset="-120"/>
+              </a:rPr>
+              <a:t>SPIELREGELN</a:t>
+            </a:r>
+            <a:endParaRPr lang="en-US" sz="1150" dirty="0"/>
+          </a:p>
+        </p:txBody>
+      </p:sp>
+      <p:sp>
+        <p:nvSpPr>
+          <p:cNvPr id="4" name="Text 2"/>
+          <p:cNvSpPr/>
+          <p:nvPr/>
+        </p:nvSpPr>
+        <p:spPr>
+          <a:xfrm>
+            <a:off x="566928" y="731520"/>
+            <a:ext cx="8010144" cy="603504"/>
+          </a:xfrm>
+          <a:prstGeom prst="rect">
+            <a:avLst/>
+          </a:prstGeom>
+          <a:noFill/>
+          <a:ln/>
+        </p:spPr>
+        <p:txBody>
+          <a:bodyPr wrap="square" lIns="0" tIns="0" rIns="0" bIns="0" rtlCol="0" anchor="t"/>
+          <a:lstStyle/>
+          <a:p>
+            <a:pPr indent="0" marL="0">
+              <a:buNone/>
+            </a:pPr>
+            <a:r>
+              <a:rPr lang="en-US" sz="2600" b="1" dirty="0">
+                <a:solidFill>
+                  <a:srgbClr val="272E52"/>
+                </a:solidFill>
+                <a:latin typeface="Arial" pitchFamily="34" charset="0"/>
+                <a:ea typeface="Arial" pitchFamily="34" charset="-122"/>
+                <a:cs typeface="Arial" pitchFamily="34" charset="-120"/>
+              </a:rPr>
+              <a:t>So arbeitet ihr</a:t>
+            </a:r>
+            <a:endParaRPr lang="en-US" sz="2600" dirty="0"/>
+          </a:p>
+        </p:txBody>
+      </p:sp>
+      <p:sp>
+        <p:nvSpPr>
+          <p:cNvPr id="5" name="Text 3"/>
+          <p:cNvSpPr/>
+          <p:nvPr/>
+        </p:nvSpPr>
+        <p:spPr>
+          <a:xfrm>
+            <a:off x="566928" y="1700784"/>
+            <a:ext cx="8010144" cy="1828800"/>
+          </a:xfrm>
+          <a:prstGeom prst="rect">
+            <a:avLst/>
+          </a:prstGeom>
+          <a:noFill/>
+          <a:ln/>
+        </p:spPr>
+        <p:txBody>
+          <a:bodyPr wrap="square" lIns="0" tIns="0" rIns="0" bIns="0" rtlCol="0" anchor="t"/>
+          <a:lstStyle/>
+          <a:p>
+            <a:pPr marL="254000" indent="-254000">
+              <a:lnSpc>
+                <a:spcPct val="100000"/>
+              </a:lnSpc>
+              <a:spcAft>
+                <a:spcPts val="900"/>
+              </a:spcAft>
+              <a:buClr>
+                <a:srgbClr val="0F7C86"/>
+              </a:buClr>
+              <a:buSzPct val="100000"/>
+              <a:buChar char="▸"/>
+            </a:pPr>
+            <a:r>
+              <a:rPr lang="en-US" sz="1200" dirty="0">
+                <a:solidFill>
+                  <a:srgbClr val="434A63"/>
+                </a:solidFill>
+                <a:latin typeface="Arial" pitchFamily="34" charset="0"/>
+                <a:ea typeface="Arial" pitchFamily="34" charset="-122"/>
+                <a:cs typeface="Arial" pitchFamily="34" charset="-120"/>
+              </a:rPr>
+              <a:t>Ein Raum für die ganze Praxiszeit: gleiche Gruppen, ihr bleibt bis 20:35 zusammen.</a:t>
+            </a:r>
+            <a:endParaRPr lang="en-US" sz="1200" dirty="0"/>
+          </a:p>
+          <a:p>
+            <a:pPr marL="254000" indent="-254000">
+              <a:lnSpc>
+                <a:spcPct val="100000"/>
+              </a:lnSpc>
+              <a:spcAft>
+                <a:spcPts val="900"/>
+              </a:spcAft>
+              <a:buClr>
+                <a:srgbClr val="0F7C86"/>
+              </a:buClr>
+              <a:buSzPct val="100000"/>
+              <a:buChar char="▸"/>
+            </a:pPr>
+            <a:r>
+              <a:rPr lang="en-US" sz="1200" dirty="0">
+                <a:solidFill>
+                  <a:srgbClr val="434A63"/>
+                </a:solidFill>
+                <a:latin typeface="Arial" pitchFamily="34" charset="0"/>
+                <a:ea typeface="Arial" pitchFamily="34" charset="-122"/>
+                <a:cs typeface="Arial" pitchFamily="34" charset="-120"/>
+              </a:rPr>
+              <a:t>Die Stationen der Reihe nach. Wer schneller ist, hat mehr Zeit für Station 3.</a:t>
+            </a:r>
+            <a:endParaRPr lang="en-US" sz="1200" dirty="0"/>
+          </a:p>
+          <a:p>
+            <a:pPr marL="254000" indent="-254000">
+              <a:lnSpc>
+                <a:spcPct val="100000"/>
+              </a:lnSpc>
+              <a:spcAft>
+                <a:spcPts val="900"/>
+              </a:spcAft>
+              <a:buClr>
+                <a:srgbClr val="0F7C86"/>
+              </a:buClr>
+              <a:buSzPct val="100000"/>
+              <a:buChar char="▸"/>
+            </a:pPr>
+            <a:r>
+              <a:rPr lang="en-US" sz="1200" dirty="0">
+                <a:solidFill>
+                  <a:srgbClr val="434A63"/>
+                </a:solidFill>
+                <a:latin typeface="Arial" pitchFamily="34" charset="0"/>
+                <a:ea typeface="Arial" pitchFamily="34" charset="-122"/>
+                <a:cs typeface="Arial" pitchFamily="34" charset="-120"/>
+              </a:rPr>
+              <a:t>Eine Person teilt den Bildschirm, alle arbeiten auf dem eigenen Rechner mit.</a:t>
+            </a:r>
+            <a:endParaRPr lang="en-US" sz="1200" dirty="0"/>
+          </a:p>
+          <a:p>
+            <a:pPr marL="254000" indent="-254000">
+              <a:lnSpc>
+                <a:spcPct val="100000"/>
+              </a:lnSpc>
+              <a:spcAft>
+                <a:spcPts val="900"/>
+              </a:spcAft>
+              <a:buClr>
+                <a:srgbClr val="0F7C86"/>
+              </a:buClr>
+              <a:buSzPct val="100000"/>
+              <a:buChar char="▸"/>
+            </a:pPr>
+            <a:r>
+              <a:rPr lang="en-US" sz="1200" dirty="0">
+                <a:solidFill>
+                  <a:srgbClr val="434A63"/>
+                </a:solidFill>
+                <a:latin typeface="Arial" pitchFamily="34" charset="0"/>
+                <a:ea typeface="Arial" pitchFamily="34" charset="-122"/>
+                <a:cs typeface="Arial" pitchFamily="34" charset="-120"/>
+              </a:rPr>
+              <a:t>Ich schaue reihum in die Räume. Wenn es klemmt: erst die Stolpersteine-Seite, dann um Hilfe bitten.</a:t>
+            </a:r>
+            <a:endParaRPr lang="en-US" sz="1200" dirty="0"/>
+          </a:p>
+          <a:p>
+            <a:pPr marL="254000" indent="-254000">
+              <a:lnSpc>
+                <a:spcPct val="100000"/>
+              </a:lnSpc>
+              <a:spcAft>
+                <a:spcPts val="900"/>
+              </a:spcAft>
+              <a:buClr>
+                <a:srgbClr val="0F7C86"/>
+              </a:buClr>
+              <a:buSzPct val="100000"/>
+              <a:buChar char="▸"/>
+            </a:pPr>
+            <a:r>
+              <a:rPr lang="en-US" sz="1200" dirty="0">
+                <a:solidFill>
+                  <a:srgbClr val="434A63"/>
+                </a:solidFill>
+                <a:latin typeface="Arial" pitchFamily="34" charset="0"/>
+                <a:ea typeface="Arial" pitchFamily="34" charset="-122"/>
+                <a:cs typeface="Arial" pitchFamily="34" charset="-120"/>
+              </a:rPr>
+              <a:t>Windows wie immer in der PowerShell im Windows-Terminal.</a:t>
+            </a:r>
+            <a:endParaRPr lang="en-US" sz="1200" dirty="0"/>
+          </a:p>
+        </p:txBody>
+      </p:sp>
+      <p:sp>
+        <p:nvSpPr>
+          <p:cNvPr id="6" name="Shape 4"/>
+          <p:cNvSpPr/>
+          <p:nvPr/>
+        </p:nvSpPr>
+        <p:spPr>
+          <a:xfrm>
+            <a:off x="566928" y="3639312"/>
+            <a:ext cx="8010144" cy="822960"/>
+          </a:xfrm>
+          <a:prstGeom prst="rect">
+            <a:avLst/>
+          </a:prstGeom>
+          <a:solidFill>
+            <a:srgbClr val="F5F6FC"/>
+          </a:solidFill>
+          <a:ln/>
+        </p:spPr>
+      </p:sp>
+      <p:sp>
+        <p:nvSpPr>
+          <p:cNvPr id="7" name="Shape 5"/>
+          <p:cNvSpPr/>
+          <p:nvPr/>
+        </p:nvSpPr>
+        <p:spPr>
+          <a:xfrm>
+            <a:off x="566928" y="3639312"/>
+            <a:ext cx="41148" cy="822960"/>
+          </a:xfrm>
+          <a:prstGeom prst="rect">
+            <a:avLst/>
+          </a:prstGeom>
+          <a:solidFill>
+            <a:srgbClr val="9A6310"/>
+          </a:solidFill>
+          <a:ln/>
+        </p:spPr>
+      </p:sp>
+      <p:sp>
+        <p:nvSpPr>
+          <p:cNvPr id="8" name="Text 6"/>
+          <p:cNvSpPr/>
+          <p:nvPr/>
+        </p:nvSpPr>
+        <p:spPr>
+          <a:xfrm>
+            <a:off x="804672" y="3785616"/>
+            <a:ext cx="7607808" cy="242062"/>
+          </a:xfrm>
+          <a:prstGeom prst="rect">
+            <a:avLst/>
+          </a:prstGeom>
+          <a:noFill/>
+          <a:ln/>
+        </p:spPr>
+        <p:txBody>
+          <a:bodyPr wrap="square" lIns="0" tIns="0" rIns="0" bIns="0" rtlCol="0" anchor="t"/>
+          <a:lstStyle/>
+          <a:p>
+            <a:pPr indent="0" marL="0">
+              <a:buNone/>
+            </a:pPr>
+            <a:r>
+              <a:rPr lang="en-US" sz="1300" b="1" dirty="0">
+                <a:solidFill>
+                  <a:srgbClr val="272E52"/>
+                </a:solidFill>
+                <a:latin typeface="Arial" pitchFamily="34" charset="0"/>
+                <a:ea typeface="Arial" pitchFamily="34" charset="-122"/>
+                <a:cs typeface="Arial" pitchFamily="34" charset="-120"/>
+              </a:rPr>
+              <a:t>Um 20:35 sind alle wieder hier</a:t>
+            </a:r>
+            <a:endParaRPr lang="en-US" sz="1300" dirty="0"/>
+          </a:p>
+        </p:txBody>
+      </p:sp>
+      <p:sp>
+        <p:nvSpPr>
+          <p:cNvPr id="9" name="Text 7"/>
+          <p:cNvSpPr/>
+          <p:nvPr/>
+        </p:nvSpPr>
+        <p:spPr>
+          <a:xfrm>
+            <a:off x="804672" y="4073398"/>
+            <a:ext cx="7607808" cy="270002"/>
+          </a:xfrm>
+          <a:prstGeom prst="rect">
+            <a:avLst/>
+          </a:prstGeom>
+          <a:noFill/>
+          <a:ln/>
+        </p:spPr>
+        <p:txBody>
+          <a:bodyPr wrap="square" lIns="0" tIns="0" rIns="0" bIns="0" rtlCol="0" anchor="t"/>
+          <a:lstStyle/>
+          <a:p>
+            <a:pPr indent="0" marL="0">
+              <a:lnSpc>
+                <a:spcPct val="92000"/>
+              </a:lnSpc>
+              <a:buNone/>
+            </a:pPr>
+            <a:r>
+              <a:rPr lang="en-US" sz="1100" dirty="0">
+                <a:solidFill>
+                  <a:srgbClr val="434A63"/>
+                </a:solidFill>
+                <a:latin typeface="Arial" pitchFamily="34" charset="0"/>
+                <a:ea typeface="Arial" pitchFamily="34" charset="-122"/>
+                <a:cs typeface="Arial" pitchFamily="34" charset="-120"/>
+              </a:rPr>
+              <a:t>Jede Gruppe bringt einen Fund aus dem Mitschnitt mit und ihren Satz zur Frage: Was fehlt eurem eigenen Broker, bevor er in eine echte Halle darf?</a:t>
+            </a:r>
+            <a:endParaRPr lang="en-US" sz="1100" dirty="0"/>
+          </a:p>
+        </p:txBody>
+      </p:sp>
+      <p:sp>
+        <p:nvSpPr>
+          <p:cNvPr id="10" name="Shape 8"/>
+          <p:cNvSpPr/>
+          <p:nvPr/>
+        </p:nvSpPr>
+        <p:spPr>
+          <a:xfrm>
+            <a:off x="566928" y="4631436"/>
+            <a:ext cx="8010144" cy="0"/>
+          </a:xfrm>
+          <a:prstGeom prst="line">
+            <a:avLst/>
+          </a:prstGeom>
+          <a:noFill/>
+          <a:ln w="9525">
+            <a:solidFill>
+              <a:srgbClr val="DFE3F0"/>
+            </a:solidFill>
+            <a:prstDash val="solid"/>
+          </a:ln>
+        </p:spPr>
+      </p:sp>
+      <p:sp>
+        <p:nvSpPr>
+          <p:cNvPr id="11" name="Text 9"/>
+          <p:cNvSpPr/>
+          <p:nvPr/>
+        </p:nvSpPr>
+        <p:spPr>
+          <a:xfrm>
+            <a:off x="566928" y="4722876"/>
+            <a:ext cx="5029200" cy="237744"/>
+          </a:xfrm>
+          <a:prstGeom prst="rect">
+            <a:avLst/>
+          </a:prstGeom>
+          <a:noFill/>
+          <a:ln/>
+        </p:spPr>
+        <p:txBody>
+          <a:bodyPr wrap="square" lIns="0" tIns="0" rIns="0" bIns="0" rtlCol="0" anchor="ctr"/>
+          <a:lstStyle/>
+          <a:p>
+            <a:pPr indent="0" marL="0">
+              <a:buNone/>
+            </a:pPr>
+            <a:r>
+              <a:rPr lang="en-US" sz="1050" spc="30" kern="0" dirty="0">
+                <a:solidFill>
+                  <a:srgbClr val="5C6377"/>
+                </a:solidFill>
+                <a:latin typeface="Arial" pitchFamily="34" charset="0"/>
+                <a:ea typeface="Arial" pitchFamily="34" charset="-122"/>
+                <a:cs typeface="Arial" pitchFamily="34" charset="-120"/>
+              </a:rPr>
+              <a:t>Praxiszeit</a:t>
+            </a:r>
+            <a:endParaRPr lang="en-US" sz="1050" dirty="0"/>
+          </a:p>
+        </p:txBody>
+      </p:sp>
+      <p:sp>
+        <p:nvSpPr>
+          <p:cNvPr id="12" name="Text 10"/>
+          <p:cNvSpPr/>
+          <p:nvPr/>
+        </p:nvSpPr>
+        <p:spPr>
+          <a:xfrm>
+            <a:off x="8028432" y="4722876"/>
+            <a:ext cx="548640" cy="237744"/>
+          </a:xfrm>
+          <a:prstGeom prst="rect">
+            <a:avLst/>
+          </a:prstGeom>
+          <a:noFill/>
+          <a:ln/>
+        </p:spPr>
+        <p:txBody>
+          <a:bodyPr wrap="square" lIns="0" tIns="0" rIns="0" bIns="0" rtlCol="0" anchor="ctr"/>
+          <a:lstStyle/>
+          <a:p>
+            <a:pPr algn="r" indent="0" marL="0">
+              <a:buNone/>
+            </a:pPr>
+            <a:r>
+              <a:rPr lang="en-US" sz="1050" dirty="0">
+                <a:solidFill>
+                  <a:srgbClr val="5C6377"/>
+                </a:solidFill>
+                <a:latin typeface="Arial" pitchFamily="34" charset="0"/>
+                <a:ea typeface="Arial" pitchFamily="34" charset="-122"/>
+                <a:cs typeface="Arial" pitchFamily="34" charset="-120"/>
+              </a:rPr>
+              <a:t>18/20</a:t>
+            </a:r>
+            <a:endParaRPr lang="en-US" sz="1050" dirty="0"/>
+          </a:p>
+        </p:txBody>
+      </p:sp>
+    </p:spTree>
+  </p:cSld>
+  <p:clrMapOvr>
+    <a:masterClrMapping/>
+  </p:clrMapOvr>
+</p:sld>
+</file>
+
+<file path=ppt/slides/slide23.xml><?xml version="1.0" encoding="utf-8"?>
+<p:sld xmlns:a="http://schemas.openxmlformats.org/drawingml/2006/main" xmlns:r="http://schemas.openxmlformats.org/officeDocument/2006/relationships" xmlns:p="http://schemas.openxmlformats.org/presentationml/2006/main">
+  <p:cSld name="Slide 23">
+    <p:bg>
+      <p:bgPr>
+        <a:solidFill>
+          <a:srgbClr val="FFFFFF"/>
+        </a:solidFill>
+      </p:bgPr>
+    </p:bg>
+    <p:spTree>
+      <p:nvGrpSpPr>
+        <p:cNvPr id="1" name=""/>
+        <p:cNvGrpSpPr/>
+        <p:nvPr/>
+      </p:nvGrpSpPr>
+      <p:grpSpPr>
+        <a:xfrm>
+          <a:off x="0" y="0"/>
+          <a:ext cx="0" cy="0"/>
+          <a:chOff x="0" y="0"/>
+          <a:chExt cx="0" cy="0"/>
+        </a:xfrm>
+      </p:grpSpPr>
+      <p:sp>
+        <p:nvSpPr>
+          <p:cNvPr id="2" name="Shape 0"/>
+          <p:cNvSpPr/>
+          <p:nvPr/>
+        </p:nvSpPr>
+        <p:spPr>
+          <a:xfrm>
+            <a:off x="566928" y="201168"/>
+            <a:ext cx="475488" cy="50292"/>
+          </a:xfrm>
+          <a:prstGeom prst="rect">
+            <a:avLst/>
+          </a:prstGeom>
+          <a:solidFill>
+            <a:srgbClr val="0F7C86"/>
+          </a:solidFill>
+          <a:ln/>
+        </p:spPr>
+      </p:sp>
+      <p:sp>
+        <p:nvSpPr>
+          <p:cNvPr id="3" name="Text 1"/>
+          <p:cNvSpPr/>
+          <p:nvPr/>
+        </p:nvSpPr>
+        <p:spPr>
+          <a:xfrm>
+            <a:off x="566928" y="384048"/>
+            <a:ext cx="8010144" cy="237744"/>
+          </a:xfrm>
+          <a:prstGeom prst="rect">
+            <a:avLst/>
+          </a:prstGeom>
+          <a:noFill/>
+          <a:ln/>
+        </p:spPr>
+        <p:txBody>
+          <a:bodyPr wrap="square" lIns="0" tIns="0" rIns="0" bIns="0" rtlCol="0" anchor="ctr"/>
+          <a:lstStyle/>
+          <a:p>
+            <a:pPr indent="0" marL="0">
+              <a:buNone/>
+            </a:pPr>
+            <a:r>
+              <a:rPr lang="en-US" sz="1150" b="1" spc="180" kern="0" dirty="0">
+                <a:solidFill>
+                  <a:srgbClr val="0F7C86"/>
+                </a:solidFill>
+                <a:latin typeface="Arial" pitchFamily="34" charset="0"/>
+                <a:ea typeface="Arial" pitchFamily="34" charset="-122"/>
+                <a:cs typeface="Arial" pitchFamily="34" charset="-120"/>
+              </a:rPr>
+              <a:t>AUSWERTUNG · 20 MINUTEN</a:t>
+            </a:r>
+            <a:endParaRPr lang="en-US" sz="1150" dirty="0"/>
+          </a:p>
+        </p:txBody>
+      </p:sp>
+      <p:sp>
+        <p:nvSpPr>
+          <p:cNvPr id="4" name="Text 2"/>
+          <p:cNvSpPr/>
+          <p:nvPr/>
+        </p:nvSpPr>
+        <p:spPr>
+          <a:xfrm>
+            <a:off x="566928" y="731520"/>
+            <a:ext cx="8010144" cy="603504"/>
+          </a:xfrm>
+          <a:prstGeom prst="rect">
+            <a:avLst/>
+          </a:prstGeom>
+          <a:noFill/>
+          <a:ln/>
+        </p:spPr>
+        <p:txBody>
+          <a:bodyPr wrap="square" lIns="0" tIns="0" rIns="0" bIns="0" rtlCol="0" anchor="t"/>
+          <a:lstStyle/>
+          <a:p>
+            <a:pPr indent="0" marL="0">
+              <a:buNone/>
+            </a:pPr>
+            <a:r>
+              <a:rPr lang="en-US" sz="2600" b="1" dirty="0">
+                <a:solidFill>
+                  <a:srgbClr val="272E52"/>
+                </a:solidFill>
+                <a:latin typeface="Arial" pitchFamily="34" charset="0"/>
+                <a:ea typeface="Arial" pitchFamily="34" charset="-122"/>
+                <a:cs typeface="Arial" pitchFamily="34" charset="-120"/>
+              </a:rPr>
+              <a:t>Eure Funde</a:t>
+            </a:r>
+            <a:endParaRPr lang="en-US" sz="2600" dirty="0"/>
+          </a:p>
+        </p:txBody>
+      </p:sp>
+      <p:sp>
+        <p:nvSpPr>
+          <p:cNvPr id="5" name="Shape 3"/>
+          <p:cNvSpPr/>
+          <p:nvPr/>
+        </p:nvSpPr>
+        <p:spPr>
+          <a:xfrm>
+            <a:off x="438912" y="1810512"/>
+            <a:ext cx="8266176" cy="365760"/>
+          </a:xfrm>
+          <a:prstGeom prst="rect">
+            <a:avLst/>
+          </a:prstGeom>
+          <a:solidFill>
+            <a:srgbClr val="F5F6FC"/>
+          </a:solidFill>
+          <a:ln/>
+        </p:spPr>
+      </p:sp>
+      <p:sp>
+        <p:nvSpPr>
+          <p:cNvPr id="6" name="Text 4"/>
+          <p:cNvSpPr/>
+          <p:nvPr/>
+        </p:nvSpPr>
+        <p:spPr>
+          <a:xfrm>
+            <a:off x="566928" y="1810512"/>
+            <a:ext cx="548640" cy="365760"/>
+          </a:xfrm>
+          <a:prstGeom prst="rect">
+            <a:avLst/>
+          </a:prstGeom>
+          <a:noFill/>
+          <a:ln/>
+        </p:spPr>
+        <p:txBody>
+          <a:bodyPr wrap="square" lIns="0" tIns="0" rIns="0" bIns="0" rtlCol="0" anchor="ctr"/>
+          <a:lstStyle/>
+          <a:p>
+            <a:pPr indent="0" marL="0">
+              <a:buNone/>
+            </a:pPr>
+            <a:r>
+              <a:rPr lang="en-US" sz="1200" b="1" dirty="0">
+                <a:solidFill>
+                  <a:srgbClr val="0F7C86"/>
+                </a:solidFill>
+                <a:latin typeface="Courier New" pitchFamily="34" charset="0"/>
+                <a:ea typeface="Courier New" pitchFamily="34" charset="-122"/>
+                <a:cs typeface="Courier New" pitchFamily="34" charset="-120"/>
+              </a:rPr>
+              <a:t>1</a:t>
+            </a:r>
+            <a:endParaRPr lang="en-US" sz="1200" dirty="0"/>
+          </a:p>
+        </p:txBody>
+      </p:sp>
+      <p:sp>
+        <p:nvSpPr>
+          <p:cNvPr id="7" name="Text 5"/>
+          <p:cNvSpPr/>
+          <p:nvPr/>
+        </p:nvSpPr>
+        <p:spPr>
+          <a:xfrm>
+            <a:off x="1115568" y="1810512"/>
+            <a:ext cx="7461504" cy="365760"/>
+          </a:xfrm>
+          <a:prstGeom prst="rect">
+            <a:avLst/>
+          </a:prstGeom>
+          <a:noFill/>
+          <a:ln/>
+        </p:spPr>
+        <p:txBody>
+          <a:bodyPr wrap="square" lIns="0" tIns="0" rIns="0" bIns="0" rtlCol="0" anchor="ctr"/>
+          <a:lstStyle/>
+          <a:p>
+            <a:pPr indent="0" marL="0">
+              <a:buNone/>
+            </a:pPr>
+            <a:r>
+              <a:rPr lang="en-US" sz="1200" dirty="0">
+                <a:solidFill>
+                  <a:srgbClr val="434A63"/>
+                </a:solidFill>
+                <a:latin typeface="Arial" pitchFamily="34" charset="0"/>
+                <a:ea typeface="Arial" pitchFamily="34" charset="-122"/>
+                <a:cs typeface="Arial" pitchFamily="34" charset="-120"/>
+              </a:rPr>
+              <a:t>Die Halle stellt sich vor: die drei Gerätenamen und wer der Controller ist</a:t>
+            </a:r>
+            <a:endParaRPr lang="en-US" sz="1200" dirty="0"/>
+          </a:p>
+        </p:txBody>
+      </p:sp>
+      <p:sp>
+        <p:nvSpPr>
+          <p:cNvPr id="8" name="Text 6"/>
+          <p:cNvSpPr/>
+          <p:nvPr/>
+        </p:nvSpPr>
+        <p:spPr>
+          <a:xfrm>
+            <a:off x="566928" y="2176272"/>
+            <a:ext cx="548640" cy="365760"/>
+          </a:xfrm>
+          <a:prstGeom prst="rect">
+            <a:avLst/>
+          </a:prstGeom>
+          <a:noFill/>
+          <a:ln/>
+        </p:spPr>
+        <p:txBody>
+          <a:bodyPr wrap="square" lIns="0" tIns="0" rIns="0" bIns="0" rtlCol="0" anchor="ctr"/>
+          <a:lstStyle/>
+          <a:p>
+            <a:pPr indent="0" marL="0">
+              <a:buNone/>
+            </a:pPr>
+            <a:r>
+              <a:rPr lang="en-US" sz="1200" b="1" dirty="0">
+                <a:solidFill>
+                  <a:srgbClr val="0F7C86"/>
+                </a:solidFill>
+                <a:latin typeface="Courier New" pitchFamily="34" charset="0"/>
+                <a:ea typeface="Courier New" pitchFamily="34" charset="-122"/>
+                <a:cs typeface="Courier New" pitchFamily="34" charset="-120"/>
+              </a:rPr>
+              <a:t>2</a:t>
+            </a:r>
+            <a:endParaRPr lang="en-US" sz="1200" dirty="0"/>
+          </a:p>
+        </p:txBody>
+      </p:sp>
+      <p:sp>
+        <p:nvSpPr>
+          <p:cNvPr id="9" name="Text 7"/>
+          <p:cNvSpPr/>
+          <p:nvPr/>
+        </p:nvSpPr>
+        <p:spPr>
+          <a:xfrm>
+            <a:off x="1115568" y="2176272"/>
+            <a:ext cx="7461504" cy="365760"/>
+          </a:xfrm>
+          <a:prstGeom prst="rect">
+            <a:avLst/>
+          </a:prstGeom>
+          <a:noFill/>
+          <a:ln/>
+        </p:spPr>
+        <p:txBody>
+          <a:bodyPr wrap="square" lIns="0" tIns="0" rIns="0" bIns="0" rtlCol="0" anchor="ctr"/>
+          <a:lstStyle/>
+          <a:p>
+            <a:pPr indent="0" marL="0">
+              <a:buNone/>
+            </a:pPr>
+            <a:r>
+              <a:rPr lang="en-US" sz="1200" dirty="0">
+                <a:solidFill>
+                  <a:srgbClr val="434A63"/>
+                </a:solidFill>
+                <a:latin typeface="Arial" pitchFamily="34" charset="0"/>
+                <a:ea typeface="Arial" pitchFamily="34" charset="-122"/>
+                <a:cs typeface="Arial" pitchFamily="34" charset="-120"/>
+              </a:rPr>
+              <a:t>Der 32-Millisekunden-Takt: Woran erkennt man Echtzeit im Mitschnitt?</a:t>
+            </a:r>
+            <a:endParaRPr lang="en-US" sz="1200" dirty="0"/>
+          </a:p>
+        </p:txBody>
+      </p:sp>
+      <p:sp>
+        <p:nvSpPr>
+          <p:cNvPr id="10" name="Shape 8"/>
+          <p:cNvSpPr/>
+          <p:nvPr/>
+        </p:nvSpPr>
+        <p:spPr>
+          <a:xfrm>
+            <a:off x="438912" y="2542032"/>
+            <a:ext cx="8266176" cy="365760"/>
+          </a:xfrm>
+          <a:prstGeom prst="rect">
+            <a:avLst/>
+          </a:prstGeom>
+          <a:solidFill>
+            <a:srgbClr val="F5F6FC"/>
+          </a:solidFill>
+          <a:ln/>
+        </p:spPr>
+      </p:sp>
+      <p:sp>
+        <p:nvSpPr>
+          <p:cNvPr id="11" name="Text 9"/>
+          <p:cNvSpPr/>
+          <p:nvPr/>
+        </p:nvSpPr>
+        <p:spPr>
+          <a:xfrm>
+            <a:off x="566928" y="2542032"/>
+            <a:ext cx="548640" cy="365760"/>
+          </a:xfrm>
+          <a:prstGeom prst="rect">
+            <a:avLst/>
+          </a:prstGeom>
+          <a:noFill/>
+          <a:ln/>
+        </p:spPr>
+        <p:txBody>
+          <a:bodyPr wrap="square" lIns="0" tIns="0" rIns="0" bIns="0" rtlCol="0" anchor="ctr"/>
+          <a:lstStyle/>
+          <a:p>
+            <a:pPr indent="0" marL="0">
+              <a:buNone/>
+            </a:pPr>
+            <a:r>
+              <a:rPr lang="en-US" sz="1200" b="1" dirty="0">
+                <a:solidFill>
+                  <a:srgbClr val="0F7C86"/>
+                </a:solidFill>
+                <a:latin typeface="Courier New" pitchFamily="34" charset="0"/>
+                <a:ea typeface="Courier New" pitchFamily="34" charset="-122"/>
+                <a:cs typeface="Courier New" pitchFamily="34" charset="-120"/>
+              </a:rPr>
+              <a:t>3</a:t>
+            </a:r>
+            <a:endParaRPr lang="en-US" sz="1200" dirty="0"/>
+          </a:p>
+        </p:txBody>
+      </p:sp>
+      <p:sp>
+        <p:nvSpPr>
+          <p:cNvPr id="12" name="Text 10"/>
+          <p:cNvSpPr/>
+          <p:nvPr/>
+        </p:nvSpPr>
+        <p:spPr>
+          <a:xfrm>
+            <a:off x="1115568" y="2542032"/>
+            <a:ext cx="7461504" cy="365760"/>
+          </a:xfrm>
+          <a:prstGeom prst="rect">
+            <a:avLst/>
+          </a:prstGeom>
+          <a:noFill/>
+          <a:ln/>
+        </p:spPr>
+        <p:txBody>
+          <a:bodyPr wrap="square" lIns="0" tIns="0" rIns="0" bIns="0" rtlCol="0" anchor="ctr"/>
+          <a:lstStyle/>
+          <a:p>
+            <a:pPr indent="0" marL="0">
+              <a:buNone/>
+            </a:pPr>
+            <a:r>
+              <a:rPr lang="en-US" sz="1200" dirty="0">
+                <a:solidFill>
+                  <a:srgbClr val="434A63"/>
+                </a:solidFill>
+                <a:latin typeface="Arial" pitchFamily="34" charset="0"/>
+                <a:ea typeface="Arial" pitchFamily="34" charset="-122"/>
+                <a:cs typeface="Arial" pitchFamily="34" charset="-120"/>
+              </a:rPr>
+              <a:t>Die Klartext-Frage: Wer kann das MQTT-Topic des Ofens mitlesen?</a:t>
+            </a:r>
+            <a:endParaRPr lang="en-US" sz="1200" dirty="0"/>
+          </a:p>
+        </p:txBody>
+      </p:sp>
+      <p:sp>
+        <p:nvSpPr>
+          <p:cNvPr id="13" name="Text 11"/>
+          <p:cNvSpPr/>
+          <p:nvPr/>
+        </p:nvSpPr>
+        <p:spPr>
+          <a:xfrm>
+            <a:off x="566928" y="2907792"/>
+            <a:ext cx="548640" cy="365760"/>
+          </a:xfrm>
+          <a:prstGeom prst="rect">
+            <a:avLst/>
+          </a:prstGeom>
+          <a:noFill/>
+          <a:ln/>
+        </p:spPr>
+        <p:txBody>
+          <a:bodyPr wrap="square" lIns="0" tIns="0" rIns="0" bIns="0" rtlCol="0" anchor="ctr"/>
+          <a:lstStyle/>
+          <a:p>
+            <a:pPr indent="0" marL="0">
+              <a:buNone/>
+            </a:pPr>
+            <a:r>
+              <a:rPr lang="en-US" sz="1200" b="1" dirty="0">
+                <a:solidFill>
+                  <a:srgbClr val="0F7C86"/>
+                </a:solidFill>
+                <a:latin typeface="Courier New" pitchFamily="34" charset="0"/>
+                <a:ea typeface="Courier New" pitchFamily="34" charset="-122"/>
+                <a:cs typeface="Courier New" pitchFamily="34" charset="-120"/>
+              </a:rPr>
+              <a:t>4</a:t>
+            </a:r>
+            <a:endParaRPr lang="en-US" sz="1200" dirty="0"/>
+          </a:p>
+        </p:txBody>
+      </p:sp>
+      <p:sp>
+        <p:nvSpPr>
+          <p:cNvPr id="14" name="Text 12"/>
+          <p:cNvSpPr/>
+          <p:nvPr/>
+        </p:nvSpPr>
+        <p:spPr>
+          <a:xfrm>
+            <a:off x="1115568" y="2907792"/>
+            <a:ext cx="7461504" cy="365760"/>
+          </a:xfrm>
+          <a:prstGeom prst="rect">
+            <a:avLst/>
+          </a:prstGeom>
+          <a:noFill/>
+          <a:ln/>
+        </p:spPr>
+        <p:txBody>
+          <a:bodyPr wrap="square" lIns="0" tIns="0" rIns="0" bIns="0" rtlCol="0" anchor="ctr"/>
+          <a:lstStyle/>
+          <a:p>
+            <a:pPr indent="0" marL="0">
+              <a:buNone/>
+            </a:pPr>
+            <a:r>
+              <a:rPr lang="en-US" sz="1200" dirty="0">
+                <a:solidFill>
+                  <a:srgbClr val="434A63"/>
+                </a:solidFill>
+                <a:latin typeface="Arial" pitchFamily="34" charset="0"/>
+                <a:ea typeface="Arial" pitchFamily="34" charset="-122"/>
+                <a:cs typeface="Arial" pitchFamily="34" charset="-120"/>
+              </a:rPr>
+              <a:t>Euer eigener Broker: Wozu dienen + und #? Wozu die Retained Message?</a:t>
+            </a:r>
+            <a:endParaRPr lang="en-US" sz="1200" dirty="0"/>
+          </a:p>
+        </p:txBody>
+      </p:sp>
+      <p:sp>
+        <p:nvSpPr>
+          <p:cNvPr id="15" name="Shape 13"/>
+          <p:cNvSpPr/>
+          <p:nvPr/>
+        </p:nvSpPr>
+        <p:spPr>
+          <a:xfrm>
+            <a:off x="438912" y="3273552"/>
+            <a:ext cx="8266176" cy="365760"/>
+          </a:xfrm>
+          <a:prstGeom prst="rect">
+            <a:avLst/>
+          </a:prstGeom>
+          <a:solidFill>
+            <a:srgbClr val="F5F6FC"/>
+          </a:solidFill>
+          <a:ln/>
+        </p:spPr>
+      </p:sp>
+      <p:sp>
+        <p:nvSpPr>
+          <p:cNvPr id="16" name="Text 14"/>
+          <p:cNvSpPr/>
+          <p:nvPr/>
+        </p:nvSpPr>
+        <p:spPr>
+          <a:xfrm>
+            <a:off x="566928" y="3273552"/>
+            <a:ext cx="548640" cy="365760"/>
+          </a:xfrm>
+          <a:prstGeom prst="rect">
+            <a:avLst/>
+          </a:prstGeom>
+          <a:noFill/>
+          <a:ln/>
+        </p:spPr>
+        <p:txBody>
+          <a:bodyPr wrap="square" lIns="0" tIns="0" rIns="0" bIns="0" rtlCol="0" anchor="ctr"/>
+          <a:lstStyle/>
+          <a:p>
+            <a:pPr indent="0" marL="0">
+              <a:buNone/>
+            </a:pPr>
+            <a:r>
+              <a:rPr lang="en-US" sz="1200" b="1" dirty="0">
+                <a:solidFill>
+                  <a:srgbClr val="0F7C86"/>
+                </a:solidFill>
+                <a:latin typeface="Courier New" pitchFamily="34" charset="0"/>
+                <a:ea typeface="Courier New" pitchFamily="34" charset="-122"/>
+                <a:cs typeface="Courier New" pitchFamily="34" charset="-120"/>
+              </a:rPr>
+              <a:t>5</a:t>
+            </a:r>
+            <a:endParaRPr lang="en-US" sz="1200" dirty="0"/>
+          </a:p>
+        </p:txBody>
+      </p:sp>
+      <p:sp>
+        <p:nvSpPr>
+          <p:cNvPr id="17" name="Text 15"/>
+          <p:cNvSpPr/>
+          <p:nvPr/>
+        </p:nvSpPr>
+        <p:spPr>
+          <a:xfrm>
+            <a:off x="1115568" y="3273552"/>
+            <a:ext cx="7461504" cy="365760"/>
+          </a:xfrm>
+          <a:prstGeom prst="rect">
+            <a:avLst/>
+          </a:prstGeom>
+          <a:noFill/>
+          <a:ln/>
+        </p:spPr>
+        <p:txBody>
+          <a:bodyPr wrap="square" lIns="0" tIns="0" rIns="0" bIns="0" rtlCol="0" anchor="ctr"/>
+          <a:lstStyle/>
+          <a:p>
+            <a:pPr indent="0" marL="0">
+              <a:buNone/>
+            </a:pPr>
+            <a:r>
+              <a:rPr lang="en-US" sz="1200" dirty="0">
+                <a:solidFill>
+                  <a:srgbClr val="434A63"/>
+                </a:solidFill>
+                <a:latin typeface="Arial" pitchFamily="34" charset="0"/>
+                <a:ea typeface="Arial" pitchFamily="34" charset="-122"/>
+                <a:cs typeface="Arial" pitchFamily="34" charset="-120"/>
+              </a:rPr>
+              <a:t>Was fehlt eurem Broker für eine echte Halle? Anmeldung, TLS, Rechte je Topic</a:t>
+            </a:r>
+            <a:endParaRPr lang="en-US" sz="1200" dirty="0"/>
+          </a:p>
+        </p:txBody>
+      </p:sp>
+      <p:sp>
+        <p:nvSpPr>
+          <p:cNvPr id="18" name="Shape 16"/>
+          <p:cNvSpPr/>
+          <p:nvPr/>
+        </p:nvSpPr>
+        <p:spPr>
+          <a:xfrm>
+            <a:off x="566928" y="4069080"/>
+            <a:ext cx="32004" cy="256032"/>
+          </a:xfrm>
+          <a:prstGeom prst="rect">
+            <a:avLst/>
+          </a:prstGeom>
+          <a:solidFill>
+            <a:srgbClr val="0F7C86"/>
+          </a:solidFill>
+          <a:ln/>
+        </p:spPr>
+      </p:sp>
+      <p:sp>
+        <p:nvSpPr>
+          <p:cNvPr id="19" name="Text 17"/>
+          <p:cNvSpPr/>
+          <p:nvPr/>
+        </p:nvSpPr>
+        <p:spPr>
+          <a:xfrm>
+            <a:off x="749808" y="4023360"/>
+            <a:ext cx="7827264" cy="402336"/>
+          </a:xfrm>
+          <a:prstGeom prst="rect">
+            <a:avLst/>
+          </a:prstGeom>
+          <a:noFill/>
+          <a:ln/>
+        </p:spPr>
+        <p:txBody>
+          <a:bodyPr wrap="square" lIns="0" tIns="0" rIns="0" bIns="0" rtlCol="0" anchor="ctr"/>
+          <a:lstStyle/>
+          <a:p>
+            <a:pPr indent="0" marL="0">
+              <a:buNone/>
+            </a:pPr>
+            <a:r>
+              <a:rPr lang="en-US" sz="1200" b="1" dirty="0">
+                <a:solidFill>
+                  <a:srgbClr val="434A63"/>
+                </a:solidFill>
+                <a:latin typeface="Arial" pitchFamily="34" charset="0"/>
+                <a:ea typeface="Arial" pitchFamily="34" charset="-122"/>
+                <a:cs typeface="Arial" pitchFamily="34" charset="-120"/>
+              </a:rPr>
+              <a:t>Die Antwort auf Frage 5 ist der Kurs-Broker vom Mittwoch: mit Zugangsdaten, Verschlüsselung und echter Hardware dahinter.</a:t>
+            </a:r>
+            <a:endParaRPr lang="en-US" sz="1200" dirty="0"/>
+          </a:p>
+        </p:txBody>
+      </p:sp>
+      <p:sp>
+        <p:nvSpPr>
+          <p:cNvPr id="20" name="Shape 18"/>
+          <p:cNvSpPr/>
+          <p:nvPr/>
+        </p:nvSpPr>
+        <p:spPr>
+          <a:xfrm>
+            <a:off x="566928" y="4631436"/>
+            <a:ext cx="8010144" cy="0"/>
+          </a:xfrm>
+          <a:prstGeom prst="line">
+            <a:avLst/>
+          </a:prstGeom>
+          <a:noFill/>
+          <a:ln w="9525">
+            <a:solidFill>
+              <a:srgbClr val="DFE3F0"/>
+            </a:solidFill>
+            <a:prstDash val="solid"/>
+          </a:ln>
+        </p:spPr>
+      </p:sp>
+      <p:sp>
+        <p:nvSpPr>
+          <p:cNvPr id="21" name="Text 19"/>
+          <p:cNvSpPr/>
+          <p:nvPr/>
+        </p:nvSpPr>
+        <p:spPr>
+          <a:xfrm>
+            <a:off x="566928" y="4722876"/>
+            <a:ext cx="5029200" cy="237744"/>
+          </a:xfrm>
+          <a:prstGeom prst="rect">
+            <a:avLst/>
+          </a:prstGeom>
+          <a:noFill/>
+          <a:ln/>
+        </p:spPr>
+        <p:txBody>
+          <a:bodyPr wrap="square" lIns="0" tIns="0" rIns="0" bIns="0" rtlCol="0" anchor="ctr"/>
+          <a:lstStyle/>
+          <a:p>
+            <a:pPr indent="0" marL="0">
+              <a:buNone/>
+            </a:pPr>
+            <a:r>
+              <a:rPr lang="en-US" sz="1050" spc="30" kern="0" dirty="0">
+                <a:solidFill>
+                  <a:srgbClr val="5C6377"/>
+                </a:solidFill>
+                <a:latin typeface="Arial" pitchFamily="34" charset="0"/>
+                <a:ea typeface="Arial" pitchFamily="34" charset="-122"/>
+                <a:cs typeface="Arial" pitchFamily="34" charset="-120"/>
+              </a:rPr>
+              <a:t>Auswertung</a:t>
+            </a:r>
+            <a:endParaRPr lang="en-US" sz="1050" dirty="0"/>
+          </a:p>
+        </p:txBody>
+      </p:sp>
+      <p:sp>
+        <p:nvSpPr>
+          <p:cNvPr id="22" name="Text 20"/>
+          <p:cNvSpPr/>
+          <p:nvPr/>
+        </p:nvSpPr>
+        <p:spPr>
+          <a:xfrm>
+            <a:off x="8028432" y="4722876"/>
+            <a:ext cx="548640" cy="237744"/>
+          </a:xfrm>
+          <a:prstGeom prst="rect">
+            <a:avLst/>
+          </a:prstGeom>
+          <a:noFill/>
+          <a:ln/>
+        </p:spPr>
+        <p:txBody>
+          <a:bodyPr wrap="square" lIns="0" tIns="0" rIns="0" bIns="0" rtlCol="0" anchor="ctr"/>
+          <a:lstStyle/>
+          <a:p>
+            <a:pPr algn="r" indent="0" marL="0">
+              <a:buNone/>
+            </a:pPr>
+            <a:r>
+              <a:rPr lang="en-US" sz="1050" dirty="0">
+                <a:solidFill>
+                  <a:srgbClr val="5C6377"/>
+                </a:solidFill>
+                <a:latin typeface="Arial" pitchFamily="34" charset="0"/>
+                <a:ea typeface="Arial" pitchFamily="34" charset="-122"/>
+                <a:cs typeface="Arial" pitchFamily="34" charset="-120"/>
+              </a:rPr>
+              <a:t>19/20</a:t>
+            </a:r>
+            <a:endParaRPr lang="en-US" sz="1050" dirty="0"/>
+          </a:p>
+        </p:txBody>
+      </p:sp>
+    </p:spTree>
+  </p:cSld>
+  <p:clrMapOvr>
+    <a:masterClrMapping/>
+  </p:clrMapOvr>
+</p:sld>
+</file>
+
+<file path=ppt/slides/slide24.xml><?xml version="1.0" encoding="utf-8"?>
+<p:sld xmlns:a="http://schemas.openxmlformats.org/drawingml/2006/main" xmlns:r="http://schemas.openxmlformats.org/officeDocument/2006/relationships" xmlns:p="http://schemas.openxmlformats.org/presentationml/2006/main">
+  <p:cSld name="Slide 24">
+    <p:bg>
+      <p:bgPr>
+        <a:solidFill>
+          <a:srgbClr val="FFFFFF"/>
+        </a:solidFill>
+      </p:bgPr>
+    </p:bg>
+    <p:spTree>
+      <p:nvGrpSpPr>
+        <p:cNvPr id="1" name=""/>
+        <p:cNvGrpSpPr/>
+        <p:nvPr/>
+      </p:nvGrpSpPr>
+      <p:grpSpPr>
+        <a:xfrm>
+          <a:off x="0" y="0"/>
+          <a:ext cx="0" cy="0"/>
+          <a:chOff x="0" y="0"/>
+          <a:chExt cx="0" cy="0"/>
+        </a:xfrm>
+      </p:grpSpPr>
+      <p:sp>
+        <p:nvSpPr>
+          <p:cNvPr id="2" name="Shape 0"/>
+          <p:cNvSpPr/>
+          <p:nvPr/>
+        </p:nvSpPr>
+        <p:spPr>
+          <a:xfrm>
+            <a:off x="566928" y="201168"/>
+            <a:ext cx="475488" cy="50292"/>
+          </a:xfrm>
+          <a:prstGeom prst="rect">
+            <a:avLst/>
+          </a:prstGeom>
+          <a:solidFill>
+            <a:srgbClr val="0F7C86"/>
+          </a:solidFill>
+          <a:ln/>
+        </p:spPr>
+      </p:sp>
+      <p:sp>
+        <p:nvSpPr>
+          <p:cNvPr id="3" name="Text 1"/>
+          <p:cNvSpPr/>
+          <p:nvPr/>
+        </p:nvSpPr>
+        <p:spPr>
+          <a:xfrm>
+            <a:off x="566928" y="384048"/>
+            <a:ext cx="8010144" cy="237744"/>
+          </a:xfrm>
+          <a:prstGeom prst="rect">
+            <a:avLst/>
+          </a:prstGeom>
+          <a:noFill/>
+          <a:ln/>
+        </p:spPr>
+        <p:txBody>
+          <a:bodyPr wrap="square" lIns="0" tIns="0" rIns="0" bIns="0" rtlCol="0" anchor="ctr"/>
+          <a:lstStyle/>
+          <a:p>
+            <a:pPr indent="0" marL="0">
+              <a:buNone/>
+            </a:pPr>
+            <a:r>
+              <a:rPr lang="en-US" sz="1150" b="1" spc="180" kern="0" dirty="0">
+                <a:solidFill>
+                  <a:srgbClr val="0F7C86"/>
+                </a:solidFill>
+                <a:latin typeface="Arial" pitchFamily="34" charset="0"/>
+                <a:ea typeface="Arial" pitchFamily="34" charset="-122"/>
+                <a:cs typeface="Arial" pitchFamily="34" charset="-120"/>
+              </a:rPr>
+              <a:t>AUSBLICK</a:t>
+            </a:r>
+            <a:endParaRPr lang="en-US" sz="1150" dirty="0"/>
+          </a:p>
+        </p:txBody>
+      </p:sp>
+      <p:sp>
+        <p:nvSpPr>
+          <p:cNvPr id="4" name="Text 2"/>
+          <p:cNvSpPr/>
+          <p:nvPr/>
+        </p:nvSpPr>
+        <p:spPr>
+          <a:xfrm>
+            <a:off x="566928" y="731520"/>
+            <a:ext cx="8010144" cy="603504"/>
+          </a:xfrm>
+          <a:prstGeom prst="rect">
+            <a:avLst/>
+          </a:prstGeom>
+          <a:noFill/>
+          <a:ln/>
+        </p:spPr>
+        <p:txBody>
+          <a:bodyPr wrap="square" lIns="0" tIns="0" rIns="0" bIns="0" rtlCol="0" anchor="t"/>
+          <a:lstStyle/>
+          <a:p>
+            <a:pPr indent="0" marL="0">
+              <a:buNone/>
+            </a:pPr>
+            <a:r>
+              <a:rPr lang="en-US" sz="2600" b="1" dirty="0">
+                <a:solidFill>
+                  <a:srgbClr val="272E52"/>
+                </a:solidFill>
+                <a:latin typeface="Arial" pitchFamily="34" charset="0"/>
+                <a:ea typeface="Arial" pitchFamily="34" charset="-122"/>
+                <a:cs typeface="Arial" pitchFamily="34" charset="-120"/>
+              </a:rPr>
+              <a:t>Bis Mittwoch</a:t>
+            </a:r>
+            <a:endParaRPr lang="en-US" sz="2600" dirty="0"/>
+          </a:p>
+        </p:txBody>
+      </p:sp>
+      <p:sp>
+        <p:nvSpPr>
+          <p:cNvPr id="5" name="Text 3"/>
+          <p:cNvSpPr/>
+          <p:nvPr/>
+        </p:nvSpPr>
+        <p:spPr>
+          <a:xfrm>
+            <a:off x="566928" y="1444752"/>
+            <a:ext cx="8010144" cy="438912"/>
+          </a:xfrm>
+          <a:prstGeom prst="rect">
+            <a:avLst/>
+          </a:prstGeom>
+          <a:noFill/>
+          <a:ln/>
+        </p:spPr>
+        <p:txBody>
+          <a:bodyPr wrap="square" lIns="0" tIns="0" rIns="0" bIns="0" rtlCol="0" anchor="t"/>
+          <a:lstStyle/>
+          <a:p>
+            <a:pPr indent="0" marL="0">
+              <a:buNone/>
+            </a:pPr>
+            <a:r>
+              <a:rPr lang="en-US" sz="1300" dirty="0">
+                <a:solidFill>
+                  <a:srgbClr val="5C6377"/>
+                </a:solidFill>
+                <a:latin typeface="Arial" pitchFamily="34" charset="0"/>
+                <a:ea typeface="Arial" pitchFamily="34" charset="-122"/>
+                <a:cs typeface="Arial" pitchFamily="34" charset="-120"/>
+              </a:rPr>
+              <a:t>Mittwoch funkt der ganze Kurs über einen gemeinsamen Broker und steuert damit echte Hardware beim Dozenten an.</a:t>
+            </a:r>
+            <a:endParaRPr lang="en-US" sz="1300" dirty="0"/>
+          </a:p>
+        </p:txBody>
+      </p:sp>
+      <p:sp>
+        <p:nvSpPr>
+          <p:cNvPr id="6" name="Shape 4"/>
+          <p:cNvSpPr/>
+          <p:nvPr/>
+        </p:nvSpPr>
+        <p:spPr>
+          <a:xfrm>
+            <a:off x="566928" y="1975104"/>
+            <a:ext cx="2523744" cy="1920240"/>
+          </a:xfrm>
+          <a:prstGeom prst="rect">
+            <a:avLst/>
+          </a:prstGeom>
+          <a:solidFill>
+            <a:srgbClr val="F5F6FC"/>
+          </a:solidFill>
+          <a:ln/>
+        </p:spPr>
+      </p:sp>
+      <p:sp>
+        <p:nvSpPr>
+          <p:cNvPr id="7" name="Shape 5"/>
+          <p:cNvSpPr/>
+          <p:nvPr/>
+        </p:nvSpPr>
+        <p:spPr>
+          <a:xfrm>
+            <a:off x="566928" y="1975104"/>
+            <a:ext cx="41148" cy="1920240"/>
+          </a:xfrm>
+          <a:prstGeom prst="rect">
+            <a:avLst/>
+          </a:prstGeom>
+          <a:solidFill>
+            <a:srgbClr val="0F7C86"/>
+          </a:solidFill>
+          <a:ln/>
+        </p:spPr>
+      </p:sp>
+      <p:sp>
+        <p:nvSpPr>
+          <p:cNvPr id="8" name="Text 6"/>
+          <p:cNvSpPr/>
+          <p:nvPr/>
+        </p:nvSpPr>
+        <p:spPr>
+          <a:xfrm>
+            <a:off x="804672" y="2121408"/>
+            <a:ext cx="2121408" cy="256032"/>
+          </a:xfrm>
+          <a:prstGeom prst="rect">
+            <a:avLst/>
+          </a:prstGeom>
+          <a:noFill/>
+          <a:ln/>
+        </p:spPr>
+        <p:txBody>
+          <a:bodyPr wrap="square" lIns="0" tIns="0" rIns="0" bIns="0" rtlCol="0" anchor="t"/>
+          <a:lstStyle/>
+          <a:p>
+            <a:pPr indent="0" marL="0">
+              <a:buNone/>
+            </a:pPr>
+            <a:r>
+              <a:rPr lang="en-US" sz="1300" b="1" dirty="0">
+                <a:solidFill>
+                  <a:srgbClr val="272E52"/>
+                </a:solidFill>
+                <a:latin typeface="Arial" pitchFamily="34" charset="0"/>
+                <a:ea typeface="Arial" pitchFamily="34" charset="-122"/>
+                <a:cs typeface="Arial" pitchFamily="34" charset="-120"/>
+              </a:rPr>
+              <a:t>Ein Broker für alle</a:t>
+            </a:r>
+            <a:endParaRPr lang="en-US" sz="1300" dirty="0"/>
+          </a:p>
+        </p:txBody>
+      </p:sp>
+      <p:sp>
+        <p:nvSpPr>
+          <p:cNvPr id="9" name="Text 7"/>
+          <p:cNvSpPr/>
+          <p:nvPr/>
+        </p:nvSpPr>
+        <p:spPr>
+          <a:xfrm>
+            <a:off x="804672" y="2423160"/>
+            <a:ext cx="2121408" cy="1353312"/>
+          </a:xfrm>
+          <a:prstGeom prst="rect">
+            <a:avLst/>
+          </a:prstGeom>
+          <a:noFill/>
+          <a:ln/>
+        </p:spPr>
+        <p:txBody>
+          <a:bodyPr wrap="square" lIns="0" tIns="0" rIns="0" bIns="0" rtlCol="0" anchor="t"/>
+          <a:lstStyle/>
+          <a:p>
+            <a:pPr indent="0" marL="0">
+              <a:lnSpc>
+                <a:spcPct val="92000"/>
+              </a:lnSpc>
+              <a:buNone/>
+            </a:pPr>
+            <a:r>
+              <a:rPr lang="en-US" sz="1150" dirty="0">
+                <a:solidFill>
+                  <a:srgbClr val="434A63"/>
+                </a:solidFill>
+                <a:latin typeface="Arial" pitchFamily="34" charset="0"/>
+                <a:ea typeface="Arial" pitchFamily="34" charset="-122"/>
+                <a:cs typeface="Arial" pitchFamily="34" charset="-120"/>
+              </a:rPr>
+              <a:t>Statt jeder für sich sendet der ganze Kurs an denselben Broker. Ihr seht die Nachrichten der anderen live.</a:t>
+            </a:r>
+            <a:endParaRPr lang="en-US" sz="1150" dirty="0"/>
+          </a:p>
+        </p:txBody>
+      </p:sp>
+      <p:sp>
+        <p:nvSpPr>
+          <p:cNvPr id="10" name="Shape 8"/>
+          <p:cNvSpPr/>
+          <p:nvPr/>
+        </p:nvSpPr>
+        <p:spPr>
+          <a:xfrm>
+            <a:off x="3310128" y="1975104"/>
+            <a:ext cx="2523744" cy="1920240"/>
+          </a:xfrm>
+          <a:prstGeom prst="rect">
+            <a:avLst/>
+          </a:prstGeom>
+          <a:solidFill>
+            <a:srgbClr val="F5F6FC"/>
+          </a:solidFill>
+          <a:ln/>
+        </p:spPr>
+      </p:sp>
+      <p:sp>
+        <p:nvSpPr>
+          <p:cNvPr id="11" name="Shape 9"/>
+          <p:cNvSpPr/>
+          <p:nvPr/>
+        </p:nvSpPr>
+        <p:spPr>
+          <a:xfrm>
+            <a:off x="3310128" y="1975104"/>
+            <a:ext cx="41148" cy="1920240"/>
+          </a:xfrm>
+          <a:prstGeom prst="rect">
+            <a:avLst/>
+          </a:prstGeom>
+          <a:solidFill>
+            <a:srgbClr val="0F7C86"/>
+          </a:solidFill>
+          <a:ln/>
+        </p:spPr>
+      </p:sp>
+      <p:sp>
+        <p:nvSpPr>
+          <p:cNvPr id="12" name="Text 10"/>
+          <p:cNvSpPr/>
+          <p:nvPr/>
+        </p:nvSpPr>
+        <p:spPr>
+          <a:xfrm>
+            <a:off x="3547872" y="2121408"/>
+            <a:ext cx="2121408" cy="256032"/>
+          </a:xfrm>
+          <a:prstGeom prst="rect">
+            <a:avLst/>
+          </a:prstGeom>
+          <a:noFill/>
+          <a:ln/>
+        </p:spPr>
+        <p:txBody>
+          <a:bodyPr wrap="square" lIns="0" tIns="0" rIns="0" bIns="0" rtlCol="0" anchor="t"/>
+          <a:lstStyle/>
+          <a:p>
+            <a:pPr indent="0" marL="0">
+              <a:buNone/>
+            </a:pPr>
+            <a:r>
+              <a:rPr lang="en-US" sz="1300" b="1" dirty="0">
+                <a:solidFill>
+                  <a:srgbClr val="272E52"/>
+                </a:solidFill>
+                <a:latin typeface="Arial" pitchFamily="34" charset="0"/>
+                <a:ea typeface="Arial" pitchFamily="34" charset="-122"/>
+                <a:cs typeface="Arial" pitchFamily="34" charset="-120"/>
+              </a:rPr>
+              <a:t>Diesmal abgesichert</a:t>
+            </a:r>
+            <a:endParaRPr lang="en-US" sz="1300" dirty="0"/>
+          </a:p>
+        </p:txBody>
+      </p:sp>
+      <p:sp>
+        <p:nvSpPr>
+          <p:cNvPr id="13" name="Text 11"/>
+          <p:cNvSpPr/>
+          <p:nvPr/>
+        </p:nvSpPr>
+        <p:spPr>
+          <a:xfrm>
+            <a:off x="3547872" y="2423160"/>
+            <a:ext cx="2121408" cy="1353312"/>
+          </a:xfrm>
+          <a:prstGeom prst="rect">
+            <a:avLst/>
+          </a:prstGeom>
+          <a:noFill/>
+          <a:ln/>
+        </p:spPr>
+        <p:txBody>
+          <a:bodyPr wrap="square" lIns="0" tIns="0" rIns="0" bIns="0" rtlCol="0" anchor="t"/>
+          <a:lstStyle/>
+          <a:p>
+            <a:pPr indent="0" marL="0">
+              <a:lnSpc>
+                <a:spcPct val="92000"/>
+              </a:lnSpc>
+              <a:buNone/>
+            </a:pPr>
+            <a:r>
+              <a:rPr lang="en-US" sz="1150" dirty="0">
+                <a:solidFill>
+                  <a:srgbClr val="434A63"/>
+                </a:solidFill>
+                <a:latin typeface="Arial" pitchFamily="34" charset="0"/>
+                <a:ea typeface="Arial" pitchFamily="34" charset="-122"/>
+                <a:cs typeface="Arial" pitchFamily="34" charset="-120"/>
+              </a:rPr>
+              <a:t>Mit Zugangsdaten und Verschlüsselung (TLS), genau die Antwort auf die Klartext-Frage von heute.</a:t>
+            </a:r>
+            <a:endParaRPr lang="en-US" sz="1150" dirty="0"/>
+          </a:p>
+        </p:txBody>
+      </p:sp>
+      <p:sp>
+        <p:nvSpPr>
+          <p:cNvPr id="14" name="Shape 12"/>
+          <p:cNvSpPr/>
+          <p:nvPr/>
+        </p:nvSpPr>
+        <p:spPr>
+          <a:xfrm>
+            <a:off x="6053328" y="1975104"/>
+            <a:ext cx="2523744" cy="1920240"/>
+          </a:xfrm>
+          <a:prstGeom prst="rect">
+            <a:avLst/>
+          </a:prstGeom>
+          <a:solidFill>
+            <a:srgbClr val="F5F6FC"/>
+          </a:solidFill>
+          <a:ln/>
+        </p:spPr>
+      </p:sp>
+      <p:sp>
+        <p:nvSpPr>
+          <p:cNvPr id="15" name="Shape 13"/>
+          <p:cNvSpPr/>
+          <p:nvPr/>
+        </p:nvSpPr>
+        <p:spPr>
+          <a:xfrm>
+            <a:off x="6053328" y="1975104"/>
+            <a:ext cx="41148" cy="1920240"/>
+          </a:xfrm>
+          <a:prstGeom prst="rect">
+            <a:avLst/>
+          </a:prstGeom>
+          <a:solidFill>
+            <a:srgbClr val="0F7C86"/>
+          </a:solidFill>
+          <a:ln/>
+        </p:spPr>
+      </p:sp>
+      <p:sp>
+        <p:nvSpPr>
+          <p:cNvPr id="16" name="Text 14"/>
+          <p:cNvSpPr/>
+          <p:nvPr/>
+        </p:nvSpPr>
+        <p:spPr>
+          <a:xfrm>
+            <a:off x="6291072" y="2121408"/>
+            <a:ext cx="2121408" cy="256032"/>
+          </a:xfrm>
+          <a:prstGeom prst="rect">
+            <a:avLst/>
+          </a:prstGeom>
+          <a:noFill/>
+          <a:ln/>
+        </p:spPr>
+        <p:txBody>
+          <a:bodyPr wrap="square" lIns="0" tIns="0" rIns="0" bIns="0" rtlCol="0" anchor="t"/>
+          <a:lstStyle/>
+          <a:p>
+            <a:pPr indent="0" marL="0">
+              <a:buNone/>
+            </a:pPr>
+            <a:r>
+              <a:rPr lang="en-US" sz="1300" b="1" dirty="0">
+                <a:solidFill>
+                  <a:srgbClr val="272E52"/>
+                </a:solidFill>
+                <a:latin typeface="Arial" pitchFamily="34" charset="0"/>
+                <a:ea typeface="Arial" pitchFamily="34" charset="-122"/>
+                <a:cs typeface="Arial" pitchFamily="34" charset="-120"/>
+              </a:rPr>
+              <a:t>Nichts vorbereiten</a:t>
+            </a:r>
+            <a:endParaRPr lang="en-US" sz="1300" dirty="0"/>
+          </a:p>
+        </p:txBody>
+      </p:sp>
+      <p:sp>
+        <p:nvSpPr>
+          <p:cNvPr id="17" name="Text 15"/>
+          <p:cNvSpPr/>
+          <p:nvPr/>
+        </p:nvSpPr>
+        <p:spPr>
+          <a:xfrm>
+            <a:off x="6291072" y="2423160"/>
+            <a:ext cx="2121408" cy="1353312"/>
+          </a:xfrm>
+          <a:prstGeom prst="rect">
+            <a:avLst/>
+          </a:prstGeom>
+          <a:noFill/>
+          <a:ln/>
+        </p:spPr>
+        <p:txBody>
+          <a:bodyPr wrap="square" lIns="0" tIns="0" rIns="0" bIns="0" rtlCol="0" anchor="t"/>
+          <a:lstStyle/>
+          <a:p>
+            <a:pPr indent="0" marL="0">
+              <a:lnSpc>
+                <a:spcPct val="92000"/>
+              </a:lnSpc>
+              <a:buNone/>
+            </a:pPr>
+            <a:r>
+              <a:rPr lang="en-US" sz="1150" dirty="0">
+                <a:solidFill>
+                  <a:srgbClr val="434A63"/>
+                </a:solidFill>
+                <a:latin typeface="Arial" pitchFamily="34" charset="0"/>
+                <a:ea typeface="Arial" pitchFamily="34" charset="-122"/>
+                <a:cs typeface="Arial" pitchFamily="34" charset="-120"/>
+              </a:rPr>
+              <a:t>Ein Browser genügt. Wer mag, spielt die Übung von heute mit eigenen Topics weiter.</a:t>
+            </a:r>
+            <a:endParaRPr lang="en-US" sz="1150" dirty="0"/>
+          </a:p>
+        </p:txBody>
+      </p:sp>
+      <p:sp>
+        <p:nvSpPr>
+          <p:cNvPr id="18" name="Shape 16"/>
+          <p:cNvSpPr/>
+          <p:nvPr/>
+        </p:nvSpPr>
+        <p:spPr>
+          <a:xfrm>
+            <a:off x="566928" y="4160520"/>
+            <a:ext cx="32004" cy="256032"/>
+          </a:xfrm>
+          <a:prstGeom prst="rect">
+            <a:avLst/>
+          </a:prstGeom>
+          <a:solidFill>
+            <a:srgbClr val="0F7C86"/>
+          </a:solidFill>
+          <a:ln/>
+        </p:spPr>
+      </p:sp>
+      <p:sp>
+        <p:nvSpPr>
+          <p:cNvPr id="19" name="Text 17"/>
+          <p:cNvSpPr/>
+          <p:nvPr/>
+        </p:nvSpPr>
+        <p:spPr>
+          <a:xfrm>
+            <a:off x="749808" y="4114800"/>
+            <a:ext cx="7827264" cy="402336"/>
+          </a:xfrm>
+          <a:prstGeom prst="rect">
+            <a:avLst/>
+          </a:prstGeom>
+          <a:noFill/>
+          <a:ln/>
+        </p:spPr>
+        <p:txBody>
+          <a:bodyPr wrap="square" lIns="0" tIns="0" rIns="0" bIns="0" rtlCol="0" anchor="ctr"/>
+          <a:lstStyle/>
+          <a:p>
+            <a:pPr indent="0" marL="0">
+              <a:buNone/>
+            </a:pPr>
+            <a:r>
+              <a:rPr lang="en-US" sz="1200" b="1" dirty="0">
+                <a:solidFill>
+                  <a:srgbClr val="434A63"/>
+                </a:solidFill>
+                <a:latin typeface="Arial" pitchFamily="34" charset="0"/>
+                <a:ea typeface="Arial" pitchFamily="34" charset="-122"/>
+                <a:cs typeface="Arial" pitchFamily="34" charset="-120"/>
+              </a:rPr>
+              <a:t>Nächster Termin: Mittwoch, 30. September um 18:00 Uhr, MQTT live.</a:t>
+            </a:r>
+            <a:endParaRPr lang="en-US" sz="1200" dirty="0"/>
+          </a:p>
+        </p:txBody>
+      </p:sp>
+      <p:sp>
+        <p:nvSpPr>
+          <p:cNvPr id="20" name="Shape 18"/>
+          <p:cNvSpPr/>
+          <p:nvPr/>
+        </p:nvSpPr>
+        <p:spPr>
+          <a:xfrm>
+            <a:off x="566928" y="4631436"/>
+            <a:ext cx="8010144" cy="0"/>
+          </a:xfrm>
+          <a:prstGeom prst="line">
+            <a:avLst/>
+          </a:prstGeom>
+          <a:noFill/>
+          <a:ln w="9525">
+            <a:solidFill>
+              <a:srgbClr val="DFE3F0"/>
+            </a:solidFill>
+            <a:prstDash val="solid"/>
+          </a:ln>
+        </p:spPr>
+      </p:sp>
+      <p:sp>
+        <p:nvSpPr>
+          <p:cNvPr id="21" name="Text 19"/>
+          <p:cNvSpPr/>
+          <p:nvPr/>
+        </p:nvSpPr>
+        <p:spPr>
+          <a:xfrm>
+            <a:off x="566928" y="4722876"/>
+            <a:ext cx="5029200" cy="237744"/>
+          </a:xfrm>
+          <a:prstGeom prst="rect">
+            <a:avLst/>
+          </a:prstGeom>
+          <a:noFill/>
+          <a:ln/>
+        </p:spPr>
+        <p:txBody>
+          <a:bodyPr wrap="square" lIns="0" tIns="0" rIns="0" bIns="0" rtlCol="0" anchor="ctr"/>
+          <a:lstStyle/>
+          <a:p>
+            <a:pPr indent="0" marL="0">
+              <a:buNone/>
+            </a:pPr>
+            <a:r>
+              <a:rPr lang="en-US" sz="1050" spc="30" kern="0" dirty="0">
+                <a:solidFill>
+                  <a:srgbClr val="5C6377"/>
+                </a:solidFill>
+                <a:latin typeface="Arial" pitchFamily="34" charset="0"/>
+                <a:ea typeface="Arial" pitchFamily="34" charset="-122"/>
+                <a:cs typeface="Arial" pitchFamily="34" charset="-120"/>
+              </a:rPr>
+              <a:t>Abschluss</a:t>
+            </a:r>
+            <a:endParaRPr lang="en-US" sz="1050" dirty="0"/>
+          </a:p>
+        </p:txBody>
+      </p:sp>
+      <p:sp>
+        <p:nvSpPr>
+          <p:cNvPr id="22" name="Text 20"/>
+          <p:cNvSpPr/>
+          <p:nvPr/>
+        </p:nvSpPr>
+        <p:spPr>
+          <a:xfrm>
+            <a:off x="8028432" y="4722876"/>
+            <a:ext cx="548640" cy="237744"/>
+          </a:xfrm>
+          <a:prstGeom prst="rect">
+            <a:avLst/>
+          </a:prstGeom>
+          <a:noFill/>
+          <a:ln/>
+        </p:spPr>
+        <p:txBody>
+          <a:bodyPr wrap="square" lIns="0" tIns="0" rIns="0" bIns="0" rtlCol="0" anchor="ctr"/>
+          <a:lstStyle/>
+          <a:p>
+            <a:pPr algn="r" indent="0" marL="0">
+              <a:buNone/>
+            </a:pPr>
+            <a:r>
+              <a:rPr lang="en-US" sz="1050" dirty="0">
+                <a:solidFill>
+                  <a:srgbClr val="5C6377"/>
+                </a:solidFill>
+                <a:latin typeface="Arial" pitchFamily="34" charset="0"/>
+                <a:ea typeface="Arial" pitchFamily="34" charset="-122"/>
+                <a:cs typeface="Arial" pitchFamily="34" charset="-120"/>
+              </a:rPr>
+              <a:t>20/20</a:t>
+            </a:r>
+            <a:endParaRPr lang="en-US" sz="1050" dirty="0"/>
+          </a:p>
+        </p:txBody>
+      </p:sp>
+    </p:spTree>
+  </p:cSld>
+  <p:clrMapOvr>
+    <a:masterClrMapping/>
+  </p:clrMapOvr>
+</p:sld>
+</file>
+
+<file path=ppt/slides/slide25.xml><?xml version="1.0" encoding="utf-8"?>
+<p:sld xmlns:a="http://schemas.openxmlformats.org/drawingml/2006/main" xmlns:r="http://schemas.openxmlformats.org/officeDocument/2006/relationships" xmlns:p="http://schemas.openxmlformats.org/presentationml/2006/main">
+  <p:cSld name="Slide 25">
     <p:bg>
       <p:bgPr>
         <a:solidFill>
@@ -9785,7 +10931,7 @@
                 <a:ea typeface="Arial" pitchFamily="34" charset="-122"/>
                 <a:cs typeface="Arial" pitchFamily="34" charset="-120"/>
               </a:rPr>
-              <a:t>Mitschnitt, Anleitung und alle Erklärungen bleiben zum Nachlesen auf der Kursseite.</a:t>
+              <a:t>Mitschnitt, beide Übungen und alle Erklärungen bleiben zum Nachlesen auf der Kursseite.</a:t>
             </a:r>
             <a:endParaRPr lang="en-US" sz="1400" dirty="0"/>
           </a:p>
@@ -9824,7 +10970,7 @@
                 <a:ea typeface="Arial" pitchFamily="34" charset="-122"/>
                 <a:cs typeface="Arial" pitchFamily="34" charset="-120"/>
               </a:rPr>
-              <a:t>Montag, 28. September · Sensorik und Edge</a:t>
+              <a:t>Mittwoch, 30. September · MQTT live</a:t>
             </a:r>
             <a:endParaRPr lang="en-US" sz="1600" dirty="0"/>
           </a:p>
@@ -10010,7 +11156,7 @@
                 <a:ea typeface="Arial" pitchFamily="34" charset="-122"/>
                 <a:cs typeface="Arial" pitchFamily="34" charset="-120"/>
               </a:rPr>
-              <a:t>HTTP, DNS, DHCP.</a:t>
+              <a:t>HTTP, DNS, DHCP. Spricht der Backofen</a:t>
             </a:r>
             <a:endParaRPr lang="en-US" sz="2200" dirty="0"/>
           </a:p>
@@ -10027,7 +11173,7 @@
                 <a:ea typeface="Arial" pitchFamily="34" charset="-122"/>
                 <a:cs typeface="Arial" pitchFamily="34" charset="-120"/>
               </a:rPr>
-              <a:t>Spricht die Presse in Halle 1 auch HTTP?</a:t>
+              <a:t>in einer Großbäckerei auch HTTP?</a:t>
             </a:r>
             <a:endParaRPr lang="en-US" sz="2200" dirty="0"/>
           </a:p>
@@ -10187,7 +11333,7 @@
                 <a:ea typeface="Arial" pitchFamily="34" charset="-122"/>
                 <a:cs typeface="Arial" pitchFamily="34" charset="-120"/>
               </a:rPr>
-              <a:t>2/18</a:t>
+              <a:t>2/20</a:t>
             </a:r>
             <a:endParaRPr lang="en-US" sz="1050" dirty="0"/>
           </a:p>
@@ -10400,7 +11546,7 @@
                 <a:ea typeface="Arial" pitchFamily="34" charset="-122"/>
                 <a:cs typeface="Arial" pitchFamily="34" charset="-120"/>
               </a:rPr>
-              <a:t>Willkommen in der OT. Ab heute schauen wir dorthin, wo eure IT-Kenntnisse auf Maschinen treffen.</a:t>
+              <a:t>Ab heute schauen wir dorthin, wo eure IT-Kenntnisse auf Maschinen treffen: zum Beispiel in die Backhalle einer Großbäckerei.</a:t>
             </a:r>
             <a:endParaRPr lang="en-US" sz="1200" dirty="0"/>
           </a:p>
@@ -10501,7 +11647,7 @@
                 <a:ea typeface="Arial" pitchFamily="34" charset="-122"/>
                 <a:cs typeface="Arial" pitchFamily="34" charset="-120"/>
               </a:rPr>
-              <a:t>3/18</a:t>
+              <a:t>3/20</a:t>
             </a:r>
             <a:endParaRPr lang="en-US" sz="1050" dirty="0"/>
           </a:p>
@@ -11024,7 +12170,7 @@
                 <a:ea typeface="Arial" pitchFamily="34" charset="-122"/>
                 <a:cs typeface="Arial" pitchFamily="34" charset="-120"/>
               </a:rPr>
-              <a:t>4/18</a:t>
+              <a:t>4/20</a:t>
             </a:r>
             <a:endParaRPr lang="en-US" sz="1050" dirty="0"/>
           </a:p>
@@ -11237,7 +12383,7 @@
                 <a:ea typeface="Arial" pitchFamily="34" charset="-122"/>
                 <a:cs typeface="Arial" pitchFamily="34" charset="-120"/>
               </a:rPr>
-              <a:t>Diesen Weg nehmt ihr heute zweimal: jetzt als Landkarte und nachher Paket für Paket im Mitschnitt.</a:t>
+              <a:t>Diesen Weg nehmt ihr heute dreimal: jetzt als Landkarte, dann im Mitschnitt und zum Schluss mit eurem eigenen Broker.</a:t>
             </a:r>
             <a:endParaRPr lang="en-US" sz="1200" dirty="0"/>
           </a:p>
@@ -11338,7 +12484,7 @@
                 <a:ea typeface="Arial" pitchFamily="34" charset="-122"/>
                 <a:cs typeface="Arial" pitchFamily="34" charset="-120"/>
               </a:rPr>
-              <a:t>5/18</a:t>
+              <a:t>5/20</a:t>
             </a:r>
             <a:endParaRPr lang="en-US" sz="1050" dirty="0"/>
           </a:p>
@@ -11652,7 +12798,7 @@
                 <a:ea typeface="Arial" pitchFamily="34" charset="-122"/>
                 <a:cs typeface="Arial" pitchFamily="34" charset="-120"/>
               </a:rPr>
-              <a:t>6/18</a:t>
+              <a:t>6/20</a:t>
             </a:r>
             <a:endParaRPr lang="en-US" sz="1050" dirty="0"/>
           </a:p>
@@ -11865,7 +13011,7 @@
                 <a:ea typeface="Arial" pitchFamily="34" charset="-122"/>
                 <a:cs typeface="Arial" pitchFamily="34" charset="-120"/>
               </a:rPr>
-              <a:t>MQTT lest ihr heute im Klartext mit. Genau aus diesem Fund wird am Montag die Sicherheitsdiskussion.</a:t>
+              <a:t>MQTT lest ihr in der Praxiszeit zuerst im Mitschnitt mit. Danach betreibt ihr den Broker selbst, in einem Container.</a:t>
             </a:r>
             <a:endParaRPr lang="en-US" sz="1200" dirty="0"/>
           </a:p>
@@ -11966,7 +13112,7 @@
                 <a:ea typeface="Arial" pitchFamily="34" charset="-122"/>
                 <a:cs typeface="Arial" pitchFamily="34" charset="-120"/>
               </a:rPr>
-              <a:t>7/18</a:t>
+              <a:t>7/20</a:t>
             </a:r>
             <a:endParaRPr lang="en-US" sz="1050" dirty="0"/>
           </a:p>

--- a/folien/09-industrie-iot.pptx
+++ b/folien/09-industrie-iot.pptx
@@ -30,9 +30,10 @@
     <p:sldId id="278" r:id="rId24"/>
     <p:sldId id="279" r:id="rId25"/>
     <p:sldId id="280" r:id="rId26"/>
+    <p:sldId id="281" r:id="rId27"/>
   </p:sldIdLst>
   <p:notesMasterIdLst>
-    <p:notesMasterId r:id="rId27"/>
+    <p:notesMasterId r:id="rId28"/>
   </p:notesMasterIdLst>
   <p:sldSz cx="9144000" cy="5143500"/>
   <p:notesSz cx="5143500" cy="9144000"/>
@@ -2046,6 +2047,94 @@
             <a:fld id="{F7021451-1387-4CA6-816F-3879F97B5CBC}" type="slidenum">
               <a:rPr lang="en-US"/>
               <a:t>25</a:t>
+            </a:fld>
+            <a:endParaRPr lang="en-US"/>
+          </a:p>
+        </p:txBody>
+      </p:sp>
+    </p:spTree>
+    <p:extLst>
+      <p:ext uri="{BB962C8B-B14F-4D97-AF65-F5344CB8AC3E}">
+        <p14:creationId xmlns:p14="http://schemas.microsoft.com/office/powerpoint/2010/main" val="1024086991"/>
+      </p:ext>
+    </p:extLst>
+  </p:cSld>
+  <p:clrMapOvr>
+    <a:masterClrMapping/>
+  </p:clrMapOvr>
+</p:notes>
+</file>
+
+<file path=ppt/notesSlides/notesSlide26.xml><?xml version="1.0" encoding="utf-8"?>
+<p:notes xmlns:a="http://schemas.openxmlformats.org/drawingml/2006/main" xmlns:r="http://schemas.openxmlformats.org/officeDocument/2006/relationships" xmlns:p="http://schemas.openxmlformats.org/presentationml/2006/main">
+  <p:cSld>
+    <p:spTree>
+      <p:nvGrpSpPr>
+        <p:cNvPr id="1" name=""/>
+        <p:cNvGrpSpPr/>
+        <p:nvPr/>
+      </p:nvGrpSpPr>
+      <p:grpSpPr>
+        <a:xfrm>
+          <a:off x="0" y="0"/>
+          <a:ext cx="0" cy="0"/>
+          <a:chOff x="0" y="0"/>
+          <a:chExt cx="0" cy="0"/>
+        </a:xfrm>
+      </p:grpSpPr>
+      <p:sp>
+        <p:nvSpPr>
+          <p:cNvPr id="2" name="Slide Image Placeholder 1"/>
+          <p:cNvSpPr>
+            <a:spLocks noGrp="1" noRot="1" noChangeAspect="1"/>
+          </p:cNvSpPr>
+          <p:nvPr>
+            <p:ph type="sldImg"/>
+          </p:nvPr>
+        </p:nvSpPr>
+        <p:spPr/>
+      </p:sp>
+      <p:sp>
+        <p:nvSpPr>
+          <p:cNvPr id="3" name="Notes Placeholder 2"/>
+          <p:cNvSpPr>
+            <a:spLocks noGrp="1"/>
+          </p:cNvSpPr>
+          <p:nvPr>
+            <p:ph type="body" idx="1"/>
+          </p:nvPr>
+        </p:nvSpPr>
+        <p:spPr/>
+        <p:txBody>
+          <a:bodyPr/>
+          <a:lstStyle/>
+          <a:p>
+            <a:r>
+              <a:rPr lang="en-US" dirty="0"/>
+              <a:t/>
+            </a:r>
+            <a:endParaRPr lang="en-US" dirty="0"/>
+          </a:p>
+        </p:txBody>
+      </p:sp>
+      <p:sp>
+        <p:nvSpPr>
+          <p:cNvPr id="4" name="Slide Number Placeholder 3"/>
+          <p:cNvSpPr>
+            <a:spLocks noGrp="1"/>
+          </p:cNvSpPr>
+          <p:nvPr>
+            <p:ph type="sldNum" sz="quarter" idx="10"/>
+          </p:nvPr>
+        </p:nvSpPr>
+        <p:spPr/>
+        <p:txBody>
+          <a:bodyPr/>
+          <a:lstStyle/>
+          <a:p>
+            <a:fld id="{F7021451-1387-4CA6-816F-3879F97B5CBC}" type="slidenum">
+              <a:rPr lang="en-US"/>
+              <a:t>26</a:t>
             </a:fld>
             <a:endParaRPr lang="en-US"/>
           </a:p>
@@ -3280,7 +3369,7 @@
                 <a:ea typeface="Arial" pitchFamily="34" charset="-122"/>
                 <a:cs typeface="Arial" pitchFamily="34" charset="-120"/>
               </a:rPr>
-              <a:t>PROFINET DCP</a:t>
+              <a:t>MQTT IN EINEM BILD</a:t>
             </a:r>
             <a:endParaRPr lang="en-US" sz="1150" dirty="0"/>
           </a:p>
@@ -3319,7 +3408,7 @@
                 <a:ea typeface="Arial" pitchFamily="34" charset="-122"/>
                 <a:cs typeface="Arial" pitchFamily="34" charset="-120"/>
               </a:rPr>
-              <a:t>Die Namensrunde im Maschinennetz</a:t>
+              <a:t>Topics: die Adressen der Nachrichten</a:t>
             </a:r>
             <a:endParaRPr lang="en-US" sz="2600" dirty="0"/>
           </a:p>
@@ -3327,7 +3416,7 @@
       </p:sp>
       <p:pic>
         <p:nvPicPr>
-          <p:cNvPr id="5" name="Image 0" descr="/Users/jacobmenge/Desktop/kurs-26.2b-orga/folienwerkstatt/assets/diagramme/dcp-namen.png">    </p:cNvPr>
+          <p:cNvPr id="5" name="Image 0" descr="/Users/jacobmenge/Desktop/kurs-26.2b-orga/folienwerkstatt/assets/diagramme/mqtt-topics-bild.png">    </p:cNvPr>
           <p:cNvPicPr>
             <a:picLocks noChangeAspect="1"/>
           </p:cNvPicPr>
@@ -3341,8 +3430,8 @@
         </p:blipFill>
         <p:spPr>
           <a:xfrm>
-            <a:off x="566928" y="1499616"/>
-            <a:ext cx="8010144" cy="2286000"/>
+            <a:off x="566928" y="1572768"/>
+            <a:ext cx="8010144" cy="2066544"/>
           </a:xfrm>
           <a:prstGeom prst="rect">
             <a:avLst/>
@@ -3402,7 +3491,7 @@
                 <a:ea typeface="Arial" pitchFamily="34" charset="-122"/>
                 <a:cs typeface="Arial" pitchFamily="34" charset="-120"/>
               </a:rPr>
-              <a:t>Genau diese vier Pakete findet ihr nachher im Mitschnitt: drei Namen und die Frage, wer hier das Sagen hat.</a:t>
+              <a:t>Mehr braucht ihr heute nicht: senden, mitlesen und das # für alles darunter. Vertieft wird beim nächsten Mal.</a:t>
             </a:r>
             <a:endParaRPr lang="en-US" sz="1200" dirty="0"/>
           </a:p>
@@ -3503,7 +3592,7 @@
                 <a:ea typeface="Arial" pitchFamily="34" charset="-122"/>
                 <a:cs typeface="Arial" pitchFamily="34" charset="-120"/>
               </a:rPr>
-              <a:t>8/20</a:t>
+              <a:t>8/21</a:t>
             </a:r>
             <a:endParaRPr lang="en-US" sz="1050" dirty="0"/>
           </a:p>
@@ -3594,7 +3683,7 @@
                 <a:ea typeface="Arial" pitchFamily="34" charset="-122"/>
                 <a:cs typeface="Arial" pitchFamily="34" charset="-120"/>
               </a:rPr>
-              <a:t>EINORDNUNG FÜR DIE PRÜFUNG</a:t>
+              <a:t>PROFINET DCP</a:t>
             </a:r>
             <a:endParaRPr lang="en-US" sz="1150" dirty="0"/>
           </a:p>
@@ -3633,7 +3722,7 @@
                 <a:ea typeface="Arial" pitchFamily="34" charset="-122"/>
                 <a:cs typeface="Arial" pitchFamily="34" charset="-120"/>
               </a:rPr>
-              <a:t>Die Ebenen der Automatisierung</a:t>
+              <a:t>Die Namensrunde im Maschinennetz</a:t>
             </a:r>
             <a:endParaRPr lang="en-US" sz="2600" dirty="0"/>
           </a:p>
@@ -3641,7 +3730,7 @@
       </p:sp>
       <p:pic>
         <p:nvPicPr>
-          <p:cNvPr id="5" name="Image 0" descr="/Users/jacobmenge/Desktop/kurs-26.2b-orga/folienwerkstatt/assets/diagramme/i40-ebenen.png">    </p:cNvPr>
+          <p:cNvPr id="5" name="Image 0" descr="/Users/jacobmenge/Desktop/kurs-26.2b-orga/folienwerkstatt/assets/diagramme/dcp-namen.png">    </p:cNvPr>
           <p:cNvPicPr>
             <a:picLocks noChangeAspect="1"/>
           </p:cNvPicPr>
@@ -3655,8 +3744,8 @@
         </p:blipFill>
         <p:spPr>
           <a:xfrm>
-            <a:off x="1243584" y="1344168"/>
-            <a:ext cx="6647688" cy="2807208"/>
+            <a:off x="566928" y="1499616"/>
+            <a:ext cx="8010144" cy="2286000"/>
           </a:xfrm>
           <a:prstGeom prst="rect">
             <a:avLst/>
@@ -3671,7 +3760,7 @@
         </p:nvSpPr>
         <p:spPr>
           <a:xfrm>
-            <a:off x="566928" y="4288536"/>
+            <a:off x="566928" y="4069080"/>
             <a:ext cx="32004" cy="256032"/>
           </a:xfrm>
           <a:prstGeom prst="rect">
@@ -3691,7 +3780,7 @@
         </p:nvSpPr>
         <p:spPr>
           <a:xfrm>
-            <a:off x="749808" y="4242816"/>
+            <a:off x="749808" y="4023360"/>
             <a:ext cx="7827264" cy="402336"/>
           </a:xfrm>
           <a:prstGeom prst="rect">
@@ -3716,7 +3805,7 @@
                 <a:ea typeface="Arial" pitchFamily="34" charset="-122"/>
                 <a:cs typeface="Arial" pitchFamily="34" charset="-120"/>
               </a:rPr>
-              <a:t>Die fünf Kürzel und ihre Zuordnung: Genau das fragt die Prüfung.</a:t>
+              <a:t>Genau diese vier Pakete findet ihr nachher im Mitschnitt: drei Namen und die Frage, wer hier das Sagen hat.</a:t>
             </a:r>
             <a:endParaRPr lang="en-US" sz="1200" dirty="0"/>
           </a:p>
@@ -3817,7 +3906,7 @@
                 <a:ea typeface="Arial" pitchFamily="34" charset="-122"/>
                 <a:cs typeface="Arial" pitchFamily="34" charset="-120"/>
               </a:rPr>
-              <a:t>9/20</a:t>
+              <a:t>9/21</a:t>
             </a:r>
             <a:endParaRPr lang="en-US" sz="1050" dirty="0"/>
           </a:p>
@@ -3947,7 +4036,7 @@
                 <a:ea typeface="Arial" pitchFamily="34" charset="-122"/>
                 <a:cs typeface="Arial" pitchFamily="34" charset="-120"/>
               </a:rPr>
-              <a:t>Zwei Protokoll-Familien</a:t>
+              <a:t>Die Ebenen der Automatisierung</a:t>
             </a:r>
             <a:endParaRPr lang="en-US" sz="2600" dirty="0"/>
           </a:p>
@@ -3955,7 +4044,7 @@
       </p:sp>
       <p:pic>
         <p:nvPicPr>
-          <p:cNvPr id="5" name="Image 0" descr="/Users/jacobmenge/Desktop/kurs-26.2b-orga/folienwerkstatt/assets/diagramme/i40-protokoll-familien.png">    </p:cNvPr>
+          <p:cNvPr id="5" name="Image 0" descr="/Users/jacobmenge/Desktop/kurs-26.2b-orga/folienwerkstatt/assets/diagramme/i40-ebenen.png">    </p:cNvPr>
           <p:cNvPicPr>
             <a:picLocks noChangeAspect="1"/>
           </p:cNvPicPr>
@@ -3969,8 +4058,8 @@
         </p:blipFill>
         <p:spPr>
           <a:xfrm>
-            <a:off x="795528" y="1316736"/>
-            <a:ext cx="7562088" cy="2743200"/>
+            <a:off x="1243584" y="1344168"/>
+            <a:ext cx="6647688" cy="2807208"/>
           </a:xfrm>
           <a:prstGeom prst="rect">
             <a:avLst/>
@@ -3985,7 +4074,7 @@
         </p:nvSpPr>
         <p:spPr>
           <a:xfrm>
-            <a:off x="566928" y="4251960"/>
+            <a:off x="566928" y="4288536"/>
             <a:ext cx="32004" cy="256032"/>
           </a:xfrm>
           <a:prstGeom prst="rect">
@@ -4005,7 +4094,7 @@
         </p:nvSpPr>
         <p:spPr>
           <a:xfrm>
-            <a:off x="749808" y="4206240"/>
+            <a:off x="749808" y="4242816"/>
             <a:ext cx="7827264" cy="402336"/>
           </a:xfrm>
           <a:prstGeom prst="rect">
@@ -4030,7 +4119,7 @@
                 <a:ea typeface="Arial" pitchFamily="34" charset="-122"/>
                 <a:cs typeface="Arial" pitchFamily="34" charset="-120"/>
               </a:rPr>
-              <a:t>Mit diesen drei Fragen sortiert ihr jedes unbekannte Protokoll ein, auch in der Prüfung.</a:t>
+              <a:t>Die fünf Kürzel und ihre Zuordnung: Genau das fragt die Prüfung.</a:t>
             </a:r>
             <a:endParaRPr lang="en-US" sz="1200" dirty="0"/>
           </a:p>
@@ -4131,7 +4220,7 @@
                 <a:ea typeface="Arial" pitchFamily="34" charset="-122"/>
                 <a:cs typeface="Arial" pitchFamily="34" charset="-120"/>
               </a:rPr>
-              <a:t>10/20</a:t>
+              <a:t>10/21</a:t>
             </a:r>
             <a:endParaRPr lang="en-US" sz="1050" dirty="0"/>
           </a:p>
@@ -4177,48 +4266,150 @@
         </p:nvSpPr>
         <p:spPr>
           <a:xfrm>
-            <a:off x="6355080" y="0"/>
-            <a:ext cx="2788920" cy="5143500"/>
+            <a:off x="566928" y="201168"/>
+            <a:ext cx="475488" cy="50292"/>
           </a:xfrm>
           <a:prstGeom prst="rect">
             <a:avLst/>
           </a:prstGeom>
           <a:solidFill>
-            <a:srgbClr val="EEF0FB"/>
+            <a:srgbClr val="0F7C86"/>
           </a:solidFill>
           <a:ln/>
         </p:spPr>
       </p:sp>
       <p:sp>
         <p:nvSpPr>
-          <p:cNvPr id="3" name="Shape 1"/>
-          <p:cNvSpPr/>
-          <p:nvPr/>
-        </p:nvSpPr>
-        <p:spPr>
-          <a:xfrm>
-            <a:off x="6355080" y="0"/>
-            <a:ext cx="45720" cy="5143500"/>
+          <p:cNvPr id="3" name="Text 1"/>
+          <p:cNvSpPr/>
+          <p:nvPr/>
+        </p:nvSpPr>
+        <p:spPr>
+          <a:xfrm>
+            <a:off x="566928" y="384048"/>
+            <a:ext cx="8010144" cy="237744"/>
+          </a:xfrm>
+          <a:prstGeom prst="rect">
+            <a:avLst/>
+          </a:prstGeom>
+          <a:noFill/>
+          <a:ln/>
+        </p:spPr>
+        <p:txBody>
+          <a:bodyPr wrap="square" lIns="0" tIns="0" rIns="0" bIns="0" rtlCol="0" anchor="ctr"/>
+          <a:lstStyle/>
+          <a:p>
+            <a:pPr indent="0" marL="0">
+              <a:buNone/>
+            </a:pPr>
+            <a:r>
+              <a:rPr lang="en-US" sz="1150" b="1" spc="180" kern="0" dirty="0">
+                <a:solidFill>
+                  <a:srgbClr val="0F7C86"/>
+                </a:solidFill>
+                <a:latin typeface="Arial" pitchFamily="34" charset="0"/>
+                <a:ea typeface="Arial" pitchFamily="34" charset="-122"/>
+                <a:cs typeface="Arial" pitchFamily="34" charset="-120"/>
+              </a:rPr>
+              <a:t>EINORDNUNG FÜR DIE PRÜFUNG</a:t>
+            </a:r>
+            <a:endParaRPr lang="en-US" sz="1150" dirty="0"/>
+          </a:p>
+        </p:txBody>
+      </p:sp>
+      <p:sp>
+        <p:nvSpPr>
+          <p:cNvPr id="4" name="Text 2"/>
+          <p:cNvSpPr/>
+          <p:nvPr/>
+        </p:nvSpPr>
+        <p:spPr>
+          <a:xfrm>
+            <a:off x="566928" y="731520"/>
+            <a:ext cx="8010144" cy="603504"/>
+          </a:xfrm>
+          <a:prstGeom prst="rect">
+            <a:avLst/>
+          </a:prstGeom>
+          <a:noFill/>
+          <a:ln/>
+        </p:spPr>
+        <p:txBody>
+          <a:bodyPr wrap="square" lIns="0" tIns="0" rIns="0" bIns="0" rtlCol="0" anchor="t"/>
+          <a:lstStyle/>
+          <a:p>
+            <a:pPr indent="0" marL="0">
+              <a:buNone/>
+            </a:pPr>
+            <a:r>
+              <a:rPr lang="en-US" sz="2600" b="1" dirty="0">
+                <a:solidFill>
+                  <a:srgbClr val="272E52"/>
+                </a:solidFill>
+                <a:latin typeface="Arial" pitchFamily="34" charset="0"/>
+                <a:ea typeface="Arial" pitchFamily="34" charset="-122"/>
+                <a:cs typeface="Arial" pitchFamily="34" charset="-120"/>
+              </a:rPr>
+              <a:t>Zwei Protokoll-Familien</a:t>
+            </a:r>
+            <a:endParaRPr lang="en-US" sz="2600" dirty="0"/>
+          </a:p>
+        </p:txBody>
+      </p:sp>
+      <p:pic>
+        <p:nvPicPr>
+          <p:cNvPr id="5" name="Image 0" descr="/Users/jacobmenge/Desktop/kurs-26.2b-orga/folienwerkstatt/assets/diagramme/i40-protokoll-familien.png">    </p:cNvPr>
+          <p:cNvPicPr>
+            <a:picLocks noChangeAspect="1"/>
+          </p:cNvPicPr>
+          <p:nvPr/>
+        </p:nvPicPr>
+        <p:blipFill>
+          <a:blip r:embed="rId1"/>
+          <a:stretch>
+            <a:fillRect/>
+          </a:stretch>
+        </p:blipFill>
+        <p:spPr>
+          <a:xfrm>
+            <a:off x="795528" y="1316736"/>
+            <a:ext cx="7562088" cy="2743200"/>
+          </a:xfrm>
+          <a:prstGeom prst="rect">
+            <a:avLst/>
+          </a:prstGeom>
+        </p:spPr>
+      </p:pic>
+      <p:sp>
+        <p:nvSpPr>
+          <p:cNvPr id="6" name="Shape 3"/>
+          <p:cNvSpPr/>
+          <p:nvPr/>
+        </p:nvSpPr>
+        <p:spPr>
+          <a:xfrm>
+            <a:off x="566928" y="4251960"/>
+            <a:ext cx="32004" cy="256032"/>
           </a:xfrm>
           <a:prstGeom prst="rect">
             <a:avLst/>
           </a:prstGeom>
           <a:solidFill>
-            <a:srgbClr val="3843AF"/>
+            <a:srgbClr val="0F7C86"/>
           </a:solidFill>
           <a:ln/>
         </p:spPr>
       </p:sp>
       <p:sp>
         <p:nvSpPr>
-          <p:cNvPr id="4" name="Text 2"/>
-          <p:cNvSpPr/>
-          <p:nvPr/>
-        </p:nvSpPr>
-        <p:spPr>
-          <a:xfrm>
-            <a:off x="6629400" y="1463040"/>
-            <a:ext cx="2194560" cy="1737360"/>
+          <p:cNvPr id="7" name="Text 4"/>
+          <p:cNvSpPr/>
+          <p:nvPr/>
+        </p:nvSpPr>
+        <p:spPr>
+          <a:xfrm>
+            <a:off x="749808" y="4206240"/>
+            <a:ext cx="7827264" cy="402336"/>
           </a:xfrm>
           <a:prstGeom prst="rect">
             <a:avLst/>
@@ -4230,109 +4421,73 @@
           <a:bodyPr wrap="square" lIns="0" tIns="0" rIns="0" bIns="0" rtlCol="0" anchor="ctr"/>
           <a:lstStyle/>
           <a:p>
-            <a:pPr algn="ctr" indent="0" marL="0">
-              <a:buNone/>
-            </a:pPr>
-            <a:r>
-              <a:rPr lang="en-US" sz="8400" b="1" dirty="0">
-                <a:solidFill>
-                  <a:srgbClr val="3843AF"/>
-                </a:solidFill>
-                <a:latin typeface="Arial" pitchFamily="34" charset="0"/>
-                <a:ea typeface="Arial" pitchFamily="34" charset="-122"/>
-                <a:cs typeface="Arial" pitchFamily="34" charset="-120"/>
-              </a:rPr>
-              <a:t>02</a:t>
-            </a:r>
-            <a:endParaRPr lang="en-US" sz="8400" dirty="0"/>
-          </a:p>
-        </p:txBody>
-      </p:sp>
-      <p:sp>
-        <p:nvSpPr>
-          <p:cNvPr id="5" name="Shape 3"/>
-          <p:cNvSpPr/>
-          <p:nvPr/>
-        </p:nvSpPr>
-        <p:spPr>
-          <a:xfrm>
-            <a:off x="566928" y="1883664"/>
-            <a:ext cx="475488" cy="50292"/>
-          </a:xfrm>
-          <a:prstGeom prst="rect">
-            <a:avLst/>
-          </a:prstGeom>
-          <a:solidFill>
-            <a:srgbClr val="3843AF"/>
-          </a:solidFill>
-          <a:ln/>
-        </p:spPr>
-      </p:sp>
-      <p:sp>
-        <p:nvSpPr>
-          <p:cNvPr id="6" name="Text 4"/>
-          <p:cNvSpPr/>
-          <p:nvPr/>
-        </p:nvSpPr>
-        <p:spPr>
-          <a:xfrm>
-            <a:off x="566928" y="2084832"/>
-            <a:ext cx="5394960" cy="868680"/>
-          </a:xfrm>
-          <a:prstGeom prst="rect">
-            <a:avLst/>
-          </a:prstGeom>
-          <a:noFill/>
-          <a:ln/>
-        </p:spPr>
-        <p:txBody>
-          <a:bodyPr wrap="square" lIns="0" tIns="0" rIns="0" bIns="0" rtlCol="0" anchor="t"/>
-          <a:lstStyle/>
-          <a:p>
-            <a:pPr indent="0" marL="0">
-              <a:buNone/>
-            </a:pPr>
-            <a:r>
-              <a:rPr lang="en-US" sz="3000" b="1" dirty="0">
-                <a:solidFill>
-                  <a:srgbClr val="272E52"/>
-                </a:solidFill>
-                <a:latin typeface="Arial" pitchFamily="34" charset="0"/>
-                <a:ea typeface="Arial" pitchFamily="34" charset="-122"/>
-                <a:cs typeface="Arial" pitchFamily="34" charset="-120"/>
-              </a:rPr>
-              <a:t>Die Werkzeuge</a:t>
-            </a:r>
-            <a:endParaRPr lang="en-US" sz="3000" dirty="0"/>
-          </a:p>
-        </p:txBody>
-      </p:sp>
-      <p:sp>
-        <p:nvSpPr>
-          <p:cNvPr id="7" name="Text 5"/>
-          <p:cNvSpPr/>
-          <p:nvPr/>
-        </p:nvSpPr>
-        <p:spPr>
-          <a:xfrm>
-            <a:off x="566928" y="3017520"/>
-            <a:ext cx="5394960" cy="548640"/>
-          </a:xfrm>
-          <a:prstGeom prst="rect">
-            <a:avLst/>
-          </a:prstGeom>
-          <a:noFill/>
-          <a:ln/>
-        </p:spPr>
-        <p:txBody>
-          <a:bodyPr wrap="square" lIns="0" tIns="0" rIns="0" bIns="0" rtlCol="0" anchor="t"/>
-          <a:lstStyle/>
-          <a:p>
-            <a:pPr indent="0" marL="0">
-              <a:buNone/>
-            </a:pPr>
-            <a:r>
-              <a:rPr lang="en-US" sz="1350" dirty="0">
+            <a:pPr indent="0" marL="0">
+              <a:buNone/>
+            </a:pPr>
+            <a:r>
+              <a:rPr lang="en-US" sz="1200" b="1" dirty="0">
+                <a:solidFill>
+                  <a:srgbClr val="434A63"/>
+                </a:solidFill>
+                <a:latin typeface="Arial" pitchFamily="34" charset="0"/>
+                <a:ea typeface="Arial" pitchFamily="34" charset="-122"/>
+                <a:cs typeface="Arial" pitchFamily="34" charset="-120"/>
+              </a:rPr>
+              <a:t>Mit diesen drei Fragen sortiert ihr jedes unbekannte Protokoll ein, auch in der Prüfung.</a:t>
+            </a:r>
+            <a:endParaRPr lang="en-US" sz="1200" dirty="0"/>
+          </a:p>
+        </p:txBody>
+      </p:sp>
+      <p:sp>
+        <p:nvSpPr>
+          <p:cNvPr id="8" name="Shape 5"/>
+          <p:cNvSpPr/>
+          <p:nvPr/>
+        </p:nvSpPr>
+        <p:spPr>
+          <a:xfrm>
+            <a:off x="566928" y="4631436"/>
+            <a:ext cx="8010144" cy="0"/>
+          </a:xfrm>
+          <a:prstGeom prst="line">
+            <a:avLst/>
+          </a:prstGeom>
+          <a:noFill/>
+          <a:ln w="9525">
+            <a:solidFill>
+              <a:srgbClr val="DFE3F0"/>
+            </a:solidFill>
+            <a:prstDash val="solid"/>
+          </a:ln>
+        </p:spPr>
+      </p:sp>
+      <p:sp>
+        <p:nvSpPr>
+          <p:cNvPr id="9" name="Text 6"/>
+          <p:cNvSpPr/>
+          <p:nvPr/>
+        </p:nvSpPr>
+        <p:spPr>
+          <a:xfrm>
+            <a:off x="566928" y="4722876"/>
+            <a:ext cx="5029200" cy="237744"/>
+          </a:xfrm>
+          <a:prstGeom prst="rect">
+            <a:avLst/>
+          </a:prstGeom>
+          <a:noFill/>
+          <a:ln/>
+        </p:spPr>
+        <p:txBody>
+          <a:bodyPr wrap="square" lIns="0" tIns="0" rIns="0" bIns="0" rtlCol="0" anchor="ctr"/>
+          <a:lstStyle/>
+          <a:p>
+            <a:pPr indent="0" marL="0">
+              <a:buNone/>
+            </a:pPr>
+            <a:r>
+              <a:rPr lang="en-US" sz="1050" spc="30" kern="0" dirty="0">
                 <a:solidFill>
                   <a:srgbClr val="5C6377"/>
                 </a:solidFill>
@@ -4340,9 +4495,48 @@
                 <a:ea typeface="Arial" pitchFamily="34" charset="-122"/>
                 <a:cs typeface="Arial" pitchFamily="34" charset="-120"/>
               </a:rPr>
-              <a:t>Wireshark und ein eigener MQTT-Broker</a:t>
-            </a:r>
-            <a:endParaRPr lang="en-US" sz="1350" dirty="0"/>
+              <a:t>Die Sprachen der Fabrik</a:t>
+            </a:r>
+            <a:endParaRPr lang="en-US" sz="1050" dirty="0"/>
+          </a:p>
+        </p:txBody>
+      </p:sp>
+      <p:sp>
+        <p:nvSpPr>
+          <p:cNvPr id="10" name="Text 7"/>
+          <p:cNvSpPr/>
+          <p:nvPr/>
+        </p:nvSpPr>
+        <p:spPr>
+          <a:xfrm>
+            <a:off x="8028432" y="4722876"/>
+            <a:ext cx="548640" cy="237744"/>
+          </a:xfrm>
+          <a:prstGeom prst="rect">
+            <a:avLst/>
+          </a:prstGeom>
+          <a:noFill/>
+          <a:ln/>
+        </p:spPr>
+        <p:txBody>
+          <a:bodyPr wrap="square" lIns="0" tIns="0" rIns="0" bIns="0" rtlCol="0" anchor="ctr"/>
+          <a:lstStyle/>
+          <a:p>
+            <a:pPr algn="r" indent="0" marL="0">
+              <a:buNone/>
+            </a:pPr>
+            <a:r>
+              <a:rPr lang="en-US" sz="1050" dirty="0">
+                <a:solidFill>
+                  <a:srgbClr val="5C6377"/>
+                </a:solidFill>
+                <a:latin typeface="Arial" pitchFamily="34" charset="0"/>
+                <a:ea typeface="Arial" pitchFamily="34" charset="-122"/>
+                <a:cs typeface="Arial" pitchFamily="34" charset="-120"/>
+              </a:rPr>
+              <a:t>11/21</a:t>
+            </a:r>
+            <a:endParaRPr lang="en-US" sz="1050" dirty="0"/>
           </a:p>
         </p:txBody>
       </p:sp>
@@ -4386,8 +4580,28 @@
         </p:nvSpPr>
         <p:spPr>
           <a:xfrm>
-            <a:off x="566928" y="201168"/>
-            <a:ext cx="475488" cy="50292"/>
+            <a:off x="6355080" y="0"/>
+            <a:ext cx="2788920" cy="5143500"/>
+          </a:xfrm>
+          <a:prstGeom prst="rect">
+            <a:avLst/>
+          </a:prstGeom>
+          <a:solidFill>
+            <a:srgbClr val="EEF0FB"/>
+          </a:solidFill>
+          <a:ln/>
+        </p:spPr>
+      </p:sp>
+      <p:sp>
+        <p:nvSpPr>
+          <p:cNvPr id="3" name="Shape 1"/>
+          <p:cNvSpPr/>
+          <p:nvPr/>
+        </p:nvSpPr>
+        <p:spPr>
+          <a:xfrm>
+            <a:off x="6355080" y="0"/>
+            <a:ext cx="45720" cy="5143500"/>
           </a:xfrm>
           <a:prstGeom prst="rect">
             <a:avLst/>
@@ -4400,14 +4614,14 @@
       </p:sp>
       <p:sp>
         <p:nvSpPr>
-          <p:cNvPr id="3" name="Text 1"/>
-          <p:cNvSpPr/>
-          <p:nvPr/>
-        </p:nvSpPr>
-        <p:spPr>
-          <a:xfrm>
-            <a:off x="566928" y="384048"/>
-            <a:ext cx="8010144" cy="237744"/>
+          <p:cNvPr id="4" name="Text 2"/>
+          <p:cNvSpPr/>
+          <p:nvPr/>
+        </p:nvSpPr>
+        <p:spPr>
+          <a:xfrm>
+            <a:off x="6629400" y="1463040"/>
+            <a:ext cx="2194560" cy="1737360"/>
           </a:xfrm>
           <a:prstGeom prst="rect">
             <a:avLst/>
@@ -4419,11 +4633,11 @@
           <a:bodyPr wrap="square" lIns="0" tIns="0" rIns="0" bIns="0" rtlCol="0" anchor="ctr"/>
           <a:lstStyle/>
           <a:p>
-            <a:pPr indent="0" marL="0">
-              <a:buNone/>
-            </a:pPr>
-            <a:r>
-              <a:rPr lang="en-US" sz="1150" b="1" spc="180" kern="0" dirty="0">
+            <a:pPr algn="ctr" indent="0" marL="0">
+              <a:buNone/>
+            </a:pPr>
+            <a:r>
+              <a:rPr lang="en-US" sz="8400" b="1" dirty="0">
                 <a:solidFill>
                   <a:srgbClr val="3843AF"/>
                 </a:solidFill>
@@ -4431,85 +4645,22 @@
                 <a:ea typeface="Arial" pitchFamily="34" charset="-122"/>
                 <a:cs typeface="Arial" pitchFamily="34" charset="-120"/>
               </a:rPr>
-              <a:t>KURZ VORGESTELLT</a:t>
-            </a:r>
-            <a:endParaRPr lang="en-US" sz="1150" dirty="0"/>
-          </a:p>
-        </p:txBody>
-      </p:sp>
-      <p:sp>
-        <p:nvSpPr>
-          <p:cNvPr id="4" name="Text 2"/>
-          <p:cNvSpPr/>
-          <p:nvPr/>
-        </p:nvSpPr>
-        <p:spPr>
-          <a:xfrm>
-            <a:off x="566928" y="731520"/>
-            <a:ext cx="8010144" cy="603504"/>
-          </a:xfrm>
-          <a:prstGeom prst="rect">
-            <a:avLst/>
-          </a:prstGeom>
-          <a:noFill/>
-          <a:ln/>
-        </p:spPr>
-        <p:txBody>
-          <a:bodyPr wrap="square" lIns="0" tIns="0" rIns="0" bIns="0" rtlCol="0" anchor="t"/>
-          <a:lstStyle/>
-          <a:p>
-            <a:pPr indent="0" marL="0">
-              <a:buNone/>
-            </a:pPr>
-            <a:r>
-              <a:rPr lang="en-US" sz="2600" b="1" dirty="0">
-                <a:solidFill>
-                  <a:srgbClr val="272E52"/>
-                </a:solidFill>
-                <a:latin typeface="Arial" pitchFamily="34" charset="0"/>
-                <a:ea typeface="Arial" pitchFamily="34" charset="-122"/>
-                <a:cs typeface="Arial" pitchFamily="34" charset="-120"/>
-              </a:rPr>
-              <a:t>Wireshark und der Mitschnitt</a:t>
-            </a:r>
-            <a:endParaRPr lang="en-US" sz="2600" dirty="0"/>
-          </a:p>
-        </p:txBody>
-      </p:sp>
-      <p:pic>
-        <p:nvPicPr>
-          <p:cNvPr id="5" name="Image 0" descr="/Users/jacobmenge/Desktop/kurs-26.2b-orga/folienwerkstatt/assets/diagramme/steckbrief-werkzeug.png">    </p:cNvPr>
-          <p:cNvPicPr>
-            <a:picLocks noChangeAspect="1"/>
-          </p:cNvPicPr>
-          <p:nvPr/>
-        </p:nvPicPr>
-        <p:blipFill>
-          <a:blip r:embed="rId1"/>
-          <a:stretch>
-            <a:fillRect/>
-          </a:stretch>
-        </p:blipFill>
-        <p:spPr>
-          <a:xfrm>
-            <a:off x="566928" y="1463040"/>
-            <a:ext cx="8010144" cy="2468880"/>
-          </a:xfrm>
-          <a:prstGeom prst="rect">
-            <a:avLst/>
-          </a:prstGeom>
-        </p:spPr>
-      </p:pic>
-      <p:sp>
-        <p:nvSpPr>
-          <p:cNvPr id="6" name="Shape 3"/>
-          <p:cNvSpPr/>
-          <p:nvPr/>
-        </p:nvSpPr>
-        <p:spPr>
-          <a:xfrm>
-            <a:off x="566928" y="4105656"/>
-            <a:ext cx="32004" cy="256032"/>
+              <a:t>02</a:t>
+            </a:r>
+            <a:endParaRPr lang="en-US" sz="8400" dirty="0"/>
+          </a:p>
+        </p:txBody>
+      </p:sp>
+      <p:sp>
+        <p:nvSpPr>
+          <p:cNvPr id="5" name="Shape 3"/>
+          <p:cNvSpPr/>
+          <p:nvPr/>
+        </p:nvSpPr>
+        <p:spPr>
+          <a:xfrm>
+            <a:off x="566928" y="1883664"/>
+            <a:ext cx="475488" cy="50292"/>
           </a:xfrm>
           <a:prstGeom prst="rect">
             <a:avLst/>
@@ -4522,92 +4673,69 @@
       </p:sp>
       <p:sp>
         <p:nvSpPr>
-          <p:cNvPr id="7" name="Text 4"/>
-          <p:cNvSpPr/>
-          <p:nvPr/>
-        </p:nvSpPr>
-        <p:spPr>
-          <a:xfrm>
-            <a:off x="749808" y="4059936"/>
-            <a:ext cx="7827264" cy="402336"/>
-          </a:xfrm>
-          <a:prstGeom prst="rect">
-            <a:avLst/>
-          </a:prstGeom>
-          <a:noFill/>
-          <a:ln/>
-        </p:spPr>
-        <p:txBody>
-          <a:bodyPr wrap="square" lIns="0" tIns="0" rIns="0" bIns="0" rtlCol="0" anchor="ctr"/>
-          <a:lstStyle/>
-          <a:p>
-            <a:pPr indent="0" marL="0">
-              <a:buNone/>
-            </a:pPr>
-            <a:r>
-              <a:rPr lang="en-US" sz="1200" b="1" dirty="0">
-                <a:solidFill>
-                  <a:srgbClr val="434A63"/>
-                </a:solidFill>
-                <a:latin typeface="Arial" pitchFamily="34" charset="0"/>
-                <a:ea typeface="Arial" pitchFamily="34" charset="-122"/>
-                <a:cs typeface="Arial" pitchFamily="34" charset="-120"/>
-              </a:rPr>
-              <a:t>Für heute reicht Datei öffnen. Alles, was nach Treiber oder Sonderrechten klingt, dürft ihr getrost ignorieren.</a:t>
-            </a:r>
-            <a:endParaRPr lang="en-US" sz="1200" dirty="0"/>
-          </a:p>
-        </p:txBody>
-      </p:sp>
-      <p:sp>
-        <p:nvSpPr>
-          <p:cNvPr id="8" name="Shape 5"/>
-          <p:cNvSpPr/>
-          <p:nvPr/>
-        </p:nvSpPr>
-        <p:spPr>
-          <a:xfrm>
-            <a:off x="566928" y="4631436"/>
-            <a:ext cx="8010144" cy="0"/>
-          </a:xfrm>
-          <a:prstGeom prst="line">
-            <a:avLst/>
-          </a:prstGeom>
-          <a:noFill/>
-          <a:ln w="9525">
-            <a:solidFill>
-              <a:srgbClr val="DFE3F0"/>
-            </a:solidFill>
-            <a:prstDash val="solid"/>
-          </a:ln>
-        </p:spPr>
-      </p:sp>
-      <p:sp>
-        <p:nvSpPr>
-          <p:cNvPr id="9" name="Text 6"/>
-          <p:cNvSpPr/>
-          <p:nvPr/>
-        </p:nvSpPr>
-        <p:spPr>
-          <a:xfrm>
-            <a:off x="566928" y="4722876"/>
-            <a:ext cx="5029200" cy="237744"/>
-          </a:xfrm>
-          <a:prstGeom prst="rect">
-            <a:avLst/>
-          </a:prstGeom>
-          <a:noFill/>
-          <a:ln/>
-        </p:spPr>
-        <p:txBody>
-          <a:bodyPr wrap="square" lIns="0" tIns="0" rIns="0" bIns="0" rtlCol="0" anchor="ctr"/>
-          <a:lstStyle/>
-          <a:p>
-            <a:pPr indent="0" marL="0">
-              <a:buNone/>
-            </a:pPr>
-            <a:r>
-              <a:rPr lang="en-US" sz="1050" spc="30" kern="0" dirty="0">
+          <p:cNvPr id="6" name="Text 4"/>
+          <p:cNvSpPr/>
+          <p:nvPr/>
+        </p:nvSpPr>
+        <p:spPr>
+          <a:xfrm>
+            <a:off x="566928" y="2084832"/>
+            <a:ext cx="5394960" cy="868680"/>
+          </a:xfrm>
+          <a:prstGeom prst="rect">
+            <a:avLst/>
+          </a:prstGeom>
+          <a:noFill/>
+          <a:ln/>
+        </p:spPr>
+        <p:txBody>
+          <a:bodyPr wrap="square" lIns="0" tIns="0" rIns="0" bIns="0" rtlCol="0" anchor="t"/>
+          <a:lstStyle/>
+          <a:p>
+            <a:pPr indent="0" marL="0">
+              <a:buNone/>
+            </a:pPr>
+            <a:r>
+              <a:rPr lang="en-US" sz="3000" b="1" dirty="0">
+                <a:solidFill>
+                  <a:srgbClr val="272E52"/>
+                </a:solidFill>
+                <a:latin typeface="Arial" pitchFamily="34" charset="0"/>
+                <a:ea typeface="Arial" pitchFamily="34" charset="-122"/>
+                <a:cs typeface="Arial" pitchFamily="34" charset="-120"/>
+              </a:rPr>
+              <a:t>Die Werkzeuge</a:t>
+            </a:r>
+            <a:endParaRPr lang="en-US" sz="3000" dirty="0"/>
+          </a:p>
+        </p:txBody>
+      </p:sp>
+      <p:sp>
+        <p:nvSpPr>
+          <p:cNvPr id="7" name="Text 5"/>
+          <p:cNvSpPr/>
+          <p:nvPr/>
+        </p:nvSpPr>
+        <p:spPr>
+          <a:xfrm>
+            <a:off x="566928" y="3017520"/>
+            <a:ext cx="5394960" cy="548640"/>
+          </a:xfrm>
+          <a:prstGeom prst="rect">
+            <a:avLst/>
+          </a:prstGeom>
+          <a:noFill/>
+          <a:ln/>
+        </p:spPr>
+        <p:txBody>
+          <a:bodyPr wrap="square" lIns="0" tIns="0" rIns="0" bIns="0" rtlCol="0" anchor="t"/>
+          <a:lstStyle/>
+          <a:p>
+            <a:pPr indent="0" marL="0">
+              <a:buNone/>
+            </a:pPr>
+            <a:r>
+              <a:rPr lang="en-US" sz="1350" dirty="0">
                 <a:solidFill>
                   <a:srgbClr val="5C6377"/>
                 </a:solidFill>
@@ -4615,48 +4743,9 @@
                 <a:ea typeface="Arial" pitchFamily="34" charset="-122"/>
                 <a:cs typeface="Arial" pitchFamily="34" charset="-120"/>
               </a:rPr>
-              <a:t>Die Werkzeuge</a:t>
-            </a:r>
-            <a:endParaRPr lang="en-US" sz="1050" dirty="0"/>
-          </a:p>
-        </p:txBody>
-      </p:sp>
-      <p:sp>
-        <p:nvSpPr>
-          <p:cNvPr id="10" name="Text 7"/>
-          <p:cNvSpPr/>
-          <p:nvPr/>
-        </p:nvSpPr>
-        <p:spPr>
-          <a:xfrm>
-            <a:off x="8028432" y="4722876"/>
-            <a:ext cx="548640" cy="237744"/>
-          </a:xfrm>
-          <a:prstGeom prst="rect">
-            <a:avLst/>
-          </a:prstGeom>
-          <a:noFill/>
-          <a:ln/>
-        </p:spPr>
-        <p:txBody>
-          <a:bodyPr wrap="square" lIns="0" tIns="0" rIns="0" bIns="0" rtlCol="0" anchor="ctr"/>
-          <a:lstStyle/>
-          <a:p>
-            <a:pPr algn="r" indent="0" marL="0">
-              <a:buNone/>
-            </a:pPr>
-            <a:r>
-              <a:rPr lang="en-US" sz="1050" dirty="0">
-                <a:solidFill>
-                  <a:srgbClr val="5C6377"/>
-                </a:solidFill>
-                <a:latin typeface="Arial" pitchFamily="34" charset="0"/>
-                <a:ea typeface="Arial" pitchFamily="34" charset="-122"/>
-                <a:cs typeface="Arial" pitchFamily="34" charset="-120"/>
-              </a:rPr>
-              <a:t>11/20</a:t>
-            </a:r>
-            <a:endParaRPr lang="en-US" sz="1050" dirty="0"/>
+              <a:t>Wireshark und ein eigener MQTT-Broker</a:t>
+            </a:r>
+            <a:endParaRPr lang="en-US" sz="1350" dirty="0"/>
           </a:p>
         </p:txBody>
       </p:sp>
@@ -4745,7 +4834,7 @@
                 <a:ea typeface="Arial" pitchFamily="34" charset="-122"/>
                 <a:cs typeface="Arial" pitchFamily="34" charset="-120"/>
               </a:rPr>
-              <a:t>LIVE AM GETEILTEN BILDSCHIRM</a:t>
+              <a:t>KURZ VORGESTELLT</a:t>
             </a:r>
             <a:endParaRPr lang="en-US" sz="1150" dirty="0"/>
           </a:p>
@@ -4784,7 +4873,7 @@
                 <a:ea typeface="Arial" pitchFamily="34" charset="-122"/>
                 <a:cs typeface="Arial" pitchFamily="34" charset="-120"/>
               </a:rPr>
-              <a:t>Die vier Handgriffe</a:t>
+              <a:t>Wireshark und der Mitschnitt</a:t>
             </a:r>
             <a:endParaRPr lang="en-US" sz="2600" dirty="0"/>
           </a:p>
@@ -4792,7 +4881,7 @@
       </p:sp>
       <p:pic>
         <p:nvPicPr>
-          <p:cNvPr id="5" name="Image 0" descr="/Users/jacobmenge/Desktop/kurs-26.2b-orga/folienwerkstatt/assets/diagramme/wireshark-fahrplan.png">    </p:cNvPr>
+          <p:cNvPr id="5" name="Image 0" descr="/Users/jacobmenge/Desktop/kurs-26.2b-orga/folienwerkstatt/assets/diagramme/steckbrief-werkzeug.png">    </p:cNvPr>
           <p:cNvPicPr>
             <a:picLocks noChangeAspect="1"/>
           </p:cNvPicPr>
@@ -4806,8 +4895,8 @@
         </p:blipFill>
         <p:spPr>
           <a:xfrm>
-            <a:off x="566928" y="1481328"/>
-            <a:ext cx="8010144" cy="2304288"/>
+            <a:off x="566928" y="1463040"/>
+            <a:ext cx="8010144" cy="2468880"/>
           </a:xfrm>
           <a:prstGeom prst="rect">
             <a:avLst/>
@@ -4822,7 +4911,7 @@
         </p:nvSpPr>
         <p:spPr>
           <a:xfrm>
-            <a:off x="566928" y="4069080"/>
+            <a:off x="566928" y="4105656"/>
             <a:ext cx="32004" cy="256032"/>
           </a:xfrm>
           <a:prstGeom prst="rect">
@@ -4842,7 +4931,7 @@
         </p:nvSpPr>
         <p:spPr>
           <a:xfrm>
-            <a:off x="749808" y="4023360"/>
+            <a:off x="749808" y="4059936"/>
             <a:ext cx="7827264" cy="402336"/>
           </a:xfrm>
           <a:prstGeom prst="rect">
@@ -4867,7 +4956,7 @@
                 <a:ea typeface="Arial" pitchFamily="34" charset="-122"/>
                 <a:cs typeface="Arial" pitchFamily="34" charset="-120"/>
               </a:rPr>
-              <a:t>Einmal zusammen an meinem Bildschirm. In der Praxiszeit macht ihr genau diese Schritte mit derselben Datei.</a:t>
+              <a:t>Für heute reicht Datei öffnen. Alles, was nach Treiber oder Sonderrechten klingt, dürft ihr getrost ignorieren.</a:t>
             </a:r>
             <a:endParaRPr lang="en-US" sz="1200" dirty="0"/>
           </a:p>
@@ -4968,7 +5057,7 @@
                 <a:ea typeface="Arial" pitchFamily="34" charset="-122"/>
                 <a:cs typeface="Arial" pitchFamily="34" charset="-120"/>
               </a:rPr>
-              <a:t>12/20</a:t>
+              <a:t>12/21</a:t>
             </a:r>
             <a:endParaRPr lang="en-US" sz="1050" dirty="0"/>
           </a:p>
@@ -5059,7 +5148,7 @@
                 <a:ea typeface="Arial" pitchFamily="34" charset="-122"/>
                 <a:cs typeface="Arial" pitchFamily="34" charset="-120"/>
               </a:rPr>
-              <a:t>MQTT IM CONTAINER</a:t>
+              <a:t>LIVE AM GETEILTEN BILDSCHIRM</a:t>
             </a:r>
             <a:endParaRPr lang="en-US" sz="1150" dirty="0"/>
           </a:p>
@@ -5098,7 +5187,7 @@
                 <a:ea typeface="Arial" pitchFamily="34" charset="-122"/>
                 <a:cs typeface="Arial" pitchFamily="34" charset="-120"/>
               </a:rPr>
-              <a:t>Eure eigene Poststelle</a:t>
+              <a:t>Die vier Handgriffe</a:t>
             </a:r>
             <a:endParaRPr lang="en-US" sz="2600" dirty="0"/>
           </a:p>
@@ -5106,7 +5195,7 @@
       </p:sp>
       <p:pic>
         <p:nvPicPr>
-          <p:cNvPr id="5" name="Image 0" descr="/Users/jacobmenge/Desktop/kurs-26.2b-orga/folienwerkstatt/assets/diagramme/mqtt-container-bild.png">    </p:cNvPr>
+          <p:cNvPr id="5" name="Image 0" descr="/Users/jacobmenge/Desktop/kurs-26.2b-orga/folienwerkstatt/assets/diagramme/wireshark-fahrplan.png">    </p:cNvPr>
           <p:cNvPicPr>
             <a:picLocks noChangeAspect="1"/>
           </p:cNvPicPr>
@@ -5120,8 +5209,8 @@
         </p:blipFill>
         <p:spPr>
           <a:xfrm>
-            <a:off x="566928" y="1444752"/>
-            <a:ext cx="8010144" cy="2340864"/>
+            <a:off x="566928" y="1481328"/>
+            <a:ext cx="8010144" cy="2304288"/>
           </a:xfrm>
           <a:prstGeom prst="rect">
             <a:avLst/>
@@ -5181,7 +5270,7 @@
                 <a:ea typeface="Arial" pitchFamily="34" charset="-122"/>
                 <a:cs typeface="Arial" pitchFamily="34" charset="-120"/>
               </a:rPr>
-              <a:t>Zwei Terminal-Fenster nebeneinander: In einem lest ihr mit, im anderen sendet ihr. Im Windows-Terminal teilt Alt+Umschalt+Plus das Fenster.</a:t>
+              <a:t>Einmal zusammen an meinem Bildschirm. In der Praxiszeit macht ihr genau diese Schritte mit derselben Datei.</a:t>
             </a:r>
             <a:endParaRPr lang="en-US" sz="1200" dirty="0"/>
           </a:p>
@@ -5282,7 +5371,7 @@
                 <a:ea typeface="Arial" pitchFamily="34" charset="-122"/>
                 <a:cs typeface="Arial" pitchFamily="34" charset="-120"/>
               </a:rPr>
-              <a:t>13/20</a:t>
+              <a:t>13/21</a:t>
             </a:r>
             <a:endParaRPr lang="en-US" sz="1050" dirty="0"/>
           </a:p>
@@ -5328,48 +5417,150 @@
         </p:nvSpPr>
         <p:spPr>
           <a:xfrm>
-            <a:off x="6355080" y="0"/>
-            <a:ext cx="2788920" cy="5143500"/>
+            <a:off x="566928" y="201168"/>
+            <a:ext cx="475488" cy="50292"/>
           </a:xfrm>
           <a:prstGeom prst="rect">
             <a:avLst/>
           </a:prstGeom>
           <a:solidFill>
-            <a:srgbClr val="FBF2E3"/>
+            <a:srgbClr val="3843AF"/>
           </a:solidFill>
           <a:ln/>
         </p:spPr>
       </p:sp>
       <p:sp>
         <p:nvSpPr>
-          <p:cNvPr id="3" name="Shape 1"/>
-          <p:cNvSpPr/>
-          <p:nvPr/>
-        </p:nvSpPr>
-        <p:spPr>
-          <a:xfrm>
-            <a:off x="6355080" y="0"/>
-            <a:ext cx="45720" cy="5143500"/>
+          <p:cNvPr id="3" name="Text 1"/>
+          <p:cNvSpPr/>
+          <p:nvPr/>
+        </p:nvSpPr>
+        <p:spPr>
+          <a:xfrm>
+            <a:off x="566928" y="384048"/>
+            <a:ext cx="8010144" cy="237744"/>
+          </a:xfrm>
+          <a:prstGeom prst="rect">
+            <a:avLst/>
+          </a:prstGeom>
+          <a:noFill/>
+          <a:ln/>
+        </p:spPr>
+        <p:txBody>
+          <a:bodyPr wrap="square" lIns="0" tIns="0" rIns="0" bIns="0" rtlCol="0" anchor="ctr"/>
+          <a:lstStyle/>
+          <a:p>
+            <a:pPr indent="0" marL="0">
+              <a:buNone/>
+            </a:pPr>
+            <a:r>
+              <a:rPr lang="en-US" sz="1150" b="1" spc="180" kern="0" dirty="0">
+                <a:solidFill>
+                  <a:srgbClr val="3843AF"/>
+                </a:solidFill>
+                <a:latin typeface="Arial" pitchFamily="34" charset="0"/>
+                <a:ea typeface="Arial" pitchFamily="34" charset="-122"/>
+                <a:cs typeface="Arial" pitchFamily="34" charset="-120"/>
+              </a:rPr>
+              <a:t>MQTT IM CONTAINER</a:t>
+            </a:r>
+            <a:endParaRPr lang="en-US" sz="1150" dirty="0"/>
+          </a:p>
+        </p:txBody>
+      </p:sp>
+      <p:sp>
+        <p:nvSpPr>
+          <p:cNvPr id="4" name="Text 2"/>
+          <p:cNvSpPr/>
+          <p:nvPr/>
+        </p:nvSpPr>
+        <p:spPr>
+          <a:xfrm>
+            <a:off x="566928" y="731520"/>
+            <a:ext cx="8010144" cy="603504"/>
+          </a:xfrm>
+          <a:prstGeom prst="rect">
+            <a:avLst/>
+          </a:prstGeom>
+          <a:noFill/>
+          <a:ln/>
+        </p:spPr>
+        <p:txBody>
+          <a:bodyPr wrap="square" lIns="0" tIns="0" rIns="0" bIns="0" rtlCol="0" anchor="t"/>
+          <a:lstStyle/>
+          <a:p>
+            <a:pPr indent="0" marL="0">
+              <a:buNone/>
+            </a:pPr>
+            <a:r>
+              <a:rPr lang="en-US" sz="2600" b="1" dirty="0">
+                <a:solidFill>
+                  <a:srgbClr val="272E52"/>
+                </a:solidFill>
+                <a:latin typeface="Arial" pitchFamily="34" charset="0"/>
+                <a:ea typeface="Arial" pitchFamily="34" charset="-122"/>
+                <a:cs typeface="Arial" pitchFamily="34" charset="-120"/>
+              </a:rPr>
+              <a:t>Eure eigene Poststelle</a:t>
+            </a:r>
+            <a:endParaRPr lang="en-US" sz="2600" dirty="0"/>
+          </a:p>
+        </p:txBody>
+      </p:sp>
+      <p:pic>
+        <p:nvPicPr>
+          <p:cNvPr id="5" name="Image 0" descr="/Users/jacobmenge/Desktop/kurs-26.2b-orga/folienwerkstatt/assets/diagramme/mqtt-container-bild.png">    </p:cNvPr>
+          <p:cNvPicPr>
+            <a:picLocks noChangeAspect="1"/>
+          </p:cNvPicPr>
+          <p:nvPr/>
+        </p:nvPicPr>
+        <p:blipFill>
+          <a:blip r:embed="rId1"/>
+          <a:stretch>
+            <a:fillRect/>
+          </a:stretch>
+        </p:blipFill>
+        <p:spPr>
+          <a:xfrm>
+            <a:off x="566928" y="1444752"/>
+            <a:ext cx="8010144" cy="2340864"/>
+          </a:xfrm>
+          <a:prstGeom prst="rect">
+            <a:avLst/>
+          </a:prstGeom>
+        </p:spPr>
+      </p:pic>
+      <p:sp>
+        <p:nvSpPr>
+          <p:cNvPr id="6" name="Shape 3"/>
+          <p:cNvSpPr/>
+          <p:nvPr/>
+        </p:nvSpPr>
+        <p:spPr>
+          <a:xfrm>
+            <a:off x="566928" y="4069080"/>
+            <a:ext cx="32004" cy="256032"/>
           </a:xfrm>
           <a:prstGeom prst="rect">
             <a:avLst/>
           </a:prstGeom>
           <a:solidFill>
-            <a:srgbClr val="9A6310"/>
+            <a:srgbClr val="3843AF"/>
           </a:solidFill>
           <a:ln/>
         </p:spPr>
       </p:sp>
       <p:sp>
         <p:nvSpPr>
-          <p:cNvPr id="4" name="Text 2"/>
-          <p:cNvSpPr/>
-          <p:nvPr/>
-        </p:nvSpPr>
-        <p:spPr>
-          <a:xfrm>
-            <a:off x="6629400" y="1463040"/>
-            <a:ext cx="2194560" cy="1737360"/>
+          <p:cNvPr id="7" name="Text 4"/>
+          <p:cNvSpPr/>
+          <p:nvPr/>
+        </p:nvSpPr>
+        <p:spPr>
+          <a:xfrm>
+            <a:off x="749808" y="4023360"/>
+            <a:ext cx="7827264" cy="402336"/>
           </a:xfrm>
           <a:prstGeom prst="rect">
             <a:avLst/>
@@ -5381,109 +5572,73 @@
           <a:bodyPr wrap="square" lIns="0" tIns="0" rIns="0" bIns="0" rtlCol="0" anchor="ctr"/>
           <a:lstStyle/>
           <a:p>
-            <a:pPr algn="ctr" indent="0" marL="0">
-              <a:buNone/>
-            </a:pPr>
-            <a:r>
-              <a:rPr lang="en-US" sz="8400" b="1" dirty="0">
-                <a:solidFill>
-                  <a:srgbClr val="9A6310"/>
-                </a:solidFill>
-                <a:latin typeface="Arial" pitchFamily="34" charset="0"/>
-                <a:ea typeface="Arial" pitchFamily="34" charset="-122"/>
-                <a:cs typeface="Arial" pitchFamily="34" charset="-120"/>
-              </a:rPr>
-              <a:t>03</a:t>
-            </a:r>
-            <a:endParaRPr lang="en-US" sz="8400" dirty="0"/>
-          </a:p>
-        </p:txBody>
-      </p:sp>
-      <p:sp>
-        <p:nvSpPr>
-          <p:cNvPr id="5" name="Shape 3"/>
-          <p:cNvSpPr/>
-          <p:nvPr/>
-        </p:nvSpPr>
-        <p:spPr>
-          <a:xfrm>
-            <a:off x="566928" y="1883664"/>
-            <a:ext cx="475488" cy="50292"/>
-          </a:xfrm>
-          <a:prstGeom prst="rect">
-            <a:avLst/>
-          </a:prstGeom>
-          <a:solidFill>
-            <a:srgbClr val="9A6310"/>
-          </a:solidFill>
-          <a:ln/>
-        </p:spPr>
-      </p:sp>
-      <p:sp>
-        <p:nvSpPr>
-          <p:cNvPr id="6" name="Text 4"/>
-          <p:cNvSpPr/>
-          <p:nvPr/>
-        </p:nvSpPr>
-        <p:spPr>
-          <a:xfrm>
-            <a:off x="566928" y="2084832"/>
-            <a:ext cx="5394960" cy="868680"/>
-          </a:xfrm>
-          <a:prstGeom prst="rect">
-            <a:avLst/>
-          </a:prstGeom>
-          <a:noFill/>
-          <a:ln/>
-        </p:spPr>
-        <p:txBody>
-          <a:bodyPr wrap="square" lIns="0" tIns="0" rIns="0" bIns="0" rtlCol="0" anchor="t"/>
-          <a:lstStyle/>
-          <a:p>
-            <a:pPr indent="0" marL="0">
-              <a:buNone/>
-            </a:pPr>
-            <a:r>
-              <a:rPr lang="en-US" sz="3000" b="1" dirty="0">
-                <a:solidFill>
-                  <a:srgbClr val="272E52"/>
-                </a:solidFill>
-                <a:latin typeface="Arial" pitchFamily="34" charset="0"/>
-                <a:ea typeface="Arial" pitchFamily="34" charset="-122"/>
-                <a:cs typeface="Arial" pitchFamily="34" charset="-120"/>
-              </a:rPr>
-              <a:t>Praxiszeit</a:t>
-            </a:r>
-            <a:endParaRPr lang="en-US" sz="3000" dirty="0"/>
-          </a:p>
-        </p:txBody>
-      </p:sp>
-      <p:sp>
-        <p:nvSpPr>
-          <p:cNvPr id="7" name="Text 5"/>
-          <p:cNvSpPr/>
-          <p:nvPr/>
-        </p:nvSpPr>
-        <p:spPr>
-          <a:xfrm>
-            <a:off x="566928" y="3017520"/>
-            <a:ext cx="5394960" cy="548640"/>
-          </a:xfrm>
-          <a:prstGeom prst="rect">
-            <a:avLst/>
-          </a:prstGeom>
-          <a:noFill/>
-          <a:ln/>
-        </p:spPr>
-        <p:txBody>
-          <a:bodyPr wrap="square" lIns="0" tIns="0" rIns="0" bIns="0" rtlCol="0" anchor="t"/>
-          <a:lstStyle/>
-          <a:p>
-            <a:pPr indent="0" marL="0">
-              <a:buNone/>
-            </a:pPr>
-            <a:r>
-              <a:rPr lang="en-US" sz="1350" dirty="0">
+            <a:pPr indent="0" marL="0">
+              <a:buNone/>
+            </a:pPr>
+            <a:r>
+              <a:rPr lang="en-US" sz="1200" b="1" dirty="0">
+                <a:solidFill>
+                  <a:srgbClr val="434A63"/>
+                </a:solidFill>
+                <a:latin typeface="Arial" pitchFamily="34" charset="0"/>
+                <a:ea typeface="Arial" pitchFamily="34" charset="-122"/>
+                <a:cs typeface="Arial" pitchFamily="34" charset="-120"/>
+              </a:rPr>
+              <a:t>Zwei Terminal-Fenster nebeneinander: In einem lest ihr mit, im anderen sendet ihr. Im Windows-Terminal teilt Alt+Umschalt+Plus das Fenster.</a:t>
+            </a:r>
+            <a:endParaRPr lang="en-US" sz="1200" dirty="0"/>
+          </a:p>
+        </p:txBody>
+      </p:sp>
+      <p:sp>
+        <p:nvSpPr>
+          <p:cNvPr id="8" name="Shape 5"/>
+          <p:cNvSpPr/>
+          <p:nvPr/>
+        </p:nvSpPr>
+        <p:spPr>
+          <a:xfrm>
+            <a:off x="566928" y="4631436"/>
+            <a:ext cx="8010144" cy="0"/>
+          </a:xfrm>
+          <a:prstGeom prst="line">
+            <a:avLst/>
+          </a:prstGeom>
+          <a:noFill/>
+          <a:ln w="9525">
+            <a:solidFill>
+              <a:srgbClr val="DFE3F0"/>
+            </a:solidFill>
+            <a:prstDash val="solid"/>
+          </a:ln>
+        </p:spPr>
+      </p:sp>
+      <p:sp>
+        <p:nvSpPr>
+          <p:cNvPr id="9" name="Text 6"/>
+          <p:cNvSpPr/>
+          <p:nvPr/>
+        </p:nvSpPr>
+        <p:spPr>
+          <a:xfrm>
+            <a:off x="566928" y="4722876"/>
+            <a:ext cx="5029200" cy="237744"/>
+          </a:xfrm>
+          <a:prstGeom prst="rect">
+            <a:avLst/>
+          </a:prstGeom>
+          <a:noFill/>
+          <a:ln/>
+        </p:spPr>
+        <p:txBody>
+          <a:bodyPr wrap="square" lIns="0" tIns="0" rIns="0" bIns="0" rtlCol="0" anchor="ctr"/>
+          <a:lstStyle/>
+          <a:p>
+            <a:pPr indent="0" marL="0">
+              <a:buNone/>
+            </a:pPr>
+            <a:r>
+              <a:rPr lang="en-US" sz="1050" spc="30" kern="0" dirty="0">
                 <a:solidFill>
                   <a:srgbClr val="5C6377"/>
                 </a:solidFill>
@@ -5491,9 +5646,48 @@
                 <a:ea typeface="Arial" pitchFamily="34" charset="-122"/>
                 <a:cs typeface="Arial" pitchFamily="34" charset="-120"/>
               </a:rPr>
-              <a:t>75 Minuten in festen Gruppen, drei Stationen</a:t>
-            </a:r>
-            <a:endParaRPr lang="en-US" sz="1350" dirty="0"/>
+              <a:t>Die Werkzeuge</a:t>
+            </a:r>
+            <a:endParaRPr lang="en-US" sz="1050" dirty="0"/>
+          </a:p>
+        </p:txBody>
+      </p:sp>
+      <p:sp>
+        <p:nvSpPr>
+          <p:cNvPr id="10" name="Text 7"/>
+          <p:cNvSpPr/>
+          <p:nvPr/>
+        </p:nvSpPr>
+        <p:spPr>
+          <a:xfrm>
+            <a:off x="8028432" y="4722876"/>
+            <a:ext cx="548640" cy="237744"/>
+          </a:xfrm>
+          <a:prstGeom prst="rect">
+            <a:avLst/>
+          </a:prstGeom>
+          <a:noFill/>
+          <a:ln/>
+        </p:spPr>
+        <p:txBody>
+          <a:bodyPr wrap="square" lIns="0" tIns="0" rIns="0" bIns="0" rtlCol="0" anchor="ctr"/>
+          <a:lstStyle/>
+          <a:p>
+            <a:pPr algn="r" indent="0" marL="0">
+              <a:buNone/>
+            </a:pPr>
+            <a:r>
+              <a:rPr lang="en-US" sz="1050" dirty="0">
+                <a:solidFill>
+                  <a:srgbClr val="5C6377"/>
+                </a:solidFill>
+                <a:latin typeface="Arial" pitchFamily="34" charset="0"/>
+                <a:ea typeface="Arial" pitchFamily="34" charset="-122"/>
+                <a:cs typeface="Arial" pitchFamily="34" charset="-120"/>
+              </a:rPr>
+              <a:t>14/21</a:t>
+            </a:r>
+            <a:endParaRPr lang="en-US" sz="1050" dirty="0"/>
           </a:p>
         </p:txBody>
       </p:sp>
@@ -5537,8 +5731,28 @@
         </p:nvSpPr>
         <p:spPr>
           <a:xfrm>
-            <a:off x="566928" y="201168"/>
-            <a:ext cx="475488" cy="50292"/>
+            <a:off x="6355080" y="0"/>
+            <a:ext cx="2788920" cy="5143500"/>
+          </a:xfrm>
+          <a:prstGeom prst="rect">
+            <a:avLst/>
+          </a:prstGeom>
+          <a:solidFill>
+            <a:srgbClr val="FBF2E3"/>
+          </a:solidFill>
+          <a:ln/>
+        </p:spPr>
+      </p:sp>
+      <p:sp>
+        <p:nvSpPr>
+          <p:cNvPr id="3" name="Shape 1"/>
+          <p:cNvSpPr/>
+          <p:nvPr/>
+        </p:nvSpPr>
+        <p:spPr>
+          <a:xfrm>
+            <a:off x="6355080" y="0"/>
+            <a:ext cx="45720" cy="5143500"/>
           </a:xfrm>
           <a:prstGeom prst="rect">
             <a:avLst/>
@@ -5551,14 +5765,14 @@
       </p:sp>
       <p:sp>
         <p:nvSpPr>
-          <p:cNvPr id="3" name="Text 1"/>
-          <p:cNvSpPr/>
-          <p:nvPr/>
-        </p:nvSpPr>
-        <p:spPr>
-          <a:xfrm>
-            <a:off x="566928" y="384048"/>
-            <a:ext cx="8010144" cy="237744"/>
+          <p:cNvPr id="4" name="Text 2"/>
+          <p:cNvSpPr/>
+          <p:nvPr/>
+        </p:nvSpPr>
+        <p:spPr>
+          <a:xfrm>
+            <a:off x="6629400" y="1463040"/>
+            <a:ext cx="2194560" cy="1737360"/>
           </a:xfrm>
           <a:prstGeom prst="rect">
             <a:avLst/>
@@ -5570,11 +5784,11 @@
           <a:bodyPr wrap="square" lIns="0" tIns="0" rIns="0" bIns="0" rtlCol="0" anchor="ctr"/>
           <a:lstStyle/>
           <a:p>
-            <a:pPr indent="0" marL="0">
-              <a:buNone/>
-            </a:pPr>
-            <a:r>
-              <a:rPr lang="en-US" sz="1150" b="1" spc="180" kern="0" dirty="0">
+            <a:pPr algn="ctr" indent="0" marL="0">
+              <a:buNone/>
+            </a:pPr>
+            <a:r>
+              <a:rPr lang="en-US" sz="8400" b="1" dirty="0">
                 <a:solidFill>
                   <a:srgbClr val="9A6310"/>
                 </a:solidFill>
@@ -5582,48 +5796,9 @@
                 <a:ea typeface="Arial" pitchFamily="34" charset="-122"/>
                 <a:cs typeface="Arial" pitchFamily="34" charset="-120"/>
               </a:rPr>
-              <a:t>BREAKOUT · 19:20 BIS 20:35</a:t>
-            </a:r>
-            <a:endParaRPr lang="en-US" sz="1150" dirty="0"/>
-          </a:p>
-        </p:txBody>
-      </p:sp>
-      <p:sp>
-        <p:nvSpPr>
-          <p:cNvPr id="4" name="Text 2"/>
-          <p:cNvSpPr/>
-          <p:nvPr/>
-        </p:nvSpPr>
-        <p:spPr>
-          <a:xfrm>
-            <a:off x="566928" y="731520"/>
-            <a:ext cx="8010144" cy="603504"/>
-          </a:xfrm>
-          <a:prstGeom prst="rect">
-            <a:avLst/>
-          </a:prstGeom>
-          <a:noFill/>
-          <a:ln/>
-        </p:spPr>
-        <p:txBody>
-          <a:bodyPr wrap="square" lIns="0" tIns="0" rIns="0" bIns="0" rtlCol="0" anchor="t"/>
-          <a:lstStyle/>
-          <a:p>
-            <a:pPr indent="0" marL="0">
-              <a:buNone/>
-            </a:pPr>
-            <a:r>
-              <a:rPr lang="en-US" sz="2600" b="1" dirty="0">
-                <a:solidFill>
-                  <a:srgbClr val="272E52"/>
-                </a:solidFill>
-                <a:latin typeface="Arial" pitchFamily="34" charset="0"/>
-                <a:ea typeface="Arial" pitchFamily="34" charset="-122"/>
-                <a:cs typeface="Arial" pitchFamily="34" charset="-120"/>
-              </a:rPr>
-              <a:t>So läuft die Praxiszeit</a:t>
-            </a:r>
-            <a:endParaRPr lang="en-US" sz="2600" dirty="0"/>
+              <a:t>03</a:t>
+            </a:r>
+            <a:endParaRPr lang="en-US" sz="8400" dirty="0"/>
           </a:p>
         </p:txBody>
       </p:sp>
@@ -5635,302 +5810,8 @@
         </p:nvSpPr>
         <p:spPr>
           <a:xfrm>
-            <a:off x="438912" y="1737360"/>
-            <a:ext cx="8266176" cy="384048"/>
-          </a:xfrm>
-          <a:prstGeom prst="rect">
-            <a:avLst/>
-          </a:prstGeom>
-          <a:solidFill>
-            <a:srgbClr val="F5F6FC"/>
-          </a:solidFill>
-          <a:ln/>
-        </p:spPr>
-      </p:sp>
-      <p:sp>
-        <p:nvSpPr>
-          <p:cNvPr id="6" name="Text 4"/>
-          <p:cNvSpPr/>
-          <p:nvPr/>
-        </p:nvSpPr>
-        <p:spPr>
-          <a:xfrm>
-            <a:off x="566928" y="1737360"/>
-            <a:ext cx="1097280" cy="384048"/>
-          </a:xfrm>
-          <a:prstGeom prst="rect">
-            <a:avLst/>
-          </a:prstGeom>
-          <a:noFill/>
-          <a:ln/>
-        </p:spPr>
-        <p:txBody>
-          <a:bodyPr wrap="square" lIns="0" tIns="0" rIns="0" bIns="0" rtlCol="0" anchor="ctr"/>
-          <a:lstStyle/>
-          <a:p>
-            <a:pPr indent="0" marL="0">
-              <a:buNone/>
-            </a:pPr>
-            <a:r>
-              <a:rPr lang="en-US" sz="1100" b="1" dirty="0">
-                <a:solidFill>
-                  <a:srgbClr val="9A6310"/>
-                </a:solidFill>
-                <a:latin typeface="Courier New" pitchFamily="34" charset="0"/>
-                <a:ea typeface="Courier New" pitchFamily="34" charset="-122"/>
-                <a:cs typeface="Courier New" pitchFamily="34" charset="-120"/>
-              </a:rPr>
-              <a:t>Station 1</a:t>
-            </a:r>
-            <a:endParaRPr lang="en-US" sz="1100" dirty="0"/>
-          </a:p>
-        </p:txBody>
-      </p:sp>
-      <p:sp>
-        <p:nvSpPr>
-          <p:cNvPr id="7" name="Text 5"/>
-          <p:cNvSpPr/>
-          <p:nvPr/>
-        </p:nvSpPr>
-        <p:spPr>
-          <a:xfrm>
-            <a:off x="1664208" y="1737360"/>
-            <a:ext cx="6912864" cy="384048"/>
-          </a:xfrm>
-          <a:prstGeom prst="rect">
-            <a:avLst/>
-          </a:prstGeom>
-          <a:noFill/>
-          <a:ln/>
-        </p:spPr>
-        <p:txBody>
-          <a:bodyPr wrap="square" lIns="0" tIns="0" rIns="0" bIns="0" rtlCol="0" anchor="ctr"/>
-          <a:lstStyle/>
-          <a:p>
-            <a:pPr indent="0" marL="0">
-              <a:buNone/>
-            </a:pPr>
-            <a:r>
-              <a:rPr lang="en-US" sz="1100" dirty="0">
-                <a:solidFill>
-                  <a:srgbClr val="434A63"/>
-                </a:solidFill>
-                <a:latin typeface="Arial" pitchFamily="34" charset="0"/>
-                <a:ea typeface="Arial" pitchFamily="34" charset="-122"/>
-                <a:cs typeface="Arial" pitchFamily="34" charset="-120"/>
-              </a:rPr>
-              <a:t>Wireshark einrichten: jede Person installiert selbst, die Gruppe hilft sich · 15 Min.</a:t>
-            </a:r>
-            <a:endParaRPr lang="en-US" sz="1100" dirty="0"/>
-          </a:p>
-        </p:txBody>
-      </p:sp>
-      <p:sp>
-        <p:nvSpPr>
-          <p:cNvPr id="8" name="Text 6"/>
-          <p:cNvSpPr/>
-          <p:nvPr/>
-        </p:nvSpPr>
-        <p:spPr>
-          <a:xfrm>
-            <a:off x="566928" y="2121408"/>
-            <a:ext cx="1097280" cy="384048"/>
-          </a:xfrm>
-          <a:prstGeom prst="rect">
-            <a:avLst/>
-          </a:prstGeom>
-          <a:noFill/>
-          <a:ln/>
-        </p:spPr>
-        <p:txBody>
-          <a:bodyPr wrap="square" lIns="0" tIns="0" rIns="0" bIns="0" rtlCol="0" anchor="ctr"/>
-          <a:lstStyle/>
-          <a:p>
-            <a:pPr indent="0" marL="0">
-              <a:buNone/>
-            </a:pPr>
-            <a:r>
-              <a:rPr lang="en-US" sz="1100" b="1" dirty="0">
-                <a:solidFill>
-                  <a:srgbClr val="9A6310"/>
-                </a:solidFill>
-                <a:latin typeface="Courier New" pitchFamily="34" charset="0"/>
-                <a:ea typeface="Courier New" pitchFamily="34" charset="-122"/>
-                <a:cs typeface="Courier New" pitchFamily="34" charset="-120"/>
-              </a:rPr>
-              <a:t>Station 2</a:t>
-            </a:r>
-            <a:endParaRPr lang="en-US" sz="1100" dirty="0"/>
-          </a:p>
-        </p:txBody>
-      </p:sp>
-      <p:sp>
-        <p:nvSpPr>
-          <p:cNvPr id="9" name="Text 7"/>
-          <p:cNvSpPr/>
-          <p:nvPr/>
-        </p:nvSpPr>
-        <p:spPr>
-          <a:xfrm>
-            <a:off x="1664208" y="2121408"/>
-            <a:ext cx="6912864" cy="384048"/>
-          </a:xfrm>
-          <a:prstGeom prst="rect">
-            <a:avLst/>
-          </a:prstGeom>
-          <a:noFill/>
-          <a:ln/>
-        </p:spPr>
-        <p:txBody>
-          <a:bodyPr wrap="square" lIns="0" tIns="0" rIns="0" bIns="0" rtlCol="0" anchor="ctr"/>
-          <a:lstStyle/>
-          <a:p>
-            <a:pPr indent="0" marL="0">
-              <a:buNone/>
-            </a:pPr>
-            <a:r>
-              <a:rPr lang="en-US" sz="1100" dirty="0">
-                <a:solidFill>
-                  <a:srgbClr val="434A63"/>
-                </a:solidFill>
-                <a:latin typeface="Arial" pitchFamily="34" charset="0"/>
-                <a:ea typeface="Arial" pitchFamily="34" charset="-122"/>
-                <a:cs typeface="Arial" pitchFamily="34" charset="-120"/>
-              </a:rPr>
-              <a:t>Paket-Detektiv: Profinet, MQTT und OPC UA im Mitschnitt der Großbäckerei · 35 Min.</a:t>
-            </a:r>
-            <a:endParaRPr lang="en-US" sz="1100" dirty="0"/>
-          </a:p>
-        </p:txBody>
-      </p:sp>
-      <p:sp>
-        <p:nvSpPr>
-          <p:cNvPr id="10" name="Shape 8"/>
-          <p:cNvSpPr/>
-          <p:nvPr/>
-        </p:nvSpPr>
-        <p:spPr>
-          <a:xfrm>
-            <a:off x="438912" y="2505456"/>
-            <a:ext cx="8266176" cy="384048"/>
-          </a:xfrm>
-          <a:prstGeom prst="rect">
-            <a:avLst/>
-          </a:prstGeom>
-          <a:solidFill>
-            <a:srgbClr val="F5F6FC"/>
-          </a:solidFill>
-          <a:ln/>
-        </p:spPr>
-      </p:sp>
-      <p:sp>
-        <p:nvSpPr>
-          <p:cNvPr id="11" name="Text 9"/>
-          <p:cNvSpPr/>
-          <p:nvPr/>
-        </p:nvSpPr>
-        <p:spPr>
-          <a:xfrm>
-            <a:off x="566928" y="2505456"/>
-            <a:ext cx="1097280" cy="384048"/>
-          </a:xfrm>
-          <a:prstGeom prst="rect">
-            <a:avLst/>
-          </a:prstGeom>
-          <a:noFill/>
-          <a:ln/>
-        </p:spPr>
-        <p:txBody>
-          <a:bodyPr wrap="square" lIns="0" tIns="0" rIns="0" bIns="0" rtlCol="0" anchor="ctr"/>
-          <a:lstStyle/>
-          <a:p>
-            <a:pPr indent="0" marL="0">
-              <a:buNone/>
-            </a:pPr>
-            <a:r>
-              <a:rPr lang="en-US" sz="1100" b="1" dirty="0">
-                <a:solidFill>
-                  <a:srgbClr val="9A6310"/>
-                </a:solidFill>
-                <a:latin typeface="Courier New" pitchFamily="34" charset="0"/>
-                <a:ea typeface="Courier New" pitchFamily="34" charset="-122"/>
-                <a:cs typeface="Courier New" pitchFamily="34" charset="-120"/>
-              </a:rPr>
-              <a:t>Station 3</a:t>
-            </a:r>
-            <a:endParaRPr lang="en-US" sz="1100" dirty="0"/>
-          </a:p>
-        </p:txBody>
-      </p:sp>
-      <p:sp>
-        <p:nvSpPr>
-          <p:cNvPr id="12" name="Text 10"/>
-          <p:cNvSpPr/>
-          <p:nvPr/>
-        </p:nvSpPr>
-        <p:spPr>
-          <a:xfrm>
-            <a:off x="1664208" y="2505456"/>
-            <a:ext cx="6912864" cy="384048"/>
-          </a:xfrm>
-          <a:prstGeom prst="rect">
-            <a:avLst/>
-          </a:prstGeom>
-          <a:noFill/>
-          <a:ln/>
-        </p:spPr>
-        <p:txBody>
-          <a:bodyPr wrap="square" lIns="0" tIns="0" rIns="0" bIns="0" rtlCol="0" anchor="ctr"/>
-          <a:lstStyle/>
-          <a:p>
-            <a:pPr indent="0" marL="0">
-              <a:buNone/>
-            </a:pPr>
-            <a:r>
-              <a:rPr lang="en-US" sz="1100" dirty="0">
-                <a:solidFill>
-                  <a:srgbClr val="434A63"/>
-                </a:solidFill>
-                <a:latin typeface="Arial" pitchFamily="34" charset="0"/>
-                <a:ea typeface="Arial" pitchFamily="34" charset="-122"/>
-                <a:cs typeface="Arial" pitchFamily="34" charset="-120"/>
-              </a:rPr>
-              <a:t>MQTT im Container: eigener Broker, senden, abonnieren, ein Sensor funkt mit · 25 Min.</a:t>
-            </a:r>
-            <a:endParaRPr lang="en-US" sz="1100" dirty="0"/>
-          </a:p>
-        </p:txBody>
-      </p:sp>
-      <p:sp>
-        <p:nvSpPr>
-          <p:cNvPr id="13" name="Shape 11"/>
-          <p:cNvSpPr/>
-          <p:nvPr/>
-        </p:nvSpPr>
-        <p:spPr>
-          <a:xfrm>
-            <a:off x="566928" y="3017520"/>
-            <a:ext cx="8010144" cy="1426464"/>
-          </a:xfrm>
-          <a:prstGeom prst="rect">
-            <a:avLst/>
-          </a:prstGeom>
-          <a:solidFill>
-            <a:srgbClr val="EEF0FB"/>
-          </a:solidFill>
-          <a:ln/>
-        </p:spPr>
-      </p:sp>
-      <p:sp>
-        <p:nvSpPr>
-          <p:cNvPr id="14" name="Shape 12"/>
-          <p:cNvSpPr/>
-          <p:nvPr/>
-        </p:nvSpPr>
-        <p:spPr>
-          <a:xfrm>
-            <a:off x="566928" y="3017520"/>
-            <a:ext cx="41148" cy="1426464"/>
+            <a:off x="566928" y="1883664"/>
+            <a:ext cx="475488" cy="50292"/>
           </a:xfrm>
           <a:prstGeom prst="rect">
             <a:avLst/>
@@ -5943,14 +5824,14 @@
       </p:sp>
       <p:sp>
         <p:nvSpPr>
-          <p:cNvPr id="15" name="Text 13"/>
-          <p:cNvSpPr/>
-          <p:nvPr/>
-        </p:nvSpPr>
-        <p:spPr>
-          <a:xfrm>
-            <a:off x="804672" y="3163824"/>
-            <a:ext cx="7607808" cy="242062"/>
+          <p:cNvPr id="6" name="Text 4"/>
+          <p:cNvSpPr/>
+          <p:nvPr/>
+        </p:nvSpPr>
+        <p:spPr>
+          <a:xfrm>
+            <a:off x="566928" y="2084832"/>
+            <a:ext cx="5394960" cy="868680"/>
           </a:xfrm>
           <a:prstGeom prst="rect">
             <a:avLst/>
@@ -5966,7 +5847,7 @@
               <a:buNone/>
             </a:pPr>
             <a:r>
-              <a:rPr lang="en-US" sz="1300" b="1" dirty="0">
+              <a:rPr lang="en-US" sz="3000" b="1" dirty="0">
                 <a:solidFill>
                   <a:srgbClr val="272E52"/>
                 </a:solidFill>
@@ -5974,22 +5855,22 @@
                 <a:ea typeface="Arial" pitchFamily="34" charset="-122"/>
                 <a:cs typeface="Arial" pitchFamily="34" charset="-120"/>
               </a:rPr>
-              <a:t>Jetzt öffnen, alles steht auf der Kursseite</a:t>
-            </a:r>
-            <a:endParaRPr lang="en-US" sz="1300" dirty="0"/>
-          </a:p>
-        </p:txBody>
-      </p:sp>
-      <p:sp>
-        <p:nvSpPr>
-          <p:cNvPr id="16" name="Text 14"/>
-          <p:cNvSpPr/>
-          <p:nvPr/>
-        </p:nvSpPr>
-        <p:spPr>
-          <a:xfrm>
-            <a:off x="804672" y="3451606"/>
-            <a:ext cx="7607808" cy="873506"/>
+              <a:t>Praxiszeit</a:t>
+            </a:r>
+            <a:endParaRPr lang="en-US" sz="3000" dirty="0"/>
+          </a:p>
+        </p:txBody>
+      </p:sp>
+      <p:sp>
+        <p:nvSpPr>
+          <p:cNvPr id="7" name="Text 5"/>
+          <p:cNvSpPr/>
+          <p:nvPr/>
+        </p:nvSpPr>
+        <p:spPr>
+          <a:xfrm>
+            <a:off x="566928" y="3017520"/>
+            <a:ext cx="5394960" cy="548640"/>
           </a:xfrm>
           <a:prstGeom prst="rect">
             <a:avLst/>
@@ -6002,147 +5883,10 @@
           <a:lstStyle/>
           <a:p>
             <a:pPr indent="0" marL="0">
-              <a:lnSpc>
-                <a:spcPct val="92000"/>
-              </a:lnSpc>
-              <a:spcAft>
-                <a:spcPts val="500"/>
-              </a:spcAft>
-              <a:buNone/>
-            </a:pPr>
-            <a:r>
-              <a:rPr lang="en-US" sz="1000" dirty="0">
-                <a:solidFill>
-                  <a:srgbClr val="434A63"/>
-                </a:solidFill>
-                <a:latin typeface="Arial" pitchFamily="34" charset="0"/>
-                <a:ea typeface="Arial" pitchFamily="34" charset="-122"/>
-                <a:cs typeface="Arial" pitchFamily="34" charset="-120"/>
-              </a:rPr>
-              <a:t>Station 1:  jacobmenge.github.io/kurs-unterlagen/industrie-iot/wireshark-installation/</a:t>
-            </a:r>
-            <a:endParaRPr lang="en-US" sz="1000" dirty="0"/>
-          </a:p>
-          <a:p>
-            <a:pPr indent="0" marL="0">
-              <a:lnSpc>
-                <a:spcPct val="92000"/>
-              </a:lnSpc>
-              <a:spcAft>
-                <a:spcPts val="500"/>
-              </a:spcAft>
-              <a:buNone/>
-            </a:pPr>
-            <a:r>
-              <a:rPr lang="en-US" sz="1000" dirty="0">
-                <a:solidFill>
-                  <a:srgbClr val="434A63"/>
-                </a:solidFill>
-                <a:latin typeface="Arial" pitchFamily="34" charset="0"/>
-                <a:ea typeface="Arial" pitchFamily="34" charset="-122"/>
-                <a:cs typeface="Arial" pitchFamily="34" charset="-120"/>
-              </a:rPr>
-              <a:t>Station 2:  jacobmenge.github.io/kurs-unterlagen/industrie-iot/praxis-paket-detektiv/</a:t>
-            </a:r>
-            <a:endParaRPr lang="en-US" sz="1000" dirty="0"/>
-          </a:p>
-          <a:p>
-            <a:pPr indent="0" marL="0">
-              <a:lnSpc>
-                <a:spcPct val="92000"/>
-              </a:lnSpc>
-              <a:spcAft>
-                <a:spcPts val="500"/>
-              </a:spcAft>
-              <a:buNone/>
-            </a:pPr>
-            <a:r>
-              <a:rPr lang="en-US" sz="1000" dirty="0">
-                <a:solidFill>
-                  <a:srgbClr val="434A63"/>
-                </a:solidFill>
-                <a:latin typeface="Arial" pitchFamily="34" charset="0"/>
-                <a:ea typeface="Arial" pitchFamily="34" charset="-122"/>
-                <a:cs typeface="Arial" pitchFamily="34" charset="-120"/>
-              </a:rPr>
-              <a:t>Station 3:  jacobmenge.github.io/kurs-unterlagen/industrie-iot/praxis-mqtt-container/</a:t>
-            </a:r>
-            <a:endParaRPr lang="en-US" sz="1000" dirty="0"/>
-          </a:p>
-          <a:p>
-            <a:pPr indent="0" marL="0">
-              <a:lnSpc>
-                <a:spcPct val="92000"/>
-              </a:lnSpc>
-              <a:spcAft>
-                <a:spcPts val="500"/>
-              </a:spcAft>
-              <a:buNone/>
-            </a:pPr>
-            <a:r>
-              <a:rPr lang="en-US" sz="1000" dirty="0">
-                <a:solidFill>
-                  <a:srgbClr val="434A63"/>
-                </a:solidFill>
-                <a:latin typeface="Arial" pitchFamily="34" charset="0"/>
-                <a:ea typeface="Arial" pitchFamily="34" charset="-122"/>
-                <a:cs typeface="Arial" pitchFamily="34" charset="-120"/>
-              </a:rPr>
-              <a:t>Wenn es klemmt:  jacobmenge.github.io/kurs-unterlagen/industrie-iot/stolpersteine/</a:t>
-            </a:r>
-            <a:endParaRPr lang="en-US" sz="1000" dirty="0"/>
-          </a:p>
-        </p:txBody>
-      </p:sp>
-      <p:sp>
-        <p:nvSpPr>
-          <p:cNvPr id="17" name="Shape 15"/>
-          <p:cNvSpPr/>
-          <p:nvPr/>
-        </p:nvSpPr>
-        <p:spPr>
-          <a:xfrm>
-            <a:off x="566928" y="4631436"/>
-            <a:ext cx="8010144" cy="0"/>
-          </a:xfrm>
-          <a:prstGeom prst="line">
-            <a:avLst/>
-          </a:prstGeom>
-          <a:noFill/>
-          <a:ln w="9525">
-            <a:solidFill>
-              <a:srgbClr val="DFE3F0"/>
-            </a:solidFill>
-            <a:prstDash val="solid"/>
-          </a:ln>
-        </p:spPr>
-      </p:sp>
-      <p:sp>
-        <p:nvSpPr>
-          <p:cNvPr id="18" name="Text 16"/>
-          <p:cNvSpPr/>
-          <p:nvPr/>
-        </p:nvSpPr>
-        <p:spPr>
-          <a:xfrm>
-            <a:off x="566928" y="4722876"/>
-            <a:ext cx="5029200" cy="237744"/>
-          </a:xfrm>
-          <a:prstGeom prst="rect">
-            <a:avLst/>
-          </a:prstGeom>
-          <a:noFill/>
-          <a:ln/>
-        </p:spPr>
-        <p:txBody>
-          <a:bodyPr wrap="square" lIns="0" tIns="0" rIns="0" bIns="0" rtlCol="0" anchor="ctr"/>
-          <a:lstStyle/>
-          <a:p>
-            <a:pPr indent="0" marL="0">
-              <a:buNone/>
-            </a:pPr>
-            <a:r>
-              <a:rPr lang="en-US" sz="1050" spc="30" kern="0" dirty="0">
+              <a:buNone/>
+            </a:pPr>
+            <a:r>
+              <a:rPr lang="en-US" sz="1350" dirty="0">
                 <a:solidFill>
                   <a:srgbClr val="5C6377"/>
                 </a:solidFill>
@@ -6150,48 +5894,9 @@
                 <a:ea typeface="Arial" pitchFamily="34" charset="-122"/>
                 <a:cs typeface="Arial" pitchFamily="34" charset="-120"/>
               </a:rPr>
-              <a:t>Praxiszeit</a:t>
-            </a:r>
-            <a:endParaRPr lang="en-US" sz="1050" dirty="0"/>
-          </a:p>
-        </p:txBody>
-      </p:sp>
-      <p:sp>
-        <p:nvSpPr>
-          <p:cNvPr id="19" name="Text 17"/>
-          <p:cNvSpPr/>
-          <p:nvPr/>
-        </p:nvSpPr>
-        <p:spPr>
-          <a:xfrm>
-            <a:off x="8028432" y="4722876"/>
-            <a:ext cx="548640" cy="237744"/>
-          </a:xfrm>
-          <a:prstGeom prst="rect">
-            <a:avLst/>
-          </a:prstGeom>
-          <a:noFill/>
-          <a:ln/>
-        </p:spPr>
-        <p:txBody>
-          <a:bodyPr wrap="square" lIns="0" tIns="0" rIns="0" bIns="0" rtlCol="0" anchor="ctr"/>
-          <a:lstStyle/>
-          <a:p>
-            <a:pPr algn="r" indent="0" marL="0">
-              <a:buNone/>
-            </a:pPr>
-            <a:r>
-              <a:rPr lang="en-US" sz="1050" dirty="0">
-                <a:solidFill>
-                  <a:srgbClr val="5C6377"/>
-                </a:solidFill>
-                <a:latin typeface="Arial" pitchFamily="34" charset="0"/>
-                <a:ea typeface="Arial" pitchFamily="34" charset="-122"/>
-                <a:cs typeface="Arial" pitchFamily="34" charset="-120"/>
-              </a:rPr>
-              <a:t>14/20</a:t>
-            </a:r>
-            <a:endParaRPr lang="en-US" sz="1050" dirty="0"/>
+              <a:t>75 Minuten in festen Gruppen, drei Stationen</a:t>
+            </a:r>
+            <a:endParaRPr lang="en-US" sz="1350" dirty="0"/>
           </a:p>
         </p:txBody>
       </p:sp>
@@ -6280,7 +5985,7 @@
                 <a:ea typeface="Arial" pitchFamily="34" charset="-122"/>
                 <a:cs typeface="Arial" pitchFamily="34" charset="-120"/>
               </a:rPr>
-              <a:t>IN DER GRUPPE · 15 MINUTEN</a:t>
+              <a:t>BREAKOUT · 19:20 BIS 20:35</a:t>
             </a:r>
             <a:endParaRPr lang="en-US" sz="1150" dirty="0"/>
           </a:p>
@@ -6319,7 +6024,7 @@
                 <a:ea typeface="Arial" pitchFamily="34" charset="-122"/>
                 <a:cs typeface="Arial" pitchFamily="34" charset="-120"/>
               </a:rPr>
-              <a:t>Station 1: Wireshark einrichten</a:t>
+              <a:t>So läuft die Praxiszeit</a:t>
             </a:r>
             <a:endParaRPr lang="en-US" sz="2600" dirty="0"/>
           </a:p>
@@ -6327,40 +6032,89 @@
       </p:sp>
       <p:sp>
         <p:nvSpPr>
-          <p:cNvPr id="5" name="Text 3"/>
+          <p:cNvPr id="5" name="Shape 3"/>
+          <p:cNvSpPr/>
+          <p:nvPr/>
+        </p:nvSpPr>
+        <p:spPr>
+          <a:xfrm>
+            <a:off x="438912" y="1737360"/>
+            <a:ext cx="8266176" cy="384048"/>
+          </a:xfrm>
+          <a:prstGeom prst="rect">
+            <a:avLst/>
+          </a:prstGeom>
+          <a:solidFill>
+            <a:srgbClr val="F5F6FC"/>
+          </a:solidFill>
+          <a:ln/>
+        </p:spPr>
+      </p:sp>
+      <p:sp>
+        <p:nvSpPr>
+          <p:cNvPr id="6" name="Text 4"/>
           <p:cNvSpPr/>
           <p:nvPr/>
         </p:nvSpPr>
         <p:spPr>
           <a:xfrm>
             <a:off x="566928" y="1737360"/>
-            <a:ext cx="8010144" cy="2103120"/>
-          </a:xfrm>
-          <a:prstGeom prst="rect">
-            <a:avLst/>
-          </a:prstGeom>
-          <a:noFill/>
-          <a:ln/>
-        </p:spPr>
-        <p:txBody>
-          <a:bodyPr wrap="square" lIns="0" tIns="0" rIns="0" bIns="0" rtlCol="0" anchor="t"/>
-          <a:lstStyle/>
-          <a:p>
-            <a:pPr marL="254000" indent="-254000">
-              <a:lnSpc>
-                <a:spcPct val="100000"/>
-              </a:lnSpc>
-              <a:spcAft>
-                <a:spcPts val="900"/>
-              </a:spcAft>
-              <a:buClr>
-                <a:srgbClr val="0F7C86"/>
-              </a:buClr>
-              <a:buSzPct val="100000"/>
-              <a:buChar char="▸"/>
-            </a:pPr>
-            <a:r>
-              <a:rPr lang="en-US" sz="1200" dirty="0">
+            <a:ext cx="1097280" cy="384048"/>
+          </a:xfrm>
+          <a:prstGeom prst="rect">
+            <a:avLst/>
+          </a:prstGeom>
+          <a:noFill/>
+          <a:ln/>
+        </p:spPr>
+        <p:txBody>
+          <a:bodyPr wrap="square" lIns="0" tIns="0" rIns="0" bIns="0" rtlCol="0" anchor="ctr"/>
+          <a:lstStyle/>
+          <a:p>
+            <a:pPr indent="0" marL="0">
+              <a:buNone/>
+            </a:pPr>
+            <a:r>
+              <a:rPr lang="en-US" sz="1100" b="1" dirty="0">
+                <a:solidFill>
+                  <a:srgbClr val="9A6310"/>
+                </a:solidFill>
+                <a:latin typeface="Courier New" pitchFamily="34" charset="0"/>
+                <a:ea typeface="Courier New" pitchFamily="34" charset="-122"/>
+                <a:cs typeface="Courier New" pitchFamily="34" charset="-120"/>
+              </a:rPr>
+              <a:t>Station 1</a:t>
+            </a:r>
+            <a:endParaRPr lang="en-US" sz="1100" dirty="0"/>
+          </a:p>
+        </p:txBody>
+      </p:sp>
+      <p:sp>
+        <p:nvSpPr>
+          <p:cNvPr id="7" name="Text 5"/>
+          <p:cNvSpPr/>
+          <p:nvPr/>
+        </p:nvSpPr>
+        <p:spPr>
+          <a:xfrm>
+            <a:off x="1664208" y="1737360"/>
+            <a:ext cx="6912864" cy="384048"/>
+          </a:xfrm>
+          <a:prstGeom prst="rect">
+            <a:avLst/>
+          </a:prstGeom>
+          <a:noFill/>
+          <a:ln/>
+        </p:spPr>
+        <p:txBody>
+          <a:bodyPr wrap="square" lIns="0" tIns="0" rIns="0" bIns="0" rtlCol="0" anchor="ctr"/>
+          <a:lstStyle/>
+          <a:p>
+            <a:pPr indent="0" marL="0">
+              <a:buNone/>
+            </a:pPr>
+            <a:r>
+              <a:rPr lang="en-US" sz="1100" dirty="0">
                 <a:solidFill>
                   <a:srgbClr val="434A63"/>
                 </a:solidFill>
@@ -6368,26 +6122,77 @@
                 <a:ea typeface="Arial" pitchFamily="34" charset="-122"/>
                 <a:cs typeface="Arial" pitchFamily="34" charset="-120"/>
               </a:rPr>
-              <a:t>Windows: Installer von wireshark.org, durchklicken. Die Npcap-Frage ist heute egal.</a:t>
-            </a:r>
-            <a:endParaRPr lang="en-US" sz="1200" dirty="0"/>
-          </a:p>
-          <a:p>
-            <a:pPr marL="254000" indent="-254000">
-              <a:lnSpc>
-                <a:spcPct val="100000"/>
-              </a:lnSpc>
-              <a:spcAft>
-                <a:spcPts val="900"/>
-              </a:spcAft>
-              <a:buClr>
-                <a:srgbClr val="0F7C86"/>
-              </a:buClr>
-              <a:buSzPct val="100000"/>
-              <a:buChar char="▸"/>
-            </a:pPr>
-            <a:r>
-              <a:rPr lang="en-US" sz="1200" dirty="0">
+              <a:t>Wireshark einrichten: jede Person installiert selbst, die Gruppe hilft sich · 15 Min.</a:t>
+            </a:r>
+            <a:endParaRPr lang="en-US" sz="1100" dirty="0"/>
+          </a:p>
+        </p:txBody>
+      </p:sp>
+      <p:sp>
+        <p:nvSpPr>
+          <p:cNvPr id="8" name="Text 6"/>
+          <p:cNvSpPr/>
+          <p:nvPr/>
+        </p:nvSpPr>
+        <p:spPr>
+          <a:xfrm>
+            <a:off x="566928" y="2121408"/>
+            <a:ext cx="1097280" cy="384048"/>
+          </a:xfrm>
+          <a:prstGeom prst="rect">
+            <a:avLst/>
+          </a:prstGeom>
+          <a:noFill/>
+          <a:ln/>
+        </p:spPr>
+        <p:txBody>
+          <a:bodyPr wrap="square" lIns="0" tIns="0" rIns="0" bIns="0" rtlCol="0" anchor="ctr"/>
+          <a:lstStyle/>
+          <a:p>
+            <a:pPr indent="0" marL="0">
+              <a:buNone/>
+            </a:pPr>
+            <a:r>
+              <a:rPr lang="en-US" sz="1100" b="1" dirty="0">
+                <a:solidFill>
+                  <a:srgbClr val="9A6310"/>
+                </a:solidFill>
+                <a:latin typeface="Courier New" pitchFamily="34" charset="0"/>
+                <a:ea typeface="Courier New" pitchFamily="34" charset="-122"/>
+                <a:cs typeface="Courier New" pitchFamily="34" charset="-120"/>
+              </a:rPr>
+              <a:t>Station 2</a:t>
+            </a:r>
+            <a:endParaRPr lang="en-US" sz="1100" dirty="0"/>
+          </a:p>
+        </p:txBody>
+      </p:sp>
+      <p:sp>
+        <p:nvSpPr>
+          <p:cNvPr id="9" name="Text 7"/>
+          <p:cNvSpPr/>
+          <p:nvPr/>
+        </p:nvSpPr>
+        <p:spPr>
+          <a:xfrm>
+            <a:off x="1664208" y="2121408"/>
+            <a:ext cx="6912864" cy="384048"/>
+          </a:xfrm>
+          <a:prstGeom prst="rect">
+            <a:avLst/>
+          </a:prstGeom>
+          <a:noFill/>
+          <a:ln/>
+        </p:spPr>
+        <p:txBody>
+          <a:bodyPr wrap="square" lIns="0" tIns="0" rIns="0" bIns="0" rtlCol="0" anchor="ctr"/>
+          <a:lstStyle/>
+          <a:p>
+            <a:pPr indent="0" marL="0">
+              <a:buNone/>
+            </a:pPr>
+            <a:r>
+              <a:rPr lang="en-US" sz="1100" dirty="0">
                 <a:solidFill>
                   <a:srgbClr val="434A63"/>
                 </a:solidFill>
@@ -6395,26 +6200,97 @@
                 <a:ea typeface="Arial" pitchFamily="34" charset="-122"/>
                 <a:cs typeface="Arial" pitchFamily="34" charset="-120"/>
               </a:rPr>
-              <a:t>macOS: dmg laden, in Programme ziehen. Die ChmodBPF-Frage überspringen.</a:t>
-            </a:r>
-            <a:endParaRPr lang="en-US" sz="1200" dirty="0"/>
-          </a:p>
-          <a:p>
-            <a:pPr marL="254000" indent="-254000">
-              <a:lnSpc>
-                <a:spcPct val="100000"/>
-              </a:lnSpc>
-              <a:spcAft>
-                <a:spcPts val="900"/>
-              </a:spcAft>
-              <a:buClr>
-                <a:srgbClr val="0F7C86"/>
-              </a:buClr>
-              <a:buSzPct val="100000"/>
-              <a:buChar char="▸"/>
-            </a:pPr>
-            <a:r>
-              <a:rPr lang="en-US" sz="1200" dirty="0">
+              <a:t>Paket-Detektiv: Profinet, MQTT und OPC UA im Mitschnitt der Großbäckerei · 35 Min.</a:t>
+            </a:r>
+            <a:endParaRPr lang="en-US" sz="1100" dirty="0"/>
+          </a:p>
+        </p:txBody>
+      </p:sp>
+      <p:sp>
+        <p:nvSpPr>
+          <p:cNvPr id="10" name="Shape 8"/>
+          <p:cNvSpPr/>
+          <p:nvPr/>
+        </p:nvSpPr>
+        <p:spPr>
+          <a:xfrm>
+            <a:off x="438912" y="2505456"/>
+            <a:ext cx="8266176" cy="384048"/>
+          </a:xfrm>
+          <a:prstGeom prst="rect">
+            <a:avLst/>
+          </a:prstGeom>
+          <a:solidFill>
+            <a:srgbClr val="F5F6FC"/>
+          </a:solidFill>
+          <a:ln/>
+        </p:spPr>
+      </p:sp>
+      <p:sp>
+        <p:nvSpPr>
+          <p:cNvPr id="11" name="Text 9"/>
+          <p:cNvSpPr/>
+          <p:nvPr/>
+        </p:nvSpPr>
+        <p:spPr>
+          <a:xfrm>
+            <a:off x="566928" y="2505456"/>
+            <a:ext cx="1097280" cy="384048"/>
+          </a:xfrm>
+          <a:prstGeom prst="rect">
+            <a:avLst/>
+          </a:prstGeom>
+          <a:noFill/>
+          <a:ln/>
+        </p:spPr>
+        <p:txBody>
+          <a:bodyPr wrap="square" lIns="0" tIns="0" rIns="0" bIns="0" rtlCol="0" anchor="ctr"/>
+          <a:lstStyle/>
+          <a:p>
+            <a:pPr indent="0" marL="0">
+              <a:buNone/>
+            </a:pPr>
+            <a:r>
+              <a:rPr lang="en-US" sz="1100" b="1" dirty="0">
+                <a:solidFill>
+                  <a:srgbClr val="9A6310"/>
+                </a:solidFill>
+                <a:latin typeface="Courier New" pitchFamily="34" charset="0"/>
+                <a:ea typeface="Courier New" pitchFamily="34" charset="-122"/>
+                <a:cs typeface="Courier New" pitchFamily="34" charset="-120"/>
+              </a:rPr>
+              <a:t>Station 3</a:t>
+            </a:r>
+            <a:endParaRPr lang="en-US" sz="1100" dirty="0"/>
+          </a:p>
+        </p:txBody>
+      </p:sp>
+      <p:sp>
+        <p:nvSpPr>
+          <p:cNvPr id="12" name="Text 10"/>
+          <p:cNvSpPr/>
+          <p:nvPr/>
+        </p:nvSpPr>
+        <p:spPr>
+          <a:xfrm>
+            <a:off x="1664208" y="2505456"/>
+            <a:ext cx="6912864" cy="384048"/>
+          </a:xfrm>
+          <a:prstGeom prst="rect">
+            <a:avLst/>
+          </a:prstGeom>
+          <a:noFill/>
+          <a:ln/>
+        </p:spPr>
+        <p:txBody>
+          <a:bodyPr wrap="square" lIns="0" tIns="0" rIns="0" bIns="0" rtlCol="0" anchor="ctr"/>
+          <a:lstStyle/>
+          <a:p>
+            <a:pPr indent="0" marL="0">
+              <a:buNone/>
+            </a:pPr>
+            <a:r>
+              <a:rPr lang="en-US" sz="1100" dirty="0">
                 <a:solidFill>
                   <a:srgbClr val="434A63"/>
                 </a:solidFill>
@@ -6422,76 +6298,42 @@
                 <a:ea typeface="Arial" pitchFamily="34" charset="-122"/>
                 <a:cs typeface="Arial" pitchFamily="34" charset="-120"/>
               </a:rPr>
-              <a:t>Linux: wireshark aus der Paketverwaltung.</a:t>
-            </a:r>
-            <a:endParaRPr lang="en-US" sz="1200" dirty="0"/>
-          </a:p>
-          <a:p>
-            <a:pPr marL="254000" indent="-254000">
-              <a:lnSpc>
-                <a:spcPct val="100000"/>
-              </a:lnSpc>
-              <a:spcAft>
-                <a:spcPts val="900"/>
-              </a:spcAft>
-              <a:buClr>
-                <a:srgbClr val="0F7C86"/>
-              </a:buClr>
-              <a:buSzPct val="100000"/>
-              <a:buChar char="▸"/>
-            </a:pPr>
-            <a:r>
-              <a:rPr lang="en-US" sz="1200" dirty="0">
-                <a:solidFill>
-                  <a:srgbClr val="434A63"/>
-                </a:solidFill>
-                <a:latin typeface="Arial" pitchFamily="34" charset="0"/>
-                <a:ea typeface="Arial" pitchFamily="34" charset="-122"/>
-                <a:cs typeface="Arial" pitchFamily="34" charset="-120"/>
-              </a:rPr>
-              <a:t>Test bei allen gleich: Wireshark startet und zeigt seine Startseite.</a:t>
-            </a:r>
-            <a:endParaRPr lang="en-US" sz="1200" dirty="0"/>
-          </a:p>
-          <a:p>
-            <a:pPr marL="254000" indent="-254000">
-              <a:lnSpc>
-                <a:spcPct val="100000"/>
-              </a:lnSpc>
-              <a:spcAft>
-                <a:spcPts val="900"/>
-              </a:spcAft>
-              <a:buClr>
-                <a:srgbClr val="0F7C86"/>
-              </a:buClr>
-              <a:buSzPct val="100000"/>
-              <a:buChar char="▸"/>
-            </a:pPr>
-            <a:r>
-              <a:rPr lang="en-US" sz="1200" dirty="0">
-                <a:solidFill>
-                  <a:srgbClr val="434A63"/>
-                </a:solidFill>
-                <a:latin typeface="Arial" pitchFamily="34" charset="0"/>
-                <a:ea typeface="Arial" pitchFamily="34" charset="-122"/>
-                <a:cs typeface="Arial" pitchFamily="34" charset="-120"/>
-              </a:rPr>
-              <a:t>Wer zuerst fertig ist, hilft den anderen. Klappt es bei jemandem gar nicht: im Duo weiterarbeiten.</a:t>
-            </a:r>
-            <a:endParaRPr lang="en-US" sz="1200" dirty="0"/>
-          </a:p>
-        </p:txBody>
-      </p:sp>
-      <p:sp>
-        <p:nvSpPr>
-          <p:cNvPr id="6" name="Shape 4"/>
-          <p:cNvSpPr/>
-          <p:nvPr/>
-        </p:nvSpPr>
-        <p:spPr>
-          <a:xfrm>
-            <a:off x="566928" y="4114800"/>
-            <a:ext cx="32004" cy="256032"/>
+              <a:t>MQTT im Container: eigener Broker, senden und mitlesen, einfach ausprobieren · 25 Min.</a:t>
+            </a:r>
+            <a:endParaRPr lang="en-US" sz="1100" dirty="0"/>
+          </a:p>
+        </p:txBody>
+      </p:sp>
+      <p:sp>
+        <p:nvSpPr>
+          <p:cNvPr id="13" name="Shape 11"/>
+          <p:cNvSpPr/>
+          <p:nvPr/>
+        </p:nvSpPr>
+        <p:spPr>
+          <a:xfrm>
+            <a:off x="566928" y="3017520"/>
+            <a:ext cx="8010144" cy="1426464"/>
+          </a:xfrm>
+          <a:prstGeom prst="rect">
+            <a:avLst/>
+          </a:prstGeom>
+          <a:solidFill>
+            <a:srgbClr val="EEF0FB"/>
+          </a:solidFill>
+          <a:ln/>
+        </p:spPr>
+      </p:sp>
+      <p:sp>
+        <p:nvSpPr>
+          <p:cNvPr id="14" name="Shape 12"/>
+          <p:cNvSpPr/>
+          <p:nvPr/>
+        </p:nvSpPr>
+        <p:spPr>
+          <a:xfrm>
+            <a:off x="566928" y="3017520"/>
+            <a:ext cx="41148" cy="1426464"/>
           </a:xfrm>
           <a:prstGeom prst="rect">
             <a:avLst/>
@@ -6504,30 +6346,75 @@
       </p:sp>
       <p:sp>
         <p:nvSpPr>
-          <p:cNvPr id="7" name="Text 5"/>
-          <p:cNvSpPr/>
-          <p:nvPr/>
-        </p:nvSpPr>
-        <p:spPr>
-          <a:xfrm>
-            <a:off x="749808" y="4069080"/>
-            <a:ext cx="7827264" cy="402336"/>
-          </a:xfrm>
-          <a:prstGeom prst="rect">
-            <a:avLst/>
-          </a:prstGeom>
-          <a:noFill/>
-          <a:ln/>
-        </p:spPr>
-        <p:txBody>
-          <a:bodyPr wrap="square" lIns="0" tIns="0" rIns="0" bIns="0" rtlCol="0" anchor="ctr"/>
-          <a:lstStyle/>
-          <a:p>
-            <a:pPr indent="0" marL="0">
-              <a:buNone/>
-            </a:pPr>
-            <a:r>
-              <a:rPr lang="en-US" sz="1200" b="1" dirty="0">
+          <p:cNvPr id="15" name="Text 13"/>
+          <p:cNvSpPr/>
+          <p:nvPr/>
+        </p:nvSpPr>
+        <p:spPr>
+          <a:xfrm>
+            <a:off x="804672" y="3163824"/>
+            <a:ext cx="7607808" cy="242062"/>
+          </a:xfrm>
+          <a:prstGeom prst="rect">
+            <a:avLst/>
+          </a:prstGeom>
+          <a:noFill/>
+          <a:ln/>
+        </p:spPr>
+        <p:txBody>
+          <a:bodyPr wrap="square" lIns="0" tIns="0" rIns="0" bIns="0" rtlCol="0" anchor="t"/>
+          <a:lstStyle/>
+          <a:p>
+            <a:pPr indent="0" marL="0">
+              <a:buNone/>
+            </a:pPr>
+            <a:r>
+              <a:rPr lang="en-US" sz="1300" b="1" dirty="0">
+                <a:solidFill>
+                  <a:srgbClr val="272E52"/>
+                </a:solidFill>
+                <a:latin typeface="Arial" pitchFamily="34" charset="0"/>
+                <a:ea typeface="Arial" pitchFamily="34" charset="-122"/>
+                <a:cs typeface="Arial" pitchFamily="34" charset="-120"/>
+              </a:rPr>
+              <a:t>Jetzt öffnen, alles steht auf der Kursseite</a:t>
+            </a:r>
+            <a:endParaRPr lang="en-US" sz="1300" dirty="0"/>
+          </a:p>
+        </p:txBody>
+      </p:sp>
+      <p:sp>
+        <p:nvSpPr>
+          <p:cNvPr id="16" name="Text 14"/>
+          <p:cNvSpPr/>
+          <p:nvPr/>
+        </p:nvSpPr>
+        <p:spPr>
+          <a:xfrm>
+            <a:off x="804672" y="3451606"/>
+            <a:ext cx="7607808" cy="873506"/>
+          </a:xfrm>
+          <a:prstGeom prst="rect">
+            <a:avLst/>
+          </a:prstGeom>
+          <a:noFill/>
+          <a:ln/>
+        </p:spPr>
+        <p:txBody>
+          <a:bodyPr wrap="square" lIns="0" tIns="0" rIns="0" bIns="0" rtlCol="0" anchor="t"/>
+          <a:lstStyle/>
+          <a:p>
+            <a:pPr indent="0" marL="0">
+              <a:lnSpc>
+                <a:spcPct val="92000"/>
+              </a:lnSpc>
+              <a:spcAft>
+                <a:spcPts val="500"/>
+              </a:spcAft>
+              <a:buNone/>
+            </a:pPr>
+            <a:r>
+              <a:rPr lang="en-US" sz="1000" dirty="0">
                 <a:solidFill>
                   <a:srgbClr val="434A63"/>
                 </a:solidFill>
@@ -6535,15 +6422,84 @@
                 <a:ea typeface="Arial" pitchFamily="34" charset="-122"/>
                 <a:cs typeface="Arial" pitchFamily="34" charset="-120"/>
               </a:rPr>
-              <a:t>Die Menüsprache folgt eurem System. Anleitung und Folien nennen deshalb immer beide Namen, etwa Statistiken/Statistics.</a:t>
-            </a:r>
-            <a:endParaRPr lang="en-US" sz="1200" dirty="0"/>
-          </a:p>
-        </p:txBody>
-      </p:sp>
-      <p:sp>
-        <p:nvSpPr>
-          <p:cNvPr id="8" name="Shape 6"/>
+              <a:t>Station 1:  jacobmenge.github.io/kurs-unterlagen/industrie-iot/wireshark-installation/</a:t>
+            </a:r>
+            <a:endParaRPr lang="en-US" sz="1000" dirty="0"/>
+          </a:p>
+          <a:p>
+            <a:pPr indent="0" marL="0">
+              <a:lnSpc>
+                <a:spcPct val="92000"/>
+              </a:lnSpc>
+              <a:spcAft>
+                <a:spcPts val="500"/>
+              </a:spcAft>
+              <a:buNone/>
+            </a:pPr>
+            <a:r>
+              <a:rPr lang="en-US" sz="1000" dirty="0">
+                <a:solidFill>
+                  <a:srgbClr val="434A63"/>
+                </a:solidFill>
+                <a:latin typeface="Arial" pitchFamily="34" charset="0"/>
+                <a:ea typeface="Arial" pitchFamily="34" charset="-122"/>
+                <a:cs typeface="Arial" pitchFamily="34" charset="-120"/>
+              </a:rPr>
+              <a:t>Station 2:  jacobmenge.github.io/kurs-unterlagen/industrie-iot/praxis-paket-detektiv/</a:t>
+            </a:r>
+            <a:endParaRPr lang="en-US" sz="1000" dirty="0"/>
+          </a:p>
+          <a:p>
+            <a:pPr indent="0" marL="0">
+              <a:lnSpc>
+                <a:spcPct val="92000"/>
+              </a:lnSpc>
+              <a:spcAft>
+                <a:spcPts val="500"/>
+              </a:spcAft>
+              <a:buNone/>
+            </a:pPr>
+            <a:r>
+              <a:rPr lang="en-US" sz="1000" dirty="0">
+                <a:solidFill>
+                  <a:srgbClr val="434A63"/>
+                </a:solidFill>
+                <a:latin typeface="Arial" pitchFamily="34" charset="0"/>
+                <a:ea typeface="Arial" pitchFamily="34" charset="-122"/>
+                <a:cs typeface="Arial" pitchFamily="34" charset="-120"/>
+              </a:rPr>
+              <a:t>Station 3:  jacobmenge.github.io/kurs-unterlagen/industrie-iot/praxis-mqtt-container/</a:t>
+            </a:r>
+            <a:endParaRPr lang="en-US" sz="1000" dirty="0"/>
+          </a:p>
+          <a:p>
+            <a:pPr indent="0" marL="0">
+              <a:lnSpc>
+                <a:spcPct val="92000"/>
+              </a:lnSpc>
+              <a:spcAft>
+                <a:spcPts val="500"/>
+              </a:spcAft>
+              <a:buNone/>
+            </a:pPr>
+            <a:r>
+              <a:rPr lang="en-US" sz="1000" dirty="0">
+                <a:solidFill>
+                  <a:srgbClr val="434A63"/>
+                </a:solidFill>
+                <a:latin typeface="Arial" pitchFamily="34" charset="0"/>
+                <a:ea typeface="Arial" pitchFamily="34" charset="-122"/>
+                <a:cs typeface="Arial" pitchFamily="34" charset="-120"/>
+              </a:rPr>
+              <a:t>Wenn es klemmt:  jacobmenge.github.io/kurs-unterlagen/industrie-iot/stolpersteine/</a:t>
+            </a:r>
+            <a:endParaRPr lang="en-US" sz="1000" dirty="0"/>
+          </a:p>
+        </p:txBody>
+      </p:sp>
+      <p:sp>
+        <p:nvSpPr>
+          <p:cNvPr id="17" name="Shape 15"/>
           <p:cNvSpPr/>
           <p:nvPr/>
         </p:nvSpPr>
@@ -6566,7 +6522,7 @@
       </p:sp>
       <p:sp>
         <p:nvSpPr>
-          <p:cNvPr id="9" name="Text 7"/>
+          <p:cNvPr id="18" name="Text 16"/>
           <p:cNvSpPr/>
           <p:nvPr/>
         </p:nvSpPr>
@@ -6605,7 +6561,7 @@
       </p:sp>
       <p:sp>
         <p:nvSpPr>
-          <p:cNvPr id="10" name="Text 8"/>
+          <p:cNvPr id="19" name="Text 17"/>
           <p:cNvSpPr/>
           <p:nvPr/>
         </p:nvSpPr>
@@ -6636,7 +6592,7 @@
                 <a:ea typeface="Arial" pitchFamily="34" charset="-122"/>
                 <a:cs typeface="Arial" pitchFamily="34" charset="-120"/>
               </a:rPr>
-              <a:t>15/20</a:t>
+              <a:t>15/21</a:t>
             </a:r>
             <a:endParaRPr lang="en-US" sz="1050" dirty="0"/>
           </a:p>
@@ -7806,7 +7762,7 @@
                 <a:ea typeface="Arial" pitchFamily="34" charset="-122"/>
                 <a:cs typeface="Arial" pitchFamily="34" charset="-120"/>
               </a:rPr>
-              <a:t>1/20</a:t>
+              <a:t>1/21</a:t>
             </a:r>
             <a:endParaRPr lang="en-US" sz="1050" dirty="0"/>
           </a:p>
@@ -7897,7 +7853,7 @@
                 <a:ea typeface="Arial" pitchFamily="34" charset="-122"/>
                 <a:cs typeface="Arial" pitchFamily="34" charset="-120"/>
               </a:rPr>
-              <a:t>PAKET-DETEKTIV · 35 MINUTEN</a:t>
+              <a:t>IN DER GRUPPE · 15 MINUTEN</a:t>
             </a:r>
             <a:endParaRPr lang="en-US" sz="1150" dirty="0"/>
           </a:p>
@@ -7936,45 +7892,178 @@
                 <a:ea typeface="Arial" pitchFamily="34" charset="-122"/>
                 <a:cs typeface="Arial" pitchFamily="34" charset="-120"/>
               </a:rPr>
-              <a:t>Station 2: Eure Fundorte</a:t>
+              <a:t>Station 1: Wireshark einrichten</a:t>
             </a:r>
             <a:endParaRPr lang="en-US" sz="2600" dirty="0"/>
           </a:p>
         </p:txBody>
       </p:sp>
-      <p:pic>
-        <p:nvPicPr>
-          <p:cNvPr id="5" name="Image 0" descr="/Users/jacobmenge/Desktop/kurs-26.2b-orga/folienwerkstatt/assets/diagramme/detektiv-ziel.png">    </p:cNvPr>
-          <p:cNvPicPr>
-            <a:picLocks noChangeAspect="1"/>
-          </p:cNvPicPr>
-          <p:nvPr/>
-        </p:nvPicPr>
-        <p:blipFill>
-          <a:blip r:embed="rId1"/>
-          <a:stretch>
-            <a:fillRect/>
-          </a:stretch>
-        </p:blipFill>
-        <p:spPr>
-          <a:xfrm>
-            <a:off x="566928" y="1444752"/>
-            <a:ext cx="8010144" cy="2432304"/>
-          </a:xfrm>
-          <a:prstGeom prst="rect">
-            <a:avLst/>
-          </a:prstGeom>
-        </p:spPr>
-      </p:pic>
-      <p:sp>
-        <p:nvSpPr>
-          <p:cNvPr id="6" name="Shape 3"/>
-          <p:cNvSpPr/>
-          <p:nvPr/>
-        </p:nvSpPr>
-        <p:spPr>
-          <a:xfrm>
-            <a:off x="566928" y="4087368"/>
+      <p:sp>
+        <p:nvSpPr>
+          <p:cNvPr id="5" name="Text 3"/>
+          <p:cNvSpPr/>
+          <p:nvPr/>
+        </p:nvSpPr>
+        <p:spPr>
+          <a:xfrm>
+            <a:off x="566928" y="1737360"/>
+            <a:ext cx="8010144" cy="2103120"/>
+          </a:xfrm>
+          <a:prstGeom prst="rect">
+            <a:avLst/>
+          </a:prstGeom>
+          <a:noFill/>
+          <a:ln/>
+        </p:spPr>
+        <p:txBody>
+          <a:bodyPr wrap="square" lIns="0" tIns="0" rIns="0" bIns="0" rtlCol="0" anchor="t"/>
+          <a:lstStyle/>
+          <a:p>
+            <a:pPr marL="254000" indent="-254000">
+              <a:lnSpc>
+                <a:spcPct val="100000"/>
+              </a:lnSpc>
+              <a:spcAft>
+                <a:spcPts val="900"/>
+              </a:spcAft>
+              <a:buClr>
+                <a:srgbClr val="0F7C86"/>
+              </a:buClr>
+              <a:buSzPct val="100000"/>
+              <a:buChar char="▸"/>
+            </a:pPr>
+            <a:r>
+              <a:rPr lang="en-US" sz="1200" dirty="0">
+                <a:solidFill>
+                  <a:srgbClr val="434A63"/>
+                </a:solidFill>
+                <a:latin typeface="Arial" pitchFamily="34" charset="0"/>
+                <a:ea typeface="Arial" pitchFamily="34" charset="-122"/>
+                <a:cs typeface="Arial" pitchFamily="34" charset="-120"/>
+              </a:rPr>
+              <a:t>Windows: Windows x64 Installer von wireshark.org, durchklicken. Die Npcap-Frage ist heute egal.</a:t>
+            </a:r>
+            <a:endParaRPr lang="en-US" sz="1200" dirty="0"/>
+          </a:p>
+          <a:p>
+            <a:pPr marL="254000" indent="-254000">
+              <a:lnSpc>
+                <a:spcPct val="100000"/>
+              </a:lnSpc>
+              <a:spcAft>
+                <a:spcPts val="900"/>
+              </a:spcAft>
+              <a:buClr>
+                <a:srgbClr val="0F7C86"/>
+              </a:buClr>
+              <a:buSzPct val="100000"/>
+              <a:buChar char="▸"/>
+            </a:pPr>
+            <a:r>
+              <a:rPr lang="en-US" sz="1200" dirty="0">
+                <a:solidFill>
+                  <a:srgbClr val="434A63"/>
+                </a:solidFill>
+                <a:latin typeface="Arial" pitchFamily="34" charset="0"/>
+                <a:ea typeface="Arial" pitchFamily="34" charset="-122"/>
+                <a:cs typeface="Arial" pitchFamily="34" charset="-120"/>
+              </a:rPr>
+              <a:t>Keine Admin-Rechte, etwa auf dem Firmenrechner: die portable Version (PortableApps), steht in der Anleitung.</a:t>
+            </a:r>
+            <a:endParaRPr lang="en-US" sz="1200" dirty="0"/>
+          </a:p>
+          <a:p>
+            <a:pPr marL="254000" indent="-254000">
+              <a:lnSpc>
+                <a:spcPct val="100000"/>
+              </a:lnSpc>
+              <a:spcAft>
+                <a:spcPts val="900"/>
+              </a:spcAft>
+              <a:buClr>
+                <a:srgbClr val="0F7C86"/>
+              </a:buClr>
+              <a:buSzPct val="100000"/>
+              <a:buChar char="▸"/>
+            </a:pPr>
+            <a:r>
+              <a:rPr lang="en-US" sz="1200" dirty="0">
+                <a:solidFill>
+                  <a:srgbClr val="434A63"/>
+                </a:solidFill>
+                <a:latin typeface="Arial" pitchFamily="34" charset="0"/>
+                <a:ea typeface="Arial" pitchFamily="34" charset="-122"/>
+                <a:cs typeface="Arial" pitchFamily="34" charset="-120"/>
+              </a:rPr>
+              <a:t>macOS: das Universal Disk Image laden, Wireshark in Programme ziehen. Die ChmodBPF-Frage überspringen.</a:t>
+            </a:r>
+            <a:endParaRPr lang="en-US" sz="1200" dirty="0"/>
+          </a:p>
+          <a:p>
+            <a:pPr marL="254000" indent="-254000">
+              <a:lnSpc>
+                <a:spcPct val="100000"/>
+              </a:lnSpc>
+              <a:spcAft>
+                <a:spcPts val="900"/>
+              </a:spcAft>
+              <a:buClr>
+                <a:srgbClr val="0F7C86"/>
+              </a:buClr>
+              <a:buSzPct val="100000"/>
+              <a:buChar char="▸"/>
+            </a:pPr>
+            <a:r>
+              <a:rPr lang="en-US" sz="1200" dirty="0">
+                <a:solidFill>
+                  <a:srgbClr val="434A63"/>
+                </a:solidFill>
+                <a:latin typeface="Arial" pitchFamily="34" charset="0"/>
+                <a:ea typeface="Arial" pitchFamily="34" charset="-122"/>
+                <a:cs typeface="Arial" pitchFamily="34" charset="-120"/>
+              </a:rPr>
+              <a:t>Test bei allen gleich: Wireshark startet und zeigt seine Startseite.</a:t>
+            </a:r>
+            <a:endParaRPr lang="en-US" sz="1200" dirty="0"/>
+          </a:p>
+          <a:p>
+            <a:pPr marL="254000" indent="-254000">
+              <a:lnSpc>
+                <a:spcPct val="100000"/>
+              </a:lnSpc>
+              <a:spcAft>
+                <a:spcPts val="900"/>
+              </a:spcAft>
+              <a:buClr>
+                <a:srgbClr val="0F7C86"/>
+              </a:buClr>
+              <a:buSzPct val="100000"/>
+              <a:buChar char="▸"/>
+            </a:pPr>
+            <a:r>
+              <a:rPr lang="en-US" sz="1200" dirty="0">
+                <a:solidFill>
+                  <a:srgbClr val="434A63"/>
+                </a:solidFill>
+                <a:latin typeface="Arial" pitchFamily="34" charset="0"/>
+                <a:ea typeface="Arial" pitchFamily="34" charset="-122"/>
+                <a:cs typeface="Arial" pitchFamily="34" charset="-120"/>
+              </a:rPr>
+              <a:t>Wer zuerst fertig ist, hilft den anderen. Klappt es bei jemandem gar nicht: im Duo weiterarbeiten.</a:t>
+            </a:r>
+            <a:endParaRPr lang="en-US" sz="1200" dirty="0"/>
+          </a:p>
+        </p:txBody>
+      </p:sp>
+      <p:sp>
+        <p:nvSpPr>
+          <p:cNvPr id="6" name="Shape 4"/>
+          <p:cNvSpPr/>
+          <p:nvPr/>
+        </p:nvSpPr>
+        <p:spPr>
+          <a:xfrm>
+            <a:off x="566928" y="4114800"/>
             <a:ext cx="32004" cy="256032"/>
           </a:xfrm>
           <a:prstGeom prst="rect">
@@ -7988,13 +8077,13 @@
       </p:sp>
       <p:sp>
         <p:nvSpPr>
-          <p:cNvPr id="7" name="Text 4"/>
-          <p:cNvSpPr/>
-          <p:nvPr/>
-        </p:nvSpPr>
-        <p:spPr>
-          <a:xfrm>
-            <a:off x="749808" y="4041648"/>
+          <p:cNvPr id="7" name="Text 5"/>
+          <p:cNvSpPr/>
+          <p:nvPr/>
+        </p:nvSpPr>
+        <p:spPr>
+          <a:xfrm>
+            <a:off x="749808" y="4069080"/>
             <a:ext cx="7827264" cy="402336"/>
           </a:xfrm>
           <a:prstGeom prst="rect">
@@ -8019,7 +8108,7 @@
                 <a:ea typeface="Arial" pitchFamily="34" charset="-122"/>
                 <a:cs typeface="Arial" pitchFamily="34" charset="-120"/>
               </a:rPr>
-              <a:t>Teil 1 bis 3 sind das Ziel, die Bonus-Spuren sind freiwillig. Alles spielt in einer einzigen Datei.</a:t>
+              <a:t>Die Menüsprache folgt eurem System. Anleitung und Folien nennen deshalb immer beide Namen, etwa Statistiken/Statistics.</a:t>
             </a:r>
             <a:endParaRPr lang="en-US" sz="1200" dirty="0"/>
           </a:p>
@@ -8027,7 +8116,7 @@
       </p:sp>
       <p:sp>
         <p:nvSpPr>
-          <p:cNvPr id="8" name="Shape 5"/>
+          <p:cNvPr id="8" name="Shape 6"/>
           <p:cNvSpPr/>
           <p:nvPr/>
         </p:nvSpPr>
@@ -8050,7 +8139,7 @@
       </p:sp>
       <p:sp>
         <p:nvSpPr>
-          <p:cNvPr id="9" name="Text 6"/>
+          <p:cNvPr id="9" name="Text 7"/>
           <p:cNvSpPr/>
           <p:nvPr/>
         </p:nvSpPr>
@@ -8089,7 +8178,7 @@
       </p:sp>
       <p:sp>
         <p:nvSpPr>
-          <p:cNvPr id="10" name="Text 7"/>
+          <p:cNvPr id="10" name="Text 8"/>
           <p:cNvSpPr/>
           <p:nvPr/>
         </p:nvSpPr>
@@ -8120,7 +8209,7 @@
                 <a:ea typeface="Arial" pitchFamily="34" charset="-122"/>
                 <a:cs typeface="Arial" pitchFamily="34" charset="-120"/>
               </a:rPr>
-              <a:t>16/20</a:t>
+              <a:t>16/21</a:t>
             </a:r>
             <a:endParaRPr lang="en-US" sz="1050" dirty="0"/>
           </a:p>
@@ -8211,7 +8300,7 @@
                 <a:ea typeface="Arial" pitchFamily="34" charset="-122"/>
                 <a:cs typeface="Arial" pitchFamily="34" charset="-120"/>
               </a:rPr>
-              <a:t>ALLEIN ODER ZU ZWEIT · 25 MINUTEN</a:t>
+              <a:t>PAKET-DETEKTIV · 35 MINUTEN</a:t>
             </a:r>
             <a:endParaRPr lang="en-US" sz="1150" dirty="0"/>
           </a:p>
@@ -8250,471 +8339,45 @@
                 <a:ea typeface="Arial" pitchFamily="34" charset="-122"/>
                 <a:cs typeface="Arial" pitchFamily="34" charset="-120"/>
               </a:rPr>
-              <a:t>Station 3: MQTT im Container</a:t>
+              <a:t>Station 2: Eure Fundorte</a:t>
             </a:r>
             <a:endParaRPr lang="en-US" sz="2600" dirty="0"/>
           </a:p>
         </p:txBody>
       </p:sp>
-      <p:sp>
-        <p:nvSpPr>
-          <p:cNvPr id="5" name="Shape 3"/>
-          <p:cNvSpPr/>
-          <p:nvPr/>
-        </p:nvSpPr>
-        <p:spPr>
-          <a:xfrm>
-            <a:off x="438912" y="1737360"/>
-            <a:ext cx="8266176" cy="329184"/>
-          </a:xfrm>
-          <a:prstGeom prst="rect">
-            <a:avLst/>
-          </a:prstGeom>
-          <a:solidFill>
-            <a:srgbClr val="F5F6FC"/>
-          </a:solidFill>
-          <a:ln/>
-        </p:spPr>
-      </p:sp>
-      <p:sp>
-        <p:nvSpPr>
-          <p:cNvPr id="6" name="Text 4"/>
-          <p:cNvSpPr/>
-          <p:nvPr/>
-        </p:nvSpPr>
-        <p:spPr>
-          <a:xfrm>
-            <a:off x="566928" y="1737360"/>
-            <a:ext cx="914400" cy="329184"/>
-          </a:xfrm>
-          <a:prstGeom prst="rect">
-            <a:avLst/>
-          </a:prstGeom>
-          <a:noFill/>
-          <a:ln/>
-        </p:spPr>
-        <p:txBody>
-          <a:bodyPr wrap="square" lIns="0" tIns="0" rIns="0" bIns="0" rtlCol="0" anchor="ctr"/>
-          <a:lstStyle/>
-          <a:p>
-            <a:pPr indent="0" marL="0">
-              <a:buNone/>
-            </a:pPr>
-            <a:r>
-              <a:rPr lang="en-US" sz="1100" b="1" dirty="0">
-                <a:solidFill>
-                  <a:srgbClr val="9A6310"/>
-                </a:solidFill>
-                <a:latin typeface="Courier New" pitchFamily="34" charset="0"/>
-                <a:ea typeface="Courier New" pitchFamily="34" charset="-122"/>
-                <a:cs typeface="Courier New" pitchFamily="34" charset="-120"/>
-              </a:rPr>
-              <a:t>Teil 1</a:t>
-            </a:r>
-            <a:endParaRPr lang="en-US" sz="1100" dirty="0"/>
-          </a:p>
-        </p:txBody>
-      </p:sp>
-      <p:sp>
-        <p:nvSpPr>
-          <p:cNvPr id="7" name="Text 5"/>
-          <p:cNvSpPr/>
-          <p:nvPr/>
-        </p:nvSpPr>
-        <p:spPr>
-          <a:xfrm>
-            <a:off x="1481328" y="1737360"/>
-            <a:ext cx="7095744" cy="329184"/>
-          </a:xfrm>
-          <a:prstGeom prst="rect">
-            <a:avLst/>
-          </a:prstGeom>
-          <a:noFill/>
-          <a:ln/>
-        </p:spPr>
-        <p:txBody>
-          <a:bodyPr wrap="square" lIns="0" tIns="0" rIns="0" bIns="0" rtlCol="0" anchor="ctr"/>
-          <a:lstStyle/>
-          <a:p>
-            <a:pPr indent="0" marL="0">
-              <a:buNone/>
-            </a:pPr>
-            <a:r>
-              <a:rPr lang="en-US" sz="1100" dirty="0">
-                <a:solidFill>
-                  <a:srgbClr val="434A63"/>
-                </a:solidFill>
-                <a:latin typeface="Arial" pitchFamily="34" charset="0"/>
-                <a:ea typeface="Arial" pitchFamily="34" charset="-122"/>
-                <a:cs typeface="Arial" pitchFamily="34" charset="-120"/>
-              </a:rPr>
-              <a:t>Broker starten: ein Netzwerk, ein docker run, ein Blick in die Logs</a:t>
-            </a:r>
-            <a:endParaRPr lang="en-US" sz="1100" dirty="0"/>
-          </a:p>
-        </p:txBody>
-      </p:sp>
-      <p:sp>
-        <p:nvSpPr>
-          <p:cNvPr id="8" name="Text 6"/>
-          <p:cNvSpPr/>
-          <p:nvPr/>
-        </p:nvSpPr>
-        <p:spPr>
-          <a:xfrm>
-            <a:off x="566928" y="2066544"/>
-            <a:ext cx="914400" cy="329184"/>
-          </a:xfrm>
-          <a:prstGeom prst="rect">
-            <a:avLst/>
-          </a:prstGeom>
-          <a:noFill/>
-          <a:ln/>
-        </p:spPr>
-        <p:txBody>
-          <a:bodyPr wrap="square" lIns="0" tIns="0" rIns="0" bIns="0" rtlCol="0" anchor="ctr"/>
-          <a:lstStyle/>
-          <a:p>
-            <a:pPr indent="0" marL="0">
-              <a:buNone/>
-            </a:pPr>
-            <a:r>
-              <a:rPr lang="en-US" sz="1100" b="1" dirty="0">
-                <a:solidFill>
-                  <a:srgbClr val="9A6310"/>
-                </a:solidFill>
-                <a:latin typeface="Courier New" pitchFamily="34" charset="0"/>
-                <a:ea typeface="Courier New" pitchFamily="34" charset="-122"/>
-                <a:cs typeface="Courier New" pitchFamily="34" charset="-120"/>
-              </a:rPr>
-              <a:t>Teil 2</a:t>
-            </a:r>
-            <a:endParaRPr lang="en-US" sz="1100" dirty="0"/>
-          </a:p>
-        </p:txBody>
-      </p:sp>
-      <p:sp>
-        <p:nvSpPr>
-          <p:cNvPr id="9" name="Text 7"/>
-          <p:cNvSpPr/>
-          <p:nvPr/>
-        </p:nvSpPr>
-        <p:spPr>
-          <a:xfrm>
-            <a:off x="1481328" y="2066544"/>
-            <a:ext cx="7095744" cy="329184"/>
-          </a:xfrm>
-          <a:prstGeom prst="rect">
-            <a:avLst/>
-          </a:prstGeom>
-          <a:noFill/>
-          <a:ln/>
-        </p:spPr>
-        <p:txBody>
-          <a:bodyPr wrap="square" lIns="0" tIns="0" rIns="0" bIns="0" rtlCol="0" anchor="ctr"/>
-          <a:lstStyle/>
-          <a:p>
-            <a:pPr indent="0" marL="0">
-              <a:buNone/>
-            </a:pPr>
-            <a:r>
-              <a:rPr lang="en-US" sz="1100" dirty="0">
-                <a:solidFill>
-                  <a:srgbClr val="434A63"/>
-                </a:solidFill>
-                <a:latin typeface="Arial" pitchFamily="34" charset="0"/>
-                <a:ea typeface="Arial" pitchFamily="34" charset="-122"/>
-                <a:cs typeface="Arial" pitchFamily="34" charset="-120"/>
-              </a:rPr>
-              <a:t>Mitlesen und senden: mosquitto_sub im einen, mosquitto_pub im anderen Fenster</a:t>
-            </a:r>
-            <a:endParaRPr lang="en-US" sz="1100" dirty="0"/>
-          </a:p>
-        </p:txBody>
-      </p:sp>
-      <p:sp>
-        <p:nvSpPr>
-          <p:cNvPr id="10" name="Shape 8"/>
-          <p:cNvSpPr/>
-          <p:nvPr/>
-        </p:nvSpPr>
-        <p:spPr>
-          <a:xfrm>
-            <a:off x="438912" y="2395728"/>
-            <a:ext cx="8266176" cy="329184"/>
-          </a:xfrm>
-          <a:prstGeom prst="rect">
-            <a:avLst/>
-          </a:prstGeom>
-          <a:solidFill>
-            <a:srgbClr val="F5F6FC"/>
-          </a:solidFill>
-          <a:ln/>
-        </p:spPr>
-      </p:sp>
-      <p:sp>
-        <p:nvSpPr>
-          <p:cNvPr id="11" name="Text 9"/>
-          <p:cNvSpPr/>
-          <p:nvPr/>
-        </p:nvSpPr>
-        <p:spPr>
-          <a:xfrm>
-            <a:off x="566928" y="2395728"/>
-            <a:ext cx="914400" cy="329184"/>
-          </a:xfrm>
-          <a:prstGeom prst="rect">
-            <a:avLst/>
-          </a:prstGeom>
-          <a:noFill/>
-          <a:ln/>
-        </p:spPr>
-        <p:txBody>
-          <a:bodyPr wrap="square" lIns="0" tIns="0" rIns="0" bIns="0" rtlCol="0" anchor="ctr"/>
-          <a:lstStyle/>
-          <a:p>
-            <a:pPr indent="0" marL="0">
-              <a:buNone/>
-            </a:pPr>
-            <a:r>
-              <a:rPr lang="en-US" sz="1100" b="1" dirty="0">
-                <a:solidFill>
-                  <a:srgbClr val="9A6310"/>
-                </a:solidFill>
-                <a:latin typeface="Courier New" pitchFamily="34" charset="0"/>
-                <a:ea typeface="Courier New" pitchFamily="34" charset="-122"/>
-                <a:cs typeface="Courier New" pitchFamily="34" charset="-120"/>
-              </a:rPr>
-              <a:t>Teil 3</a:t>
-            </a:r>
-            <a:endParaRPr lang="en-US" sz="1100" dirty="0"/>
-          </a:p>
-        </p:txBody>
-      </p:sp>
-      <p:sp>
-        <p:nvSpPr>
-          <p:cNvPr id="12" name="Text 10"/>
-          <p:cNvSpPr/>
-          <p:nvPr/>
-        </p:nvSpPr>
-        <p:spPr>
-          <a:xfrm>
-            <a:off x="1481328" y="2395728"/>
-            <a:ext cx="7095744" cy="329184"/>
-          </a:xfrm>
-          <a:prstGeom prst="rect">
-            <a:avLst/>
-          </a:prstGeom>
-          <a:noFill/>
-          <a:ln/>
-        </p:spPr>
-        <p:txBody>
-          <a:bodyPr wrap="square" lIns="0" tIns="0" rIns="0" bIns="0" rtlCol="0" anchor="ctr"/>
-          <a:lstStyle/>
-          <a:p>
-            <a:pPr indent="0" marL="0">
-              <a:buNone/>
-            </a:pPr>
-            <a:r>
-              <a:rPr lang="en-US" sz="1100" dirty="0">
-                <a:solidFill>
-                  <a:srgbClr val="434A63"/>
-                </a:solidFill>
-                <a:latin typeface="Arial" pitchFamily="34" charset="0"/>
-                <a:ea typeface="Arial" pitchFamily="34" charset="-122"/>
-                <a:cs typeface="Arial" pitchFamily="34" charset="-120"/>
-              </a:rPr>
-              <a:t>Platzhalter: mit + und # mehrere Topics auf einmal abonnieren</a:t>
-            </a:r>
-            <a:endParaRPr lang="en-US" sz="1100" dirty="0"/>
-          </a:p>
-        </p:txBody>
-      </p:sp>
-      <p:sp>
-        <p:nvSpPr>
-          <p:cNvPr id="13" name="Text 11"/>
-          <p:cNvSpPr/>
-          <p:nvPr/>
-        </p:nvSpPr>
-        <p:spPr>
-          <a:xfrm>
-            <a:off x="566928" y="2724912"/>
-            <a:ext cx="914400" cy="329184"/>
-          </a:xfrm>
-          <a:prstGeom prst="rect">
-            <a:avLst/>
-          </a:prstGeom>
-          <a:noFill/>
-          <a:ln/>
-        </p:spPr>
-        <p:txBody>
-          <a:bodyPr wrap="square" lIns="0" tIns="0" rIns="0" bIns="0" rtlCol="0" anchor="ctr"/>
-          <a:lstStyle/>
-          <a:p>
-            <a:pPr indent="0" marL="0">
-              <a:buNone/>
-            </a:pPr>
-            <a:r>
-              <a:rPr lang="en-US" sz="1100" b="1" dirty="0">
-                <a:solidFill>
-                  <a:srgbClr val="9A6310"/>
-                </a:solidFill>
-                <a:latin typeface="Courier New" pitchFamily="34" charset="0"/>
-                <a:ea typeface="Courier New" pitchFamily="34" charset="-122"/>
-                <a:cs typeface="Courier New" pitchFamily="34" charset="-120"/>
-              </a:rPr>
-              <a:t>Teil 4</a:t>
-            </a:r>
-            <a:endParaRPr lang="en-US" sz="1100" dirty="0"/>
-          </a:p>
-        </p:txBody>
-      </p:sp>
-      <p:sp>
-        <p:nvSpPr>
-          <p:cNvPr id="14" name="Text 12"/>
-          <p:cNvSpPr/>
-          <p:nvPr/>
-        </p:nvSpPr>
-        <p:spPr>
-          <a:xfrm>
-            <a:off x="1481328" y="2724912"/>
-            <a:ext cx="7095744" cy="329184"/>
-          </a:xfrm>
-          <a:prstGeom prst="rect">
-            <a:avLst/>
-          </a:prstGeom>
-          <a:noFill/>
-          <a:ln/>
-        </p:spPr>
-        <p:txBody>
-          <a:bodyPr wrap="square" lIns="0" tIns="0" rIns="0" bIns="0" rtlCol="0" anchor="ctr"/>
-          <a:lstStyle/>
-          <a:p>
-            <a:pPr indent="0" marL="0">
-              <a:buNone/>
-            </a:pPr>
-            <a:r>
-              <a:rPr lang="en-US" sz="1100" dirty="0">
-                <a:solidFill>
-                  <a:srgbClr val="434A63"/>
-                </a:solidFill>
-                <a:latin typeface="Arial" pitchFamily="34" charset="0"/>
-                <a:ea typeface="Arial" pitchFamily="34" charset="-122"/>
-                <a:cs typeface="Arial" pitchFamily="34" charset="-120"/>
-              </a:rPr>
-              <a:t>Retained Message: Der Broker merkt sich den letzten Sollwert</a:t>
-            </a:r>
-            <a:endParaRPr lang="en-US" sz="1100" dirty="0"/>
-          </a:p>
-        </p:txBody>
-      </p:sp>
-      <p:sp>
-        <p:nvSpPr>
-          <p:cNvPr id="15" name="Shape 13"/>
-          <p:cNvSpPr/>
-          <p:nvPr/>
-        </p:nvSpPr>
-        <p:spPr>
-          <a:xfrm>
-            <a:off x="438912" y="3054096"/>
-            <a:ext cx="8266176" cy="329184"/>
-          </a:xfrm>
-          <a:prstGeom prst="rect">
-            <a:avLst/>
-          </a:prstGeom>
-          <a:solidFill>
-            <a:srgbClr val="F5F6FC"/>
-          </a:solidFill>
-          <a:ln/>
-        </p:spPr>
-      </p:sp>
-      <p:sp>
-        <p:nvSpPr>
-          <p:cNvPr id="16" name="Text 14"/>
-          <p:cNvSpPr/>
-          <p:nvPr/>
-        </p:nvSpPr>
-        <p:spPr>
-          <a:xfrm>
-            <a:off x="566928" y="3054096"/>
-            <a:ext cx="914400" cy="329184"/>
-          </a:xfrm>
-          <a:prstGeom prst="rect">
-            <a:avLst/>
-          </a:prstGeom>
-          <a:noFill/>
-          <a:ln/>
-        </p:spPr>
-        <p:txBody>
-          <a:bodyPr wrap="square" lIns="0" tIns="0" rIns="0" bIns="0" rtlCol="0" anchor="ctr"/>
-          <a:lstStyle/>
-          <a:p>
-            <a:pPr indent="0" marL="0">
-              <a:buNone/>
-            </a:pPr>
-            <a:r>
-              <a:rPr lang="en-US" sz="1100" b="1" dirty="0">
-                <a:solidFill>
-                  <a:srgbClr val="9A6310"/>
-                </a:solidFill>
-                <a:latin typeface="Courier New" pitchFamily="34" charset="0"/>
-                <a:ea typeface="Courier New" pitchFamily="34" charset="-122"/>
-                <a:cs typeface="Courier New" pitchFamily="34" charset="-120"/>
-              </a:rPr>
-              <a:t>Teil 5</a:t>
-            </a:r>
-            <a:endParaRPr lang="en-US" sz="1100" dirty="0"/>
-          </a:p>
-        </p:txBody>
-      </p:sp>
-      <p:sp>
-        <p:nvSpPr>
-          <p:cNvPr id="17" name="Text 15"/>
-          <p:cNvSpPr/>
-          <p:nvPr/>
-        </p:nvSpPr>
-        <p:spPr>
-          <a:xfrm>
-            <a:off x="1481328" y="3054096"/>
-            <a:ext cx="7095744" cy="329184"/>
-          </a:xfrm>
-          <a:prstGeom prst="rect">
-            <a:avLst/>
-          </a:prstGeom>
-          <a:noFill/>
-          <a:ln/>
-        </p:spPr>
-        <p:txBody>
-          <a:bodyPr wrap="square" lIns="0" tIns="0" rIns="0" bIns="0" rtlCol="0" anchor="ctr"/>
-          <a:lstStyle/>
-          <a:p>
-            <a:pPr indent="0" marL="0">
-              <a:buNone/>
-            </a:pPr>
-            <a:r>
-              <a:rPr lang="en-US" sz="1100" dirty="0">
-                <a:solidFill>
-                  <a:srgbClr val="434A63"/>
-                </a:solidFill>
-                <a:latin typeface="Arial" pitchFamily="34" charset="0"/>
-                <a:ea typeface="Arial" pitchFamily="34" charset="-122"/>
-                <a:cs typeface="Arial" pitchFamily="34" charset="-120"/>
-              </a:rPr>
-              <a:t>Ein Sensor-Container funkt mit, dazu das Dashboard im Browser</a:t>
-            </a:r>
-            <a:endParaRPr lang="en-US" sz="1100" dirty="0"/>
-          </a:p>
-        </p:txBody>
-      </p:sp>
-      <p:sp>
-        <p:nvSpPr>
-          <p:cNvPr id="18" name="Shape 16"/>
-          <p:cNvSpPr/>
-          <p:nvPr/>
-        </p:nvSpPr>
-        <p:spPr>
-          <a:xfrm>
-            <a:off x="566928" y="3794760"/>
+      <p:pic>
+        <p:nvPicPr>
+          <p:cNvPr id="5" name="Image 0" descr="/Users/jacobmenge/Desktop/kurs-26.2b-orga/folienwerkstatt/assets/diagramme/detektiv-ziel.png">    </p:cNvPr>
+          <p:cNvPicPr>
+            <a:picLocks noChangeAspect="1"/>
+          </p:cNvPicPr>
+          <p:nvPr/>
+        </p:nvPicPr>
+        <p:blipFill>
+          <a:blip r:embed="rId1"/>
+          <a:stretch>
+            <a:fillRect/>
+          </a:stretch>
+        </p:blipFill>
+        <p:spPr>
+          <a:xfrm>
+            <a:off x="566928" y="1444752"/>
+            <a:ext cx="8010144" cy="2432304"/>
+          </a:xfrm>
+          <a:prstGeom prst="rect">
+            <a:avLst/>
+          </a:prstGeom>
+        </p:spPr>
+      </p:pic>
+      <p:sp>
+        <p:nvSpPr>
+          <p:cNvPr id="6" name="Shape 3"/>
+          <p:cNvSpPr/>
+          <p:nvPr/>
+        </p:nvSpPr>
+        <p:spPr>
+          <a:xfrm>
+            <a:off x="566928" y="4087368"/>
             <a:ext cx="32004" cy="256032"/>
           </a:xfrm>
           <a:prstGeom prst="rect">
@@ -8728,13 +8391,13 @@
       </p:sp>
       <p:sp>
         <p:nvSpPr>
-          <p:cNvPr id="19" name="Text 17"/>
-          <p:cNvSpPr/>
-          <p:nvPr/>
-        </p:nvSpPr>
-        <p:spPr>
-          <a:xfrm>
-            <a:off x="749808" y="3749040"/>
+          <p:cNvPr id="7" name="Text 4"/>
+          <p:cNvSpPr/>
+          <p:nvPr/>
+        </p:nvSpPr>
+        <p:spPr>
+          <a:xfrm>
+            <a:off x="749808" y="4041648"/>
             <a:ext cx="7827264" cy="402336"/>
           </a:xfrm>
           <a:prstGeom prst="rect">
@@ -8759,7 +8422,7 @@
                 <a:ea typeface="Arial" pitchFamily="34" charset="-122"/>
                 <a:cs typeface="Arial" pitchFamily="34" charset="-120"/>
               </a:rPr>
-              <a:t>Teil 1 bis 4 sind das Ziel, Teil 5 für alle mit Restzeit. Probiert eigene Topics und Werte aus: Der Broker läuft nur auf eurem Rechner.</a:t>
+              <a:t>Teil 1 bis 3 sind das Ziel, die Bonus-Spuren sind freiwillig. Alles spielt in einer einzigen Datei.</a:t>
             </a:r>
             <a:endParaRPr lang="en-US" sz="1200" dirty="0"/>
           </a:p>
@@ -8767,7 +8430,7 @@
       </p:sp>
       <p:sp>
         <p:nvSpPr>
-          <p:cNvPr id="20" name="Shape 18"/>
+          <p:cNvPr id="8" name="Shape 5"/>
           <p:cNvSpPr/>
           <p:nvPr/>
         </p:nvSpPr>
@@ -8790,7 +8453,7 @@
       </p:sp>
       <p:sp>
         <p:nvSpPr>
-          <p:cNvPr id="21" name="Text 19"/>
+          <p:cNvPr id="9" name="Text 6"/>
           <p:cNvSpPr/>
           <p:nvPr/>
         </p:nvSpPr>
@@ -8829,7 +8492,7 @@
       </p:sp>
       <p:sp>
         <p:nvSpPr>
-          <p:cNvPr id="22" name="Text 20"/>
+          <p:cNvPr id="10" name="Text 7"/>
           <p:cNvSpPr/>
           <p:nvPr/>
         </p:nvSpPr>
@@ -8860,7 +8523,7 @@
                 <a:ea typeface="Arial" pitchFamily="34" charset="-122"/>
                 <a:cs typeface="Arial" pitchFamily="34" charset="-120"/>
               </a:rPr>
-              <a:t>17/20</a:t>
+              <a:t>17/21</a:t>
             </a:r>
             <a:endParaRPr lang="en-US" sz="1050" dirty="0"/>
           </a:p>
@@ -8951,7 +8614,7 @@
                 <a:ea typeface="Arial" pitchFamily="34" charset="-122"/>
                 <a:cs typeface="Arial" pitchFamily="34" charset="-120"/>
               </a:rPr>
-              <a:t>SPIELREGELN</a:t>
+              <a:t>ALLEIN ODER ZU ZWEIT · 25 MINUTEN</a:t>
             </a:r>
             <a:endParaRPr lang="en-US" sz="1150" dirty="0"/>
           </a:p>
@@ -8990,7 +8653,7 @@
                 <a:ea typeface="Arial" pitchFamily="34" charset="-122"/>
                 <a:cs typeface="Arial" pitchFamily="34" charset="-120"/>
               </a:rPr>
-              <a:t>So arbeitet ihr</a:t>
+              <a:t>Station 3: MQTT im Container</a:t>
             </a:r>
             <a:endParaRPr lang="en-US" sz="2600" dirty="0"/>
           </a:p>
@@ -8998,171 +8661,14 @@
       </p:sp>
       <p:sp>
         <p:nvSpPr>
-          <p:cNvPr id="5" name="Text 3"/>
-          <p:cNvSpPr/>
-          <p:nvPr/>
-        </p:nvSpPr>
-        <p:spPr>
-          <a:xfrm>
-            <a:off x="566928" y="1700784"/>
-            <a:ext cx="8010144" cy="1828800"/>
-          </a:xfrm>
-          <a:prstGeom prst="rect">
-            <a:avLst/>
-          </a:prstGeom>
-          <a:noFill/>
-          <a:ln/>
-        </p:spPr>
-        <p:txBody>
-          <a:bodyPr wrap="square" lIns="0" tIns="0" rIns="0" bIns="0" rtlCol="0" anchor="t"/>
-          <a:lstStyle/>
-          <a:p>
-            <a:pPr marL="254000" indent="-254000">
-              <a:lnSpc>
-                <a:spcPct val="100000"/>
-              </a:lnSpc>
-              <a:spcAft>
-                <a:spcPts val="900"/>
-              </a:spcAft>
-              <a:buClr>
-                <a:srgbClr val="0F7C86"/>
-              </a:buClr>
-              <a:buSzPct val="100000"/>
-              <a:buChar char="▸"/>
-            </a:pPr>
-            <a:r>
-              <a:rPr lang="en-US" sz="1200" dirty="0">
-                <a:solidFill>
-                  <a:srgbClr val="434A63"/>
-                </a:solidFill>
-                <a:latin typeface="Arial" pitchFamily="34" charset="0"/>
-                <a:ea typeface="Arial" pitchFamily="34" charset="-122"/>
-                <a:cs typeface="Arial" pitchFamily="34" charset="-120"/>
-              </a:rPr>
-              <a:t>Ein Raum für die ganze Praxiszeit: gleiche Gruppen, ihr bleibt bis 20:35 zusammen.</a:t>
-            </a:r>
-            <a:endParaRPr lang="en-US" sz="1200" dirty="0"/>
-          </a:p>
-          <a:p>
-            <a:pPr marL="254000" indent="-254000">
-              <a:lnSpc>
-                <a:spcPct val="100000"/>
-              </a:lnSpc>
-              <a:spcAft>
-                <a:spcPts val="900"/>
-              </a:spcAft>
-              <a:buClr>
-                <a:srgbClr val="0F7C86"/>
-              </a:buClr>
-              <a:buSzPct val="100000"/>
-              <a:buChar char="▸"/>
-            </a:pPr>
-            <a:r>
-              <a:rPr lang="en-US" sz="1200" dirty="0">
-                <a:solidFill>
-                  <a:srgbClr val="434A63"/>
-                </a:solidFill>
-                <a:latin typeface="Arial" pitchFamily="34" charset="0"/>
-                <a:ea typeface="Arial" pitchFamily="34" charset="-122"/>
-                <a:cs typeface="Arial" pitchFamily="34" charset="-120"/>
-              </a:rPr>
-              <a:t>Die Stationen der Reihe nach. Wer schneller ist, hat mehr Zeit für Station 3.</a:t>
-            </a:r>
-            <a:endParaRPr lang="en-US" sz="1200" dirty="0"/>
-          </a:p>
-          <a:p>
-            <a:pPr marL="254000" indent="-254000">
-              <a:lnSpc>
-                <a:spcPct val="100000"/>
-              </a:lnSpc>
-              <a:spcAft>
-                <a:spcPts val="900"/>
-              </a:spcAft>
-              <a:buClr>
-                <a:srgbClr val="0F7C86"/>
-              </a:buClr>
-              <a:buSzPct val="100000"/>
-              <a:buChar char="▸"/>
-            </a:pPr>
-            <a:r>
-              <a:rPr lang="en-US" sz="1200" dirty="0">
-                <a:solidFill>
-                  <a:srgbClr val="434A63"/>
-                </a:solidFill>
-                <a:latin typeface="Arial" pitchFamily="34" charset="0"/>
-                <a:ea typeface="Arial" pitchFamily="34" charset="-122"/>
-                <a:cs typeface="Arial" pitchFamily="34" charset="-120"/>
-              </a:rPr>
-              <a:t>Eine Person teilt den Bildschirm, alle arbeiten auf dem eigenen Rechner mit.</a:t>
-            </a:r>
-            <a:endParaRPr lang="en-US" sz="1200" dirty="0"/>
-          </a:p>
-          <a:p>
-            <a:pPr marL="254000" indent="-254000">
-              <a:lnSpc>
-                <a:spcPct val="100000"/>
-              </a:lnSpc>
-              <a:spcAft>
-                <a:spcPts val="900"/>
-              </a:spcAft>
-              <a:buClr>
-                <a:srgbClr val="0F7C86"/>
-              </a:buClr>
-              <a:buSzPct val="100000"/>
-              <a:buChar char="▸"/>
-            </a:pPr>
-            <a:r>
-              <a:rPr lang="en-US" sz="1200" dirty="0">
-                <a:solidFill>
-                  <a:srgbClr val="434A63"/>
-                </a:solidFill>
-                <a:latin typeface="Arial" pitchFamily="34" charset="0"/>
-                <a:ea typeface="Arial" pitchFamily="34" charset="-122"/>
-                <a:cs typeface="Arial" pitchFamily="34" charset="-120"/>
-              </a:rPr>
-              <a:t>Ich schaue reihum in die Räume. Wenn es klemmt: erst die Stolpersteine-Seite, dann um Hilfe bitten.</a:t>
-            </a:r>
-            <a:endParaRPr lang="en-US" sz="1200" dirty="0"/>
-          </a:p>
-          <a:p>
-            <a:pPr marL="254000" indent="-254000">
-              <a:lnSpc>
-                <a:spcPct val="100000"/>
-              </a:lnSpc>
-              <a:spcAft>
-                <a:spcPts val="900"/>
-              </a:spcAft>
-              <a:buClr>
-                <a:srgbClr val="0F7C86"/>
-              </a:buClr>
-              <a:buSzPct val="100000"/>
-              <a:buChar char="▸"/>
-            </a:pPr>
-            <a:r>
-              <a:rPr lang="en-US" sz="1200" dirty="0">
-                <a:solidFill>
-                  <a:srgbClr val="434A63"/>
-                </a:solidFill>
-                <a:latin typeface="Arial" pitchFamily="34" charset="0"/>
-                <a:ea typeface="Arial" pitchFamily="34" charset="-122"/>
-                <a:cs typeface="Arial" pitchFamily="34" charset="-120"/>
-              </a:rPr>
-              <a:t>Windows wie immer in der PowerShell im Windows-Terminal.</a:t>
-            </a:r>
-            <a:endParaRPr lang="en-US" sz="1200" dirty="0"/>
-          </a:p>
-        </p:txBody>
-      </p:sp>
-      <p:sp>
-        <p:nvSpPr>
-          <p:cNvPr id="6" name="Shape 4"/>
-          <p:cNvSpPr/>
-          <p:nvPr/>
-        </p:nvSpPr>
-        <p:spPr>
-          <a:xfrm>
-            <a:off x="566928" y="3639312"/>
-            <a:ext cx="8010144" cy="822960"/>
+          <p:cNvPr id="5" name="Shape 3"/>
+          <p:cNvSpPr/>
+          <p:nvPr/>
+        </p:nvSpPr>
+        <p:spPr>
+          <a:xfrm>
+            <a:off x="438912" y="1737360"/>
+            <a:ext cx="8266176" cy="365760"/>
           </a:xfrm>
           <a:prstGeom prst="rect">
             <a:avLst/>
@@ -9175,14 +8681,346 @@
       </p:sp>
       <p:sp>
         <p:nvSpPr>
-          <p:cNvPr id="7" name="Shape 5"/>
-          <p:cNvSpPr/>
-          <p:nvPr/>
-        </p:nvSpPr>
-        <p:spPr>
-          <a:xfrm>
-            <a:off x="566928" y="3639312"/>
-            <a:ext cx="41148" cy="822960"/>
+          <p:cNvPr id="6" name="Text 4"/>
+          <p:cNvSpPr/>
+          <p:nvPr/>
+        </p:nvSpPr>
+        <p:spPr>
+          <a:xfrm>
+            <a:off x="566928" y="1737360"/>
+            <a:ext cx="914400" cy="365760"/>
+          </a:xfrm>
+          <a:prstGeom prst="rect">
+            <a:avLst/>
+          </a:prstGeom>
+          <a:noFill/>
+          <a:ln/>
+        </p:spPr>
+        <p:txBody>
+          <a:bodyPr wrap="square" lIns="0" tIns="0" rIns="0" bIns="0" rtlCol="0" anchor="ctr"/>
+          <a:lstStyle/>
+          <a:p>
+            <a:pPr indent="0" marL="0">
+              <a:buNone/>
+            </a:pPr>
+            <a:r>
+              <a:rPr lang="en-US" sz="1100" b="1" dirty="0">
+                <a:solidFill>
+                  <a:srgbClr val="9A6310"/>
+                </a:solidFill>
+                <a:latin typeface="Courier New" pitchFamily="34" charset="0"/>
+                <a:ea typeface="Courier New" pitchFamily="34" charset="-122"/>
+                <a:cs typeface="Courier New" pitchFamily="34" charset="-120"/>
+              </a:rPr>
+              <a:t>Teil 1</a:t>
+            </a:r>
+            <a:endParaRPr lang="en-US" sz="1100" dirty="0"/>
+          </a:p>
+        </p:txBody>
+      </p:sp>
+      <p:sp>
+        <p:nvSpPr>
+          <p:cNvPr id="7" name="Text 5"/>
+          <p:cNvSpPr/>
+          <p:nvPr/>
+        </p:nvSpPr>
+        <p:spPr>
+          <a:xfrm>
+            <a:off x="1481328" y="1737360"/>
+            <a:ext cx="7095744" cy="365760"/>
+          </a:xfrm>
+          <a:prstGeom prst="rect">
+            <a:avLst/>
+          </a:prstGeom>
+          <a:noFill/>
+          <a:ln/>
+        </p:spPr>
+        <p:txBody>
+          <a:bodyPr wrap="square" lIns="0" tIns="0" rIns="0" bIns="0" rtlCol="0" anchor="ctr"/>
+          <a:lstStyle/>
+          <a:p>
+            <a:pPr indent="0" marL="0">
+              <a:buNone/>
+            </a:pPr>
+            <a:r>
+              <a:rPr lang="en-US" sz="1100" dirty="0">
+                <a:solidFill>
+                  <a:srgbClr val="434A63"/>
+                </a:solidFill>
+                <a:latin typeface="Arial" pitchFamily="34" charset="0"/>
+                <a:ea typeface="Arial" pitchFamily="34" charset="-122"/>
+                <a:cs typeface="Arial" pitchFamily="34" charset="-120"/>
+              </a:rPr>
+              <a:t>Broker starten: ein Netzwerk, ein docker run, ein Blick in die Logs</a:t>
+            </a:r>
+            <a:endParaRPr lang="en-US" sz="1100" dirty="0"/>
+          </a:p>
+        </p:txBody>
+      </p:sp>
+      <p:sp>
+        <p:nvSpPr>
+          <p:cNvPr id="8" name="Text 6"/>
+          <p:cNvSpPr/>
+          <p:nvPr/>
+        </p:nvSpPr>
+        <p:spPr>
+          <a:xfrm>
+            <a:off x="566928" y="2103120"/>
+            <a:ext cx="914400" cy="365760"/>
+          </a:xfrm>
+          <a:prstGeom prst="rect">
+            <a:avLst/>
+          </a:prstGeom>
+          <a:noFill/>
+          <a:ln/>
+        </p:spPr>
+        <p:txBody>
+          <a:bodyPr wrap="square" lIns="0" tIns="0" rIns="0" bIns="0" rtlCol="0" anchor="ctr"/>
+          <a:lstStyle/>
+          <a:p>
+            <a:pPr indent="0" marL="0">
+              <a:buNone/>
+            </a:pPr>
+            <a:r>
+              <a:rPr lang="en-US" sz="1100" b="1" dirty="0">
+                <a:solidFill>
+                  <a:srgbClr val="9A6310"/>
+                </a:solidFill>
+                <a:latin typeface="Courier New" pitchFamily="34" charset="0"/>
+                <a:ea typeface="Courier New" pitchFamily="34" charset="-122"/>
+                <a:cs typeface="Courier New" pitchFamily="34" charset="-120"/>
+              </a:rPr>
+              <a:t>Teil 2</a:t>
+            </a:r>
+            <a:endParaRPr lang="en-US" sz="1100" dirty="0"/>
+          </a:p>
+        </p:txBody>
+      </p:sp>
+      <p:sp>
+        <p:nvSpPr>
+          <p:cNvPr id="9" name="Text 7"/>
+          <p:cNvSpPr/>
+          <p:nvPr/>
+        </p:nvSpPr>
+        <p:spPr>
+          <a:xfrm>
+            <a:off x="1481328" y="2103120"/>
+            <a:ext cx="7095744" cy="365760"/>
+          </a:xfrm>
+          <a:prstGeom prst="rect">
+            <a:avLst/>
+          </a:prstGeom>
+          <a:noFill/>
+          <a:ln/>
+        </p:spPr>
+        <p:txBody>
+          <a:bodyPr wrap="square" lIns="0" tIns="0" rIns="0" bIns="0" rtlCol="0" anchor="ctr"/>
+          <a:lstStyle/>
+          <a:p>
+            <a:pPr indent="0" marL="0">
+              <a:buNone/>
+            </a:pPr>
+            <a:r>
+              <a:rPr lang="en-US" sz="1100" dirty="0">
+                <a:solidFill>
+                  <a:srgbClr val="434A63"/>
+                </a:solidFill>
+                <a:latin typeface="Arial" pitchFamily="34" charset="0"/>
+                <a:ea typeface="Arial" pitchFamily="34" charset="-122"/>
+                <a:cs typeface="Arial" pitchFamily="34" charset="-120"/>
+              </a:rPr>
+              <a:t>Mitlesen und senden: mosquitto_sub im einen, mosquitto_pub im anderen Fenster</a:t>
+            </a:r>
+            <a:endParaRPr lang="en-US" sz="1100" dirty="0"/>
+          </a:p>
+        </p:txBody>
+      </p:sp>
+      <p:sp>
+        <p:nvSpPr>
+          <p:cNvPr id="10" name="Shape 8"/>
+          <p:cNvSpPr/>
+          <p:nvPr/>
+        </p:nvSpPr>
+        <p:spPr>
+          <a:xfrm>
+            <a:off x="438912" y="2468880"/>
+            <a:ext cx="8266176" cy="365760"/>
+          </a:xfrm>
+          <a:prstGeom prst="rect">
+            <a:avLst/>
+          </a:prstGeom>
+          <a:solidFill>
+            <a:srgbClr val="F5F6FC"/>
+          </a:solidFill>
+          <a:ln/>
+        </p:spPr>
+      </p:sp>
+      <p:sp>
+        <p:nvSpPr>
+          <p:cNvPr id="11" name="Text 9"/>
+          <p:cNvSpPr/>
+          <p:nvPr/>
+        </p:nvSpPr>
+        <p:spPr>
+          <a:xfrm>
+            <a:off x="566928" y="2468880"/>
+            <a:ext cx="914400" cy="365760"/>
+          </a:xfrm>
+          <a:prstGeom prst="rect">
+            <a:avLst/>
+          </a:prstGeom>
+          <a:noFill/>
+          <a:ln/>
+        </p:spPr>
+        <p:txBody>
+          <a:bodyPr wrap="square" lIns="0" tIns="0" rIns="0" bIns="0" rtlCol="0" anchor="ctr"/>
+          <a:lstStyle/>
+          <a:p>
+            <a:pPr indent="0" marL="0">
+              <a:buNone/>
+            </a:pPr>
+            <a:r>
+              <a:rPr lang="en-US" sz="1100" b="1" dirty="0">
+                <a:solidFill>
+                  <a:srgbClr val="9A6310"/>
+                </a:solidFill>
+                <a:latin typeface="Courier New" pitchFamily="34" charset="0"/>
+                <a:ea typeface="Courier New" pitchFamily="34" charset="-122"/>
+                <a:cs typeface="Courier New" pitchFamily="34" charset="-120"/>
+              </a:rPr>
+              <a:t>Teil 3</a:t>
+            </a:r>
+            <a:endParaRPr lang="en-US" sz="1100" dirty="0"/>
+          </a:p>
+        </p:txBody>
+      </p:sp>
+      <p:sp>
+        <p:nvSpPr>
+          <p:cNvPr id="12" name="Text 10"/>
+          <p:cNvSpPr/>
+          <p:nvPr/>
+        </p:nvSpPr>
+        <p:spPr>
+          <a:xfrm>
+            <a:off x="1481328" y="2468880"/>
+            <a:ext cx="7095744" cy="365760"/>
+          </a:xfrm>
+          <a:prstGeom prst="rect">
+            <a:avLst/>
+          </a:prstGeom>
+          <a:noFill/>
+          <a:ln/>
+        </p:spPr>
+        <p:txBody>
+          <a:bodyPr wrap="square" lIns="0" tIns="0" rIns="0" bIns="0" rtlCol="0" anchor="ctr"/>
+          <a:lstStyle/>
+          <a:p>
+            <a:pPr indent="0" marL="0">
+              <a:buNone/>
+            </a:pPr>
+            <a:r>
+              <a:rPr lang="en-US" sz="1100" dirty="0">
+                <a:solidFill>
+                  <a:srgbClr val="434A63"/>
+                </a:solidFill>
+                <a:latin typeface="Arial" pitchFamily="34" charset="0"/>
+                <a:ea typeface="Arial" pitchFamily="34" charset="-122"/>
+                <a:cs typeface="Arial" pitchFamily="34" charset="-120"/>
+              </a:rPr>
+              <a:t>Alles auf einmal mitlesen: das Abo mit #</a:t>
+            </a:r>
+            <a:endParaRPr lang="en-US" sz="1100" dirty="0"/>
+          </a:p>
+        </p:txBody>
+      </p:sp>
+      <p:sp>
+        <p:nvSpPr>
+          <p:cNvPr id="13" name="Text 11"/>
+          <p:cNvSpPr/>
+          <p:nvPr/>
+        </p:nvSpPr>
+        <p:spPr>
+          <a:xfrm>
+            <a:off x="566928" y="2834640"/>
+            <a:ext cx="914400" cy="365760"/>
+          </a:xfrm>
+          <a:prstGeom prst="rect">
+            <a:avLst/>
+          </a:prstGeom>
+          <a:noFill/>
+          <a:ln/>
+        </p:spPr>
+        <p:txBody>
+          <a:bodyPr wrap="square" lIns="0" tIns="0" rIns="0" bIns="0" rtlCol="0" anchor="ctr"/>
+          <a:lstStyle/>
+          <a:p>
+            <a:pPr indent="0" marL="0">
+              <a:buNone/>
+            </a:pPr>
+            <a:r>
+              <a:rPr lang="en-US" sz="1100" b="1" dirty="0">
+                <a:solidFill>
+                  <a:srgbClr val="9A6310"/>
+                </a:solidFill>
+                <a:latin typeface="Courier New" pitchFamily="34" charset="0"/>
+                <a:ea typeface="Courier New" pitchFamily="34" charset="-122"/>
+                <a:cs typeface="Courier New" pitchFamily="34" charset="-120"/>
+              </a:rPr>
+              <a:t>Extras</a:t>
+            </a:r>
+            <a:endParaRPr lang="en-US" sz="1100" dirty="0"/>
+          </a:p>
+        </p:txBody>
+      </p:sp>
+      <p:sp>
+        <p:nvSpPr>
+          <p:cNvPr id="14" name="Text 12"/>
+          <p:cNvSpPr/>
+          <p:nvPr/>
+        </p:nvSpPr>
+        <p:spPr>
+          <a:xfrm>
+            <a:off x="1481328" y="2834640"/>
+            <a:ext cx="7095744" cy="365760"/>
+          </a:xfrm>
+          <a:prstGeom prst="rect">
+            <a:avLst/>
+          </a:prstGeom>
+          <a:noFill/>
+          <a:ln/>
+        </p:spPr>
+        <p:txBody>
+          <a:bodyPr wrap="square" lIns="0" tIns="0" rIns="0" bIns="0" rtlCol="0" anchor="ctr"/>
+          <a:lstStyle/>
+          <a:p>
+            <a:pPr indent="0" marL="0">
+              <a:buNone/>
+            </a:pPr>
+            <a:r>
+              <a:rPr lang="en-US" sz="1100" dirty="0">
+                <a:solidFill>
+                  <a:srgbClr val="434A63"/>
+                </a:solidFill>
+                <a:latin typeface="Arial" pitchFamily="34" charset="0"/>
+                <a:ea typeface="Arial" pitchFamily="34" charset="-122"/>
+                <a:cs typeface="Arial" pitchFamily="34" charset="-120"/>
+              </a:rPr>
+              <a:t>Für Neugierige: Retained Message, ein Sensor-Container, der Platzhalter +</a:t>
+            </a:r>
+            <a:endParaRPr lang="en-US" sz="1100" dirty="0"/>
+          </a:p>
+        </p:txBody>
+      </p:sp>
+      <p:sp>
+        <p:nvSpPr>
+          <p:cNvPr id="15" name="Shape 13"/>
+          <p:cNvSpPr/>
+          <p:nvPr/>
+        </p:nvSpPr>
+        <p:spPr>
+          <a:xfrm>
+            <a:off x="566928" y="3794760"/>
+            <a:ext cx="32004" cy="256032"/>
           </a:xfrm>
           <a:prstGeom prst="rect">
             <a:avLst/>
@@ -9195,72 +9033,30 @@
       </p:sp>
       <p:sp>
         <p:nvSpPr>
-          <p:cNvPr id="8" name="Text 6"/>
-          <p:cNvSpPr/>
-          <p:nvPr/>
-        </p:nvSpPr>
-        <p:spPr>
-          <a:xfrm>
-            <a:off x="804672" y="3785616"/>
-            <a:ext cx="7607808" cy="242062"/>
-          </a:xfrm>
-          <a:prstGeom prst="rect">
-            <a:avLst/>
-          </a:prstGeom>
-          <a:noFill/>
-          <a:ln/>
-        </p:spPr>
-        <p:txBody>
-          <a:bodyPr wrap="square" lIns="0" tIns="0" rIns="0" bIns="0" rtlCol="0" anchor="t"/>
-          <a:lstStyle/>
-          <a:p>
-            <a:pPr indent="0" marL="0">
-              <a:buNone/>
-            </a:pPr>
-            <a:r>
-              <a:rPr lang="en-US" sz="1300" b="1" dirty="0">
-                <a:solidFill>
-                  <a:srgbClr val="272E52"/>
-                </a:solidFill>
-                <a:latin typeface="Arial" pitchFamily="34" charset="0"/>
-                <a:ea typeface="Arial" pitchFamily="34" charset="-122"/>
-                <a:cs typeface="Arial" pitchFamily="34" charset="-120"/>
-              </a:rPr>
-              <a:t>Um 20:35 sind alle wieder hier</a:t>
-            </a:r>
-            <a:endParaRPr lang="en-US" sz="1300" dirty="0"/>
-          </a:p>
-        </p:txBody>
-      </p:sp>
-      <p:sp>
-        <p:nvSpPr>
-          <p:cNvPr id="9" name="Text 7"/>
-          <p:cNvSpPr/>
-          <p:nvPr/>
-        </p:nvSpPr>
-        <p:spPr>
-          <a:xfrm>
-            <a:off x="804672" y="4073398"/>
-            <a:ext cx="7607808" cy="270002"/>
-          </a:xfrm>
-          <a:prstGeom prst="rect">
-            <a:avLst/>
-          </a:prstGeom>
-          <a:noFill/>
-          <a:ln/>
-        </p:spPr>
-        <p:txBody>
-          <a:bodyPr wrap="square" lIns="0" tIns="0" rIns="0" bIns="0" rtlCol="0" anchor="t"/>
-          <a:lstStyle/>
-          <a:p>
-            <a:pPr indent="0" marL="0">
-              <a:lnSpc>
-                <a:spcPct val="92000"/>
-              </a:lnSpc>
-              <a:buNone/>
-            </a:pPr>
-            <a:r>
-              <a:rPr lang="en-US" sz="1100" dirty="0">
+          <p:cNvPr id="16" name="Text 14"/>
+          <p:cNvSpPr/>
+          <p:nvPr/>
+        </p:nvSpPr>
+        <p:spPr>
+          <a:xfrm>
+            <a:off x="749808" y="3749040"/>
+            <a:ext cx="7827264" cy="402336"/>
+          </a:xfrm>
+          <a:prstGeom prst="rect">
+            <a:avLst/>
+          </a:prstGeom>
+          <a:noFill/>
+          <a:ln/>
+        </p:spPr>
+        <p:txBody>
+          <a:bodyPr wrap="square" lIns="0" tIns="0" rIns="0" bIns="0" rtlCol="0" anchor="ctr"/>
+          <a:lstStyle/>
+          <a:p>
+            <a:pPr indent="0" marL="0">
+              <a:buNone/>
+            </a:pPr>
+            <a:r>
+              <a:rPr lang="en-US" sz="1200" b="1" dirty="0">
                 <a:solidFill>
                   <a:srgbClr val="434A63"/>
                 </a:solidFill>
@@ -9268,15 +9064,15 @@
                 <a:ea typeface="Arial" pitchFamily="34" charset="-122"/>
                 <a:cs typeface="Arial" pitchFamily="34" charset="-120"/>
               </a:rPr>
-              <a:t>Jede Gruppe bringt einen Fund aus dem Mitschnitt mit und ihren Satz zur Frage: Was fehlt eurem eigenen Broker, bevor er in eine echte Halle darf?</a:t>
-            </a:r>
-            <a:endParaRPr lang="en-US" sz="1100" dirty="0"/>
-          </a:p>
-        </p:txBody>
-      </p:sp>
-      <p:sp>
-        <p:nvSpPr>
-          <p:cNvPr id="10" name="Shape 8"/>
+              <a:t>Teil 1 bis 3 sind das Ziel. Probiert eigene Topics und Werte aus: Der Broker läuft nur auf eurem Rechner, kaputtgehen kann nichts.</a:t>
+            </a:r>
+            <a:endParaRPr lang="en-US" sz="1200" dirty="0"/>
+          </a:p>
+        </p:txBody>
+      </p:sp>
+      <p:sp>
+        <p:nvSpPr>
+          <p:cNvPr id="17" name="Shape 15"/>
           <p:cNvSpPr/>
           <p:nvPr/>
         </p:nvSpPr>
@@ -9299,7 +9095,7 @@
       </p:sp>
       <p:sp>
         <p:nvSpPr>
-          <p:cNvPr id="11" name="Text 9"/>
+          <p:cNvPr id="18" name="Text 16"/>
           <p:cNvSpPr/>
           <p:nvPr/>
         </p:nvSpPr>
@@ -9338,7 +9134,7 @@
       </p:sp>
       <p:sp>
         <p:nvSpPr>
-          <p:cNvPr id="12" name="Text 10"/>
+          <p:cNvPr id="19" name="Text 17"/>
           <p:cNvSpPr/>
           <p:nvPr/>
         </p:nvSpPr>
@@ -9369,7 +9165,7 @@
                 <a:ea typeface="Arial" pitchFamily="34" charset="-122"/>
                 <a:cs typeface="Arial" pitchFamily="34" charset="-120"/>
               </a:rPr>
-              <a:t>18/20</a:t>
+              <a:t>18/21</a:t>
             </a:r>
             <a:endParaRPr lang="en-US" sz="1050" dirty="0"/>
           </a:p>
@@ -9422,7 +9218,7 @@
             <a:avLst/>
           </a:prstGeom>
           <a:solidFill>
-            <a:srgbClr val="0F7C86"/>
+            <a:srgbClr val="9A6310"/>
           </a:solidFill>
           <a:ln/>
         </p:spPr>
@@ -9454,13 +9250,13 @@
             <a:r>
               <a:rPr lang="en-US" sz="1150" b="1" spc="180" kern="0" dirty="0">
                 <a:solidFill>
-                  <a:srgbClr val="0F7C86"/>
-                </a:solidFill>
-                <a:latin typeface="Arial" pitchFamily="34" charset="0"/>
-                <a:ea typeface="Arial" pitchFamily="34" charset="-122"/>
-                <a:cs typeface="Arial" pitchFamily="34" charset="-120"/>
-              </a:rPr>
-              <a:t>AUSWERTUNG · 20 MINUTEN</a:t>
+                  <a:srgbClr val="9A6310"/>
+                </a:solidFill>
+                <a:latin typeface="Arial" pitchFamily="34" charset="0"/>
+                <a:ea typeface="Arial" pitchFamily="34" charset="-122"/>
+                <a:cs typeface="Arial" pitchFamily="34" charset="-120"/>
+              </a:rPr>
+              <a:t>SPIELREGELN</a:t>
             </a:r>
             <a:endParaRPr lang="en-US" sz="1150" dirty="0"/>
           </a:p>
@@ -9499,7 +9295,7 @@
                 <a:ea typeface="Arial" pitchFamily="34" charset="-122"/>
                 <a:cs typeface="Arial" pitchFamily="34" charset="-120"/>
               </a:rPr>
-              <a:t>Eure Funde</a:t>
+              <a:t>So arbeitet ihr</a:t>
             </a:r>
             <a:endParaRPr lang="en-US" sz="2600" dirty="0"/>
           </a:p>
@@ -9507,14 +9303,171 @@
       </p:sp>
       <p:sp>
         <p:nvSpPr>
-          <p:cNvPr id="5" name="Shape 3"/>
-          <p:cNvSpPr/>
-          <p:nvPr/>
-        </p:nvSpPr>
-        <p:spPr>
-          <a:xfrm>
-            <a:off x="438912" y="1810512"/>
-            <a:ext cx="8266176" cy="365760"/>
+          <p:cNvPr id="5" name="Text 3"/>
+          <p:cNvSpPr/>
+          <p:nvPr/>
+        </p:nvSpPr>
+        <p:spPr>
+          <a:xfrm>
+            <a:off x="566928" y="1700784"/>
+            <a:ext cx="8010144" cy="1828800"/>
+          </a:xfrm>
+          <a:prstGeom prst="rect">
+            <a:avLst/>
+          </a:prstGeom>
+          <a:noFill/>
+          <a:ln/>
+        </p:spPr>
+        <p:txBody>
+          <a:bodyPr wrap="square" lIns="0" tIns="0" rIns="0" bIns="0" rtlCol="0" anchor="t"/>
+          <a:lstStyle/>
+          <a:p>
+            <a:pPr marL="254000" indent="-254000">
+              <a:lnSpc>
+                <a:spcPct val="100000"/>
+              </a:lnSpc>
+              <a:spcAft>
+                <a:spcPts val="900"/>
+              </a:spcAft>
+              <a:buClr>
+                <a:srgbClr val="0F7C86"/>
+              </a:buClr>
+              <a:buSzPct val="100000"/>
+              <a:buChar char="▸"/>
+            </a:pPr>
+            <a:r>
+              <a:rPr lang="en-US" sz="1200" dirty="0">
+                <a:solidFill>
+                  <a:srgbClr val="434A63"/>
+                </a:solidFill>
+                <a:latin typeface="Arial" pitchFamily="34" charset="0"/>
+                <a:ea typeface="Arial" pitchFamily="34" charset="-122"/>
+                <a:cs typeface="Arial" pitchFamily="34" charset="-120"/>
+              </a:rPr>
+              <a:t>Ein Raum für die ganze Praxiszeit: gleiche Gruppen, ihr bleibt bis 20:35 zusammen.</a:t>
+            </a:r>
+            <a:endParaRPr lang="en-US" sz="1200" dirty="0"/>
+          </a:p>
+          <a:p>
+            <a:pPr marL="254000" indent="-254000">
+              <a:lnSpc>
+                <a:spcPct val="100000"/>
+              </a:lnSpc>
+              <a:spcAft>
+                <a:spcPts val="900"/>
+              </a:spcAft>
+              <a:buClr>
+                <a:srgbClr val="0F7C86"/>
+              </a:buClr>
+              <a:buSzPct val="100000"/>
+              <a:buChar char="▸"/>
+            </a:pPr>
+            <a:r>
+              <a:rPr lang="en-US" sz="1200" dirty="0">
+                <a:solidFill>
+                  <a:srgbClr val="434A63"/>
+                </a:solidFill>
+                <a:latin typeface="Arial" pitchFamily="34" charset="0"/>
+                <a:ea typeface="Arial" pitchFamily="34" charset="-122"/>
+                <a:cs typeface="Arial" pitchFamily="34" charset="-120"/>
+              </a:rPr>
+              <a:t>Die Stationen der Reihe nach. Wer schneller ist, hat mehr Zeit für Station 3.</a:t>
+            </a:r>
+            <a:endParaRPr lang="en-US" sz="1200" dirty="0"/>
+          </a:p>
+          <a:p>
+            <a:pPr marL="254000" indent="-254000">
+              <a:lnSpc>
+                <a:spcPct val="100000"/>
+              </a:lnSpc>
+              <a:spcAft>
+                <a:spcPts val="900"/>
+              </a:spcAft>
+              <a:buClr>
+                <a:srgbClr val="0F7C86"/>
+              </a:buClr>
+              <a:buSzPct val="100000"/>
+              <a:buChar char="▸"/>
+            </a:pPr>
+            <a:r>
+              <a:rPr lang="en-US" sz="1200" dirty="0">
+                <a:solidFill>
+                  <a:srgbClr val="434A63"/>
+                </a:solidFill>
+                <a:latin typeface="Arial" pitchFamily="34" charset="0"/>
+                <a:ea typeface="Arial" pitchFamily="34" charset="-122"/>
+                <a:cs typeface="Arial" pitchFamily="34" charset="-120"/>
+              </a:rPr>
+              <a:t>Eine Person teilt den Bildschirm, alle arbeiten auf dem eigenen Rechner mit.</a:t>
+            </a:r>
+            <a:endParaRPr lang="en-US" sz="1200" dirty="0"/>
+          </a:p>
+          <a:p>
+            <a:pPr marL="254000" indent="-254000">
+              <a:lnSpc>
+                <a:spcPct val="100000"/>
+              </a:lnSpc>
+              <a:spcAft>
+                <a:spcPts val="900"/>
+              </a:spcAft>
+              <a:buClr>
+                <a:srgbClr val="0F7C86"/>
+              </a:buClr>
+              <a:buSzPct val="100000"/>
+              <a:buChar char="▸"/>
+            </a:pPr>
+            <a:r>
+              <a:rPr lang="en-US" sz="1200" dirty="0">
+                <a:solidFill>
+                  <a:srgbClr val="434A63"/>
+                </a:solidFill>
+                <a:latin typeface="Arial" pitchFamily="34" charset="0"/>
+                <a:ea typeface="Arial" pitchFamily="34" charset="-122"/>
+                <a:cs typeface="Arial" pitchFamily="34" charset="-120"/>
+              </a:rPr>
+              <a:t>Ich schaue reihum in die Räume. Wenn es klemmt: erst die Stolpersteine-Seite, dann um Hilfe bitten.</a:t>
+            </a:r>
+            <a:endParaRPr lang="en-US" sz="1200" dirty="0"/>
+          </a:p>
+          <a:p>
+            <a:pPr marL="254000" indent="-254000">
+              <a:lnSpc>
+                <a:spcPct val="100000"/>
+              </a:lnSpc>
+              <a:spcAft>
+                <a:spcPts val="900"/>
+              </a:spcAft>
+              <a:buClr>
+                <a:srgbClr val="0F7C86"/>
+              </a:buClr>
+              <a:buSzPct val="100000"/>
+              <a:buChar char="▸"/>
+            </a:pPr>
+            <a:r>
+              <a:rPr lang="en-US" sz="1200" dirty="0">
+                <a:solidFill>
+                  <a:srgbClr val="434A63"/>
+                </a:solidFill>
+                <a:latin typeface="Arial" pitchFamily="34" charset="0"/>
+                <a:ea typeface="Arial" pitchFamily="34" charset="-122"/>
+                <a:cs typeface="Arial" pitchFamily="34" charset="-120"/>
+              </a:rPr>
+              <a:t>Windows wie immer in der PowerShell im Windows-Terminal.</a:t>
+            </a:r>
+            <a:endParaRPr lang="en-US" sz="1200" dirty="0"/>
+          </a:p>
+        </p:txBody>
+      </p:sp>
+      <p:sp>
+        <p:nvSpPr>
+          <p:cNvPr id="6" name="Shape 4"/>
+          <p:cNvSpPr/>
+          <p:nvPr/>
+        </p:nvSpPr>
+        <p:spPr>
+          <a:xfrm>
+            <a:off x="566928" y="3639312"/>
+            <a:ext cx="8010144" cy="822960"/>
           </a:xfrm>
           <a:prstGeom prst="rect">
             <a:avLst/>
@@ -9527,69 +9480,92 @@
       </p:sp>
       <p:sp>
         <p:nvSpPr>
-          <p:cNvPr id="6" name="Text 4"/>
-          <p:cNvSpPr/>
-          <p:nvPr/>
-        </p:nvSpPr>
-        <p:spPr>
-          <a:xfrm>
-            <a:off x="566928" y="1810512"/>
-            <a:ext cx="548640" cy="365760"/>
-          </a:xfrm>
-          <a:prstGeom prst="rect">
-            <a:avLst/>
-          </a:prstGeom>
-          <a:noFill/>
-          <a:ln/>
-        </p:spPr>
-        <p:txBody>
-          <a:bodyPr wrap="square" lIns="0" tIns="0" rIns="0" bIns="0" rtlCol="0" anchor="ctr"/>
-          <a:lstStyle/>
-          <a:p>
-            <a:pPr indent="0" marL="0">
-              <a:buNone/>
-            </a:pPr>
-            <a:r>
-              <a:rPr lang="en-US" sz="1200" b="1" dirty="0">
-                <a:solidFill>
-                  <a:srgbClr val="0F7C86"/>
-                </a:solidFill>
-                <a:latin typeface="Courier New" pitchFamily="34" charset="0"/>
-                <a:ea typeface="Courier New" pitchFamily="34" charset="-122"/>
-                <a:cs typeface="Courier New" pitchFamily="34" charset="-120"/>
-              </a:rPr>
-              <a:t>1</a:t>
-            </a:r>
-            <a:endParaRPr lang="en-US" sz="1200" dirty="0"/>
-          </a:p>
-        </p:txBody>
-      </p:sp>
-      <p:sp>
-        <p:nvSpPr>
-          <p:cNvPr id="7" name="Text 5"/>
-          <p:cNvSpPr/>
-          <p:nvPr/>
-        </p:nvSpPr>
-        <p:spPr>
-          <a:xfrm>
-            <a:off x="1115568" y="1810512"/>
-            <a:ext cx="7461504" cy="365760"/>
-          </a:xfrm>
-          <a:prstGeom prst="rect">
-            <a:avLst/>
-          </a:prstGeom>
-          <a:noFill/>
-          <a:ln/>
-        </p:spPr>
-        <p:txBody>
-          <a:bodyPr wrap="square" lIns="0" tIns="0" rIns="0" bIns="0" rtlCol="0" anchor="ctr"/>
-          <a:lstStyle/>
-          <a:p>
-            <a:pPr indent="0" marL="0">
-              <a:buNone/>
-            </a:pPr>
-            <a:r>
-              <a:rPr lang="en-US" sz="1200" dirty="0">
+          <p:cNvPr id="7" name="Shape 5"/>
+          <p:cNvSpPr/>
+          <p:nvPr/>
+        </p:nvSpPr>
+        <p:spPr>
+          <a:xfrm>
+            <a:off x="566928" y="3639312"/>
+            <a:ext cx="41148" cy="822960"/>
+          </a:xfrm>
+          <a:prstGeom prst="rect">
+            <a:avLst/>
+          </a:prstGeom>
+          <a:solidFill>
+            <a:srgbClr val="9A6310"/>
+          </a:solidFill>
+          <a:ln/>
+        </p:spPr>
+      </p:sp>
+      <p:sp>
+        <p:nvSpPr>
+          <p:cNvPr id="8" name="Text 6"/>
+          <p:cNvSpPr/>
+          <p:nvPr/>
+        </p:nvSpPr>
+        <p:spPr>
+          <a:xfrm>
+            <a:off x="804672" y="3785616"/>
+            <a:ext cx="7607808" cy="242062"/>
+          </a:xfrm>
+          <a:prstGeom prst="rect">
+            <a:avLst/>
+          </a:prstGeom>
+          <a:noFill/>
+          <a:ln/>
+        </p:spPr>
+        <p:txBody>
+          <a:bodyPr wrap="square" lIns="0" tIns="0" rIns="0" bIns="0" rtlCol="0" anchor="t"/>
+          <a:lstStyle/>
+          <a:p>
+            <a:pPr indent="0" marL="0">
+              <a:buNone/>
+            </a:pPr>
+            <a:r>
+              <a:rPr lang="en-US" sz="1300" b="1" dirty="0">
+                <a:solidFill>
+                  <a:srgbClr val="272E52"/>
+                </a:solidFill>
+                <a:latin typeface="Arial" pitchFamily="34" charset="0"/>
+                <a:ea typeface="Arial" pitchFamily="34" charset="-122"/>
+                <a:cs typeface="Arial" pitchFamily="34" charset="-120"/>
+              </a:rPr>
+              <a:t>Um 20:35 sind alle wieder hier</a:t>
+            </a:r>
+            <a:endParaRPr lang="en-US" sz="1300" dirty="0"/>
+          </a:p>
+        </p:txBody>
+      </p:sp>
+      <p:sp>
+        <p:nvSpPr>
+          <p:cNvPr id="9" name="Text 7"/>
+          <p:cNvSpPr/>
+          <p:nvPr/>
+        </p:nvSpPr>
+        <p:spPr>
+          <a:xfrm>
+            <a:off x="804672" y="4073398"/>
+            <a:ext cx="7607808" cy="270002"/>
+          </a:xfrm>
+          <a:prstGeom prst="rect">
+            <a:avLst/>
+          </a:prstGeom>
+          <a:noFill/>
+          <a:ln/>
+        </p:spPr>
+        <p:txBody>
+          <a:bodyPr wrap="square" lIns="0" tIns="0" rIns="0" bIns="0" rtlCol="0" anchor="t"/>
+          <a:lstStyle/>
+          <a:p>
+            <a:pPr indent="0" marL="0">
+              <a:lnSpc>
+                <a:spcPct val="92000"/>
+              </a:lnSpc>
+              <a:buNone/>
+            </a:pPr>
+            <a:r>
+              <a:rPr lang="en-US" sz="1100" dirty="0">
                 <a:solidFill>
                   <a:srgbClr val="434A63"/>
                 </a:solidFill>
@@ -9597,426 +9573,15 @@
                 <a:ea typeface="Arial" pitchFamily="34" charset="-122"/>
                 <a:cs typeface="Arial" pitchFamily="34" charset="-120"/>
               </a:rPr>
-              <a:t>Die Halle stellt sich vor: die drei Gerätenamen und wer der Controller ist</a:t>
-            </a:r>
-            <a:endParaRPr lang="en-US" sz="1200" dirty="0"/>
-          </a:p>
-        </p:txBody>
-      </p:sp>
-      <p:sp>
-        <p:nvSpPr>
-          <p:cNvPr id="8" name="Text 6"/>
-          <p:cNvSpPr/>
-          <p:nvPr/>
-        </p:nvSpPr>
-        <p:spPr>
-          <a:xfrm>
-            <a:off x="566928" y="2176272"/>
-            <a:ext cx="548640" cy="365760"/>
-          </a:xfrm>
-          <a:prstGeom prst="rect">
-            <a:avLst/>
-          </a:prstGeom>
-          <a:noFill/>
-          <a:ln/>
-        </p:spPr>
-        <p:txBody>
-          <a:bodyPr wrap="square" lIns="0" tIns="0" rIns="0" bIns="0" rtlCol="0" anchor="ctr"/>
-          <a:lstStyle/>
-          <a:p>
-            <a:pPr indent="0" marL="0">
-              <a:buNone/>
-            </a:pPr>
-            <a:r>
-              <a:rPr lang="en-US" sz="1200" b="1" dirty="0">
-                <a:solidFill>
-                  <a:srgbClr val="0F7C86"/>
-                </a:solidFill>
-                <a:latin typeface="Courier New" pitchFamily="34" charset="0"/>
-                <a:ea typeface="Courier New" pitchFamily="34" charset="-122"/>
-                <a:cs typeface="Courier New" pitchFamily="34" charset="-120"/>
-              </a:rPr>
-              <a:t>2</a:t>
-            </a:r>
-            <a:endParaRPr lang="en-US" sz="1200" dirty="0"/>
-          </a:p>
-        </p:txBody>
-      </p:sp>
-      <p:sp>
-        <p:nvSpPr>
-          <p:cNvPr id="9" name="Text 7"/>
-          <p:cNvSpPr/>
-          <p:nvPr/>
-        </p:nvSpPr>
-        <p:spPr>
-          <a:xfrm>
-            <a:off x="1115568" y="2176272"/>
-            <a:ext cx="7461504" cy="365760"/>
-          </a:xfrm>
-          <a:prstGeom prst="rect">
-            <a:avLst/>
-          </a:prstGeom>
-          <a:noFill/>
-          <a:ln/>
-        </p:spPr>
-        <p:txBody>
-          <a:bodyPr wrap="square" lIns="0" tIns="0" rIns="0" bIns="0" rtlCol="0" anchor="ctr"/>
-          <a:lstStyle/>
-          <a:p>
-            <a:pPr indent="0" marL="0">
-              <a:buNone/>
-            </a:pPr>
-            <a:r>
-              <a:rPr lang="en-US" sz="1200" dirty="0">
-                <a:solidFill>
-                  <a:srgbClr val="434A63"/>
-                </a:solidFill>
-                <a:latin typeface="Arial" pitchFamily="34" charset="0"/>
-                <a:ea typeface="Arial" pitchFamily="34" charset="-122"/>
-                <a:cs typeface="Arial" pitchFamily="34" charset="-120"/>
-              </a:rPr>
-              <a:t>Der 32-Millisekunden-Takt: Woran erkennt man Echtzeit im Mitschnitt?</a:t>
-            </a:r>
-            <a:endParaRPr lang="en-US" sz="1200" dirty="0"/>
+              <a:t>Jede Gruppe bringt einen Fund aus dem Mitschnitt mit und ihren Satz zur Frage: Was fehlt eurem eigenen Broker, bevor er in eine echte Halle darf?</a:t>
+            </a:r>
+            <a:endParaRPr lang="en-US" sz="1100" dirty="0"/>
           </a:p>
         </p:txBody>
       </p:sp>
       <p:sp>
         <p:nvSpPr>
           <p:cNvPr id="10" name="Shape 8"/>
-          <p:cNvSpPr/>
-          <p:nvPr/>
-        </p:nvSpPr>
-        <p:spPr>
-          <a:xfrm>
-            <a:off x="438912" y="2542032"/>
-            <a:ext cx="8266176" cy="365760"/>
-          </a:xfrm>
-          <a:prstGeom prst="rect">
-            <a:avLst/>
-          </a:prstGeom>
-          <a:solidFill>
-            <a:srgbClr val="F5F6FC"/>
-          </a:solidFill>
-          <a:ln/>
-        </p:spPr>
-      </p:sp>
-      <p:sp>
-        <p:nvSpPr>
-          <p:cNvPr id="11" name="Text 9"/>
-          <p:cNvSpPr/>
-          <p:nvPr/>
-        </p:nvSpPr>
-        <p:spPr>
-          <a:xfrm>
-            <a:off x="566928" y="2542032"/>
-            <a:ext cx="548640" cy="365760"/>
-          </a:xfrm>
-          <a:prstGeom prst="rect">
-            <a:avLst/>
-          </a:prstGeom>
-          <a:noFill/>
-          <a:ln/>
-        </p:spPr>
-        <p:txBody>
-          <a:bodyPr wrap="square" lIns="0" tIns="0" rIns="0" bIns="0" rtlCol="0" anchor="ctr"/>
-          <a:lstStyle/>
-          <a:p>
-            <a:pPr indent="0" marL="0">
-              <a:buNone/>
-            </a:pPr>
-            <a:r>
-              <a:rPr lang="en-US" sz="1200" b="1" dirty="0">
-                <a:solidFill>
-                  <a:srgbClr val="0F7C86"/>
-                </a:solidFill>
-                <a:latin typeface="Courier New" pitchFamily="34" charset="0"/>
-                <a:ea typeface="Courier New" pitchFamily="34" charset="-122"/>
-                <a:cs typeface="Courier New" pitchFamily="34" charset="-120"/>
-              </a:rPr>
-              <a:t>3</a:t>
-            </a:r>
-            <a:endParaRPr lang="en-US" sz="1200" dirty="0"/>
-          </a:p>
-        </p:txBody>
-      </p:sp>
-      <p:sp>
-        <p:nvSpPr>
-          <p:cNvPr id="12" name="Text 10"/>
-          <p:cNvSpPr/>
-          <p:nvPr/>
-        </p:nvSpPr>
-        <p:spPr>
-          <a:xfrm>
-            <a:off x="1115568" y="2542032"/>
-            <a:ext cx="7461504" cy="365760"/>
-          </a:xfrm>
-          <a:prstGeom prst="rect">
-            <a:avLst/>
-          </a:prstGeom>
-          <a:noFill/>
-          <a:ln/>
-        </p:spPr>
-        <p:txBody>
-          <a:bodyPr wrap="square" lIns="0" tIns="0" rIns="0" bIns="0" rtlCol="0" anchor="ctr"/>
-          <a:lstStyle/>
-          <a:p>
-            <a:pPr indent="0" marL="0">
-              <a:buNone/>
-            </a:pPr>
-            <a:r>
-              <a:rPr lang="en-US" sz="1200" dirty="0">
-                <a:solidFill>
-                  <a:srgbClr val="434A63"/>
-                </a:solidFill>
-                <a:latin typeface="Arial" pitchFamily="34" charset="0"/>
-                <a:ea typeface="Arial" pitchFamily="34" charset="-122"/>
-                <a:cs typeface="Arial" pitchFamily="34" charset="-120"/>
-              </a:rPr>
-              <a:t>Die Klartext-Frage: Wer kann das MQTT-Topic des Ofens mitlesen?</a:t>
-            </a:r>
-            <a:endParaRPr lang="en-US" sz="1200" dirty="0"/>
-          </a:p>
-        </p:txBody>
-      </p:sp>
-      <p:sp>
-        <p:nvSpPr>
-          <p:cNvPr id="13" name="Text 11"/>
-          <p:cNvSpPr/>
-          <p:nvPr/>
-        </p:nvSpPr>
-        <p:spPr>
-          <a:xfrm>
-            <a:off x="566928" y="2907792"/>
-            <a:ext cx="548640" cy="365760"/>
-          </a:xfrm>
-          <a:prstGeom prst="rect">
-            <a:avLst/>
-          </a:prstGeom>
-          <a:noFill/>
-          <a:ln/>
-        </p:spPr>
-        <p:txBody>
-          <a:bodyPr wrap="square" lIns="0" tIns="0" rIns="0" bIns="0" rtlCol="0" anchor="ctr"/>
-          <a:lstStyle/>
-          <a:p>
-            <a:pPr indent="0" marL="0">
-              <a:buNone/>
-            </a:pPr>
-            <a:r>
-              <a:rPr lang="en-US" sz="1200" b="1" dirty="0">
-                <a:solidFill>
-                  <a:srgbClr val="0F7C86"/>
-                </a:solidFill>
-                <a:latin typeface="Courier New" pitchFamily="34" charset="0"/>
-                <a:ea typeface="Courier New" pitchFamily="34" charset="-122"/>
-                <a:cs typeface="Courier New" pitchFamily="34" charset="-120"/>
-              </a:rPr>
-              <a:t>4</a:t>
-            </a:r>
-            <a:endParaRPr lang="en-US" sz="1200" dirty="0"/>
-          </a:p>
-        </p:txBody>
-      </p:sp>
-      <p:sp>
-        <p:nvSpPr>
-          <p:cNvPr id="14" name="Text 12"/>
-          <p:cNvSpPr/>
-          <p:nvPr/>
-        </p:nvSpPr>
-        <p:spPr>
-          <a:xfrm>
-            <a:off x="1115568" y="2907792"/>
-            <a:ext cx="7461504" cy="365760"/>
-          </a:xfrm>
-          <a:prstGeom prst="rect">
-            <a:avLst/>
-          </a:prstGeom>
-          <a:noFill/>
-          <a:ln/>
-        </p:spPr>
-        <p:txBody>
-          <a:bodyPr wrap="square" lIns="0" tIns="0" rIns="0" bIns="0" rtlCol="0" anchor="ctr"/>
-          <a:lstStyle/>
-          <a:p>
-            <a:pPr indent="0" marL="0">
-              <a:buNone/>
-            </a:pPr>
-            <a:r>
-              <a:rPr lang="en-US" sz="1200" dirty="0">
-                <a:solidFill>
-                  <a:srgbClr val="434A63"/>
-                </a:solidFill>
-                <a:latin typeface="Arial" pitchFamily="34" charset="0"/>
-                <a:ea typeface="Arial" pitchFamily="34" charset="-122"/>
-                <a:cs typeface="Arial" pitchFamily="34" charset="-120"/>
-              </a:rPr>
-              <a:t>Euer eigener Broker: Wozu dienen + und #? Wozu die Retained Message?</a:t>
-            </a:r>
-            <a:endParaRPr lang="en-US" sz="1200" dirty="0"/>
-          </a:p>
-        </p:txBody>
-      </p:sp>
-      <p:sp>
-        <p:nvSpPr>
-          <p:cNvPr id="15" name="Shape 13"/>
-          <p:cNvSpPr/>
-          <p:nvPr/>
-        </p:nvSpPr>
-        <p:spPr>
-          <a:xfrm>
-            <a:off x="438912" y="3273552"/>
-            <a:ext cx="8266176" cy="365760"/>
-          </a:xfrm>
-          <a:prstGeom prst="rect">
-            <a:avLst/>
-          </a:prstGeom>
-          <a:solidFill>
-            <a:srgbClr val="F5F6FC"/>
-          </a:solidFill>
-          <a:ln/>
-        </p:spPr>
-      </p:sp>
-      <p:sp>
-        <p:nvSpPr>
-          <p:cNvPr id="16" name="Text 14"/>
-          <p:cNvSpPr/>
-          <p:nvPr/>
-        </p:nvSpPr>
-        <p:spPr>
-          <a:xfrm>
-            <a:off x="566928" y="3273552"/>
-            <a:ext cx="548640" cy="365760"/>
-          </a:xfrm>
-          <a:prstGeom prst="rect">
-            <a:avLst/>
-          </a:prstGeom>
-          <a:noFill/>
-          <a:ln/>
-        </p:spPr>
-        <p:txBody>
-          <a:bodyPr wrap="square" lIns="0" tIns="0" rIns="0" bIns="0" rtlCol="0" anchor="ctr"/>
-          <a:lstStyle/>
-          <a:p>
-            <a:pPr indent="0" marL="0">
-              <a:buNone/>
-            </a:pPr>
-            <a:r>
-              <a:rPr lang="en-US" sz="1200" b="1" dirty="0">
-                <a:solidFill>
-                  <a:srgbClr val="0F7C86"/>
-                </a:solidFill>
-                <a:latin typeface="Courier New" pitchFamily="34" charset="0"/>
-                <a:ea typeface="Courier New" pitchFamily="34" charset="-122"/>
-                <a:cs typeface="Courier New" pitchFamily="34" charset="-120"/>
-              </a:rPr>
-              <a:t>5</a:t>
-            </a:r>
-            <a:endParaRPr lang="en-US" sz="1200" dirty="0"/>
-          </a:p>
-        </p:txBody>
-      </p:sp>
-      <p:sp>
-        <p:nvSpPr>
-          <p:cNvPr id="17" name="Text 15"/>
-          <p:cNvSpPr/>
-          <p:nvPr/>
-        </p:nvSpPr>
-        <p:spPr>
-          <a:xfrm>
-            <a:off x="1115568" y="3273552"/>
-            <a:ext cx="7461504" cy="365760"/>
-          </a:xfrm>
-          <a:prstGeom prst="rect">
-            <a:avLst/>
-          </a:prstGeom>
-          <a:noFill/>
-          <a:ln/>
-        </p:spPr>
-        <p:txBody>
-          <a:bodyPr wrap="square" lIns="0" tIns="0" rIns="0" bIns="0" rtlCol="0" anchor="ctr"/>
-          <a:lstStyle/>
-          <a:p>
-            <a:pPr indent="0" marL="0">
-              <a:buNone/>
-            </a:pPr>
-            <a:r>
-              <a:rPr lang="en-US" sz="1200" dirty="0">
-                <a:solidFill>
-                  <a:srgbClr val="434A63"/>
-                </a:solidFill>
-                <a:latin typeface="Arial" pitchFamily="34" charset="0"/>
-                <a:ea typeface="Arial" pitchFamily="34" charset="-122"/>
-                <a:cs typeface="Arial" pitchFamily="34" charset="-120"/>
-              </a:rPr>
-              <a:t>Was fehlt eurem Broker für eine echte Halle? Anmeldung, TLS, Rechte je Topic</a:t>
-            </a:r>
-            <a:endParaRPr lang="en-US" sz="1200" dirty="0"/>
-          </a:p>
-        </p:txBody>
-      </p:sp>
-      <p:sp>
-        <p:nvSpPr>
-          <p:cNvPr id="18" name="Shape 16"/>
-          <p:cNvSpPr/>
-          <p:nvPr/>
-        </p:nvSpPr>
-        <p:spPr>
-          <a:xfrm>
-            <a:off x="566928" y="4069080"/>
-            <a:ext cx="32004" cy="256032"/>
-          </a:xfrm>
-          <a:prstGeom prst="rect">
-            <a:avLst/>
-          </a:prstGeom>
-          <a:solidFill>
-            <a:srgbClr val="0F7C86"/>
-          </a:solidFill>
-          <a:ln/>
-        </p:spPr>
-      </p:sp>
-      <p:sp>
-        <p:nvSpPr>
-          <p:cNvPr id="19" name="Text 17"/>
-          <p:cNvSpPr/>
-          <p:nvPr/>
-        </p:nvSpPr>
-        <p:spPr>
-          <a:xfrm>
-            <a:off x="749808" y="4023360"/>
-            <a:ext cx="7827264" cy="402336"/>
-          </a:xfrm>
-          <a:prstGeom prst="rect">
-            <a:avLst/>
-          </a:prstGeom>
-          <a:noFill/>
-          <a:ln/>
-        </p:spPr>
-        <p:txBody>
-          <a:bodyPr wrap="square" lIns="0" tIns="0" rIns="0" bIns="0" rtlCol="0" anchor="ctr"/>
-          <a:lstStyle/>
-          <a:p>
-            <a:pPr indent="0" marL="0">
-              <a:buNone/>
-            </a:pPr>
-            <a:r>
-              <a:rPr lang="en-US" sz="1200" b="1" dirty="0">
-                <a:solidFill>
-                  <a:srgbClr val="434A63"/>
-                </a:solidFill>
-                <a:latin typeface="Arial" pitchFamily="34" charset="0"/>
-                <a:ea typeface="Arial" pitchFamily="34" charset="-122"/>
-                <a:cs typeface="Arial" pitchFamily="34" charset="-120"/>
-              </a:rPr>
-              <a:t>Die Antwort auf Frage 5 ist der Kurs-Broker vom Mittwoch: mit Zugangsdaten, Verschlüsselung und echter Hardware dahinter.</a:t>
-            </a:r>
-            <a:endParaRPr lang="en-US" sz="1200" dirty="0"/>
-          </a:p>
-        </p:txBody>
-      </p:sp>
-      <p:sp>
-        <p:nvSpPr>
-          <p:cNvPr id="20" name="Shape 18"/>
           <p:cNvSpPr/>
           <p:nvPr/>
         </p:nvSpPr>
@@ -10039,7 +9604,7 @@
       </p:sp>
       <p:sp>
         <p:nvSpPr>
-          <p:cNvPr id="21" name="Text 19"/>
+          <p:cNvPr id="11" name="Text 9"/>
           <p:cNvSpPr/>
           <p:nvPr/>
         </p:nvSpPr>
@@ -10070,7 +9635,7 @@
                 <a:ea typeface="Arial" pitchFamily="34" charset="-122"/>
                 <a:cs typeface="Arial" pitchFamily="34" charset="-120"/>
               </a:rPr>
-              <a:t>Auswertung</a:t>
+              <a:t>Praxiszeit</a:t>
             </a:r>
             <a:endParaRPr lang="en-US" sz="1050" dirty="0"/>
           </a:p>
@@ -10078,7 +9643,7 @@
       </p:sp>
       <p:sp>
         <p:nvSpPr>
-          <p:cNvPr id="22" name="Text 20"/>
+          <p:cNvPr id="12" name="Text 10"/>
           <p:cNvSpPr/>
           <p:nvPr/>
         </p:nvSpPr>
@@ -10109,7 +9674,7 @@
                 <a:ea typeface="Arial" pitchFamily="34" charset="-122"/>
                 <a:cs typeface="Arial" pitchFamily="34" charset="-120"/>
               </a:rPr>
-              <a:t>19/20</a:t>
+              <a:t>19/21</a:t>
             </a:r>
             <a:endParaRPr lang="en-US" sz="1050" dirty="0"/>
           </a:p>
@@ -10200,7 +9765,7 @@
                 <a:ea typeface="Arial" pitchFamily="34" charset="-122"/>
                 <a:cs typeface="Arial" pitchFamily="34" charset="-120"/>
               </a:rPr>
-              <a:t>AUSBLICK</a:t>
+              <a:t>AUSWERTUNG · 20 MINUTEN</a:t>
             </a:r>
             <a:endParaRPr lang="en-US" sz="1150" dirty="0"/>
           </a:p>
@@ -10239,7 +9804,7 @@
                 <a:ea typeface="Arial" pitchFamily="34" charset="-122"/>
                 <a:cs typeface="Arial" pitchFamily="34" charset="-120"/>
               </a:rPr>
-              <a:t>Bis Mittwoch</a:t>
+              <a:t>Eure Funde</a:t>
             </a:r>
             <a:endParaRPr lang="en-US" sz="2600" dirty="0"/>
           </a:p>
@@ -10247,53 +9812,14 @@
       </p:sp>
       <p:sp>
         <p:nvSpPr>
-          <p:cNvPr id="5" name="Text 3"/>
-          <p:cNvSpPr/>
-          <p:nvPr/>
-        </p:nvSpPr>
-        <p:spPr>
-          <a:xfrm>
-            <a:off x="566928" y="1444752"/>
-            <a:ext cx="8010144" cy="438912"/>
-          </a:xfrm>
-          <a:prstGeom prst="rect">
-            <a:avLst/>
-          </a:prstGeom>
-          <a:noFill/>
-          <a:ln/>
-        </p:spPr>
-        <p:txBody>
-          <a:bodyPr wrap="square" lIns="0" tIns="0" rIns="0" bIns="0" rtlCol="0" anchor="t"/>
-          <a:lstStyle/>
-          <a:p>
-            <a:pPr indent="0" marL="0">
-              <a:buNone/>
-            </a:pPr>
-            <a:r>
-              <a:rPr lang="en-US" sz="1300" dirty="0">
-                <a:solidFill>
-                  <a:srgbClr val="5C6377"/>
-                </a:solidFill>
-                <a:latin typeface="Arial" pitchFamily="34" charset="0"/>
-                <a:ea typeface="Arial" pitchFamily="34" charset="-122"/>
-                <a:cs typeface="Arial" pitchFamily="34" charset="-120"/>
-              </a:rPr>
-              <a:t>Mittwoch funkt der ganze Kurs über einen gemeinsamen Broker und steuert damit echte Hardware beim Dozenten an.</a:t>
-            </a:r>
-            <a:endParaRPr lang="en-US" sz="1300" dirty="0"/>
-          </a:p>
-        </p:txBody>
-      </p:sp>
-      <p:sp>
-        <p:nvSpPr>
-          <p:cNvPr id="6" name="Shape 4"/>
-          <p:cNvSpPr/>
-          <p:nvPr/>
-        </p:nvSpPr>
-        <p:spPr>
-          <a:xfrm>
-            <a:off x="566928" y="1975104"/>
-            <a:ext cx="2523744" cy="1920240"/>
+          <p:cNvPr id="5" name="Shape 3"/>
+          <p:cNvSpPr/>
+          <p:nvPr/>
+        </p:nvSpPr>
+        <p:spPr>
+          <a:xfrm>
+            <a:off x="438912" y="1810512"/>
+            <a:ext cx="8266176" cy="365760"/>
           </a:xfrm>
           <a:prstGeom prst="rect">
             <a:avLst/>
@@ -10306,14 +9832,444 @@
       </p:sp>
       <p:sp>
         <p:nvSpPr>
-          <p:cNvPr id="7" name="Shape 5"/>
-          <p:cNvSpPr/>
-          <p:nvPr/>
-        </p:nvSpPr>
-        <p:spPr>
-          <a:xfrm>
-            <a:off x="566928" y="1975104"/>
-            <a:ext cx="41148" cy="1920240"/>
+          <p:cNvPr id="6" name="Text 4"/>
+          <p:cNvSpPr/>
+          <p:nvPr/>
+        </p:nvSpPr>
+        <p:spPr>
+          <a:xfrm>
+            <a:off x="566928" y="1810512"/>
+            <a:ext cx="548640" cy="365760"/>
+          </a:xfrm>
+          <a:prstGeom prst="rect">
+            <a:avLst/>
+          </a:prstGeom>
+          <a:noFill/>
+          <a:ln/>
+        </p:spPr>
+        <p:txBody>
+          <a:bodyPr wrap="square" lIns="0" tIns="0" rIns="0" bIns="0" rtlCol="0" anchor="ctr"/>
+          <a:lstStyle/>
+          <a:p>
+            <a:pPr indent="0" marL="0">
+              <a:buNone/>
+            </a:pPr>
+            <a:r>
+              <a:rPr lang="en-US" sz="1200" b="1" dirty="0">
+                <a:solidFill>
+                  <a:srgbClr val="0F7C86"/>
+                </a:solidFill>
+                <a:latin typeface="Courier New" pitchFamily="34" charset="0"/>
+                <a:ea typeface="Courier New" pitchFamily="34" charset="-122"/>
+                <a:cs typeface="Courier New" pitchFamily="34" charset="-120"/>
+              </a:rPr>
+              <a:t>1</a:t>
+            </a:r>
+            <a:endParaRPr lang="en-US" sz="1200" dirty="0"/>
+          </a:p>
+        </p:txBody>
+      </p:sp>
+      <p:sp>
+        <p:nvSpPr>
+          <p:cNvPr id="7" name="Text 5"/>
+          <p:cNvSpPr/>
+          <p:nvPr/>
+        </p:nvSpPr>
+        <p:spPr>
+          <a:xfrm>
+            <a:off x="1115568" y="1810512"/>
+            <a:ext cx="7461504" cy="365760"/>
+          </a:xfrm>
+          <a:prstGeom prst="rect">
+            <a:avLst/>
+          </a:prstGeom>
+          <a:noFill/>
+          <a:ln/>
+        </p:spPr>
+        <p:txBody>
+          <a:bodyPr wrap="square" lIns="0" tIns="0" rIns="0" bIns="0" rtlCol="0" anchor="ctr"/>
+          <a:lstStyle/>
+          <a:p>
+            <a:pPr indent="0" marL="0">
+              <a:buNone/>
+            </a:pPr>
+            <a:r>
+              <a:rPr lang="en-US" sz="1200" dirty="0">
+                <a:solidFill>
+                  <a:srgbClr val="434A63"/>
+                </a:solidFill>
+                <a:latin typeface="Arial" pitchFamily="34" charset="0"/>
+                <a:ea typeface="Arial" pitchFamily="34" charset="-122"/>
+                <a:cs typeface="Arial" pitchFamily="34" charset="-120"/>
+              </a:rPr>
+              <a:t>Die Halle stellt sich vor: die drei Gerätenamen und wer der Controller ist</a:t>
+            </a:r>
+            <a:endParaRPr lang="en-US" sz="1200" dirty="0"/>
+          </a:p>
+        </p:txBody>
+      </p:sp>
+      <p:sp>
+        <p:nvSpPr>
+          <p:cNvPr id="8" name="Text 6"/>
+          <p:cNvSpPr/>
+          <p:nvPr/>
+        </p:nvSpPr>
+        <p:spPr>
+          <a:xfrm>
+            <a:off x="566928" y="2176272"/>
+            <a:ext cx="548640" cy="365760"/>
+          </a:xfrm>
+          <a:prstGeom prst="rect">
+            <a:avLst/>
+          </a:prstGeom>
+          <a:noFill/>
+          <a:ln/>
+        </p:spPr>
+        <p:txBody>
+          <a:bodyPr wrap="square" lIns="0" tIns="0" rIns="0" bIns="0" rtlCol="0" anchor="ctr"/>
+          <a:lstStyle/>
+          <a:p>
+            <a:pPr indent="0" marL="0">
+              <a:buNone/>
+            </a:pPr>
+            <a:r>
+              <a:rPr lang="en-US" sz="1200" b="1" dirty="0">
+                <a:solidFill>
+                  <a:srgbClr val="0F7C86"/>
+                </a:solidFill>
+                <a:latin typeface="Courier New" pitchFamily="34" charset="0"/>
+                <a:ea typeface="Courier New" pitchFamily="34" charset="-122"/>
+                <a:cs typeface="Courier New" pitchFamily="34" charset="-120"/>
+              </a:rPr>
+              <a:t>2</a:t>
+            </a:r>
+            <a:endParaRPr lang="en-US" sz="1200" dirty="0"/>
+          </a:p>
+        </p:txBody>
+      </p:sp>
+      <p:sp>
+        <p:nvSpPr>
+          <p:cNvPr id="9" name="Text 7"/>
+          <p:cNvSpPr/>
+          <p:nvPr/>
+        </p:nvSpPr>
+        <p:spPr>
+          <a:xfrm>
+            <a:off x="1115568" y="2176272"/>
+            <a:ext cx="7461504" cy="365760"/>
+          </a:xfrm>
+          <a:prstGeom prst="rect">
+            <a:avLst/>
+          </a:prstGeom>
+          <a:noFill/>
+          <a:ln/>
+        </p:spPr>
+        <p:txBody>
+          <a:bodyPr wrap="square" lIns="0" tIns="0" rIns="0" bIns="0" rtlCol="0" anchor="ctr"/>
+          <a:lstStyle/>
+          <a:p>
+            <a:pPr indent="0" marL="0">
+              <a:buNone/>
+            </a:pPr>
+            <a:r>
+              <a:rPr lang="en-US" sz="1200" dirty="0">
+                <a:solidFill>
+                  <a:srgbClr val="434A63"/>
+                </a:solidFill>
+                <a:latin typeface="Arial" pitchFamily="34" charset="0"/>
+                <a:ea typeface="Arial" pitchFamily="34" charset="-122"/>
+                <a:cs typeface="Arial" pitchFamily="34" charset="-120"/>
+              </a:rPr>
+              <a:t>Der 32-Millisekunden-Takt: Woran erkennt man Echtzeit im Mitschnitt?</a:t>
+            </a:r>
+            <a:endParaRPr lang="en-US" sz="1200" dirty="0"/>
+          </a:p>
+        </p:txBody>
+      </p:sp>
+      <p:sp>
+        <p:nvSpPr>
+          <p:cNvPr id="10" name="Shape 8"/>
+          <p:cNvSpPr/>
+          <p:nvPr/>
+        </p:nvSpPr>
+        <p:spPr>
+          <a:xfrm>
+            <a:off x="438912" y="2542032"/>
+            <a:ext cx="8266176" cy="365760"/>
+          </a:xfrm>
+          <a:prstGeom prst="rect">
+            <a:avLst/>
+          </a:prstGeom>
+          <a:solidFill>
+            <a:srgbClr val="F5F6FC"/>
+          </a:solidFill>
+          <a:ln/>
+        </p:spPr>
+      </p:sp>
+      <p:sp>
+        <p:nvSpPr>
+          <p:cNvPr id="11" name="Text 9"/>
+          <p:cNvSpPr/>
+          <p:nvPr/>
+        </p:nvSpPr>
+        <p:spPr>
+          <a:xfrm>
+            <a:off x="566928" y="2542032"/>
+            <a:ext cx="548640" cy="365760"/>
+          </a:xfrm>
+          <a:prstGeom prst="rect">
+            <a:avLst/>
+          </a:prstGeom>
+          <a:noFill/>
+          <a:ln/>
+        </p:spPr>
+        <p:txBody>
+          <a:bodyPr wrap="square" lIns="0" tIns="0" rIns="0" bIns="0" rtlCol="0" anchor="ctr"/>
+          <a:lstStyle/>
+          <a:p>
+            <a:pPr indent="0" marL="0">
+              <a:buNone/>
+            </a:pPr>
+            <a:r>
+              <a:rPr lang="en-US" sz="1200" b="1" dirty="0">
+                <a:solidFill>
+                  <a:srgbClr val="0F7C86"/>
+                </a:solidFill>
+                <a:latin typeface="Courier New" pitchFamily="34" charset="0"/>
+                <a:ea typeface="Courier New" pitchFamily="34" charset="-122"/>
+                <a:cs typeface="Courier New" pitchFamily="34" charset="-120"/>
+              </a:rPr>
+              <a:t>3</a:t>
+            </a:r>
+            <a:endParaRPr lang="en-US" sz="1200" dirty="0"/>
+          </a:p>
+        </p:txBody>
+      </p:sp>
+      <p:sp>
+        <p:nvSpPr>
+          <p:cNvPr id="12" name="Text 10"/>
+          <p:cNvSpPr/>
+          <p:nvPr/>
+        </p:nvSpPr>
+        <p:spPr>
+          <a:xfrm>
+            <a:off x="1115568" y="2542032"/>
+            <a:ext cx="7461504" cy="365760"/>
+          </a:xfrm>
+          <a:prstGeom prst="rect">
+            <a:avLst/>
+          </a:prstGeom>
+          <a:noFill/>
+          <a:ln/>
+        </p:spPr>
+        <p:txBody>
+          <a:bodyPr wrap="square" lIns="0" tIns="0" rIns="0" bIns="0" rtlCol="0" anchor="ctr"/>
+          <a:lstStyle/>
+          <a:p>
+            <a:pPr indent="0" marL="0">
+              <a:buNone/>
+            </a:pPr>
+            <a:r>
+              <a:rPr lang="en-US" sz="1200" dirty="0">
+                <a:solidFill>
+                  <a:srgbClr val="434A63"/>
+                </a:solidFill>
+                <a:latin typeface="Arial" pitchFamily="34" charset="0"/>
+                <a:ea typeface="Arial" pitchFamily="34" charset="-122"/>
+                <a:cs typeface="Arial" pitchFamily="34" charset="-120"/>
+              </a:rPr>
+              <a:t>Die Klartext-Frage: Wer kann das MQTT-Topic des Ofens mitlesen?</a:t>
+            </a:r>
+            <a:endParaRPr lang="en-US" sz="1200" dirty="0"/>
+          </a:p>
+        </p:txBody>
+      </p:sp>
+      <p:sp>
+        <p:nvSpPr>
+          <p:cNvPr id="13" name="Text 11"/>
+          <p:cNvSpPr/>
+          <p:nvPr/>
+        </p:nvSpPr>
+        <p:spPr>
+          <a:xfrm>
+            <a:off x="566928" y="2907792"/>
+            <a:ext cx="548640" cy="365760"/>
+          </a:xfrm>
+          <a:prstGeom prst="rect">
+            <a:avLst/>
+          </a:prstGeom>
+          <a:noFill/>
+          <a:ln/>
+        </p:spPr>
+        <p:txBody>
+          <a:bodyPr wrap="square" lIns="0" tIns="0" rIns="0" bIns="0" rtlCol="0" anchor="ctr"/>
+          <a:lstStyle/>
+          <a:p>
+            <a:pPr indent="0" marL="0">
+              <a:buNone/>
+            </a:pPr>
+            <a:r>
+              <a:rPr lang="en-US" sz="1200" b="1" dirty="0">
+                <a:solidFill>
+                  <a:srgbClr val="0F7C86"/>
+                </a:solidFill>
+                <a:latin typeface="Courier New" pitchFamily="34" charset="0"/>
+                <a:ea typeface="Courier New" pitchFamily="34" charset="-122"/>
+                <a:cs typeface="Courier New" pitchFamily="34" charset="-120"/>
+              </a:rPr>
+              <a:t>4</a:t>
+            </a:r>
+            <a:endParaRPr lang="en-US" sz="1200" dirty="0"/>
+          </a:p>
+        </p:txBody>
+      </p:sp>
+      <p:sp>
+        <p:nvSpPr>
+          <p:cNvPr id="14" name="Text 12"/>
+          <p:cNvSpPr/>
+          <p:nvPr/>
+        </p:nvSpPr>
+        <p:spPr>
+          <a:xfrm>
+            <a:off x="1115568" y="2907792"/>
+            <a:ext cx="7461504" cy="365760"/>
+          </a:xfrm>
+          <a:prstGeom prst="rect">
+            <a:avLst/>
+          </a:prstGeom>
+          <a:noFill/>
+          <a:ln/>
+        </p:spPr>
+        <p:txBody>
+          <a:bodyPr wrap="square" lIns="0" tIns="0" rIns="0" bIns="0" rtlCol="0" anchor="ctr"/>
+          <a:lstStyle/>
+          <a:p>
+            <a:pPr indent="0" marL="0">
+              <a:buNone/>
+            </a:pPr>
+            <a:r>
+              <a:rPr lang="en-US" sz="1200" dirty="0">
+                <a:solidFill>
+                  <a:srgbClr val="434A63"/>
+                </a:solidFill>
+                <a:latin typeface="Arial" pitchFamily="34" charset="0"/>
+                <a:ea typeface="Arial" pitchFamily="34" charset="-122"/>
+                <a:cs typeface="Arial" pitchFamily="34" charset="-120"/>
+              </a:rPr>
+              <a:t>Euer eigener Broker: Was kam an, als ihr mit # abonniert habt? Warum?</a:t>
+            </a:r>
+            <a:endParaRPr lang="en-US" sz="1200" dirty="0"/>
+          </a:p>
+        </p:txBody>
+      </p:sp>
+      <p:sp>
+        <p:nvSpPr>
+          <p:cNvPr id="15" name="Shape 13"/>
+          <p:cNvSpPr/>
+          <p:nvPr/>
+        </p:nvSpPr>
+        <p:spPr>
+          <a:xfrm>
+            <a:off x="438912" y="3273552"/>
+            <a:ext cx="8266176" cy="365760"/>
+          </a:xfrm>
+          <a:prstGeom prst="rect">
+            <a:avLst/>
+          </a:prstGeom>
+          <a:solidFill>
+            <a:srgbClr val="F5F6FC"/>
+          </a:solidFill>
+          <a:ln/>
+        </p:spPr>
+      </p:sp>
+      <p:sp>
+        <p:nvSpPr>
+          <p:cNvPr id="16" name="Text 14"/>
+          <p:cNvSpPr/>
+          <p:nvPr/>
+        </p:nvSpPr>
+        <p:spPr>
+          <a:xfrm>
+            <a:off x="566928" y="3273552"/>
+            <a:ext cx="548640" cy="365760"/>
+          </a:xfrm>
+          <a:prstGeom prst="rect">
+            <a:avLst/>
+          </a:prstGeom>
+          <a:noFill/>
+          <a:ln/>
+        </p:spPr>
+        <p:txBody>
+          <a:bodyPr wrap="square" lIns="0" tIns="0" rIns="0" bIns="0" rtlCol="0" anchor="ctr"/>
+          <a:lstStyle/>
+          <a:p>
+            <a:pPr indent="0" marL="0">
+              <a:buNone/>
+            </a:pPr>
+            <a:r>
+              <a:rPr lang="en-US" sz="1200" b="1" dirty="0">
+                <a:solidFill>
+                  <a:srgbClr val="0F7C86"/>
+                </a:solidFill>
+                <a:latin typeface="Courier New" pitchFamily="34" charset="0"/>
+                <a:ea typeface="Courier New" pitchFamily="34" charset="-122"/>
+                <a:cs typeface="Courier New" pitchFamily="34" charset="-120"/>
+              </a:rPr>
+              <a:t>5</a:t>
+            </a:r>
+            <a:endParaRPr lang="en-US" sz="1200" dirty="0"/>
+          </a:p>
+        </p:txBody>
+      </p:sp>
+      <p:sp>
+        <p:nvSpPr>
+          <p:cNvPr id="17" name="Text 15"/>
+          <p:cNvSpPr/>
+          <p:nvPr/>
+        </p:nvSpPr>
+        <p:spPr>
+          <a:xfrm>
+            <a:off x="1115568" y="3273552"/>
+            <a:ext cx="7461504" cy="365760"/>
+          </a:xfrm>
+          <a:prstGeom prst="rect">
+            <a:avLst/>
+          </a:prstGeom>
+          <a:noFill/>
+          <a:ln/>
+        </p:spPr>
+        <p:txBody>
+          <a:bodyPr wrap="square" lIns="0" tIns="0" rIns="0" bIns="0" rtlCol="0" anchor="ctr"/>
+          <a:lstStyle/>
+          <a:p>
+            <a:pPr indent="0" marL="0">
+              <a:buNone/>
+            </a:pPr>
+            <a:r>
+              <a:rPr lang="en-US" sz="1200" dirty="0">
+                <a:solidFill>
+                  <a:srgbClr val="434A63"/>
+                </a:solidFill>
+                <a:latin typeface="Arial" pitchFamily="34" charset="0"/>
+                <a:ea typeface="Arial" pitchFamily="34" charset="-122"/>
+                <a:cs typeface="Arial" pitchFamily="34" charset="-120"/>
+              </a:rPr>
+              <a:t>Was fehlt eurem Broker für eine echte Halle? Anmeldung, TLS, Rechte je Topic</a:t>
+            </a:r>
+            <a:endParaRPr lang="en-US" sz="1200" dirty="0"/>
+          </a:p>
+        </p:txBody>
+      </p:sp>
+      <p:sp>
+        <p:nvSpPr>
+          <p:cNvPr id="18" name="Shape 16"/>
+          <p:cNvSpPr/>
+          <p:nvPr/>
+        </p:nvSpPr>
+        <p:spPr>
+          <a:xfrm>
+            <a:off x="566928" y="4069080"/>
+            <a:ext cx="32004" cy="256032"/>
           </a:xfrm>
           <a:prstGeom prst="rect">
             <a:avLst/>
@@ -10326,72 +10282,30 @@
       </p:sp>
       <p:sp>
         <p:nvSpPr>
-          <p:cNvPr id="8" name="Text 6"/>
-          <p:cNvSpPr/>
-          <p:nvPr/>
-        </p:nvSpPr>
-        <p:spPr>
-          <a:xfrm>
-            <a:off x="804672" y="2121408"/>
-            <a:ext cx="2121408" cy="256032"/>
-          </a:xfrm>
-          <a:prstGeom prst="rect">
-            <a:avLst/>
-          </a:prstGeom>
-          <a:noFill/>
-          <a:ln/>
-        </p:spPr>
-        <p:txBody>
-          <a:bodyPr wrap="square" lIns="0" tIns="0" rIns="0" bIns="0" rtlCol="0" anchor="t"/>
-          <a:lstStyle/>
-          <a:p>
-            <a:pPr indent="0" marL="0">
-              <a:buNone/>
-            </a:pPr>
-            <a:r>
-              <a:rPr lang="en-US" sz="1300" b="1" dirty="0">
-                <a:solidFill>
-                  <a:srgbClr val="272E52"/>
-                </a:solidFill>
-                <a:latin typeface="Arial" pitchFamily="34" charset="0"/>
-                <a:ea typeface="Arial" pitchFamily="34" charset="-122"/>
-                <a:cs typeface="Arial" pitchFamily="34" charset="-120"/>
-              </a:rPr>
-              <a:t>Ein Broker für alle</a:t>
-            </a:r>
-            <a:endParaRPr lang="en-US" sz="1300" dirty="0"/>
-          </a:p>
-        </p:txBody>
-      </p:sp>
-      <p:sp>
-        <p:nvSpPr>
-          <p:cNvPr id="9" name="Text 7"/>
-          <p:cNvSpPr/>
-          <p:nvPr/>
-        </p:nvSpPr>
-        <p:spPr>
-          <a:xfrm>
-            <a:off x="804672" y="2423160"/>
-            <a:ext cx="2121408" cy="1353312"/>
-          </a:xfrm>
-          <a:prstGeom prst="rect">
-            <a:avLst/>
-          </a:prstGeom>
-          <a:noFill/>
-          <a:ln/>
-        </p:spPr>
-        <p:txBody>
-          <a:bodyPr wrap="square" lIns="0" tIns="0" rIns="0" bIns="0" rtlCol="0" anchor="t"/>
-          <a:lstStyle/>
-          <a:p>
-            <a:pPr indent="0" marL="0">
-              <a:lnSpc>
-                <a:spcPct val="92000"/>
-              </a:lnSpc>
-              <a:buNone/>
-            </a:pPr>
-            <a:r>
-              <a:rPr lang="en-US" sz="1150" dirty="0">
+          <p:cNvPr id="19" name="Text 17"/>
+          <p:cNvSpPr/>
+          <p:nvPr/>
+        </p:nvSpPr>
+        <p:spPr>
+          <a:xfrm>
+            <a:off x="749808" y="4023360"/>
+            <a:ext cx="7827264" cy="402336"/>
+          </a:xfrm>
+          <a:prstGeom prst="rect">
+            <a:avLst/>
+          </a:prstGeom>
+          <a:noFill/>
+          <a:ln/>
+        </p:spPr>
+        <p:txBody>
+          <a:bodyPr wrap="square" lIns="0" tIns="0" rIns="0" bIns="0" rtlCol="0" anchor="ctr"/>
+          <a:lstStyle/>
+          <a:p>
+            <a:pPr indent="0" marL="0">
+              <a:buNone/>
+            </a:pPr>
+            <a:r>
+              <a:rPr lang="en-US" sz="1200" b="1" dirty="0">
                 <a:solidFill>
                   <a:srgbClr val="434A63"/>
                 </a:solidFill>
@@ -10399,308 +10313,7 @@
                 <a:ea typeface="Arial" pitchFamily="34" charset="-122"/>
                 <a:cs typeface="Arial" pitchFamily="34" charset="-120"/>
               </a:rPr>
-              <a:t>Statt jeder für sich sendet der ganze Kurs an denselben Broker. Ihr seht die Nachrichten der anderen live.</a:t>
-            </a:r>
-            <a:endParaRPr lang="en-US" sz="1150" dirty="0"/>
-          </a:p>
-        </p:txBody>
-      </p:sp>
-      <p:sp>
-        <p:nvSpPr>
-          <p:cNvPr id="10" name="Shape 8"/>
-          <p:cNvSpPr/>
-          <p:nvPr/>
-        </p:nvSpPr>
-        <p:spPr>
-          <a:xfrm>
-            <a:off x="3310128" y="1975104"/>
-            <a:ext cx="2523744" cy="1920240"/>
-          </a:xfrm>
-          <a:prstGeom prst="rect">
-            <a:avLst/>
-          </a:prstGeom>
-          <a:solidFill>
-            <a:srgbClr val="F5F6FC"/>
-          </a:solidFill>
-          <a:ln/>
-        </p:spPr>
-      </p:sp>
-      <p:sp>
-        <p:nvSpPr>
-          <p:cNvPr id="11" name="Shape 9"/>
-          <p:cNvSpPr/>
-          <p:nvPr/>
-        </p:nvSpPr>
-        <p:spPr>
-          <a:xfrm>
-            <a:off x="3310128" y="1975104"/>
-            <a:ext cx="41148" cy="1920240"/>
-          </a:xfrm>
-          <a:prstGeom prst="rect">
-            <a:avLst/>
-          </a:prstGeom>
-          <a:solidFill>
-            <a:srgbClr val="0F7C86"/>
-          </a:solidFill>
-          <a:ln/>
-        </p:spPr>
-      </p:sp>
-      <p:sp>
-        <p:nvSpPr>
-          <p:cNvPr id="12" name="Text 10"/>
-          <p:cNvSpPr/>
-          <p:nvPr/>
-        </p:nvSpPr>
-        <p:spPr>
-          <a:xfrm>
-            <a:off x="3547872" y="2121408"/>
-            <a:ext cx="2121408" cy="256032"/>
-          </a:xfrm>
-          <a:prstGeom prst="rect">
-            <a:avLst/>
-          </a:prstGeom>
-          <a:noFill/>
-          <a:ln/>
-        </p:spPr>
-        <p:txBody>
-          <a:bodyPr wrap="square" lIns="0" tIns="0" rIns="0" bIns="0" rtlCol="0" anchor="t"/>
-          <a:lstStyle/>
-          <a:p>
-            <a:pPr indent="0" marL="0">
-              <a:buNone/>
-            </a:pPr>
-            <a:r>
-              <a:rPr lang="en-US" sz="1300" b="1" dirty="0">
-                <a:solidFill>
-                  <a:srgbClr val="272E52"/>
-                </a:solidFill>
-                <a:latin typeface="Arial" pitchFamily="34" charset="0"/>
-                <a:ea typeface="Arial" pitchFamily="34" charset="-122"/>
-                <a:cs typeface="Arial" pitchFamily="34" charset="-120"/>
-              </a:rPr>
-              <a:t>Diesmal abgesichert</a:t>
-            </a:r>
-            <a:endParaRPr lang="en-US" sz="1300" dirty="0"/>
-          </a:p>
-        </p:txBody>
-      </p:sp>
-      <p:sp>
-        <p:nvSpPr>
-          <p:cNvPr id="13" name="Text 11"/>
-          <p:cNvSpPr/>
-          <p:nvPr/>
-        </p:nvSpPr>
-        <p:spPr>
-          <a:xfrm>
-            <a:off x="3547872" y="2423160"/>
-            <a:ext cx="2121408" cy="1353312"/>
-          </a:xfrm>
-          <a:prstGeom prst="rect">
-            <a:avLst/>
-          </a:prstGeom>
-          <a:noFill/>
-          <a:ln/>
-        </p:spPr>
-        <p:txBody>
-          <a:bodyPr wrap="square" lIns="0" tIns="0" rIns="0" bIns="0" rtlCol="0" anchor="t"/>
-          <a:lstStyle/>
-          <a:p>
-            <a:pPr indent="0" marL="0">
-              <a:lnSpc>
-                <a:spcPct val="92000"/>
-              </a:lnSpc>
-              <a:buNone/>
-            </a:pPr>
-            <a:r>
-              <a:rPr lang="en-US" sz="1150" dirty="0">
-                <a:solidFill>
-                  <a:srgbClr val="434A63"/>
-                </a:solidFill>
-                <a:latin typeface="Arial" pitchFamily="34" charset="0"/>
-                <a:ea typeface="Arial" pitchFamily="34" charset="-122"/>
-                <a:cs typeface="Arial" pitchFamily="34" charset="-120"/>
-              </a:rPr>
-              <a:t>Mit Zugangsdaten und Verschlüsselung (TLS), genau die Antwort auf die Klartext-Frage von heute.</a:t>
-            </a:r>
-            <a:endParaRPr lang="en-US" sz="1150" dirty="0"/>
-          </a:p>
-        </p:txBody>
-      </p:sp>
-      <p:sp>
-        <p:nvSpPr>
-          <p:cNvPr id="14" name="Shape 12"/>
-          <p:cNvSpPr/>
-          <p:nvPr/>
-        </p:nvSpPr>
-        <p:spPr>
-          <a:xfrm>
-            <a:off x="6053328" y="1975104"/>
-            <a:ext cx="2523744" cy="1920240"/>
-          </a:xfrm>
-          <a:prstGeom prst="rect">
-            <a:avLst/>
-          </a:prstGeom>
-          <a:solidFill>
-            <a:srgbClr val="F5F6FC"/>
-          </a:solidFill>
-          <a:ln/>
-        </p:spPr>
-      </p:sp>
-      <p:sp>
-        <p:nvSpPr>
-          <p:cNvPr id="15" name="Shape 13"/>
-          <p:cNvSpPr/>
-          <p:nvPr/>
-        </p:nvSpPr>
-        <p:spPr>
-          <a:xfrm>
-            <a:off x="6053328" y="1975104"/>
-            <a:ext cx="41148" cy="1920240"/>
-          </a:xfrm>
-          <a:prstGeom prst="rect">
-            <a:avLst/>
-          </a:prstGeom>
-          <a:solidFill>
-            <a:srgbClr val="0F7C86"/>
-          </a:solidFill>
-          <a:ln/>
-        </p:spPr>
-      </p:sp>
-      <p:sp>
-        <p:nvSpPr>
-          <p:cNvPr id="16" name="Text 14"/>
-          <p:cNvSpPr/>
-          <p:nvPr/>
-        </p:nvSpPr>
-        <p:spPr>
-          <a:xfrm>
-            <a:off x="6291072" y="2121408"/>
-            <a:ext cx="2121408" cy="256032"/>
-          </a:xfrm>
-          <a:prstGeom prst="rect">
-            <a:avLst/>
-          </a:prstGeom>
-          <a:noFill/>
-          <a:ln/>
-        </p:spPr>
-        <p:txBody>
-          <a:bodyPr wrap="square" lIns="0" tIns="0" rIns="0" bIns="0" rtlCol="0" anchor="t"/>
-          <a:lstStyle/>
-          <a:p>
-            <a:pPr indent="0" marL="0">
-              <a:buNone/>
-            </a:pPr>
-            <a:r>
-              <a:rPr lang="en-US" sz="1300" b="1" dirty="0">
-                <a:solidFill>
-                  <a:srgbClr val="272E52"/>
-                </a:solidFill>
-                <a:latin typeface="Arial" pitchFamily="34" charset="0"/>
-                <a:ea typeface="Arial" pitchFamily="34" charset="-122"/>
-                <a:cs typeface="Arial" pitchFamily="34" charset="-120"/>
-              </a:rPr>
-              <a:t>Nichts vorbereiten</a:t>
-            </a:r>
-            <a:endParaRPr lang="en-US" sz="1300" dirty="0"/>
-          </a:p>
-        </p:txBody>
-      </p:sp>
-      <p:sp>
-        <p:nvSpPr>
-          <p:cNvPr id="17" name="Text 15"/>
-          <p:cNvSpPr/>
-          <p:nvPr/>
-        </p:nvSpPr>
-        <p:spPr>
-          <a:xfrm>
-            <a:off x="6291072" y="2423160"/>
-            <a:ext cx="2121408" cy="1353312"/>
-          </a:xfrm>
-          <a:prstGeom prst="rect">
-            <a:avLst/>
-          </a:prstGeom>
-          <a:noFill/>
-          <a:ln/>
-        </p:spPr>
-        <p:txBody>
-          <a:bodyPr wrap="square" lIns="0" tIns="0" rIns="0" bIns="0" rtlCol="0" anchor="t"/>
-          <a:lstStyle/>
-          <a:p>
-            <a:pPr indent="0" marL="0">
-              <a:lnSpc>
-                <a:spcPct val="92000"/>
-              </a:lnSpc>
-              <a:buNone/>
-            </a:pPr>
-            <a:r>
-              <a:rPr lang="en-US" sz="1150" dirty="0">
-                <a:solidFill>
-                  <a:srgbClr val="434A63"/>
-                </a:solidFill>
-                <a:latin typeface="Arial" pitchFamily="34" charset="0"/>
-                <a:ea typeface="Arial" pitchFamily="34" charset="-122"/>
-                <a:cs typeface="Arial" pitchFamily="34" charset="-120"/>
-              </a:rPr>
-              <a:t>Ein Browser genügt. Wer mag, spielt die Übung von heute mit eigenen Topics weiter.</a:t>
-            </a:r>
-            <a:endParaRPr lang="en-US" sz="1150" dirty="0"/>
-          </a:p>
-        </p:txBody>
-      </p:sp>
-      <p:sp>
-        <p:nvSpPr>
-          <p:cNvPr id="18" name="Shape 16"/>
-          <p:cNvSpPr/>
-          <p:nvPr/>
-        </p:nvSpPr>
-        <p:spPr>
-          <a:xfrm>
-            <a:off x="566928" y="4160520"/>
-            <a:ext cx="32004" cy="256032"/>
-          </a:xfrm>
-          <a:prstGeom prst="rect">
-            <a:avLst/>
-          </a:prstGeom>
-          <a:solidFill>
-            <a:srgbClr val="0F7C86"/>
-          </a:solidFill>
-          <a:ln/>
-        </p:spPr>
-      </p:sp>
-      <p:sp>
-        <p:nvSpPr>
-          <p:cNvPr id="19" name="Text 17"/>
-          <p:cNvSpPr/>
-          <p:nvPr/>
-        </p:nvSpPr>
-        <p:spPr>
-          <a:xfrm>
-            <a:off x="749808" y="4114800"/>
-            <a:ext cx="7827264" cy="402336"/>
-          </a:xfrm>
-          <a:prstGeom prst="rect">
-            <a:avLst/>
-          </a:prstGeom>
-          <a:noFill/>
-          <a:ln/>
-        </p:spPr>
-        <p:txBody>
-          <a:bodyPr wrap="square" lIns="0" tIns="0" rIns="0" bIns="0" rtlCol="0" anchor="ctr"/>
-          <a:lstStyle/>
-          <a:p>
-            <a:pPr indent="0" marL="0">
-              <a:buNone/>
-            </a:pPr>
-            <a:r>
-              <a:rPr lang="en-US" sz="1200" b="1" dirty="0">
-                <a:solidFill>
-                  <a:srgbClr val="434A63"/>
-                </a:solidFill>
-                <a:latin typeface="Arial" pitchFamily="34" charset="0"/>
-                <a:ea typeface="Arial" pitchFamily="34" charset="-122"/>
-                <a:cs typeface="Arial" pitchFamily="34" charset="-120"/>
-              </a:rPr>
-              <a:t>Nächster Termin: Mittwoch, 30. September um 18:00 Uhr, MQTT live.</a:t>
+              <a:t>Die Antwort auf Frage 5 ist der Kurs-Broker vom Mittwoch: mit Zugangsdaten, Verschlüsselung und echter Hardware dahinter.</a:t>
             </a:r>
             <a:endParaRPr lang="en-US" sz="1200" dirty="0"/>
           </a:p>
@@ -10762,7 +10375,7 @@
                 <a:ea typeface="Arial" pitchFamily="34" charset="-122"/>
                 <a:cs typeface="Arial" pitchFamily="34" charset="-120"/>
               </a:rPr>
-              <a:t>Abschluss</a:t>
+              <a:t>Auswertung</a:t>
             </a:r>
             <a:endParaRPr lang="en-US" sz="1050" dirty="0"/>
           </a:p>
@@ -10801,7 +10414,7 @@
                 <a:ea typeface="Arial" pitchFamily="34" charset="-122"/>
                 <a:cs typeface="Arial" pitchFamily="34" charset="-120"/>
               </a:rPr>
-              <a:t>20/20</a:t>
+              <a:t>20/21</a:t>
             </a:r>
             <a:endParaRPr lang="en-US" sz="1050" dirty="0"/>
           </a:p>
@@ -10818,6 +10431,698 @@
 <file path=ppt/slides/slide25.xml><?xml version="1.0" encoding="utf-8"?>
 <p:sld xmlns:a="http://schemas.openxmlformats.org/drawingml/2006/main" xmlns:r="http://schemas.openxmlformats.org/officeDocument/2006/relationships" xmlns:p="http://schemas.openxmlformats.org/presentationml/2006/main">
   <p:cSld name="Slide 25">
+    <p:bg>
+      <p:bgPr>
+        <a:solidFill>
+          <a:srgbClr val="FFFFFF"/>
+        </a:solidFill>
+      </p:bgPr>
+    </p:bg>
+    <p:spTree>
+      <p:nvGrpSpPr>
+        <p:cNvPr id="1" name=""/>
+        <p:cNvGrpSpPr/>
+        <p:nvPr/>
+      </p:nvGrpSpPr>
+      <p:grpSpPr>
+        <a:xfrm>
+          <a:off x="0" y="0"/>
+          <a:ext cx="0" cy="0"/>
+          <a:chOff x="0" y="0"/>
+          <a:chExt cx="0" cy="0"/>
+        </a:xfrm>
+      </p:grpSpPr>
+      <p:sp>
+        <p:nvSpPr>
+          <p:cNvPr id="2" name="Shape 0"/>
+          <p:cNvSpPr/>
+          <p:nvPr/>
+        </p:nvSpPr>
+        <p:spPr>
+          <a:xfrm>
+            <a:off x="566928" y="201168"/>
+            <a:ext cx="475488" cy="50292"/>
+          </a:xfrm>
+          <a:prstGeom prst="rect">
+            <a:avLst/>
+          </a:prstGeom>
+          <a:solidFill>
+            <a:srgbClr val="0F7C86"/>
+          </a:solidFill>
+          <a:ln/>
+        </p:spPr>
+      </p:sp>
+      <p:sp>
+        <p:nvSpPr>
+          <p:cNvPr id="3" name="Text 1"/>
+          <p:cNvSpPr/>
+          <p:nvPr/>
+        </p:nvSpPr>
+        <p:spPr>
+          <a:xfrm>
+            <a:off x="566928" y="384048"/>
+            <a:ext cx="8010144" cy="237744"/>
+          </a:xfrm>
+          <a:prstGeom prst="rect">
+            <a:avLst/>
+          </a:prstGeom>
+          <a:noFill/>
+          <a:ln/>
+        </p:spPr>
+        <p:txBody>
+          <a:bodyPr wrap="square" lIns="0" tIns="0" rIns="0" bIns="0" rtlCol="0" anchor="ctr"/>
+          <a:lstStyle/>
+          <a:p>
+            <a:pPr indent="0" marL="0">
+              <a:buNone/>
+            </a:pPr>
+            <a:r>
+              <a:rPr lang="en-US" sz="1150" b="1" spc="180" kern="0" dirty="0">
+                <a:solidFill>
+                  <a:srgbClr val="0F7C86"/>
+                </a:solidFill>
+                <a:latin typeface="Arial" pitchFamily="34" charset="0"/>
+                <a:ea typeface="Arial" pitchFamily="34" charset="-122"/>
+                <a:cs typeface="Arial" pitchFamily="34" charset="-120"/>
+              </a:rPr>
+              <a:t>AUSBLICK</a:t>
+            </a:r>
+            <a:endParaRPr lang="en-US" sz="1150" dirty="0"/>
+          </a:p>
+        </p:txBody>
+      </p:sp>
+      <p:sp>
+        <p:nvSpPr>
+          <p:cNvPr id="4" name="Text 2"/>
+          <p:cNvSpPr/>
+          <p:nvPr/>
+        </p:nvSpPr>
+        <p:spPr>
+          <a:xfrm>
+            <a:off x="566928" y="731520"/>
+            <a:ext cx="8010144" cy="603504"/>
+          </a:xfrm>
+          <a:prstGeom prst="rect">
+            <a:avLst/>
+          </a:prstGeom>
+          <a:noFill/>
+          <a:ln/>
+        </p:spPr>
+        <p:txBody>
+          <a:bodyPr wrap="square" lIns="0" tIns="0" rIns="0" bIns="0" rtlCol="0" anchor="t"/>
+          <a:lstStyle/>
+          <a:p>
+            <a:pPr indent="0" marL="0">
+              <a:buNone/>
+            </a:pPr>
+            <a:r>
+              <a:rPr lang="en-US" sz="2600" b="1" dirty="0">
+                <a:solidFill>
+                  <a:srgbClr val="272E52"/>
+                </a:solidFill>
+                <a:latin typeface="Arial" pitchFamily="34" charset="0"/>
+                <a:ea typeface="Arial" pitchFamily="34" charset="-122"/>
+                <a:cs typeface="Arial" pitchFamily="34" charset="-120"/>
+              </a:rPr>
+              <a:t>Bis Mittwoch</a:t>
+            </a:r>
+            <a:endParaRPr lang="en-US" sz="2600" dirty="0"/>
+          </a:p>
+        </p:txBody>
+      </p:sp>
+      <p:sp>
+        <p:nvSpPr>
+          <p:cNvPr id="5" name="Text 3"/>
+          <p:cNvSpPr/>
+          <p:nvPr/>
+        </p:nvSpPr>
+        <p:spPr>
+          <a:xfrm>
+            <a:off x="566928" y="1444752"/>
+            <a:ext cx="8010144" cy="438912"/>
+          </a:xfrm>
+          <a:prstGeom prst="rect">
+            <a:avLst/>
+          </a:prstGeom>
+          <a:noFill/>
+          <a:ln/>
+        </p:spPr>
+        <p:txBody>
+          <a:bodyPr wrap="square" lIns="0" tIns="0" rIns="0" bIns="0" rtlCol="0" anchor="t"/>
+          <a:lstStyle/>
+          <a:p>
+            <a:pPr indent="0" marL="0">
+              <a:buNone/>
+            </a:pPr>
+            <a:r>
+              <a:rPr lang="en-US" sz="1300" dirty="0">
+                <a:solidFill>
+                  <a:srgbClr val="5C6377"/>
+                </a:solidFill>
+                <a:latin typeface="Arial" pitchFamily="34" charset="0"/>
+                <a:ea typeface="Arial" pitchFamily="34" charset="-122"/>
+                <a:cs typeface="Arial" pitchFamily="34" charset="-120"/>
+              </a:rPr>
+              <a:t>Mittwoch funkt der ganze Kurs über einen gemeinsamen Broker und steuert damit echte Hardware beim Dozenten an.</a:t>
+            </a:r>
+            <a:endParaRPr lang="en-US" sz="1300" dirty="0"/>
+          </a:p>
+        </p:txBody>
+      </p:sp>
+      <p:sp>
+        <p:nvSpPr>
+          <p:cNvPr id="6" name="Shape 4"/>
+          <p:cNvSpPr/>
+          <p:nvPr/>
+        </p:nvSpPr>
+        <p:spPr>
+          <a:xfrm>
+            <a:off x="566928" y="1975104"/>
+            <a:ext cx="2523744" cy="1920240"/>
+          </a:xfrm>
+          <a:prstGeom prst="rect">
+            <a:avLst/>
+          </a:prstGeom>
+          <a:solidFill>
+            <a:srgbClr val="F5F6FC"/>
+          </a:solidFill>
+          <a:ln/>
+        </p:spPr>
+      </p:sp>
+      <p:sp>
+        <p:nvSpPr>
+          <p:cNvPr id="7" name="Shape 5"/>
+          <p:cNvSpPr/>
+          <p:nvPr/>
+        </p:nvSpPr>
+        <p:spPr>
+          <a:xfrm>
+            <a:off x="566928" y="1975104"/>
+            <a:ext cx="41148" cy="1920240"/>
+          </a:xfrm>
+          <a:prstGeom prst="rect">
+            <a:avLst/>
+          </a:prstGeom>
+          <a:solidFill>
+            <a:srgbClr val="0F7C86"/>
+          </a:solidFill>
+          <a:ln/>
+        </p:spPr>
+      </p:sp>
+      <p:sp>
+        <p:nvSpPr>
+          <p:cNvPr id="8" name="Text 6"/>
+          <p:cNvSpPr/>
+          <p:nvPr/>
+        </p:nvSpPr>
+        <p:spPr>
+          <a:xfrm>
+            <a:off x="804672" y="2121408"/>
+            <a:ext cx="2121408" cy="256032"/>
+          </a:xfrm>
+          <a:prstGeom prst="rect">
+            <a:avLst/>
+          </a:prstGeom>
+          <a:noFill/>
+          <a:ln/>
+        </p:spPr>
+        <p:txBody>
+          <a:bodyPr wrap="square" lIns="0" tIns="0" rIns="0" bIns="0" rtlCol="0" anchor="t"/>
+          <a:lstStyle/>
+          <a:p>
+            <a:pPr indent="0" marL="0">
+              <a:buNone/>
+            </a:pPr>
+            <a:r>
+              <a:rPr lang="en-US" sz="1300" b="1" dirty="0">
+                <a:solidFill>
+                  <a:srgbClr val="272E52"/>
+                </a:solidFill>
+                <a:latin typeface="Arial" pitchFamily="34" charset="0"/>
+                <a:ea typeface="Arial" pitchFamily="34" charset="-122"/>
+                <a:cs typeface="Arial" pitchFamily="34" charset="-120"/>
+              </a:rPr>
+              <a:t>Ein Broker für alle</a:t>
+            </a:r>
+            <a:endParaRPr lang="en-US" sz="1300" dirty="0"/>
+          </a:p>
+        </p:txBody>
+      </p:sp>
+      <p:sp>
+        <p:nvSpPr>
+          <p:cNvPr id="9" name="Text 7"/>
+          <p:cNvSpPr/>
+          <p:nvPr/>
+        </p:nvSpPr>
+        <p:spPr>
+          <a:xfrm>
+            <a:off x="804672" y="2423160"/>
+            <a:ext cx="2121408" cy="1353312"/>
+          </a:xfrm>
+          <a:prstGeom prst="rect">
+            <a:avLst/>
+          </a:prstGeom>
+          <a:noFill/>
+          <a:ln/>
+        </p:spPr>
+        <p:txBody>
+          <a:bodyPr wrap="square" lIns="0" tIns="0" rIns="0" bIns="0" rtlCol="0" anchor="t"/>
+          <a:lstStyle/>
+          <a:p>
+            <a:pPr indent="0" marL="0">
+              <a:lnSpc>
+                <a:spcPct val="92000"/>
+              </a:lnSpc>
+              <a:buNone/>
+            </a:pPr>
+            <a:r>
+              <a:rPr lang="en-US" sz="1150" dirty="0">
+                <a:solidFill>
+                  <a:srgbClr val="434A63"/>
+                </a:solidFill>
+                <a:latin typeface="Arial" pitchFamily="34" charset="0"/>
+                <a:ea typeface="Arial" pitchFamily="34" charset="-122"/>
+                <a:cs typeface="Arial" pitchFamily="34" charset="-120"/>
+              </a:rPr>
+              <a:t>Statt jeder für sich sendet der ganze Kurs an denselben Broker. Ihr seht die Nachrichten der anderen live.</a:t>
+            </a:r>
+            <a:endParaRPr lang="en-US" sz="1150" dirty="0"/>
+          </a:p>
+        </p:txBody>
+      </p:sp>
+      <p:sp>
+        <p:nvSpPr>
+          <p:cNvPr id="10" name="Shape 8"/>
+          <p:cNvSpPr/>
+          <p:nvPr/>
+        </p:nvSpPr>
+        <p:spPr>
+          <a:xfrm>
+            <a:off x="3310128" y="1975104"/>
+            <a:ext cx="2523744" cy="1920240"/>
+          </a:xfrm>
+          <a:prstGeom prst="rect">
+            <a:avLst/>
+          </a:prstGeom>
+          <a:solidFill>
+            <a:srgbClr val="F5F6FC"/>
+          </a:solidFill>
+          <a:ln/>
+        </p:spPr>
+      </p:sp>
+      <p:sp>
+        <p:nvSpPr>
+          <p:cNvPr id="11" name="Shape 9"/>
+          <p:cNvSpPr/>
+          <p:nvPr/>
+        </p:nvSpPr>
+        <p:spPr>
+          <a:xfrm>
+            <a:off x="3310128" y="1975104"/>
+            <a:ext cx="41148" cy="1920240"/>
+          </a:xfrm>
+          <a:prstGeom prst="rect">
+            <a:avLst/>
+          </a:prstGeom>
+          <a:solidFill>
+            <a:srgbClr val="0F7C86"/>
+          </a:solidFill>
+          <a:ln/>
+        </p:spPr>
+      </p:sp>
+      <p:sp>
+        <p:nvSpPr>
+          <p:cNvPr id="12" name="Text 10"/>
+          <p:cNvSpPr/>
+          <p:nvPr/>
+        </p:nvSpPr>
+        <p:spPr>
+          <a:xfrm>
+            <a:off x="3547872" y="2121408"/>
+            <a:ext cx="2121408" cy="256032"/>
+          </a:xfrm>
+          <a:prstGeom prst="rect">
+            <a:avLst/>
+          </a:prstGeom>
+          <a:noFill/>
+          <a:ln/>
+        </p:spPr>
+        <p:txBody>
+          <a:bodyPr wrap="square" lIns="0" tIns="0" rIns="0" bIns="0" rtlCol="0" anchor="t"/>
+          <a:lstStyle/>
+          <a:p>
+            <a:pPr indent="0" marL="0">
+              <a:buNone/>
+            </a:pPr>
+            <a:r>
+              <a:rPr lang="en-US" sz="1300" b="1" dirty="0">
+                <a:solidFill>
+                  <a:srgbClr val="272E52"/>
+                </a:solidFill>
+                <a:latin typeface="Arial" pitchFamily="34" charset="0"/>
+                <a:ea typeface="Arial" pitchFamily="34" charset="-122"/>
+                <a:cs typeface="Arial" pitchFamily="34" charset="-120"/>
+              </a:rPr>
+              <a:t>Diesmal abgesichert</a:t>
+            </a:r>
+            <a:endParaRPr lang="en-US" sz="1300" dirty="0"/>
+          </a:p>
+        </p:txBody>
+      </p:sp>
+      <p:sp>
+        <p:nvSpPr>
+          <p:cNvPr id="13" name="Text 11"/>
+          <p:cNvSpPr/>
+          <p:nvPr/>
+        </p:nvSpPr>
+        <p:spPr>
+          <a:xfrm>
+            <a:off x="3547872" y="2423160"/>
+            <a:ext cx="2121408" cy="1353312"/>
+          </a:xfrm>
+          <a:prstGeom prst="rect">
+            <a:avLst/>
+          </a:prstGeom>
+          <a:noFill/>
+          <a:ln/>
+        </p:spPr>
+        <p:txBody>
+          <a:bodyPr wrap="square" lIns="0" tIns="0" rIns="0" bIns="0" rtlCol="0" anchor="t"/>
+          <a:lstStyle/>
+          <a:p>
+            <a:pPr indent="0" marL="0">
+              <a:lnSpc>
+                <a:spcPct val="92000"/>
+              </a:lnSpc>
+              <a:buNone/>
+            </a:pPr>
+            <a:r>
+              <a:rPr lang="en-US" sz="1150" dirty="0">
+                <a:solidFill>
+                  <a:srgbClr val="434A63"/>
+                </a:solidFill>
+                <a:latin typeface="Arial" pitchFamily="34" charset="0"/>
+                <a:ea typeface="Arial" pitchFamily="34" charset="-122"/>
+                <a:cs typeface="Arial" pitchFamily="34" charset="-120"/>
+              </a:rPr>
+              <a:t>Mit Zugangsdaten und Verschlüsselung (TLS), genau die Antwort auf die Klartext-Frage von heute.</a:t>
+            </a:r>
+            <a:endParaRPr lang="en-US" sz="1150" dirty="0"/>
+          </a:p>
+        </p:txBody>
+      </p:sp>
+      <p:sp>
+        <p:nvSpPr>
+          <p:cNvPr id="14" name="Shape 12"/>
+          <p:cNvSpPr/>
+          <p:nvPr/>
+        </p:nvSpPr>
+        <p:spPr>
+          <a:xfrm>
+            <a:off x="6053328" y="1975104"/>
+            <a:ext cx="2523744" cy="1920240"/>
+          </a:xfrm>
+          <a:prstGeom prst="rect">
+            <a:avLst/>
+          </a:prstGeom>
+          <a:solidFill>
+            <a:srgbClr val="F5F6FC"/>
+          </a:solidFill>
+          <a:ln/>
+        </p:spPr>
+      </p:sp>
+      <p:sp>
+        <p:nvSpPr>
+          <p:cNvPr id="15" name="Shape 13"/>
+          <p:cNvSpPr/>
+          <p:nvPr/>
+        </p:nvSpPr>
+        <p:spPr>
+          <a:xfrm>
+            <a:off x="6053328" y="1975104"/>
+            <a:ext cx="41148" cy="1920240"/>
+          </a:xfrm>
+          <a:prstGeom prst="rect">
+            <a:avLst/>
+          </a:prstGeom>
+          <a:solidFill>
+            <a:srgbClr val="0F7C86"/>
+          </a:solidFill>
+          <a:ln/>
+        </p:spPr>
+      </p:sp>
+      <p:sp>
+        <p:nvSpPr>
+          <p:cNvPr id="16" name="Text 14"/>
+          <p:cNvSpPr/>
+          <p:nvPr/>
+        </p:nvSpPr>
+        <p:spPr>
+          <a:xfrm>
+            <a:off x="6291072" y="2121408"/>
+            <a:ext cx="2121408" cy="256032"/>
+          </a:xfrm>
+          <a:prstGeom prst="rect">
+            <a:avLst/>
+          </a:prstGeom>
+          <a:noFill/>
+          <a:ln/>
+        </p:spPr>
+        <p:txBody>
+          <a:bodyPr wrap="square" lIns="0" tIns="0" rIns="0" bIns="0" rtlCol="0" anchor="t"/>
+          <a:lstStyle/>
+          <a:p>
+            <a:pPr indent="0" marL="0">
+              <a:buNone/>
+            </a:pPr>
+            <a:r>
+              <a:rPr lang="en-US" sz="1300" b="1" dirty="0">
+                <a:solidFill>
+                  <a:srgbClr val="272E52"/>
+                </a:solidFill>
+                <a:latin typeface="Arial" pitchFamily="34" charset="0"/>
+                <a:ea typeface="Arial" pitchFamily="34" charset="-122"/>
+                <a:cs typeface="Arial" pitchFamily="34" charset="-120"/>
+              </a:rPr>
+              <a:t>Nichts vorbereiten</a:t>
+            </a:r>
+            <a:endParaRPr lang="en-US" sz="1300" dirty="0"/>
+          </a:p>
+        </p:txBody>
+      </p:sp>
+      <p:sp>
+        <p:nvSpPr>
+          <p:cNvPr id="17" name="Text 15"/>
+          <p:cNvSpPr/>
+          <p:nvPr/>
+        </p:nvSpPr>
+        <p:spPr>
+          <a:xfrm>
+            <a:off x="6291072" y="2423160"/>
+            <a:ext cx="2121408" cy="1353312"/>
+          </a:xfrm>
+          <a:prstGeom prst="rect">
+            <a:avLst/>
+          </a:prstGeom>
+          <a:noFill/>
+          <a:ln/>
+        </p:spPr>
+        <p:txBody>
+          <a:bodyPr wrap="square" lIns="0" tIns="0" rIns="0" bIns="0" rtlCol="0" anchor="t"/>
+          <a:lstStyle/>
+          <a:p>
+            <a:pPr indent="0" marL="0">
+              <a:lnSpc>
+                <a:spcPct val="92000"/>
+              </a:lnSpc>
+              <a:buNone/>
+            </a:pPr>
+            <a:r>
+              <a:rPr lang="en-US" sz="1150" dirty="0">
+                <a:solidFill>
+                  <a:srgbClr val="434A63"/>
+                </a:solidFill>
+                <a:latin typeface="Arial" pitchFamily="34" charset="0"/>
+                <a:ea typeface="Arial" pitchFamily="34" charset="-122"/>
+                <a:cs typeface="Arial" pitchFamily="34" charset="-120"/>
+              </a:rPr>
+              <a:t>Ein Browser genügt. Wer mag, spielt die Übung von heute mit eigenen Topics weiter.</a:t>
+            </a:r>
+            <a:endParaRPr lang="en-US" sz="1150" dirty="0"/>
+          </a:p>
+        </p:txBody>
+      </p:sp>
+      <p:sp>
+        <p:nvSpPr>
+          <p:cNvPr id="18" name="Shape 16"/>
+          <p:cNvSpPr/>
+          <p:nvPr/>
+        </p:nvSpPr>
+        <p:spPr>
+          <a:xfrm>
+            <a:off x="566928" y="4160520"/>
+            <a:ext cx="32004" cy="256032"/>
+          </a:xfrm>
+          <a:prstGeom prst="rect">
+            <a:avLst/>
+          </a:prstGeom>
+          <a:solidFill>
+            <a:srgbClr val="0F7C86"/>
+          </a:solidFill>
+          <a:ln/>
+        </p:spPr>
+      </p:sp>
+      <p:sp>
+        <p:nvSpPr>
+          <p:cNvPr id="19" name="Text 17"/>
+          <p:cNvSpPr/>
+          <p:nvPr/>
+        </p:nvSpPr>
+        <p:spPr>
+          <a:xfrm>
+            <a:off x="749808" y="4114800"/>
+            <a:ext cx="7827264" cy="402336"/>
+          </a:xfrm>
+          <a:prstGeom prst="rect">
+            <a:avLst/>
+          </a:prstGeom>
+          <a:noFill/>
+          <a:ln/>
+        </p:spPr>
+        <p:txBody>
+          <a:bodyPr wrap="square" lIns="0" tIns="0" rIns="0" bIns="0" rtlCol="0" anchor="ctr"/>
+          <a:lstStyle/>
+          <a:p>
+            <a:pPr indent="0" marL="0">
+              <a:buNone/>
+            </a:pPr>
+            <a:r>
+              <a:rPr lang="en-US" sz="1200" b="1" dirty="0">
+                <a:solidFill>
+                  <a:srgbClr val="434A63"/>
+                </a:solidFill>
+                <a:latin typeface="Arial" pitchFamily="34" charset="0"/>
+                <a:ea typeface="Arial" pitchFamily="34" charset="-122"/>
+                <a:cs typeface="Arial" pitchFamily="34" charset="-120"/>
+              </a:rPr>
+              <a:t>Nächster Termin: Mittwoch, 30. September um 18:00 Uhr, MQTT live.</a:t>
+            </a:r>
+            <a:endParaRPr lang="en-US" sz="1200" dirty="0"/>
+          </a:p>
+        </p:txBody>
+      </p:sp>
+      <p:sp>
+        <p:nvSpPr>
+          <p:cNvPr id="20" name="Shape 18"/>
+          <p:cNvSpPr/>
+          <p:nvPr/>
+        </p:nvSpPr>
+        <p:spPr>
+          <a:xfrm>
+            <a:off x="566928" y="4631436"/>
+            <a:ext cx="8010144" cy="0"/>
+          </a:xfrm>
+          <a:prstGeom prst="line">
+            <a:avLst/>
+          </a:prstGeom>
+          <a:noFill/>
+          <a:ln w="9525">
+            <a:solidFill>
+              <a:srgbClr val="DFE3F0"/>
+            </a:solidFill>
+            <a:prstDash val="solid"/>
+          </a:ln>
+        </p:spPr>
+      </p:sp>
+      <p:sp>
+        <p:nvSpPr>
+          <p:cNvPr id="21" name="Text 19"/>
+          <p:cNvSpPr/>
+          <p:nvPr/>
+        </p:nvSpPr>
+        <p:spPr>
+          <a:xfrm>
+            <a:off x="566928" y="4722876"/>
+            <a:ext cx="5029200" cy="237744"/>
+          </a:xfrm>
+          <a:prstGeom prst="rect">
+            <a:avLst/>
+          </a:prstGeom>
+          <a:noFill/>
+          <a:ln/>
+        </p:spPr>
+        <p:txBody>
+          <a:bodyPr wrap="square" lIns="0" tIns="0" rIns="0" bIns="0" rtlCol="0" anchor="ctr"/>
+          <a:lstStyle/>
+          <a:p>
+            <a:pPr indent="0" marL="0">
+              <a:buNone/>
+            </a:pPr>
+            <a:r>
+              <a:rPr lang="en-US" sz="1050" spc="30" kern="0" dirty="0">
+                <a:solidFill>
+                  <a:srgbClr val="5C6377"/>
+                </a:solidFill>
+                <a:latin typeface="Arial" pitchFamily="34" charset="0"/>
+                <a:ea typeface="Arial" pitchFamily="34" charset="-122"/>
+                <a:cs typeface="Arial" pitchFamily="34" charset="-120"/>
+              </a:rPr>
+              <a:t>Abschluss</a:t>
+            </a:r>
+            <a:endParaRPr lang="en-US" sz="1050" dirty="0"/>
+          </a:p>
+        </p:txBody>
+      </p:sp>
+      <p:sp>
+        <p:nvSpPr>
+          <p:cNvPr id="22" name="Text 20"/>
+          <p:cNvSpPr/>
+          <p:nvPr/>
+        </p:nvSpPr>
+        <p:spPr>
+          <a:xfrm>
+            <a:off x="8028432" y="4722876"/>
+            <a:ext cx="548640" cy="237744"/>
+          </a:xfrm>
+          <a:prstGeom prst="rect">
+            <a:avLst/>
+          </a:prstGeom>
+          <a:noFill/>
+          <a:ln/>
+        </p:spPr>
+        <p:txBody>
+          <a:bodyPr wrap="square" lIns="0" tIns="0" rIns="0" bIns="0" rtlCol="0" anchor="ctr"/>
+          <a:lstStyle/>
+          <a:p>
+            <a:pPr algn="r" indent="0" marL="0">
+              <a:buNone/>
+            </a:pPr>
+            <a:r>
+              <a:rPr lang="en-US" sz="1050" dirty="0">
+                <a:solidFill>
+                  <a:srgbClr val="5C6377"/>
+                </a:solidFill>
+                <a:latin typeface="Arial" pitchFamily="34" charset="0"/>
+                <a:ea typeface="Arial" pitchFamily="34" charset="-122"/>
+                <a:cs typeface="Arial" pitchFamily="34" charset="-120"/>
+              </a:rPr>
+              <a:t>21/21</a:t>
+            </a:r>
+            <a:endParaRPr lang="en-US" sz="1050" dirty="0"/>
+          </a:p>
+        </p:txBody>
+      </p:sp>
+    </p:spTree>
+  </p:cSld>
+  <p:clrMapOvr>
+    <a:masterClrMapping/>
+  </p:clrMapOvr>
+</p:sld>
+</file>
+
+<file path=ppt/slides/slide26.xml><?xml version="1.0" encoding="utf-8"?>
+<p:sld xmlns:a="http://schemas.openxmlformats.org/drawingml/2006/main" xmlns:r="http://schemas.openxmlformats.org/officeDocument/2006/relationships" xmlns:p="http://schemas.openxmlformats.org/presentationml/2006/main">
+  <p:cSld name="Slide 26">
     <p:bg>
       <p:bgPr>
         <a:solidFill>
@@ -11333,7 +11638,7 @@
                 <a:ea typeface="Arial" pitchFamily="34" charset="-122"/>
                 <a:cs typeface="Arial" pitchFamily="34" charset="-120"/>
               </a:rPr>
-              <a:t>2/20</a:t>
+              <a:t>2/21</a:t>
             </a:r>
             <a:endParaRPr lang="en-US" sz="1050" dirty="0"/>
           </a:p>
@@ -11647,7 +11952,7 @@
                 <a:ea typeface="Arial" pitchFamily="34" charset="-122"/>
                 <a:cs typeface="Arial" pitchFamily="34" charset="-120"/>
               </a:rPr>
-              <a:t>3/20</a:t>
+              <a:t>3/21</a:t>
             </a:r>
             <a:endParaRPr lang="en-US" sz="1050" dirty="0"/>
           </a:p>
@@ -12170,7 +12475,7 @@
                 <a:ea typeface="Arial" pitchFamily="34" charset="-122"/>
                 <a:cs typeface="Arial" pitchFamily="34" charset="-120"/>
               </a:rPr>
-              <a:t>4/20</a:t>
+              <a:t>4/21</a:t>
             </a:r>
             <a:endParaRPr lang="en-US" sz="1050" dirty="0"/>
           </a:p>
@@ -12484,7 +12789,7 @@
                 <a:ea typeface="Arial" pitchFamily="34" charset="-122"/>
                 <a:cs typeface="Arial" pitchFamily="34" charset="-120"/>
               </a:rPr>
-              <a:t>5/20</a:t>
+              <a:t>5/21</a:t>
             </a:r>
             <a:endParaRPr lang="en-US" sz="1050" dirty="0"/>
           </a:p>
@@ -12798,7 +13103,7 @@
                 <a:ea typeface="Arial" pitchFamily="34" charset="-122"/>
                 <a:cs typeface="Arial" pitchFamily="34" charset="-120"/>
               </a:rPr>
-              <a:t>6/20</a:t>
+              <a:t>6/21</a:t>
             </a:r>
             <a:endParaRPr lang="en-US" sz="1050" dirty="0"/>
           </a:p>
@@ -13112,7 +13417,7 @@
                 <a:ea typeface="Arial" pitchFamily="34" charset="-122"/>
                 <a:cs typeface="Arial" pitchFamily="34" charset="-120"/>
               </a:rPr>
-              <a:t>7/20</a:t>
+              <a:t>7/21</a:t>
             </a:r>
             <a:endParaRPr lang="en-US" sz="1050" dirty="0"/>
           </a:p>
